--- a/docs/presentations/eCMRs_plan.pptx
+++ b/docs/presentations/eCMRs_plan.pptx
@@ -12,6 +12,7 @@
     <p:sldId id="257" r:id="rId3"/>
     <p:sldId id="258" r:id="rId4"/>
     <p:sldId id="266" r:id="rId17"/>
+    <p:sldId id="267" r:id="rId18"/>
     <p:sldId id="259" r:id="rId5"/>
     <p:sldId id="260" r:id="rId6"/>
     <p:sldId id="261" r:id="rId7"/>
@@ -2580,6 +2581,1026 @@
               <a:t>Save, notify engineering (follow up after 24 hrs), then send the CMR Number back to the requester.</a:t>
             </a:r>
             <a:endParaRPr lang="en-US" sz="1500" dirty="0"/>
+          </a:p>
+        </p:txBody>
+      </p:sp>
+    </p:spTree>
+  </p:cSld>
+  <p:clrMapOvr>
+    <a:masterClrMapping/>
+  </p:clrMapOvr>
+</p:sld>
+</file>
+
+<file path=ppt/slides/slide12.xml><?xml version="1.0" encoding="utf-8"?>
+<p:sld xmlns:a="http://schemas.openxmlformats.org/drawingml/2006/main" xmlns:r="http://schemas.openxmlformats.org/officeDocument/2006/relationships" xmlns:p="http://schemas.openxmlformats.org/presentationml/2006/main">
+  <p:cSld name="Slide 3">
+    <p:bg>
+      <p:bgPr>
+        <a:solidFill>
+          <a:srgbClr val="F8FAFC"/>
+        </a:solidFill>
+        <a:effectLst/>
+      </p:bgPr>
+    </p:bg>
+    <p:spTree>
+      <p:nvGrpSpPr>
+        <p:cNvPr id="1" name=""/>
+        <p:cNvGrpSpPr/>
+        <p:nvPr/>
+      </p:nvGrpSpPr>
+      <p:grpSpPr>
+        <a:xfrm>
+          <a:off x="0" y="0"/>
+          <a:ext cx="0" cy="0"/>
+          <a:chOff x="0" y="0"/>
+          <a:chExt cx="0" cy="0"/>
+        </a:xfrm>
+      </p:grpSpPr>
+      <p:sp>
+        <p:nvSpPr>
+          <p:cNvPr id="2" name="Shape 0"/>
+          <p:cNvSpPr/>
+          <p:nvPr/>
+        </p:nvSpPr>
+        <p:spPr>
+          <a:xfrm>
+            <a:off x="457200" y="502920"/>
+            <a:ext cx="1371600" cy="1371600"/>
+          </a:xfrm>
+          <a:prstGeom prst="roundRect">
+            <a:avLst>
+              <a:gd name="adj" fmla="val 8000"/>
+            </a:avLst>
+          </a:prstGeom>
+          <a:solidFill>
+            <a:srgbClr val="ECFDF5"/>
+          </a:solidFill>
+          <a:ln w="12700">
+            <a:solidFill>
+              <a:srgbClr val="E2E8F0"/>
+            </a:solidFill>
+            <a:prstDash val="solid"/>
+          </a:ln>
+        </p:spPr>
+        <p:txBody>
+          <a:bodyPr/>
+          <a:lstStyle/>
+          <a:p>
+            <a:endParaRPr lang="en-US"/>
+          </a:p>
+        </p:txBody>
+      </p:sp>
+      <p:pic>
+        <p:nvPicPr>
+          <p:cNvPr id="3" name="Image 0" descr="icons/flow.png"/>
+          <p:cNvPicPr>
+            <a:picLocks noChangeAspect="1"/>
+          </p:cNvPicPr>
+          <p:nvPr/>
+        </p:nvPicPr>
+        <p:blipFill>
+          <a:blip r:embed="rId4"/>
+          <a:stretch>
+            <a:fillRect/>
+          </a:stretch>
+        </p:blipFill>
+        <p:spPr>
+          <a:xfrm>
+            <a:off x="800100" y="845820"/>
+            <a:ext cx="685800" cy="685800"/>
+          </a:xfrm>
+          <a:prstGeom prst="rect">
+            <a:avLst/>
+          </a:prstGeom>
+        </p:spPr>
+      </p:pic>
+      <p:sp>
+        <p:nvSpPr>
+          <p:cNvPr id="4" name="Text 1"/>
+          <p:cNvSpPr/>
+          <p:nvPr/>
+        </p:nvSpPr>
+        <p:spPr>
+          <a:xfrm>
+            <a:off x="2194560" y="502920"/>
+            <a:ext cx="9539935" cy="685800"/>
+          </a:xfrm>
+          <a:prstGeom prst="rect">
+            <a:avLst/>
+          </a:prstGeom>
+          <a:noFill/>
+          <a:ln/>
+        </p:spPr>
+        <p:txBody>
+          <a:bodyPr wrap="square" lIns="0" tIns="0" rIns="0" bIns="0" rtlCol="0" anchor="t"/>
+          <a:lstStyle/>
+          <a:p>
+            <a:pPr marL="0" indent="0" algn="l">
+              <a:buNone/>
+            </a:pPr>
+            <a:r>
+              <a:rPr lang="en-US" sz="3400" b="1" dirty="0">
+                <a:solidFill>
+                  <a:srgbClr val="0F172A"/>
+                </a:solidFill>
+                <a:latin typeface="Cambria" pitchFamily="34" charset="0"/>
+                <a:ea typeface="Cambria" pitchFamily="34" charset="-122"/>
+                <a:cs typeface="Cambria" pitchFamily="34" charset="-120"/>
+              </a:rPr>
+              <a:t>Today’s process flow</a:t>
+            </a:r>
+            <a:endParaRPr lang="en-US" sz="3400" dirty="0"/>
+          </a:p>
+        </p:txBody>
+      </p:sp>
+      <p:sp>
+        <p:nvSpPr>
+          <p:cNvPr id="5" name="Text 2"/>
+          <p:cNvSpPr/>
+          <p:nvPr/>
+        </p:nvSpPr>
+        <p:spPr>
+          <a:xfrm>
+            <a:off x="2194560" y="1216152"/>
+            <a:ext cx="9539935" cy="640080"/>
+          </a:xfrm>
+          <a:prstGeom prst="rect">
+            <a:avLst/>
+          </a:prstGeom>
+          <a:noFill/>
+          <a:ln/>
+        </p:spPr>
+        <p:txBody>
+          <a:bodyPr wrap="square" lIns="0" tIns="0" rIns="0" bIns="0" rtlCol="0" anchor="t"/>
+          <a:lstStyle/>
+          <a:p>
+            <a:pPr marL="0" indent="0" algn="l">
+              <a:buNone/>
+            </a:pPr>
+            <a:r>
+              <a:rPr lang="en-US" sz="1600" dirty="0">
+                <a:solidFill>
+                  <a:srgbClr val="64748B"/>
+                </a:solidFill>
+                <a:latin typeface="Calibri" pitchFamily="34" charset="0"/>
+                <a:ea typeface="Calibri" pitchFamily="34" charset="-122"/>
+                <a:cs typeface="Calibri" pitchFamily="34" charset="-120"/>
+              </a:rPr>
+              <a:t>How a CMR moves through the current three-form process, start to finish.</a:t>
+            </a:r>
+            <a:endParaRPr lang="en-US" sz="1600" dirty="0"/>
+          </a:p>
+        </p:txBody>
+      </p:sp>
+      <p:sp>
+        <p:nvSpPr>
+          <p:cNvPr id="6" name="Shape 3"/>
+          <p:cNvSpPr/>
+          <p:nvPr/>
+        </p:nvSpPr>
+        <p:spPr>
+          <a:xfrm>
+            <a:off x="457200" y="2148840"/>
+            <a:ext cx="11277295" cy="4251960"/>
+          </a:xfrm>
+          <a:prstGeom prst="roundRect">
+            <a:avLst>
+              <a:gd name="adj" fmla="val 2581"/>
+            </a:avLst>
+          </a:prstGeom>
+          <a:solidFill>
+            <a:srgbClr val="FFFFFF"/>
+          </a:solidFill>
+          <a:ln w="12700">
+            <a:solidFill>
+              <a:srgbClr val="E2E8F0"/>
+            </a:solidFill>
+            <a:prstDash val="solid"/>
+          </a:ln>
+          <a:effectLst>
+            <a:outerShdw blurRad="152400" dist="38100" dir="5400000" algn="bl" rotWithShape="0">
+              <a:srgbClr val="1E293B">
+                <a:alpha val="8000"/>
+              </a:srgbClr>
+            </a:outerShdw>
+          </a:effectLst>
+        </p:spPr>
+        <p:txBody>
+          <a:bodyPr/>
+          <a:lstStyle/>
+          <a:p>
+            <a:endParaRPr lang="en-US"/>
+          </a:p>
+        </p:txBody>
+      </p:sp>
+      <p:sp>
+        <p:nvSpPr>
+          <p:cNvPr id="7" name="Text 4"/>
+          <p:cNvSpPr/>
+          <p:nvPr/>
+        </p:nvSpPr>
+        <p:spPr>
+          <a:xfrm>
+            <a:off x="822960" y="2514600"/>
+            <a:ext cx="9144000" cy="365760"/>
+          </a:xfrm>
+          <a:prstGeom prst="rect">
+            <a:avLst/>
+          </a:prstGeom>
+          <a:noFill/>
+          <a:ln/>
+        </p:spPr>
+        <p:txBody>
+          <a:bodyPr wrap="square" lIns="0" tIns="0" rIns="0" bIns="0" rtlCol="0" anchor="t"/>
+          <a:lstStyle/>
+          <a:p>
+            <a:pPr marL="0" indent="0" algn="l">
+              <a:buNone/>
+            </a:pPr>
+            <a:r>
+              <a:rPr lang="en-US" sz="1500" b="1" dirty="0">
+                <a:solidFill>
+                  <a:srgbClr val="059669"/>
+                </a:solidFill>
+                <a:latin typeface="Calibri" pitchFamily="34" charset="0"/>
+                <a:ea typeface="Calibri" pitchFamily="34" charset="-122"/>
+                <a:cs typeface="Calibri" pitchFamily="34" charset="-120"/>
+              </a:rPr>
+              <a:t>Actual process flow</a:t>
+            </a:r>
+            <a:endParaRPr lang="en-US" sz="1500" dirty="0"/>
+          </a:p>
+        </p:txBody>
+      </p:sp>
+      <p:sp>
+        <p:nvSpPr>
+          <p:cNvPr id="100" name="Shape 100"/>
+          <p:cNvSpPr/>
+          <p:nvPr/>
+        </p:nvSpPr>
+        <p:spPr>
+          <a:xfrm>
+            <a:off x="822960" y="2926080"/>
+            <a:ext cx="1490929" cy="1828800"/>
+          </a:xfrm>
+          <a:prstGeom prst="roundRect">
+            <a:avLst>
+              <a:gd name="adj" fmla="val 4438"/>
+            </a:avLst>
+          </a:prstGeom>
+          <a:solidFill>
+            <a:srgbClr val="F8FAFC"/>
+          </a:solidFill>
+          <a:ln w="12700">
+            <a:solidFill>
+              <a:srgbClr val="E2E8F0"/>
+            </a:solidFill>
+            <a:prstDash val="solid"/>
+          </a:ln>
+        </p:spPr>
+        <p:txBody>
+          <a:bodyPr/>
+          <a:lstStyle/>
+          <a:p>
+            <a:endParaRPr lang="en-US"/>
+          </a:p>
+        </p:txBody>
+      </p:sp>
+      <p:sp>
+        <p:nvSpPr>
+          <p:cNvPr id="101" name="Text 101"/>
+          <p:cNvSpPr/>
+          <p:nvPr/>
+        </p:nvSpPr>
+        <p:spPr>
+          <a:xfrm>
+            <a:off x="987552" y="3090672"/>
+            <a:ext cx="1161745" cy="1554480"/>
+          </a:xfrm>
+          <a:prstGeom prst="rect">
+            <a:avLst/>
+          </a:prstGeom>
+          <a:noFill/>
+          <a:ln/>
+        </p:spPr>
+        <p:txBody>
+          <a:bodyPr wrap="square" lIns="0" tIns="0" rIns="0" bIns="0" rtlCol="0" anchor="t"/>
+          <a:lstStyle/>
+          <a:p>
+            <a:pPr marL="0" indent="0">
+              <a:lnSpc>
+                <a:spcPts val="1600"/>
+              </a:lnSpc>
+              <a:buNone/>
+            </a:pPr>
+            <a:r>
+              <a:rPr lang="en-US" sz="1400" b="1" dirty="0">
+                <a:solidFill>
+                  <a:srgbClr val="059669"/>
+                </a:solidFill>
+                <a:latin typeface="Calibri" pitchFamily="34" charset="0"/>
+                <a:ea typeface="Calibri" pitchFamily="34" charset="-122"/>
+                <a:cs typeface="Calibri" pitchFamily="34" charset="-120"/>
+              </a:rPr>
+              <a:t>PIR Email</a:t>
+            </a:r>
+            <a:endParaRPr lang="en-US" sz="1400" dirty="0"/>
+          </a:p>
+          <a:p>
+            <a:pPr marL="0" indent="0">
+              <a:lnSpc>
+                <a:spcPts val="1600"/>
+              </a:lnSpc>
+              <a:buNone/>
+            </a:pPr>
+            <a:r>
+              <a:rPr lang="en-US" sz="1250" dirty="0">
+                <a:solidFill>
+                  <a:srgbClr val="0F172A"/>
+                </a:solidFill>
+                <a:latin typeface="Calibri" pitchFamily="34" charset="0"/>
+                <a:ea typeface="Calibri" pitchFamily="34" charset="-122"/>
+                <a:cs typeface="Calibri" pitchFamily="34" charset="-120"/>
+              </a:rPr>
+              <a:t>Job, Serial #, PN, Part, Issue from Production</a:t>
+            </a:r>
+            <a:endParaRPr lang="en-US" sz="1400" dirty="0"/>
+          </a:p>
+        </p:txBody>
+      </p:sp>
+      <p:sp>
+        <p:nvSpPr>
+          <p:cNvPr id="102" name="Text 102"/>
+          <p:cNvSpPr/>
+          <p:nvPr/>
+        </p:nvSpPr>
+        <p:spPr>
+          <a:xfrm>
+            <a:off x="2313889" y="2926080"/>
+            <a:ext cx="320040" cy="1828800"/>
+          </a:xfrm>
+          <a:prstGeom prst="rect">
+            <a:avLst/>
+          </a:prstGeom>
+          <a:noFill/>
+          <a:ln/>
+        </p:spPr>
+        <p:txBody>
+          <a:bodyPr wrap="square" lIns="0" tIns="0" rIns="0" bIns="0" rtlCol="0" anchor="ctr"/>
+          <a:lstStyle/>
+          <a:p>
+            <a:pPr marL="0" indent="0" algn="ctr">
+              <a:buNone/>
+            </a:pPr>
+            <a:r>
+              <a:rPr lang="en-US" sz="1800" dirty="0">
+                <a:solidFill>
+                  <a:srgbClr val="059669"/>
+                </a:solidFill>
+                <a:latin typeface="Calibri" pitchFamily="34" charset="0"/>
+                <a:ea typeface="Calibri" pitchFamily="34" charset="-122"/>
+                <a:cs typeface="Calibri" pitchFamily="34" charset="-120"/>
+              </a:rPr>
+              <a:t>→</a:t>
+            </a:r>
+            <a:endParaRPr lang="en-US" sz="1800" dirty="0"/>
+          </a:p>
+        </p:txBody>
+      </p:sp>
+      <p:sp>
+        <p:nvSpPr>
+          <p:cNvPr id="103" name="Shape 103"/>
+          <p:cNvSpPr/>
+          <p:nvPr/>
+        </p:nvSpPr>
+        <p:spPr>
+          <a:xfrm>
+            <a:off x="2633929" y="2926080"/>
+            <a:ext cx="1490929" cy="1828800"/>
+          </a:xfrm>
+          <a:prstGeom prst="roundRect">
+            <a:avLst>
+              <a:gd name="adj" fmla="val 4438"/>
+            </a:avLst>
+          </a:prstGeom>
+          <a:solidFill>
+            <a:srgbClr val="F8FAFC"/>
+          </a:solidFill>
+          <a:ln w="12700">
+            <a:solidFill>
+              <a:srgbClr val="E2E8F0"/>
+            </a:solidFill>
+            <a:prstDash val="solid"/>
+          </a:ln>
+        </p:spPr>
+        <p:txBody>
+          <a:bodyPr/>
+          <a:lstStyle/>
+          <a:p>
+            <a:endParaRPr lang="en-US"/>
+          </a:p>
+        </p:txBody>
+      </p:sp>
+      <p:sp>
+        <p:nvSpPr>
+          <p:cNvPr id="104" name="Text 104"/>
+          <p:cNvSpPr/>
+          <p:nvPr/>
+        </p:nvSpPr>
+        <p:spPr>
+          <a:xfrm>
+            <a:off x="2798521" y="3090672"/>
+            <a:ext cx="1161745" cy="1554480"/>
+          </a:xfrm>
+          <a:prstGeom prst="rect">
+            <a:avLst/>
+          </a:prstGeom>
+          <a:noFill/>
+          <a:ln/>
+        </p:spPr>
+        <p:txBody>
+          <a:bodyPr wrap="square" lIns="0" tIns="0" rIns="0" bIns="0" rtlCol="0" anchor="t"/>
+          <a:lstStyle/>
+          <a:p>
+            <a:pPr marL="0" indent="0">
+              <a:lnSpc>
+                <a:spcPts val="1600"/>
+              </a:lnSpc>
+              <a:buNone/>
+            </a:pPr>
+            <a:r>
+              <a:rPr lang="en-US" sz="1400" b="1" dirty="0">
+                <a:solidFill>
+                  <a:srgbClr val="059669"/>
+                </a:solidFill>
+                <a:latin typeface="Calibri" pitchFamily="34" charset="0"/>
+                <a:ea typeface="Calibri" pitchFamily="34" charset="-122"/>
+                <a:cs typeface="Calibri" pitchFamily="34" charset="-120"/>
+              </a:rPr>
+              <a:t>Triage</a:t>
+            </a:r>
+            <a:endParaRPr lang="en-US" sz="1400" dirty="0"/>
+          </a:p>
+          <a:p>
+            <a:pPr marL="0" indent="0">
+              <a:lnSpc>
+                <a:spcPts val="1600"/>
+              </a:lnSpc>
+              <a:buNone/>
+            </a:pPr>
+            <a:r>
+              <a:rPr lang="en-US" sz="1250" dirty="0">
+                <a:solidFill>
+                  <a:srgbClr val="0F172A"/>
+                </a:solidFill>
+                <a:latin typeface="Calibri" pitchFamily="34" charset="0"/>
+                <a:ea typeface="Calibri" pitchFamily="34" charset="-122"/>
+                <a:cs typeface="Calibri" pitchFamily="34" charset="-120"/>
+              </a:rPr>
+              <a:t>Jasmine decides CMR vs. TRR vs. MRR</a:t>
+            </a:r>
+            <a:endParaRPr lang="en-US" sz="1400" dirty="0"/>
+          </a:p>
+        </p:txBody>
+      </p:sp>
+      <p:sp>
+        <p:nvSpPr>
+          <p:cNvPr id="105" name="Text 105"/>
+          <p:cNvSpPr/>
+          <p:nvPr/>
+        </p:nvSpPr>
+        <p:spPr>
+          <a:xfrm>
+            <a:off x="4124858" y="2926080"/>
+            <a:ext cx="320040" cy="1828800"/>
+          </a:xfrm>
+          <a:prstGeom prst="rect">
+            <a:avLst/>
+          </a:prstGeom>
+          <a:noFill/>
+          <a:ln/>
+        </p:spPr>
+        <p:txBody>
+          <a:bodyPr wrap="square" lIns="0" tIns="0" rIns="0" bIns="0" rtlCol="0" anchor="ctr"/>
+          <a:lstStyle/>
+          <a:p>
+            <a:pPr marL="0" indent="0" algn="ctr">
+              <a:buNone/>
+            </a:pPr>
+            <a:r>
+              <a:rPr lang="en-US" sz="1800" dirty="0">
+                <a:solidFill>
+                  <a:srgbClr val="059669"/>
+                </a:solidFill>
+                <a:latin typeface="Calibri" pitchFamily="34" charset="0"/>
+                <a:ea typeface="Calibri" pitchFamily="34" charset="-122"/>
+                <a:cs typeface="Calibri" pitchFamily="34" charset="-120"/>
+              </a:rPr>
+              <a:t>→</a:t>
+            </a:r>
+            <a:endParaRPr lang="en-US" sz="1800" dirty="0"/>
+          </a:p>
+        </p:txBody>
+      </p:sp>
+      <p:sp>
+        <p:nvSpPr>
+          <p:cNvPr id="106" name="Shape 106"/>
+          <p:cNvSpPr/>
+          <p:nvPr/>
+        </p:nvSpPr>
+        <p:spPr>
+          <a:xfrm>
+            <a:off x="4444898" y="2926080"/>
+            <a:ext cx="1490929" cy="1828800"/>
+          </a:xfrm>
+          <a:prstGeom prst="roundRect">
+            <a:avLst>
+              <a:gd name="adj" fmla="val 4438"/>
+            </a:avLst>
+          </a:prstGeom>
+          <a:solidFill>
+            <a:srgbClr val="F8FAFC"/>
+          </a:solidFill>
+          <a:ln w="12700">
+            <a:solidFill>
+              <a:srgbClr val="E2E8F0"/>
+            </a:solidFill>
+            <a:prstDash val="solid"/>
+          </a:ln>
+        </p:spPr>
+        <p:txBody>
+          <a:bodyPr/>
+          <a:lstStyle/>
+          <a:p>
+            <a:endParaRPr lang="en-US"/>
+          </a:p>
+        </p:txBody>
+      </p:sp>
+      <p:sp>
+        <p:nvSpPr>
+          <p:cNvPr id="107" name="Text 107"/>
+          <p:cNvSpPr/>
+          <p:nvPr/>
+        </p:nvSpPr>
+        <p:spPr>
+          <a:xfrm>
+            <a:off x="4609490" y="3090672"/>
+            <a:ext cx="1161745" cy="1554480"/>
+          </a:xfrm>
+          <a:prstGeom prst="rect">
+            <a:avLst/>
+          </a:prstGeom>
+          <a:noFill/>
+          <a:ln/>
+        </p:spPr>
+        <p:txBody>
+          <a:bodyPr wrap="square" lIns="0" tIns="0" rIns="0" bIns="0" rtlCol="0" anchor="t"/>
+          <a:lstStyle/>
+          <a:p>
+            <a:pPr marL="0" indent="0">
+              <a:lnSpc>
+                <a:spcPts val="1600"/>
+              </a:lnSpc>
+              <a:buNone/>
+            </a:pPr>
+            <a:r>
+              <a:rPr lang="en-US" sz="1400" b="1" dirty="0">
+                <a:solidFill>
+                  <a:srgbClr val="059669"/>
+                </a:solidFill>
+                <a:latin typeface="Calibri" pitchFamily="34" charset="0"/>
+                <a:ea typeface="Calibri" pitchFamily="34" charset="-122"/>
+                <a:cs typeface="Calibri" pitchFamily="34" charset="-120"/>
+              </a:rPr>
+              <a:t>Create Change Request</a:t>
+            </a:r>
+            <a:endParaRPr lang="en-US" sz="1400" dirty="0"/>
+          </a:p>
+          <a:p>
+            <a:pPr marL="0" indent="0">
+              <a:lnSpc>
+                <a:spcPts val="1600"/>
+              </a:lnSpc>
+              <a:buNone/>
+            </a:pPr>
+            <a:r>
+              <a:rPr lang="en-US" sz="1250" dirty="0">
+                <a:solidFill>
+                  <a:srgbClr val="0F172A"/>
+                </a:solidFill>
+                <a:latin typeface="Calibri" pitchFamily="34" charset="0"/>
+                <a:ea typeface="Calibri" pitchFamily="34" charset="-122"/>
+                <a:cs typeface="Calibri" pitchFamily="34" charset="-120"/>
+              </a:rPr>
+              <a:t>Priority, Initial Change, Requested By</a:t>
+            </a:r>
+            <a:endParaRPr lang="en-US" sz="1400" dirty="0"/>
+          </a:p>
+        </p:txBody>
+      </p:sp>
+      <p:sp>
+        <p:nvSpPr>
+          <p:cNvPr id="108" name="Text 108"/>
+          <p:cNvSpPr/>
+          <p:nvPr/>
+        </p:nvSpPr>
+        <p:spPr>
+          <a:xfrm>
+            <a:off x="5935827" y="2926080"/>
+            <a:ext cx="320040" cy="1828800"/>
+          </a:xfrm>
+          <a:prstGeom prst="rect">
+            <a:avLst/>
+          </a:prstGeom>
+          <a:noFill/>
+          <a:ln/>
+        </p:spPr>
+        <p:txBody>
+          <a:bodyPr wrap="square" lIns="0" tIns="0" rIns="0" bIns="0" rtlCol="0" anchor="ctr"/>
+          <a:lstStyle/>
+          <a:p>
+            <a:pPr marL="0" indent="0" algn="ctr">
+              <a:buNone/>
+            </a:pPr>
+            <a:r>
+              <a:rPr lang="en-US" sz="1800" dirty="0">
+                <a:solidFill>
+                  <a:srgbClr val="059669"/>
+                </a:solidFill>
+                <a:latin typeface="Calibri" pitchFamily="34" charset="0"/>
+                <a:ea typeface="Calibri" pitchFamily="34" charset="-122"/>
+                <a:cs typeface="Calibri" pitchFamily="34" charset="-120"/>
+              </a:rPr>
+              <a:t>→</a:t>
+            </a:r>
+            <a:endParaRPr lang="en-US" sz="1800" dirty="0"/>
+          </a:p>
+        </p:txBody>
+      </p:sp>
+      <p:sp>
+        <p:nvSpPr>
+          <p:cNvPr id="109" name="Shape 109"/>
+          <p:cNvSpPr/>
+          <p:nvPr/>
+        </p:nvSpPr>
+        <p:spPr>
+          <a:xfrm>
+            <a:off x="6255867" y="2926080"/>
+            <a:ext cx="1490929" cy="1828800"/>
+          </a:xfrm>
+          <a:prstGeom prst="roundRect">
+            <a:avLst>
+              <a:gd name="adj" fmla="val 4438"/>
+            </a:avLst>
+          </a:prstGeom>
+          <a:solidFill>
+            <a:srgbClr val="F8FAFC"/>
+          </a:solidFill>
+          <a:ln w="12700">
+            <a:solidFill>
+              <a:srgbClr val="E2E8F0"/>
+            </a:solidFill>
+            <a:prstDash val="solid"/>
+          </a:ln>
+        </p:spPr>
+        <p:txBody>
+          <a:bodyPr/>
+          <a:lstStyle/>
+          <a:p>
+            <a:endParaRPr lang="en-US"/>
+          </a:p>
+        </p:txBody>
+      </p:sp>
+      <p:sp>
+        <p:nvSpPr>
+          <p:cNvPr id="110" name="Text 110"/>
+          <p:cNvSpPr/>
+          <p:nvPr/>
+        </p:nvSpPr>
+        <p:spPr>
+          <a:xfrm>
+            <a:off x="6420459" y="3090672"/>
+            <a:ext cx="1161745" cy="1554480"/>
+          </a:xfrm>
+          <a:prstGeom prst="rect">
+            <a:avLst/>
+          </a:prstGeom>
+          <a:noFill/>
+          <a:ln/>
+        </p:spPr>
+        <p:txBody>
+          <a:bodyPr wrap="square" lIns="0" tIns="0" rIns="0" bIns="0" rtlCol="0" anchor="t"/>
+          <a:lstStyle/>
+          <a:p>
+            <a:pPr marL="0" indent="0">
+              <a:lnSpc>
+                <a:spcPts val="1600"/>
+              </a:lnSpc>
+              <a:buNone/>
+            </a:pPr>
+            <a:r>
+              <a:rPr lang="en-US" sz="1400" b="1" dirty="0">
+                <a:solidFill>
+                  <a:srgbClr val="059669"/>
+                </a:solidFill>
+                <a:latin typeface="Calibri" pitchFamily="34" charset="0"/>
+                <a:ea typeface="Calibri" pitchFamily="34" charset="-122"/>
+                <a:cs typeface="Calibri" pitchFamily="34" charset="-120"/>
+              </a:rPr>
+              <a:t>Change Request Mgmt</a:t>
+            </a:r>
+            <a:endParaRPr lang="en-US" sz="1400" dirty="0"/>
+          </a:p>
+          <a:p>
+            <a:pPr marL="0" indent="0">
+              <a:lnSpc>
+                <a:spcPts val="1600"/>
+              </a:lnSpc>
+              <a:buNone/>
+            </a:pPr>
+            <a:r>
+              <a:rPr lang="en-US" sz="1250" dirty="0">
+                <a:solidFill>
+                  <a:srgbClr val="0F172A"/>
+                </a:solidFill>
+                <a:latin typeface="Calibri" pitchFamily="34" charset="0"/>
+                <a:ea typeface="Calibri" pitchFamily="34" charset="-122"/>
+                <a:cs typeface="Calibri" pitchFamily="34" charset="-120"/>
+              </a:rPr>
+              <a:t>Grab the CMR Number</a:t>
+            </a:r>
+            <a:endParaRPr lang="en-US" sz="1400" dirty="0"/>
+          </a:p>
+        </p:txBody>
+      </p:sp>
+      <p:sp>
+        <p:nvSpPr>
+          <p:cNvPr id="111" name="Text 111"/>
+          <p:cNvSpPr/>
+          <p:nvPr/>
+        </p:nvSpPr>
+        <p:spPr>
+          <a:xfrm>
+            <a:off x="7746796" y="2926080"/>
+            <a:ext cx="320040" cy="1828800"/>
+          </a:xfrm>
+          <a:prstGeom prst="rect">
+            <a:avLst/>
+          </a:prstGeom>
+          <a:noFill/>
+          <a:ln/>
+        </p:spPr>
+        <p:txBody>
+          <a:bodyPr wrap="square" lIns="0" tIns="0" rIns="0" bIns="0" rtlCol="0" anchor="ctr"/>
+          <a:lstStyle/>
+          <a:p>
+            <a:pPr marL="0" indent="0" algn="ctr">
+              <a:buNone/>
+            </a:pPr>
+            <a:r>
+              <a:rPr lang="en-US" sz="1800" dirty="0">
+                <a:solidFill>
+                  <a:srgbClr val="059669"/>
+                </a:solidFill>
+                <a:latin typeface="Calibri" pitchFamily="34" charset="0"/>
+                <a:ea typeface="Calibri" pitchFamily="34" charset="-122"/>
+                <a:cs typeface="Calibri" pitchFamily="34" charset="-120"/>
+              </a:rPr>
+              <a:t>→</a:t>
+            </a:r>
+            <a:endParaRPr lang="en-US" sz="1800" dirty="0"/>
+          </a:p>
+        </p:txBody>
+      </p:sp>
+      <p:sp>
+        <p:nvSpPr>
+          <p:cNvPr id="112" name="Shape 112"/>
+          <p:cNvSpPr/>
+          <p:nvPr/>
+        </p:nvSpPr>
+        <p:spPr>
+          <a:xfrm>
+            <a:off x="8066836" y="2926080"/>
+            <a:ext cx="1490929" cy="1828800"/>
+          </a:xfrm>
+          <a:prstGeom prst="roundRect">
+            <a:avLst>
+              <a:gd name="adj" fmla="val 4438"/>
+            </a:avLst>
+          </a:prstGeom>
+          <a:solidFill>
+            <a:srgbClr val="F8FAFC"/>
+          </a:solidFill>
+          <a:ln w="12700">
+            <a:solidFill>
+              <a:srgbClr val="E2E8F0"/>
+            </a:solidFill>
+            <a:prstDash val="solid"/>
+          </a:ln>
+        </p:spPr>
+        <p:txBody>
+          <a:bodyPr/>
+          <a:lstStyle/>
+          <a:p>
+            <a:endParaRPr lang="en-US"/>
+          </a:p>
+        </p:txBody>
+      </p:sp>
+      <p:sp>
+        <p:nvSpPr>
+          <p:cNvPr id="113" name="Text 113"/>
+          <p:cNvSpPr/>
+          <p:nvPr/>
+        </p:nvSpPr>
+        <p:spPr>
+          <a:xfrm>
+            <a:off x="8231428" y="3090672"/>
+            <a:ext cx="1161745" cy="1554480"/>
+          </a:xfrm>
+          <a:prstGeom prst="rect">
+            <a:avLst/>
+          </a:prstGeom>
+          <a:noFill/>
+          <a:ln/>
+        </p:spPr>
+        <p:txBody>
+          <a:bodyPr wrap="square" lIns="0" tIns="0" rIns="0" bIns="0" rtlCol="0" anchor="t"/>
+          <a:lstStyle/>
+          <a:p>
+            <a:pPr marL="0" indent="0">
+              <a:lnSpc>
+                <a:spcPts val="1600"/>
+              </a:lnSpc>
+              <a:buNone/>
+            </a:pPr>
+            <a:r>
+              <a:rPr lang="en-US" sz="1400" b="1" dirty="0">
+                <a:solidFill>
+                  <a:srgbClr val="059669"/>
+                </a:solidFill>
+                <a:latin typeface="Calibri" pitchFamily="34" charset="0"/>
+                <a:ea typeface="Calibri" pitchFamily="34" charset="-122"/>
+                <a:cs typeface="Calibri" pitchFamily="34" charset="-120"/>
+              </a:rPr>
+              <a:t>CMR Form</a:t>
+            </a:r>
+            <a:endParaRPr lang="en-US" sz="1400" dirty="0"/>
+          </a:p>
+          <a:p>
+            <a:pPr marL="0" indent="0">
+              <a:lnSpc>
+                <a:spcPts val="1600"/>
+              </a:lnSpc>
+              <a:buNone/>
+            </a:pPr>
+            <a:r>
+              <a:rPr lang="en-US" sz="1250" dirty="0">
+                <a:solidFill>
+                  <a:srgbClr val="0F172A"/>
+                </a:solidFill>
+                <a:latin typeface="Calibri" pitchFamily="34" charset="0"/>
+                <a:ea typeface="Calibri" pitchFamily="34" charset="-122"/>
+                <a:cs typeface="Calibri" pitchFamily="34" charset="-120"/>
+              </a:rPr>
+              <a:t>Engineering, Item/Revision, On Hold</a:t>
+            </a:r>
+            <a:endParaRPr lang="en-US" sz="1400" dirty="0"/>
+          </a:p>
+        </p:txBody>
+      </p:sp>
+      <p:sp>
+        <p:nvSpPr>
+          <p:cNvPr id="114" name="Text 114"/>
+          <p:cNvSpPr/>
+          <p:nvPr/>
+        </p:nvSpPr>
+        <p:spPr>
+          <a:xfrm>
+            <a:off x="9557765" y="2926080"/>
+            <a:ext cx="320040" cy="1828800"/>
+          </a:xfrm>
+          <a:prstGeom prst="rect">
+            <a:avLst/>
+          </a:prstGeom>
+          <a:noFill/>
+          <a:ln/>
+        </p:spPr>
+        <p:txBody>
+          <a:bodyPr wrap="square" lIns="0" tIns="0" rIns="0" bIns="0" rtlCol="0" anchor="ctr"/>
+          <a:lstStyle/>
+          <a:p>
+            <a:pPr marL="0" indent="0" algn="ctr">
+              <a:buNone/>
+            </a:pPr>
+            <a:r>
+              <a:rPr lang="en-US" sz="1800" dirty="0">
+                <a:solidFill>
+                  <a:srgbClr val="059669"/>
+                </a:solidFill>
+                <a:latin typeface="Calibri" pitchFamily="34" charset="0"/>
+                <a:ea typeface="Calibri" pitchFamily="34" charset="-122"/>
+                <a:cs typeface="Calibri" pitchFamily="34" charset="-120"/>
+              </a:rPr>
+              <a:t>→</a:t>
+            </a:r>
+            <a:endParaRPr lang="en-US" sz="1800" dirty="0"/>
+          </a:p>
+        </p:txBody>
+      </p:sp>
+      <p:sp>
+        <p:nvSpPr>
+          <p:cNvPr id="115" name="Shape 115"/>
+          <p:cNvSpPr/>
+          <p:nvPr/>
+        </p:nvSpPr>
+        <p:spPr>
+          <a:xfrm>
+            <a:off x="9877805" y="2926080"/>
+            <a:ext cx="1490929" cy="1828800"/>
+          </a:xfrm>
+          <a:prstGeom prst="roundRect">
+            <a:avLst>
+              <a:gd name="adj" fmla="val 4438"/>
+            </a:avLst>
+          </a:prstGeom>
+          <a:solidFill>
+            <a:srgbClr val="F8FAFC"/>
+          </a:solidFill>
+          <a:ln w="12700">
+            <a:solidFill>
+              <a:srgbClr val="E2E8F0"/>
+            </a:solidFill>
+            <a:prstDash val="solid"/>
+          </a:ln>
+        </p:spPr>
+        <p:txBody>
+          <a:bodyPr/>
+          <a:lstStyle/>
+          <a:p>
+            <a:endParaRPr lang="en-US"/>
+          </a:p>
+        </p:txBody>
+      </p:sp>
+      <p:sp>
+        <p:nvSpPr>
+          <p:cNvPr id="116" name="Text 116"/>
+          <p:cNvSpPr/>
+          <p:nvPr/>
+        </p:nvSpPr>
+        <p:spPr>
+          <a:xfrm>
+            <a:off x="10042397" y="3090672"/>
+            <a:ext cx="1161745" cy="1554480"/>
+          </a:xfrm>
+          <a:prstGeom prst="rect">
+            <a:avLst/>
+          </a:prstGeom>
+          <a:noFill/>
+          <a:ln/>
+        </p:spPr>
+        <p:txBody>
+          <a:bodyPr wrap="square" lIns="0" tIns="0" rIns="0" bIns="0" rtlCol="0" anchor="t"/>
+          <a:lstStyle/>
+          <a:p>
+            <a:pPr marL="0" indent="0">
+              <a:lnSpc>
+                <a:spcPts val="1600"/>
+              </a:lnSpc>
+              <a:buNone/>
+            </a:pPr>
+            <a:r>
+              <a:rPr lang="en-US" sz="1400" b="1" dirty="0">
+                <a:solidFill>
+                  <a:srgbClr val="059669"/>
+                </a:solidFill>
+                <a:latin typeface="Calibri" pitchFamily="34" charset="0"/>
+                <a:ea typeface="Calibri" pitchFamily="34" charset="-122"/>
+                <a:cs typeface="Calibri" pitchFamily="34" charset="-120"/>
+              </a:rPr>
+              <a:t>Notify &amp; Close</a:t>
+            </a:r>
+            <a:endParaRPr lang="en-US" sz="1400" dirty="0"/>
+          </a:p>
+          <a:p>
+            <a:pPr marL="0" indent="0">
+              <a:lnSpc>
+                <a:spcPts val="1600"/>
+              </a:lnSpc>
+              <a:buNone/>
+            </a:pPr>
+            <a:r>
+              <a:rPr lang="en-US" sz="1250" dirty="0">
+                <a:solidFill>
+                  <a:srgbClr val="0F172A"/>
+                </a:solidFill>
+                <a:latin typeface="Calibri" pitchFamily="34" charset="0"/>
+                <a:ea typeface="Calibri" pitchFamily="34" charset="-122"/>
+                <a:cs typeface="Calibri" pitchFamily="34" charset="-120"/>
+              </a:rPr>
+              <a:t>Save, notify engineering, send CMR #</a:t>
+            </a:r>
+            <a:endParaRPr lang="en-US" sz="1400" dirty="0"/>
           </a:p>
         </p:txBody>
       </p:sp>

--- a/docs/presentations/eCMRs_plan.pptx
+++ b/docs/presentations/eCMRs_plan.pptx
@@ -5,21 +5,20 @@
     <p:sldMasterId id="2147483648" r:id="rId1"/>
   </p:sldMasterIdLst>
   <p:notesMasterIdLst>
-    <p:notesMasterId r:id="rId12"/>
+    <p:notesMasterId r:id="rId13"/>
   </p:notesMasterIdLst>
   <p:sldIdLst>
     <p:sldId id="256" r:id="rId2"/>
     <p:sldId id="257" r:id="rId3"/>
     <p:sldId id="258" r:id="rId4"/>
-    <p:sldId id="266" r:id="rId17"/>
-    <p:sldId id="267" r:id="rId18"/>
-    <p:sldId id="259" r:id="rId5"/>
-    <p:sldId id="260" r:id="rId6"/>
-    <p:sldId id="261" r:id="rId7"/>
-    <p:sldId id="263" r:id="rId8"/>
-    <p:sldId id="262" r:id="rId9"/>
-    <p:sldId id="264" r:id="rId10"/>
-    <p:sldId id="265" r:id="rId11"/>
+    <p:sldId id="266" r:id="rId5"/>
+    <p:sldId id="259" r:id="rId6"/>
+    <p:sldId id="260" r:id="rId7"/>
+    <p:sldId id="261" r:id="rId8"/>
+    <p:sldId id="263" r:id="rId9"/>
+    <p:sldId id="262" r:id="rId10"/>
+    <p:sldId id="264" r:id="rId11"/>
+    <p:sldId id="265" r:id="rId12"/>
   </p:sldIdLst>
   <p:sldSz cx="12192000" cy="6858000"/>
   <p:notesSz cx="6858000" cy="12192000"/>
@@ -280,7 +279,7 @@
           <a:bodyPr/>
           <a:lstStyle/>
           <a:p>
-            <a:endParaRPr lang="en-US"/>
+            <a:endParaRPr lang="en-US" dirty="0"/>
           </a:p>
         </p:txBody>
       </p:sp>
@@ -322,7 +321,7 @@
               <a:rPr lang="en-US"/>
               <a:t>1</a:t>
             </a:fld>
-            <a:endParaRPr lang="en-US"/>
+            <a:endParaRPr lang="en-US" dirty="0"/>
           </a:p>
         </p:txBody>
       </p:sp>
@@ -411,7 +410,7 @@
           <a:p>
             <a:fld id="{F7021451-1387-4CA6-816F-3879F97B5CBC}" type="slidenum">
               <a:rPr lang="en-US"/>
-              <a:t>10</a:t>
+              <a:t>11</a:t>
             </a:fld>
             <a:endParaRPr lang="en-US"/>
           </a:p>
@@ -462,7 +461,7 @@
           <a:bodyPr/>
           <a:lstStyle/>
           <a:p>
-            <a:endParaRPr lang="en-US"/>
+            <a:endParaRPr lang="en-US" dirty="0"/>
           </a:p>
         </p:txBody>
       </p:sp>
@@ -504,7 +503,7 @@
               <a:rPr lang="en-US"/>
               <a:t>2</a:t>
             </a:fld>
-            <a:endParaRPr lang="en-US"/>
+            <a:endParaRPr lang="en-US" dirty="0"/>
           </a:p>
         </p:txBody>
       </p:sp>
@@ -553,7 +552,7 @@
           <a:bodyPr/>
           <a:lstStyle/>
           <a:p>
-            <a:endParaRPr lang="en-US"/>
+            <a:endParaRPr lang="en-US" dirty="0"/>
           </a:p>
         </p:txBody>
       </p:sp>
@@ -595,7 +594,7 @@
               <a:rPr lang="en-US"/>
               <a:t>3</a:t>
             </a:fld>
-            <a:endParaRPr lang="en-US"/>
+            <a:endParaRPr lang="en-US" dirty="0"/>
           </a:p>
         </p:txBody>
       </p:sp>
@@ -644,7 +643,7 @@
           <a:bodyPr/>
           <a:lstStyle/>
           <a:p>
-            <a:endParaRPr lang="en-US"/>
+            <a:endParaRPr lang="en-US" dirty="0"/>
           </a:p>
         </p:txBody>
       </p:sp>
@@ -684,9 +683,9 @@
           <a:p>
             <a:fld id="{F7021451-1387-4CA6-816F-3879F97B5CBC}" type="slidenum">
               <a:rPr lang="en-US"/>
-              <a:t>4</a:t>
+              <a:t>5</a:t>
             </a:fld>
-            <a:endParaRPr lang="en-US"/>
+            <a:endParaRPr lang="en-US" dirty="0"/>
           </a:p>
         </p:txBody>
       </p:sp>
@@ -775,7 +774,7 @@
           <a:p>
             <a:fld id="{F7021451-1387-4CA6-816F-3879F97B5CBC}" type="slidenum">
               <a:rPr lang="en-US"/>
-              <a:t>5</a:t>
+              <a:t>6</a:t>
             </a:fld>
             <a:endParaRPr lang="en-US"/>
           </a:p>
@@ -826,7 +825,7 @@
           <a:bodyPr/>
           <a:lstStyle/>
           <a:p>
-            <a:endParaRPr lang="en-US"/>
+            <a:endParaRPr lang="en-US" dirty="0"/>
           </a:p>
         </p:txBody>
       </p:sp>
@@ -866,9 +865,9 @@
           <a:p>
             <a:fld id="{F7021451-1387-4CA6-816F-3879F97B5CBC}" type="slidenum">
               <a:rPr lang="en-US"/>
-              <a:t>6</a:t>
+              <a:t>7</a:t>
             </a:fld>
-            <a:endParaRPr lang="en-US"/>
+            <a:endParaRPr lang="en-US" dirty="0"/>
           </a:p>
         </p:txBody>
       </p:sp>
@@ -917,7 +916,7 @@
           <a:bodyPr/>
           <a:lstStyle/>
           <a:p>
-            <a:endParaRPr lang="en-US"/>
+            <a:endParaRPr lang="en-US" dirty="0"/>
           </a:p>
         </p:txBody>
       </p:sp>
@@ -957,9 +956,9 @@
           <a:p>
             <a:fld id="{F7021451-1387-4CA6-816F-3879F97B5CBC}" type="slidenum">
               <a:rPr lang="en-US"/>
-              <a:t>7</a:t>
+              <a:t>8</a:t>
             </a:fld>
-            <a:endParaRPr lang="en-US"/>
+            <a:endParaRPr lang="en-US" dirty="0"/>
           </a:p>
         </p:txBody>
       </p:sp>
@@ -1048,7 +1047,7 @@
           <a:p>
             <a:fld id="{F7021451-1387-4CA6-816F-3879F97B5CBC}" type="slidenum">
               <a:rPr lang="en-US"/>
-              <a:t>8</a:t>
+              <a:t>9</a:t>
             </a:fld>
             <a:endParaRPr lang="en-US"/>
           </a:p>
@@ -1139,7 +1138,7 @@
           <a:p>
             <a:fld id="{F7021451-1387-4CA6-816F-3879F97B5CBC}" type="slidenum">
               <a:rPr lang="en-US"/>
-              <a:t>9</a:t>
+              <a:t>10</a:t>
             </a:fld>
             <a:endParaRPr lang="en-US"/>
           </a:p>
@@ -1518,7 +1517,7 @@
           <a:bodyPr/>
           <a:lstStyle/>
           <a:p>
-            <a:endParaRPr lang="en-US"/>
+            <a:endParaRPr lang="en-US" dirty="0"/>
           </a:p>
         </p:txBody>
       </p:sp>
@@ -1552,7 +1551,7 @@
           <a:bodyPr/>
           <a:lstStyle/>
           <a:p>
-            <a:endParaRPr lang="en-US"/>
+            <a:endParaRPr lang="en-US" dirty="0"/>
           </a:p>
         </p:txBody>
       </p:sp>
@@ -1706,6 +1705,382 @@
 </file>
 
 <file path=ppt/slides/slide10.xml><?xml version="1.0" encoding="utf-8"?>
+<p:sld xmlns:a="http://schemas.openxmlformats.org/drawingml/2006/main" xmlns:r="http://schemas.openxmlformats.org/officeDocument/2006/relationships" xmlns:p="http://schemas.openxmlformats.org/presentationml/2006/main">
+  <p:cSld name="Slide 9">
+    <p:bg>
+      <p:bgPr>
+        <a:solidFill>
+          <a:srgbClr val="F8FAFC"/>
+        </a:solidFill>
+        <a:effectLst/>
+      </p:bgPr>
+    </p:bg>
+    <p:spTree>
+      <p:nvGrpSpPr>
+        <p:cNvPr id="1" name=""/>
+        <p:cNvGrpSpPr/>
+        <p:nvPr/>
+      </p:nvGrpSpPr>
+      <p:grpSpPr>
+        <a:xfrm>
+          <a:off x="0" y="0"/>
+          <a:ext cx="0" cy="0"/>
+          <a:chOff x="0" y="0"/>
+          <a:chExt cx="0" cy="0"/>
+        </a:xfrm>
+      </p:grpSpPr>
+      <p:sp>
+        <p:nvSpPr>
+          <p:cNvPr id="2" name="Text 0"/>
+          <p:cNvSpPr/>
+          <p:nvPr/>
+        </p:nvSpPr>
+        <p:spPr>
+          <a:xfrm>
+            <a:off x="457200" y="502920"/>
+            <a:ext cx="9539935" cy="685800"/>
+          </a:xfrm>
+          <a:prstGeom prst="rect">
+            <a:avLst/>
+          </a:prstGeom>
+          <a:noFill/>
+          <a:ln/>
+        </p:spPr>
+        <p:txBody>
+          <a:bodyPr wrap="square" lIns="0" tIns="0" rIns="0" bIns="0" rtlCol="0" anchor="t"/>
+          <a:lstStyle/>
+          <a:p>
+            <a:pPr marL="0" indent="0" algn="l">
+              <a:buNone/>
+            </a:pPr>
+            <a:r>
+              <a:rPr lang="en-US" sz="3400" b="1" dirty="0">
+                <a:solidFill>
+                  <a:srgbClr val="0F172A"/>
+                </a:solidFill>
+                <a:latin typeface="Cambria" pitchFamily="34" charset="0"/>
+                <a:ea typeface="Cambria" pitchFamily="34" charset="-122"/>
+                <a:cs typeface="Cambria" pitchFamily="34" charset="-120"/>
+              </a:rPr>
+              <a:t>Test</a:t>
+            </a:r>
+            <a:endParaRPr lang="en-US" sz="3400" dirty="0"/>
+          </a:p>
+        </p:txBody>
+      </p:sp>
+      <p:sp>
+        <p:nvSpPr>
+          <p:cNvPr id="3" name="Text 1"/>
+          <p:cNvSpPr/>
+          <p:nvPr/>
+        </p:nvSpPr>
+        <p:spPr>
+          <a:xfrm>
+            <a:off x="457200" y="1216152"/>
+            <a:ext cx="9539935" cy="640080"/>
+          </a:xfrm>
+          <a:prstGeom prst="rect">
+            <a:avLst/>
+          </a:prstGeom>
+          <a:noFill/>
+          <a:ln/>
+        </p:spPr>
+        <p:txBody>
+          <a:bodyPr wrap="square" lIns="0" tIns="0" rIns="0" bIns="0" rtlCol="0" anchor="t"/>
+          <a:lstStyle/>
+          <a:p>
+            <a:pPr marL="0" indent="0" algn="l">
+              <a:buNone/>
+            </a:pPr>
+            <a:r>
+              <a:rPr lang="en-US" sz="1600" dirty="0">
+                <a:solidFill>
+                  <a:srgbClr val="64748B"/>
+                </a:solidFill>
+                <a:latin typeface="Calibri" pitchFamily="34" charset="0"/>
+                <a:ea typeface="Calibri" pitchFamily="34" charset="-122"/>
+                <a:cs typeface="Calibri" pitchFamily="34" charset="-120"/>
+              </a:rPr>
+              <a:t>Run tests to make sure everything looks good.</a:t>
+            </a:r>
+            <a:endParaRPr lang="en-US" sz="1600" dirty="0"/>
+          </a:p>
+        </p:txBody>
+      </p:sp>
+      <p:sp>
+        <p:nvSpPr>
+          <p:cNvPr id="4" name="Shape 2"/>
+          <p:cNvSpPr/>
+          <p:nvPr/>
+        </p:nvSpPr>
+        <p:spPr>
+          <a:xfrm>
+            <a:off x="10362895" y="502920"/>
+            <a:ext cx="1371600" cy="1371600"/>
+          </a:xfrm>
+          <a:prstGeom prst="roundRect">
+            <a:avLst>
+              <a:gd name="adj" fmla="val 8000"/>
+            </a:avLst>
+          </a:prstGeom>
+          <a:solidFill>
+            <a:srgbClr val="ECFDF5"/>
+          </a:solidFill>
+          <a:ln w="12700">
+            <a:solidFill>
+              <a:srgbClr val="E2E8F0"/>
+            </a:solidFill>
+            <a:prstDash val="solid"/>
+          </a:ln>
+        </p:spPr>
+        <p:txBody>
+          <a:bodyPr/>
+          <a:lstStyle/>
+          <a:p>
+            <a:endParaRPr lang="en-US"/>
+          </a:p>
+        </p:txBody>
+      </p:sp>
+      <p:pic>
+        <p:nvPicPr>
+          <p:cNvPr id="5" name="Image 0" descr="icons/search.png"/>
+          <p:cNvPicPr>
+            <a:picLocks noChangeAspect="1"/>
+          </p:cNvPicPr>
+          <p:nvPr/>
+        </p:nvPicPr>
+        <p:blipFill>
+          <a:blip r:embed="rId3"/>
+          <a:stretch>
+            <a:fillRect/>
+          </a:stretch>
+        </p:blipFill>
+        <p:spPr>
+          <a:xfrm>
+            <a:off x="10705795" y="845820"/>
+            <a:ext cx="685800" cy="685800"/>
+          </a:xfrm>
+          <a:prstGeom prst="rect">
+            <a:avLst/>
+          </a:prstGeom>
+        </p:spPr>
+      </p:pic>
+      <p:sp>
+        <p:nvSpPr>
+          <p:cNvPr id="6" name="Shape 3"/>
+          <p:cNvSpPr/>
+          <p:nvPr/>
+        </p:nvSpPr>
+        <p:spPr>
+          <a:xfrm>
+            <a:off x="457199" y="2148840"/>
+            <a:ext cx="11277295" cy="4251960"/>
+          </a:xfrm>
+          <a:prstGeom prst="roundRect">
+            <a:avLst>
+              <a:gd name="adj" fmla="val 2581"/>
+            </a:avLst>
+          </a:prstGeom>
+          <a:solidFill>
+            <a:srgbClr val="FFFFFF"/>
+          </a:solidFill>
+          <a:ln w="12700">
+            <a:solidFill>
+              <a:srgbClr val="E2E8F0"/>
+            </a:solidFill>
+            <a:prstDash val="solid"/>
+          </a:ln>
+          <a:effectLst>
+            <a:outerShdw blurRad="152400" dist="38100" dir="5400000" algn="bl" rotWithShape="0">
+              <a:srgbClr val="1E293B">
+                <a:alpha val="8000"/>
+              </a:srgbClr>
+            </a:outerShdw>
+          </a:effectLst>
+        </p:spPr>
+        <p:txBody>
+          <a:bodyPr/>
+          <a:lstStyle/>
+          <a:p>
+            <a:endParaRPr lang="en-US"/>
+          </a:p>
+        </p:txBody>
+      </p:sp>
+      <p:sp>
+        <p:nvSpPr>
+          <p:cNvPr id="7" name="Text 4"/>
+          <p:cNvSpPr/>
+          <p:nvPr/>
+        </p:nvSpPr>
+        <p:spPr>
+          <a:xfrm>
+            <a:off x="822960" y="2514600"/>
+            <a:ext cx="9144000" cy="365760"/>
+          </a:xfrm>
+          <a:prstGeom prst="rect">
+            <a:avLst/>
+          </a:prstGeom>
+          <a:noFill/>
+          <a:ln/>
+        </p:spPr>
+        <p:txBody>
+          <a:bodyPr wrap="square" lIns="0" tIns="0" rIns="0" bIns="0" rtlCol="0" anchor="t"/>
+          <a:lstStyle/>
+          <a:p>
+            <a:pPr marL="0" indent="0" algn="l">
+              <a:buNone/>
+            </a:pPr>
+            <a:r>
+              <a:rPr lang="en-US" sz="1500" b="1" dirty="0">
+                <a:solidFill>
+                  <a:srgbClr val="059669"/>
+                </a:solidFill>
+                <a:latin typeface="Calibri" pitchFamily="34" charset="0"/>
+                <a:ea typeface="Calibri" pitchFamily="34" charset="-122"/>
+                <a:cs typeface="Calibri" pitchFamily="34" charset="-120"/>
+              </a:rPr>
+              <a:t>Actual Phase C test list</a:t>
+            </a:r>
+            <a:endParaRPr lang="en-US" sz="1500" dirty="0"/>
+          </a:p>
+        </p:txBody>
+      </p:sp>
+      <p:sp>
+        <p:nvSpPr>
+          <p:cNvPr id="8" name="Text 5"/>
+          <p:cNvSpPr/>
+          <p:nvPr/>
+        </p:nvSpPr>
+        <p:spPr>
+          <a:xfrm>
+            <a:off x="822960" y="2926080"/>
+            <a:ext cx="10545775" cy="2743200"/>
+          </a:xfrm>
+          <a:prstGeom prst="rect">
+            <a:avLst/>
+          </a:prstGeom>
+          <a:noFill/>
+          <a:ln/>
+        </p:spPr>
+        <p:txBody>
+          <a:bodyPr wrap="square" lIns="0" tIns="0" rIns="0" bIns="0" rtlCol="0" anchor="t"/>
+          <a:lstStyle/>
+          <a:p>
+            <a:pPr marL="228600" indent="-228600">
+              <a:spcAft>
+                <a:spcPts val="1600"/>
+              </a:spcAft>
+              <a:buSzPct val="100000"/>
+              <a:buChar char="■"/>
+            </a:pPr>
+            <a:r>
+              <a:rPr lang="en-US" sz="1500" dirty="0">
+                <a:solidFill>
+                  <a:srgbClr val="0F172A"/>
+                </a:solidFill>
+                <a:latin typeface="Calibri" pitchFamily="34" charset="0"/>
+                <a:ea typeface="Calibri" pitchFamily="34" charset="-122"/>
+                <a:cs typeface="Calibri" pitchFamily="34" charset="-120"/>
+              </a:rPr>
+              <a:t>Create a new CMR end-to-end</a:t>
+            </a:r>
+            <a:endParaRPr lang="en-US" sz="1500" dirty="0"/>
+          </a:p>
+          <a:p>
+            <a:pPr marL="228600" indent="-228600">
+              <a:spcAft>
+                <a:spcPts val="1600"/>
+              </a:spcAft>
+              <a:buSzPct val="100000"/>
+              <a:buChar char="■"/>
+            </a:pPr>
+            <a:r>
+              <a:rPr lang="en-US" sz="1500" dirty="0">
+                <a:solidFill>
+                  <a:srgbClr val="0F172A"/>
+                </a:solidFill>
+                <a:latin typeface="Calibri" pitchFamily="34" charset="0"/>
+                <a:ea typeface="Calibri" pitchFamily="34" charset="-122"/>
+                <a:cs typeface="Calibri" pitchFamily="34" charset="-120"/>
+              </a:rPr>
+              <a:t>Save and reopen</a:t>
+            </a:r>
+            <a:endParaRPr lang="en-US" sz="1500" dirty="0"/>
+          </a:p>
+          <a:p>
+            <a:pPr marL="228600" indent="-228600">
+              <a:spcAft>
+                <a:spcPts val="1600"/>
+              </a:spcAft>
+              <a:buSzPct val="100000"/>
+              <a:buChar char="■"/>
+            </a:pPr>
+            <a:r>
+              <a:rPr lang="en-US" sz="1500" dirty="0">
+                <a:solidFill>
+                  <a:srgbClr val="0F172A"/>
+                </a:solidFill>
+                <a:latin typeface="Calibri" pitchFamily="34" charset="0"/>
+                <a:ea typeface="Calibri" pitchFamily="34" charset="-122"/>
+                <a:cs typeface="Calibri" pitchFamily="34" charset="-120"/>
+              </a:rPr>
+              <a:t>Confirm numbering has no race condition</a:t>
+            </a:r>
+            <a:endParaRPr lang="en-US" sz="1500" dirty="0"/>
+          </a:p>
+          <a:p>
+            <a:pPr marL="228600" indent="-228600">
+              <a:spcAft>
+                <a:spcPts val="1600"/>
+              </a:spcAft>
+              <a:buSzPct val="100000"/>
+              <a:buChar char="■"/>
+            </a:pPr>
+            <a:r>
+              <a:rPr lang="en-US" sz="1500" dirty="0">
+                <a:solidFill>
+                  <a:srgbClr val="0F172A"/>
+                </a:solidFill>
+                <a:latin typeface="Calibri" pitchFamily="34" charset="0"/>
+                <a:ea typeface="Calibri" pitchFamily="34" charset="-122"/>
+                <a:cs typeface="Calibri" pitchFamily="34" charset="-120"/>
+              </a:rPr>
+              <a:t>Confirm the flow meets requirements</a:t>
+            </a:r>
+            <a:endParaRPr lang="en-US" sz="1500" dirty="0"/>
+          </a:p>
+          <a:p>
+            <a:pPr marL="228600" indent="-228600">
+              <a:spcAft>
+                <a:spcPts val="1600"/>
+              </a:spcAft>
+              <a:buSzPct val="100000"/>
+              <a:buChar char="■"/>
+            </a:pPr>
+            <a:r>
+              <a:rPr lang="en-US" sz="1500" dirty="0">
+                <a:solidFill>
+                  <a:srgbClr val="0F172A"/>
+                </a:solidFill>
+                <a:latin typeface="Calibri" pitchFamily="34" charset="0"/>
+                <a:ea typeface="Calibri" pitchFamily="34" charset="-122"/>
+                <a:cs typeface="Calibri" pitchFamily="34" charset="-120"/>
+              </a:rPr>
+              <a:t>Confirm all fields + lookup fields work</a:t>
+            </a:r>
+            <a:endParaRPr lang="en-US" sz="1500" dirty="0"/>
+          </a:p>
+        </p:txBody>
+      </p:sp>
+    </p:spTree>
+  </p:cSld>
+  <p:clrMapOvr>
+    <a:masterClrMapping/>
+  </p:clrMapOvr>
+</p:sld>
+</file>
+
+<file path=ppt/slides/slide11.xml><?xml version="1.0" encoding="utf-8"?>
 <p:sld xmlns:a="http://schemas.openxmlformats.org/drawingml/2006/main" xmlns:r="http://schemas.openxmlformats.org/officeDocument/2006/relationships" xmlns:p="http://schemas.openxmlformats.org/presentationml/2006/main">
   <p:cSld name="Slide 10">
     <p:bg>
@@ -2064,1543 +2439,9 @@
                 <a:ea typeface="Calibri" pitchFamily="34" charset="-122"/>
                 <a:cs typeface="Calibri" pitchFamily="34" charset="-120"/>
               </a:rPr>
-              <a:t>Work on procedure documentation changes </a:t>
-            </a:r>
-          </a:p>
-          <a:p>
-            <a:pPr marL="228600" indent="-228600">
-              <a:buSzPct val="100000"/>
-              <a:buChar char="■"/>
-            </a:pPr>
-            <a:r>
-              <a:rPr lang="en-US" sz="1500" dirty="0">
-                <a:solidFill>
-                  <a:srgbClr val="FFFFFF"/>
-                </a:solidFill>
-                <a:latin typeface="Calibri" pitchFamily="34" charset="0"/>
-                <a:ea typeface="Calibri" pitchFamily="34" charset="-122"/>
-                <a:cs typeface="Calibri" pitchFamily="34" charset="-120"/>
-              </a:rPr>
               <a:t>Submit procedures for manager approval</a:t>
             </a:r>
             <a:endParaRPr lang="en-US" sz="1500" dirty="0"/>
-          </a:p>
-        </p:txBody>
-      </p:sp>
-    </p:spTree>
-  </p:cSld>
-  <p:clrMapOvr>
-    <a:masterClrMapping/>
-  </p:clrMapOvr>
-</p:sld>
-</file>
-
-<file path=ppt/slides/slide11.xml><?xml version="1.0" encoding="utf-8"?>
-<p:sld xmlns:a="http://schemas.openxmlformats.org/drawingml/2006/main" xmlns:r="http://schemas.openxmlformats.org/officeDocument/2006/relationships" xmlns:p="http://schemas.openxmlformats.org/presentationml/2006/main">
-  <p:cSld name="Slide 5">
-    <p:bg>
-      <p:bgPr>
-        <a:solidFill>
-          <a:srgbClr val="F8FAFC"/>
-        </a:solidFill>
-        <a:effectLst/>
-      </p:bgPr>
-    </p:bg>
-    <p:spTree>
-      <p:nvGrpSpPr>
-        <p:cNvPr id="1" name=""/>
-        <p:cNvGrpSpPr/>
-        <p:nvPr/>
-      </p:nvGrpSpPr>
-      <p:grpSpPr>
-        <a:xfrm>
-          <a:off x="0" y="0"/>
-          <a:ext cx="0" cy="0"/>
-          <a:chOff x="0" y="0"/>
-          <a:chExt cx="0" cy="0"/>
-        </a:xfrm>
-      </p:grpSpPr>
-      <p:sp>
-        <p:nvSpPr>
-          <p:cNvPr id="2" name="Shape 0"/>
-          <p:cNvSpPr/>
-          <p:nvPr/>
-        </p:nvSpPr>
-        <p:spPr>
-          <a:xfrm>
-            <a:off x="457200" y="502920"/>
-            <a:ext cx="1371600" cy="1371600"/>
-          </a:xfrm>
-          <a:prstGeom prst="roundRect">
-            <a:avLst>
-              <a:gd name="adj" fmla="val 8000"/>
-            </a:avLst>
-          </a:prstGeom>
-          <a:solidFill>
-            <a:srgbClr val="ECFDF5"/>
-          </a:solidFill>
-          <a:ln w="12700">
-            <a:solidFill>
-              <a:srgbClr val="E2E8F0"/>
-            </a:solidFill>
-            <a:prstDash val="solid"/>
-          </a:ln>
-        </p:spPr>
-        <p:txBody>
-          <a:bodyPr/>
-          <a:lstStyle/>
-          <a:p>
-            <a:endParaRPr lang="en-US"/>
-          </a:p>
-        </p:txBody>
-      </p:sp>
-      <p:pic>
-        <p:nvPicPr>
-          <p:cNvPr id="3" name="Image 0" descr="icons/tag.png"/>
-          <p:cNvPicPr>
-            <a:picLocks noChangeAspect="1"/>
-          </p:cNvPicPr>
-          <p:nvPr/>
-        </p:nvPicPr>
-        <p:blipFill>
-          <a:blip r:embed="rId4"/>
-          <a:stretch>
-            <a:fillRect/>
-          </a:stretch>
-        </p:blipFill>
-        <p:spPr>
-          <a:xfrm>
-            <a:off x="800100" y="845820"/>
-            <a:ext cx="685800" cy="685800"/>
-          </a:xfrm>
-          <a:prstGeom prst="rect">
-            <a:avLst/>
-          </a:prstGeom>
-        </p:spPr>
-      </p:pic>
-      <p:sp>
-        <p:nvSpPr>
-          <p:cNvPr id="4" name="Text 1"/>
-          <p:cNvSpPr/>
-          <p:nvPr/>
-        </p:nvSpPr>
-        <p:spPr>
-          <a:xfrm>
-            <a:off x="2194560" y="502920"/>
-            <a:ext cx="9539935" cy="685800"/>
-          </a:xfrm>
-          <a:prstGeom prst="rect">
-            <a:avLst/>
-          </a:prstGeom>
-          <a:noFill/>
-          <a:ln/>
-        </p:spPr>
-        <p:txBody>
-          <a:bodyPr wrap="square" lIns="0" tIns="0" rIns="0" bIns="0" rtlCol="0" anchor="t"/>
-          <a:lstStyle/>
-          <a:p>
-            <a:pPr marL="0" indent="0" algn="l">
-              <a:buNone/>
-            </a:pPr>
-            <a:r>
-              <a:rPr lang="en-US" sz="3400" b="1" dirty="0">
-                <a:solidFill>
-                  <a:srgbClr val="0F172A"/>
-                </a:solidFill>
-                <a:latin typeface="Cambria" pitchFamily="34" charset="0"/>
-                <a:ea typeface="Cambria" pitchFamily="34" charset="-122"/>
-                <a:cs typeface="Cambria" pitchFamily="34" charset="-120"/>
-              </a:rPr>
-              <a:t>The current CMR process</a:t>
-            </a:r>
-            <a:endParaRPr lang="en-US" sz="3400" dirty="0"/>
-          </a:p>
-        </p:txBody>
-      </p:sp>
-      <p:sp>
-        <p:nvSpPr>
-          <p:cNvPr id="5" name="Text 2"/>
-          <p:cNvSpPr/>
-          <p:nvPr/>
-        </p:nvSpPr>
-        <p:spPr>
-          <a:xfrm>
-            <a:off x="2194560" y="1216152"/>
-            <a:ext cx="9539935" cy="640080"/>
-          </a:xfrm>
-          <a:prstGeom prst="rect">
-            <a:avLst/>
-          </a:prstGeom>
-          <a:noFill/>
-          <a:ln/>
-        </p:spPr>
-        <p:txBody>
-          <a:bodyPr wrap="square" lIns="0" tIns="0" rIns="0" bIns="0" rtlCol="0" anchor="t"/>
-          <a:lstStyle/>
-          <a:p>
-            <a:pPr marL="0" indent="0" algn="l">
-              <a:buNone/>
-            </a:pPr>
-            <a:r>
-              <a:rPr lang="en-US" sz="1600" dirty="0">
-                <a:solidFill>
-                  <a:srgbClr val="64748B"/>
-                </a:solidFill>
-                <a:latin typeface="Calibri" pitchFamily="34" charset="0"/>
-                <a:ea typeface="Calibri" pitchFamily="34" charset="-122"/>
-                <a:cs typeface="Calibri" pitchFamily="34" charset="-120"/>
-              </a:rPr>
-              <a:t>Create Change Request → Change Request Management → CMR — the three-form workflow today.</a:t>
-            </a:r>
-            <a:endParaRPr lang="en-US" sz="1600" dirty="0"/>
-          </a:p>
-        </p:txBody>
-      </p:sp>
-      <p:sp>
-        <p:nvSpPr>
-          <p:cNvPr id="6" name="Shape 3"/>
-          <p:cNvSpPr/>
-          <p:nvPr/>
-        </p:nvSpPr>
-        <p:spPr>
-          <a:xfrm>
-            <a:off x="457200" y="2148840"/>
-            <a:ext cx="11277295" cy="4251960"/>
-          </a:xfrm>
-          <a:prstGeom prst="roundRect">
-            <a:avLst>
-              <a:gd name="adj" fmla="val 2581"/>
-            </a:avLst>
-          </a:prstGeom>
-          <a:solidFill>
-            <a:srgbClr val="FFFFFF"/>
-          </a:solidFill>
-          <a:ln w="12700">
-            <a:solidFill>
-              <a:srgbClr val="E2E8F0"/>
-            </a:solidFill>
-            <a:prstDash val="solid"/>
-          </a:ln>
-          <a:effectLst>
-            <a:outerShdw blurRad="152400" dist="38100" dir="5400000" algn="bl" rotWithShape="0">
-              <a:srgbClr val="1E293B">
-                <a:alpha val="8000"/>
-              </a:srgbClr>
-            </a:outerShdw>
-          </a:effectLst>
-        </p:spPr>
-        <p:txBody>
-          <a:bodyPr/>
-          <a:lstStyle/>
-          <a:p>
-            <a:endParaRPr lang="en-US"/>
-          </a:p>
-        </p:txBody>
-      </p:sp>
-      <p:sp>
-        <p:nvSpPr>
-          <p:cNvPr id="7" name="Text 4"/>
-          <p:cNvSpPr/>
-          <p:nvPr/>
-        </p:nvSpPr>
-        <p:spPr>
-          <a:xfrm>
-            <a:off x="822960" y="2514600"/>
-            <a:ext cx="9144000" cy="365760"/>
-          </a:xfrm>
-          <a:prstGeom prst="rect">
-            <a:avLst/>
-          </a:prstGeom>
-          <a:noFill/>
-          <a:ln/>
-        </p:spPr>
-        <p:txBody>
-          <a:bodyPr wrap="square" lIns="0" tIns="0" rIns="0" bIns="0" rtlCol="0" anchor="t"/>
-          <a:lstStyle/>
-          <a:p>
-            <a:pPr marL="0" indent="0" algn="l">
-              <a:buNone/>
-            </a:pPr>
-            <a:r>
-              <a:rPr lang="en-US" sz="1500" b="1" dirty="0">
-                <a:solidFill>
-                  <a:srgbClr val="059669"/>
-                </a:solidFill>
-                <a:latin typeface="Calibri" pitchFamily="34" charset="0"/>
-                <a:ea typeface="Calibri" pitchFamily="34" charset="-122"/>
-                <a:cs typeface="Calibri" pitchFamily="34" charset="-120"/>
-              </a:rPr>
-              <a:t>Actual current process</a:t>
-            </a:r>
-            <a:endParaRPr lang="en-US" sz="1500" dirty="0"/>
-          </a:p>
-        </p:txBody>
-      </p:sp>
-      <p:sp>
-        <p:nvSpPr>
-          <p:cNvPr id="8" name="Text 5"/>
-          <p:cNvSpPr/>
-          <p:nvPr/>
-        </p:nvSpPr>
-        <p:spPr>
-          <a:xfrm>
-            <a:off x="822960" y="2926080"/>
-            <a:ext cx="10545775" cy="3343200"/>
-          </a:xfrm>
-          <a:prstGeom prst="rect">
-            <a:avLst/>
-          </a:prstGeom>
-          <a:noFill/>
-          <a:ln/>
-        </p:spPr>
-        <p:txBody>
-          <a:bodyPr wrap="square" lIns="0" tIns="0" rIns="0" bIns="0" rtlCol="0" anchor="t"/>
-          <a:lstStyle/>
-          <a:p>
-            <a:pPr marL="228600" indent="-228600">
-              <a:spcAft>
-                <a:spcPts val="1400"/>
-              </a:spcAft>
-              <a:buSzPct val="100000"/>
-              <a:buChar char="■"/>
-            </a:pPr>
-            <a:r>
-              <a:rPr lang="en-US" sz="1500" dirty="0">
-                <a:solidFill>
-                  <a:srgbClr val="0F172A"/>
-                </a:solidFill>
-                <a:latin typeface="Calibri" pitchFamily="34" charset="0"/>
-                <a:ea typeface="Calibri" pitchFamily="34" charset="-122"/>
-                <a:cs typeface="Calibri" pitchFamily="34" charset="-120"/>
-              </a:rPr>
-              <a:t>Production emails a PIR (Job, Serial #, Top Level PN, Sub Assembly PN, Part, Issue); Jasmine decides </a:t>
-            </a:r>
-            <a:r>
-              <a:rPr lang="en-US" sz="1500" b="1" dirty="0">
-                <a:solidFill>
-                  <a:srgbClr val="0F172A"/>
-                </a:solidFill>
-                <a:latin typeface="Calibri" pitchFamily="34" charset="0"/>
-                <a:ea typeface="Calibri" pitchFamily="34" charset="-122"/>
-                <a:cs typeface="Calibri" pitchFamily="34" charset="-120"/>
-              </a:rPr>
-              <a:t>CMR</a:t>
-            </a:r>
-            <a:r>
-              <a:rPr lang="en-US" sz="1500" dirty="0">
-                <a:solidFill>
-                  <a:srgbClr val="0F172A"/>
-                </a:solidFill>
-                <a:latin typeface="Calibri" pitchFamily="34" charset="0"/>
-                <a:ea typeface="Calibri" pitchFamily="34" charset="-122"/>
-                <a:cs typeface="Calibri" pitchFamily="34" charset="-120"/>
-              </a:rPr>
-              <a:t> vs. </a:t>
-            </a:r>
-            <a:r>
-              <a:rPr lang="en-US" sz="1500" b="1" dirty="0">
-                <a:solidFill>
-                  <a:srgbClr val="0F172A"/>
-                </a:solidFill>
-                <a:latin typeface="Calibri" pitchFamily="34" charset="0"/>
-                <a:ea typeface="Calibri" pitchFamily="34" charset="-122"/>
-                <a:cs typeface="Calibri" pitchFamily="34" charset="-120"/>
-              </a:rPr>
-              <a:t>TRR</a:t>
-            </a:r>
-            <a:r>
-              <a:rPr lang="en-US" sz="1500" dirty="0">
-                <a:solidFill>
-                  <a:srgbClr val="0F172A"/>
-                </a:solidFill>
-                <a:latin typeface="Calibri" pitchFamily="34" charset="0"/>
-                <a:ea typeface="Calibri" pitchFamily="34" charset="-122"/>
-                <a:cs typeface="Calibri" pitchFamily="34" charset="-120"/>
-              </a:rPr>
-              <a:t> vs. </a:t>
-            </a:r>
-            <a:r>
-              <a:rPr lang="en-US" sz="1500" b="1" dirty="0">
-                <a:solidFill>
-                  <a:srgbClr val="0F172A"/>
-                </a:solidFill>
-                <a:latin typeface="Calibri" pitchFamily="34" charset="0"/>
-                <a:ea typeface="Calibri" pitchFamily="34" charset="-122"/>
-                <a:cs typeface="Calibri" pitchFamily="34" charset="-120"/>
-              </a:rPr>
-              <a:t>MRR</a:t>
-            </a:r>
-            <a:r>
-              <a:rPr lang="en-US" sz="1500" dirty="0">
-                <a:solidFill>
-                  <a:srgbClr val="0F172A"/>
-                </a:solidFill>
-                <a:latin typeface="Calibri" pitchFamily="34" charset="0"/>
-                <a:ea typeface="Calibri" pitchFamily="34" charset="-122"/>
-                <a:cs typeface="Calibri" pitchFamily="34" charset="-120"/>
-              </a:rPr>
-              <a:t> based on the issue.</a:t>
-            </a:r>
-            <a:endParaRPr lang="en-US" sz="1500" dirty="0"/>
-          </a:p>
-          <a:p>
-            <a:pPr marL="228600" indent="-228600">
-              <a:spcAft>
-                <a:spcPts val="1400"/>
-              </a:spcAft>
-              <a:buSzPct val="100000"/>
-              <a:buChar char="■"/>
-            </a:pPr>
-            <a:r>
-              <a:rPr lang="en-US" sz="1500" b="1" dirty="0">
-                <a:solidFill>
-                  <a:srgbClr val="0F172A"/>
-                </a:solidFill>
-                <a:latin typeface="Calibri" pitchFamily="34" charset="0"/>
-                <a:ea typeface="Calibri" pitchFamily="34" charset="-122"/>
-                <a:cs typeface="Calibri" pitchFamily="34" charset="-120"/>
-              </a:rPr>
-              <a:t>Create Change Request</a:t>
-            </a:r>
-            <a:r>
-              <a:rPr lang="en-US" sz="1500" dirty="0">
-                <a:solidFill>
-                  <a:srgbClr val="0F172A"/>
-                </a:solidFill>
-                <a:latin typeface="Calibri" pitchFamily="34" charset="0"/>
-                <a:ea typeface="Calibri" pitchFamily="34" charset="-122"/>
-                <a:cs typeface="Calibri" pitchFamily="34" charset="-120"/>
-              </a:rPr>
-              <a:t>: Priority, Initial Change, Requested By.</a:t>
-            </a:r>
-            <a:endParaRPr lang="en-US" sz="1500" dirty="0"/>
-          </a:p>
-          <a:p>
-            <a:pPr marL="228600" indent="-228600">
-              <a:spcAft>
-                <a:spcPts val="1400"/>
-              </a:spcAft>
-              <a:buSzPct val="100000"/>
-              <a:buChar char="■"/>
-            </a:pPr>
-            <a:r>
-              <a:rPr lang="en-US" sz="1500" b="1" dirty="0">
-                <a:solidFill>
-                  <a:srgbClr val="0F172A"/>
-                </a:solidFill>
-                <a:latin typeface="Calibri" pitchFamily="34" charset="0"/>
-                <a:ea typeface="Calibri" pitchFamily="34" charset="-122"/>
-                <a:cs typeface="Calibri" pitchFamily="34" charset="-120"/>
-              </a:rPr>
-              <a:t>Change Request Management</a:t>
-            </a:r>
-            <a:r>
-              <a:rPr lang="en-US" sz="1500" dirty="0">
-                <a:solidFill>
-                  <a:srgbClr val="0F172A"/>
-                </a:solidFill>
-                <a:latin typeface="Calibri" pitchFamily="34" charset="0"/>
-                <a:ea typeface="Calibri" pitchFamily="34" charset="-122"/>
-                <a:cs typeface="Calibri" pitchFamily="34" charset="-120"/>
-              </a:rPr>
-              <a:t>: everything’s already filled in — she just grabs the CMR Number it generated.</a:t>
-            </a:r>
-            <a:endParaRPr lang="en-US" sz="1500" dirty="0"/>
-          </a:p>
-          <a:p>
-            <a:pPr marL="228600" indent="-228600">
-              <a:spcAft>
-                <a:spcPts val="1400"/>
-              </a:spcAft>
-              <a:buSzPct val="100000"/>
-              <a:buChar char="■"/>
-            </a:pPr>
-            <a:r>
-              <a:rPr lang="en-US" sz="1500" b="1" dirty="0">
-                <a:solidFill>
-                  <a:srgbClr val="0F172A"/>
-                </a:solidFill>
-                <a:latin typeface="Calibri" pitchFamily="34" charset="0"/>
-                <a:ea typeface="Calibri" pitchFamily="34" charset="-122"/>
-                <a:cs typeface="Calibri" pitchFamily="34" charset="-120"/>
-              </a:rPr>
-              <a:t>CMR Form</a:t>
-            </a:r>
-            <a:r>
-              <a:rPr lang="en-US" sz="1500" dirty="0">
-                <a:solidFill>
-                  <a:srgbClr val="0F172A"/>
-                </a:solidFill>
-                <a:latin typeface="Calibri" pitchFamily="34" charset="0"/>
-                <a:ea typeface="Calibri" pitchFamily="34" charset="-122"/>
-                <a:cs typeface="Calibri" pitchFamily="34" charset="-120"/>
-              </a:rPr>
-              <a:t>: assign engineering, pull Item/Revision from the drawing books, Disposition starts </a:t>
-            </a:r>
-            <a:r>
-              <a:rPr lang="en-US" sz="1500" b="1" dirty="0">
-                <a:solidFill>
-                  <a:srgbClr val="0F172A"/>
-                </a:solidFill>
-                <a:latin typeface="Calibri" pitchFamily="34" charset="0"/>
-                <a:ea typeface="Calibri" pitchFamily="34" charset="-122"/>
-                <a:cs typeface="Calibri" pitchFamily="34" charset="-120"/>
-              </a:rPr>
-              <a:t>On Hold</a:t>
-            </a:r>
-            <a:r>
-              <a:rPr lang="en-US" sz="1500" dirty="0">
-                <a:solidFill>
-                  <a:srgbClr val="0F172A"/>
-                </a:solidFill>
-                <a:latin typeface="Calibri" pitchFamily="34" charset="0"/>
-                <a:ea typeface="Calibri" pitchFamily="34" charset="-122"/>
-                <a:cs typeface="Calibri" pitchFamily="34" charset="-120"/>
-              </a:rPr>
-              <a:t>, RCA notes copied from the intake email (Serial #/LOT # currently get copied into the Notes here too).</a:t>
-            </a:r>
-            <a:endParaRPr lang="en-US" sz="1500" dirty="0"/>
-          </a:p>
-          <a:p>
-            <a:pPr marL="228600" indent="-228600">
-              <a:spcAft>
-                <a:spcPts val="1400"/>
-              </a:spcAft>
-              <a:buSzPct val="100000"/>
-              <a:buChar char="■"/>
-            </a:pPr>
-            <a:r>
-              <a:rPr lang="en-US" sz="1500" dirty="0">
-                <a:solidFill>
-                  <a:srgbClr val="0F172A"/>
-                </a:solidFill>
-                <a:latin typeface="Calibri" pitchFamily="34" charset="0"/>
-                <a:ea typeface="Calibri" pitchFamily="34" charset="-122"/>
-                <a:cs typeface="Calibri" pitchFamily="34" charset="-120"/>
-              </a:rPr>
-              <a:t>Save, notify engineering (follow up after 24 hrs), then send the CMR Number back to the requester.</a:t>
-            </a:r>
-            <a:endParaRPr lang="en-US" sz="1500" dirty="0"/>
-          </a:p>
-        </p:txBody>
-      </p:sp>
-    </p:spTree>
-  </p:cSld>
-  <p:clrMapOvr>
-    <a:masterClrMapping/>
-  </p:clrMapOvr>
-</p:sld>
-</file>
-
-<file path=ppt/slides/slide12.xml><?xml version="1.0" encoding="utf-8"?>
-<p:sld xmlns:a="http://schemas.openxmlformats.org/drawingml/2006/main" xmlns:r="http://schemas.openxmlformats.org/officeDocument/2006/relationships" xmlns:p="http://schemas.openxmlformats.org/presentationml/2006/main">
-  <p:cSld name="Slide 3">
-    <p:bg>
-      <p:bgPr>
-        <a:solidFill>
-          <a:srgbClr val="F8FAFC"/>
-        </a:solidFill>
-        <a:effectLst/>
-      </p:bgPr>
-    </p:bg>
-    <p:spTree>
-      <p:nvGrpSpPr>
-        <p:cNvPr id="1" name=""/>
-        <p:cNvGrpSpPr/>
-        <p:nvPr/>
-      </p:nvGrpSpPr>
-      <p:grpSpPr>
-        <a:xfrm>
-          <a:off x="0" y="0"/>
-          <a:ext cx="0" cy="0"/>
-          <a:chOff x="0" y="0"/>
-          <a:chExt cx="0" cy="0"/>
-        </a:xfrm>
-      </p:grpSpPr>
-      <p:sp>
-        <p:nvSpPr>
-          <p:cNvPr id="2" name="Shape 0"/>
-          <p:cNvSpPr/>
-          <p:nvPr/>
-        </p:nvSpPr>
-        <p:spPr>
-          <a:xfrm>
-            <a:off x="457200" y="502920"/>
-            <a:ext cx="1371600" cy="1371600"/>
-          </a:xfrm>
-          <a:prstGeom prst="roundRect">
-            <a:avLst>
-              <a:gd name="adj" fmla="val 8000"/>
-            </a:avLst>
-          </a:prstGeom>
-          <a:solidFill>
-            <a:srgbClr val="ECFDF5"/>
-          </a:solidFill>
-          <a:ln w="12700">
-            <a:solidFill>
-              <a:srgbClr val="E2E8F0"/>
-            </a:solidFill>
-            <a:prstDash val="solid"/>
-          </a:ln>
-        </p:spPr>
-        <p:txBody>
-          <a:bodyPr/>
-          <a:lstStyle/>
-          <a:p>
-            <a:endParaRPr lang="en-US"/>
-          </a:p>
-        </p:txBody>
-      </p:sp>
-      <p:pic>
-        <p:nvPicPr>
-          <p:cNvPr id="3" name="Image 0" descr="icons/flow.png"/>
-          <p:cNvPicPr>
-            <a:picLocks noChangeAspect="1"/>
-          </p:cNvPicPr>
-          <p:nvPr/>
-        </p:nvPicPr>
-        <p:blipFill>
-          <a:blip r:embed="rId4"/>
-          <a:stretch>
-            <a:fillRect/>
-          </a:stretch>
-        </p:blipFill>
-        <p:spPr>
-          <a:xfrm>
-            <a:off x="800100" y="845820"/>
-            <a:ext cx="685800" cy="685800"/>
-          </a:xfrm>
-          <a:prstGeom prst="rect">
-            <a:avLst/>
-          </a:prstGeom>
-        </p:spPr>
-      </p:pic>
-      <p:sp>
-        <p:nvSpPr>
-          <p:cNvPr id="4" name="Text 1"/>
-          <p:cNvSpPr/>
-          <p:nvPr/>
-        </p:nvSpPr>
-        <p:spPr>
-          <a:xfrm>
-            <a:off x="2194560" y="502920"/>
-            <a:ext cx="9539935" cy="685800"/>
-          </a:xfrm>
-          <a:prstGeom prst="rect">
-            <a:avLst/>
-          </a:prstGeom>
-          <a:noFill/>
-          <a:ln/>
-        </p:spPr>
-        <p:txBody>
-          <a:bodyPr wrap="square" lIns="0" tIns="0" rIns="0" bIns="0" rtlCol="0" anchor="t"/>
-          <a:lstStyle/>
-          <a:p>
-            <a:pPr marL="0" indent="0" algn="l">
-              <a:buNone/>
-            </a:pPr>
-            <a:r>
-              <a:rPr lang="en-US" sz="3400" b="1" dirty="0">
-                <a:solidFill>
-                  <a:srgbClr val="0F172A"/>
-                </a:solidFill>
-                <a:latin typeface="Cambria" pitchFamily="34" charset="0"/>
-                <a:ea typeface="Cambria" pitchFamily="34" charset="-122"/>
-                <a:cs typeface="Cambria" pitchFamily="34" charset="-120"/>
-              </a:rPr>
-              <a:t>Today’s process flow</a:t>
-            </a:r>
-            <a:endParaRPr lang="en-US" sz="3400" dirty="0"/>
-          </a:p>
-        </p:txBody>
-      </p:sp>
-      <p:sp>
-        <p:nvSpPr>
-          <p:cNvPr id="5" name="Text 2"/>
-          <p:cNvSpPr/>
-          <p:nvPr/>
-        </p:nvSpPr>
-        <p:spPr>
-          <a:xfrm>
-            <a:off x="2194560" y="1216152"/>
-            <a:ext cx="9539935" cy="640080"/>
-          </a:xfrm>
-          <a:prstGeom prst="rect">
-            <a:avLst/>
-          </a:prstGeom>
-          <a:noFill/>
-          <a:ln/>
-        </p:spPr>
-        <p:txBody>
-          <a:bodyPr wrap="square" lIns="0" tIns="0" rIns="0" bIns="0" rtlCol="0" anchor="t"/>
-          <a:lstStyle/>
-          <a:p>
-            <a:pPr marL="0" indent="0" algn="l">
-              <a:buNone/>
-            </a:pPr>
-            <a:r>
-              <a:rPr lang="en-US" sz="1600" dirty="0">
-                <a:solidFill>
-                  <a:srgbClr val="64748B"/>
-                </a:solidFill>
-                <a:latin typeface="Calibri" pitchFamily="34" charset="0"/>
-                <a:ea typeface="Calibri" pitchFamily="34" charset="-122"/>
-                <a:cs typeface="Calibri" pitchFamily="34" charset="-120"/>
-              </a:rPr>
-              <a:t>How a CMR moves through the current three-form process, start to finish.</a:t>
-            </a:r>
-            <a:endParaRPr lang="en-US" sz="1600" dirty="0"/>
-          </a:p>
-        </p:txBody>
-      </p:sp>
-      <p:sp>
-        <p:nvSpPr>
-          <p:cNvPr id="6" name="Shape 3"/>
-          <p:cNvSpPr/>
-          <p:nvPr/>
-        </p:nvSpPr>
-        <p:spPr>
-          <a:xfrm>
-            <a:off x="457200" y="2148840"/>
-            <a:ext cx="11277295" cy="4251960"/>
-          </a:xfrm>
-          <a:prstGeom prst="roundRect">
-            <a:avLst>
-              <a:gd name="adj" fmla="val 2581"/>
-            </a:avLst>
-          </a:prstGeom>
-          <a:solidFill>
-            <a:srgbClr val="FFFFFF"/>
-          </a:solidFill>
-          <a:ln w="12700">
-            <a:solidFill>
-              <a:srgbClr val="E2E8F0"/>
-            </a:solidFill>
-            <a:prstDash val="solid"/>
-          </a:ln>
-          <a:effectLst>
-            <a:outerShdw blurRad="152400" dist="38100" dir="5400000" algn="bl" rotWithShape="0">
-              <a:srgbClr val="1E293B">
-                <a:alpha val="8000"/>
-              </a:srgbClr>
-            </a:outerShdw>
-          </a:effectLst>
-        </p:spPr>
-        <p:txBody>
-          <a:bodyPr/>
-          <a:lstStyle/>
-          <a:p>
-            <a:endParaRPr lang="en-US"/>
-          </a:p>
-        </p:txBody>
-      </p:sp>
-      <p:sp>
-        <p:nvSpPr>
-          <p:cNvPr id="7" name="Text 4"/>
-          <p:cNvSpPr/>
-          <p:nvPr/>
-        </p:nvSpPr>
-        <p:spPr>
-          <a:xfrm>
-            <a:off x="822960" y="2514600"/>
-            <a:ext cx="9144000" cy="365760"/>
-          </a:xfrm>
-          <a:prstGeom prst="rect">
-            <a:avLst/>
-          </a:prstGeom>
-          <a:noFill/>
-          <a:ln/>
-        </p:spPr>
-        <p:txBody>
-          <a:bodyPr wrap="square" lIns="0" tIns="0" rIns="0" bIns="0" rtlCol="0" anchor="t"/>
-          <a:lstStyle/>
-          <a:p>
-            <a:pPr marL="0" indent="0" algn="l">
-              <a:buNone/>
-            </a:pPr>
-            <a:r>
-              <a:rPr lang="en-US" sz="1500" b="1" dirty="0">
-                <a:solidFill>
-                  <a:srgbClr val="059669"/>
-                </a:solidFill>
-                <a:latin typeface="Calibri" pitchFamily="34" charset="0"/>
-                <a:ea typeface="Calibri" pitchFamily="34" charset="-122"/>
-                <a:cs typeface="Calibri" pitchFamily="34" charset="-120"/>
-              </a:rPr>
-              <a:t>Actual process flow</a:t>
-            </a:r>
-            <a:endParaRPr lang="en-US" sz="1500" dirty="0"/>
-          </a:p>
-        </p:txBody>
-      </p:sp>
-      <p:sp>
-        <p:nvSpPr>
-          <p:cNvPr id="100" name="Shape 100"/>
-          <p:cNvSpPr/>
-          <p:nvPr/>
-        </p:nvSpPr>
-        <p:spPr>
-          <a:xfrm>
-            <a:off x="822960" y="2926080"/>
-            <a:ext cx="1490929" cy="1828800"/>
-          </a:xfrm>
-          <a:prstGeom prst="roundRect">
-            <a:avLst>
-              <a:gd name="adj" fmla="val 4438"/>
-            </a:avLst>
-          </a:prstGeom>
-          <a:solidFill>
-            <a:srgbClr val="F8FAFC"/>
-          </a:solidFill>
-          <a:ln w="12700">
-            <a:solidFill>
-              <a:srgbClr val="E2E8F0"/>
-            </a:solidFill>
-            <a:prstDash val="solid"/>
-          </a:ln>
-        </p:spPr>
-        <p:txBody>
-          <a:bodyPr/>
-          <a:lstStyle/>
-          <a:p>
-            <a:endParaRPr lang="en-US"/>
-          </a:p>
-        </p:txBody>
-      </p:sp>
-      <p:sp>
-        <p:nvSpPr>
-          <p:cNvPr id="101" name="Text 101"/>
-          <p:cNvSpPr/>
-          <p:nvPr/>
-        </p:nvSpPr>
-        <p:spPr>
-          <a:xfrm>
-            <a:off x="987552" y="3090672"/>
-            <a:ext cx="1161745" cy="1554480"/>
-          </a:xfrm>
-          <a:prstGeom prst="rect">
-            <a:avLst/>
-          </a:prstGeom>
-          <a:noFill/>
-          <a:ln/>
-        </p:spPr>
-        <p:txBody>
-          <a:bodyPr wrap="square" lIns="0" tIns="0" rIns="0" bIns="0" rtlCol="0" anchor="t"/>
-          <a:lstStyle/>
-          <a:p>
-            <a:pPr marL="0" indent="0">
-              <a:lnSpc>
-                <a:spcPts val="1600"/>
-              </a:lnSpc>
-              <a:buNone/>
-            </a:pPr>
-            <a:r>
-              <a:rPr lang="en-US" sz="1400" b="1" dirty="0">
-                <a:solidFill>
-                  <a:srgbClr val="059669"/>
-                </a:solidFill>
-                <a:latin typeface="Calibri" pitchFamily="34" charset="0"/>
-                <a:ea typeface="Calibri" pitchFamily="34" charset="-122"/>
-                <a:cs typeface="Calibri" pitchFamily="34" charset="-120"/>
-              </a:rPr>
-              <a:t>PIR Email</a:t>
-            </a:r>
-            <a:endParaRPr lang="en-US" sz="1400" dirty="0"/>
-          </a:p>
-          <a:p>
-            <a:pPr marL="0" indent="0">
-              <a:lnSpc>
-                <a:spcPts val="1600"/>
-              </a:lnSpc>
-              <a:buNone/>
-            </a:pPr>
-            <a:r>
-              <a:rPr lang="en-US" sz="1250" dirty="0">
-                <a:solidFill>
-                  <a:srgbClr val="0F172A"/>
-                </a:solidFill>
-                <a:latin typeface="Calibri" pitchFamily="34" charset="0"/>
-                <a:ea typeface="Calibri" pitchFamily="34" charset="-122"/>
-                <a:cs typeface="Calibri" pitchFamily="34" charset="-120"/>
-              </a:rPr>
-              <a:t>Job, Serial #, PN, Part, Issue from Production</a:t>
-            </a:r>
-            <a:endParaRPr lang="en-US" sz="1400" dirty="0"/>
-          </a:p>
-        </p:txBody>
-      </p:sp>
-      <p:sp>
-        <p:nvSpPr>
-          <p:cNvPr id="102" name="Text 102"/>
-          <p:cNvSpPr/>
-          <p:nvPr/>
-        </p:nvSpPr>
-        <p:spPr>
-          <a:xfrm>
-            <a:off x="2313889" y="2926080"/>
-            <a:ext cx="320040" cy="1828800"/>
-          </a:xfrm>
-          <a:prstGeom prst="rect">
-            <a:avLst/>
-          </a:prstGeom>
-          <a:noFill/>
-          <a:ln/>
-        </p:spPr>
-        <p:txBody>
-          <a:bodyPr wrap="square" lIns="0" tIns="0" rIns="0" bIns="0" rtlCol="0" anchor="ctr"/>
-          <a:lstStyle/>
-          <a:p>
-            <a:pPr marL="0" indent="0" algn="ctr">
-              <a:buNone/>
-            </a:pPr>
-            <a:r>
-              <a:rPr lang="en-US" sz="1800" dirty="0">
-                <a:solidFill>
-                  <a:srgbClr val="059669"/>
-                </a:solidFill>
-                <a:latin typeface="Calibri" pitchFamily="34" charset="0"/>
-                <a:ea typeface="Calibri" pitchFamily="34" charset="-122"/>
-                <a:cs typeface="Calibri" pitchFamily="34" charset="-120"/>
-              </a:rPr>
-              <a:t>→</a:t>
-            </a:r>
-            <a:endParaRPr lang="en-US" sz="1800" dirty="0"/>
-          </a:p>
-        </p:txBody>
-      </p:sp>
-      <p:sp>
-        <p:nvSpPr>
-          <p:cNvPr id="103" name="Shape 103"/>
-          <p:cNvSpPr/>
-          <p:nvPr/>
-        </p:nvSpPr>
-        <p:spPr>
-          <a:xfrm>
-            <a:off x="2633929" y="2926080"/>
-            <a:ext cx="1490929" cy="1828800"/>
-          </a:xfrm>
-          <a:prstGeom prst="roundRect">
-            <a:avLst>
-              <a:gd name="adj" fmla="val 4438"/>
-            </a:avLst>
-          </a:prstGeom>
-          <a:solidFill>
-            <a:srgbClr val="F8FAFC"/>
-          </a:solidFill>
-          <a:ln w="12700">
-            <a:solidFill>
-              <a:srgbClr val="E2E8F0"/>
-            </a:solidFill>
-            <a:prstDash val="solid"/>
-          </a:ln>
-        </p:spPr>
-        <p:txBody>
-          <a:bodyPr/>
-          <a:lstStyle/>
-          <a:p>
-            <a:endParaRPr lang="en-US"/>
-          </a:p>
-        </p:txBody>
-      </p:sp>
-      <p:sp>
-        <p:nvSpPr>
-          <p:cNvPr id="104" name="Text 104"/>
-          <p:cNvSpPr/>
-          <p:nvPr/>
-        </p:nvSpPr>
-        <p:spPr>
-          <a:xfrm>
-            <a:off x="2798521" y="3090672"/>
-            <a:ext cx="1161745" cy="1554480"/>
-          </a:xfrm>
-          <a:prstGeom prst="rect">
-            <a:avLst/>
-          </a:prstGeom>
-          <a:noFill/>
-          <a:ln/>
-        </p:spPr>
-        <p:txBody>
-          <a:bodyPr wrap="square" lIns="0" tIns="0" rIns="0" bIns="0" rtlCol="0" anchor="t"/>
-          <a:lstStyle/>
-          <a:p>
-            <a:pPr marL="0" indent="0">
-              <a:lnSpc>
-                <a:spcPts val="1600"/>
-              </a:lnSpc>
-              <a:buNone/>
-            </a:pPr>
-            <a:r>
-              <a:rPr lang="en-US" sz="1400" b="1" dirty="0">
-                <a:solidFill>
-                  <a:srgbClr val="059669"/>
-                </a:solidFill>
-                <a:latin typeface="Calibri" pitchFamily="34" charset="0"/>
-                <a:ea typeface="Calibri" pitchFamily="34" charset="-122"/>
-                <a:cs typeface="Calibri" pitchFamily="34" charset="-120"/>
-              </a:rPr>
-              <a:t>Triage</a:t>
-            </a:r>
-            <a:endParaRPr lang="en-US" sz="1400" dirty="0"/>
-          </a:p>
-          <a:p>
-            <a:pPr marL="0" indent="0">
-              <a:lnSpc>
-                <a:spcPts val="1600"/>
-              </a:lnSpc>
-              <a:buNone/>
-            </a:pPr>
-            <a:r>
-              <a:rPr lang="en-US" sz="1250" dirty="0">
-                <a:solidFill>
-                  <a:srgbClr val="0F172A"/>
-                </a:solidFill>
-                <a:latin typeface="Calibri" pitchFamily="34" charset="0"/>
-                <a:ea typeface="Calibri" pitchFamily="34" charset="-122"/>
-                <a:cs typeface="Calibri" pitchFamily="34" charset="-120"/>
-              </a:rPr>
-              <a:t>Jasmine decides CMR vs. TRR vs. MRR</a:t>
-            </a:r>
-            <a:endParaRPr lang="en-US" sz="1400" dirty="0"/>
-          </a:p>
-        </p:txBody>
-      </p:sp>
-      <p:sp>
-        <p:nvSpPr>
-          <p:cNvPr id="105" name="Text 105"/>
-          <p:cNvSpPr/>
-          <p:nvPr/>
-        </p:nvSpPr>
-        <p:spPr>
-          <a:xfrm>
-            <a:off x="4124858" y="2926080"/>
-            <a:ext cx="320040" cy="1828800"/>
-          </a:xfrm>
-          <a:prstGeom prst="rect">
-            <a:avLst/>
-          </a:prstGeom>
-          <a:noFill/>
-          <a:ln/>
-        </p:spPr>
-        <p:txBody>
-          <a:bodyPr wrap="square" lIns="0" tIns="0" rIns="0" bIns="0" rtlCol="0" anchor="ctr"/>
-          <a:lstStyle/>
-          <a:p>
-            <a:pPr marL="0" indent="0" algn="ctr">
-              <a:buNone/>
-            </a:pPr>
-            <a:r>
-              <a:rPr lang="en-US" sz="1800" dirty="0">
-                <a:solidFill>
-                  <a:srgbClr val="059669"/>
-                </a:solidFill>
-                <a:latin typeface="Calibri" pitchFamily="34" charset="0"/>
-                <a:ea typeface="Calibri" pitchFamily="34" charset="-122"/>
-                <a:cs typeface="Calibri" pitchFamily="34" charset="-120"/>
-              </a:rPr>
-              <a:t>→</a:t>
-            </a:r>
-            <a:endParaRPr lang="en-US" sz="1800" dirty="0"/>
-          </a:p>
-        </p:txBody>
-      </p:sp>
-      <p:sp>
-        <p:nvSpPr>
-          <p:cNvPr id="106" name="Shape 106"/>
-          <p:cNvSpPr/>
-          <p:nvPr/>
-        </p:nvSpPr>
-        <p:spPr>
-          <a:xfrm>
-            <a:off x="4444898" y="2926080"/>
-            <a:ext cx="1490929" cy="1828800"/>
-          </a:xfrm>
-          <a:prstGeom prst="roundRect">
-            <a:avLst>
-              <a:gd name="adj" fmla="val 4438"/>
-            </a:avLst>
-          </a:prstGeom>
-          <a:solidFill>
-            <a:srgbClr val="F8FAFC"/>
-          </a:solidFill>
-          <a:ln w="12700">
-            <a:solidFill>
-              <a:srgbClr val="E2E8F0"/>
-            </a:solidFill>
-            <a:prstDash val="solid"/>
-          </a:ln>
-        </p:spPr>
-        <p:txBody>
-          <a:bodyPr/>
-          <a:lstStyle/>
-          <a:p>
-            <a:endParaRPr lang="en-US"/>
-          </a:p>
-        </p:txBody>
-      </p:sp>
-      <p:sp>
-        <p:nvSpPr>
-          <p:cNvPr id="107" name="Text 107"/>
-          <p:cNvSpPr/>
-          <p:nvPr/>
-        </p:nvSpPr>
-        <p:spPr>
-          <a:xfrm>
-            <a:off x="4609490" y="3090672"/>
-            <a:ext cx="1161745" cy="1554480"/>
-          </a:xfrm>
-          <a:prstGeom prst="rect">
-            <a:avLst/>
-          </a:prstGeom>
-          <a:noFill/>
-          <a:ln/>
-        </p:spPr>
-        <p:txBody>
-          <a:bodyPr wrap="square" lIns="0" tIns="0" rIns="0" bIns="0" rtlCol="0" anchor="t"/>
-          <a:lstStyle/>
-          <a:p>
-            <a:pPr marL="0" indent="0">
-              <a:lnSpc>
-                <a:spcPts val="1600"/>
-              </a:lnSpc>
-              <a:buNone/>
-            </a:pPr>
-            <a:r>
-              <a:rPr lang="en-US" sz="1400" b="1" dirty="0">
-                <a:solidFill>
-                  <a:srgbClr val="059669"/>
-                </a:solidFill>
-                <a:latin typeface="Calibri" pitchFamily="34" charset="0"/>
-                <a:ea typeface="Calibri" pitchFamily="34" charset="-122"/>
-                <a:cs typeface="Calibri" pitchFamily="34" charset="-120"/>
-              </a:rPr>
-              <a:t>Create Change Request</a:t>
-            </a:r>
-            <a:endParaRPr lang="en-US" sz="1400" dirty="0"/>
-          </a:p>
-          <a:p>
-            <a:pPr marL="0" indent="0">
-              <a:lnSpc>
-                <a:spcPts val="1600"/>
-              </a:lnSpc>
-              <a:buNone/>
-            </a:pPr>
-            <a:r>
-              <a:rPr lang="en-US" sz="1250" dirty="0">
-                <a:solidFill>
-                  <a:srgbClr val="0F172A"/>
-                </a:solidFill>
-                <a:latin typeface="Calibri" pitchFamily="34" charset="0"/>
-                <a:ea typeface="Calibri" pitchFamily="34" charset="-122"/>
-                <a:cs typeface="Calibri" pitchFamily="34" charset="-120"/>
-              </a:rPr>
-              <a:t>Priority, Initial Change, Requested By</a:t>
-            </a:r>
-            <a:endParaRPr lang="en-US" sz="1400" dirty="0"/>
-          </a:p>
-        </p:txBody>
-      </p:sp>
-      <p:sp>
-        <p:nvSpPr>
-          <p:cNvPr id="108" name="Text 108"/>
-          <p:cNvSpPr/>
-          <p:nvPr/>
-        </p:nvSpPr>
-        <p:spPr>
-          <a:xfrm>
-            <a:off x="5935827" y="2926080"/>
-            <a:ext cx="320040" cy="1828800"/>
-          </a:xfrm>
-          <a:prstGeom prst="rect">
-            <a:avLst/>
-          </a:prstGeom>
-          <a:noFill/>
-          <a:ln/>
-        </p:spPr>
-        <p:txBody>
-          <a:bodyPr wrap="square" lIns="0" tIns="0" rIns="0" bIns="0" rtlCol="0" anchor="ctr"/>
-          <a:lstStyle/>
-          <a:p>
-            <a:pPr marL="0" indent="0" algn="ctr">
-              <a:buNone/>
-            </a:pPr>
-            <a:r>
-              <a:rPr lang="en-US" sz="1800" dirty="0">
-                <a:solidFill>
-                  <a:srgbClr val="059669"/>
-                </a:solidFill>
-                <a:latin typeface="Calibri" pitchFamily="34" charset="0"/>
-                <a:ea typeface="Calibri" pitchFamily="34" charset="-122"/>
-                <a:cs typeface="Calibri" pitchFamily="34" charset="-120"/>
-              </a:rPr>
-              <a:t>→</a:t>
-            </a:r>
-            <a:endParaRPr lang="en-US" sz="1800" dirty="0"/>
-          </a:p>
-        </p:txBody>
-      </p:sp>
-      <p:sp>
-        <p:nvSpPr>
-          <p:cNvPr id="109" name="Shape 109"/>
-          <p:cNvSpPr/>
-          <p:nvPr/>
-        </p:nvSpPr>
-        <p:spPr>
-          <a:xfrm>
-            <a:off x="6255867" y="2926080"/>
-            <a:ext cx="1490929" cy="1828800"/>
-          </a:xfrm>
-          <a:prstGeom prst="roundRect">
-            <a:avLst>
-              <a:gd name="adj" fmla="val 4438"/>
-            </a:avLst>
-          </a:prstGeom>
-          <a:solidFill>
-            <a:srgbClr val="F8FAFC"/>
-          </a:solidFill>
-          <a:ln w="12700">
-            <a:solidFill>
-              <a:srgbClr val="E2E8F0"/>
-            </a:solidFill>
-            <a:prstDash val="solid"/>
-          </a:ln>
-        </p:spPr>
-        <p:txBody>
-          <a:bodyPr/>
-          <a:lstStyle/>
-          <a:p>
-            <a:endParaRPr lang="en-US"/>
-          </a:p>
-        </p:txBody>
-      </p:sp>
-      <p:sp>
-        <p:nvSpPr>
-          <p:cNvPr id="110" name="Text 110"/>
-          <p:cNvSpPr/>
-          <p:nvPr/>
-        </p:nvSpPr>
-        <p:spPr>
-          <a:xfrm>
-            <a:off x="6420459" y="3090672"/>
-            <a:ext cx="1161745" cy="1554480"/>
-          </a:xfrm>
-          <a:prstGeom prst="rect">
-            <a:avLst/>
-          </a:prstGeom>
-          <a:noFill/>
-          <a:ln/>
-        </p:spPr>
-        <p:txBody>
-          <a:bodyPr wrap="square" lIns="0" tIns="0" rIns="0" bIns="0" rtlCol="0" anchor="t"/>
-          <a:lstStyle/>
-          <a:p>
-            <a:pPr marL="0" indent="0">
-              <a:lnSpc>
-                <a:spcPts val="1600"/>
-              </a:lnSpc>
-              <a:buNone/>
-            </a:pPr>
-            <a:r>
-              <a:rPr lang="en-US" sz="1400" b="1" dirty="0">
-                <a:solidFill>
-                  <a:srgbClr val="059669"/>
-                </a:solidFill>
-                <a:latin typeface="Calibri" pitchFamily="34" charset="0"/>
-                <a:ea typeface="Calibri" pitchFamily="34" charset="-122"/>
-                <a:cs typeface="Calibri" pitchFamily="34" charset="-120"/>
-              </a:rPr>
-              <a:t>Change Request Mgmt</a:t>
-            </a:r>
-            <a:endParaRPr lang="en-US" sz="1400" dirty="0"/>
-          </a:p>
-          <a:p>
-            <a:pPr marL="0" indent="0">
-              <a:lnSpc>
-                <a:spcPts val="1600"/>
-              </a:lnSpc>
-              <a:buNone/>
-            </a:pPr>
-            <a:r>
-              <a:rPr lang="en-US" sz="1250" dirty="0">
-                <a:solidFill>
-                  <a:srgbClr val="0F172A"/>
-                </a:solidFill>
-                <a:latin typeface="Calibri" pitchFamily="34" charset="0"/>
-                <a:ea typeface="Calibri" pitchFamily="34" charset="-122"/>
-                <a:cs typeface="Calibri" pitchFamily="34" charset="-120"/>
-              </a:rPr>
-              <a:t>Grab the CMR Number</a:t>
-            </a:r>
-            <a:endParaRPr lang="en-US" sz="1400" dirty="0"/>
-          </a:p>
-        </p:txBody>
-      </p:sp>
-      <p:sp>
-        <p:nvSpPr>
-          <p:cNvPr id="111" name="Text 111"/>
-          <p:cNvSpPr/>
-          <p:nvPr/>
-        </p:nvSpPr>
-        <p:spPr>
-          <a:xfrm>
-            <a:off x="7746796" y="2926080"/>
-            <a:ext cx="320040" cy="1828800"/>
-          </a:xfrm>
-          <a:prstGeom prst="rect">
-            <a:avLst/>
-          </a:prstGeom>
-          <a:noFill/>
-          <a:ln/>
-        </p:spPr>
-        <p:txBody>
-          <a:bodyPr wrap="square" lIns="0" tIns="0" rIns="0" bIns="0" rtlCol="0" anchor="ctr"/>
-          <a:lstStyle/>
-          <a:p>
-            <a:pPr marL="0" indent="0" algn="ctr">
-              <a:buNone/>
-            </a:pPr>
-            <a:r>
-              <a:rPr lang="en-US" sz="1800" dirty="0">
-                <a:solidFill>
-                  <a:srgbClr val="059669"/>
-                </a:solidFill>
-                <a:latin typeface="Calibri" pitchFamily="34" charset="0"/>
-                <a:ea typeface="Calibri" pitchFamily="34" charset="-122"/>
-                <a:cs typeface="Calibri" pitchFamily="34" charset="-120"/>
-              </a:rPr>
-              <a:t>→</a:t>
-            </a:r>
-            <a:endParaRPr lang="en-US" sz="1800" dirty="0"/>
-          </a:p>
-        </p:txBody>
-      </p:sp>
-      <p:sp>
-        <p:nvSpPr>
-          <p:cNvPr id="112" name="Shape 112"/>
-          <p:cNvSpPr/>
-          <p:nvPr/>
-        </p:nvSpPr>
-        <p:spPr>
-          <a:xfrm>
-            <a:off x="8066836" y="2926080"/>
-            <a:ext cx="1490929" cy="1828800"/>
-          </a:xfrm>
-          <a:prstGeom prst="roundRect">
-            <a:avLst>
-              <a:gd name="adj" fmla="val 4438"/>
-            </a:avLst>
-          </a:prstGeom>
-          <a:solidFill>
-            <a:srgbClr val="F8FAFC"/>
-          </a:solidFill>
-          <a:ln w="12700">
-            <a:solidFill>
-              <a:srgbClr val="E2E8F0"/>
-            </a:solidFill>
-            <a:prstDash val="solid"/>
-          </a:ln>
-        </p:spPr>
-        <p:txBody>
-          <a:bodyPr/>
-          <a:lstStyle/>
-          <a:p>
-            <a:endParaRPr lang="en-US"/>
-          </a:p>
-        </p:txBody>
-      </p:sp>
-      <p:sp>
-        <p:nvSpPr>
-          <p:cNvPr id="113" name="Text 113"/>
-          <p:cNvSpPr/>
-          <p:nvPr/>
-        </p:nvSpPr>
-        <p:spPr>
-          <a:xfrm>
-            <a:off x="8231428" y="3090672"/>
-            <a:ext cx="1161745" cy="1554480"/>
-          </a:xfrm>
-          <a:prstGeom prst="rect">
-            <a:avLst/>
-          </a:prstGeom>
-          <a:noFill/>
-          <a:ln/>
-        </p:spPr>
-        <p:txBody>
-          <a:bodyPr wrap="square" lIns="0" tIns="0" rIns="0" bIns="0" rtlCol="0" anchor="t"/>
-          <a:lstStyle/>
-          <a:p>
-            <a:pPr marL="0" indent="0">
-              <a:lnSpc>
-                <a:spcPts val="1600"/>
-              </a:lnSpc>
-              <a:buNone/>
-            </a:pPr>
-            <a:r>
-              <a:rPr lang="en-US" sz="1400" b="1" dirty="0">
-                <a:solidFill>
-                  <a:srgbClr val="059669"/>
-                </a:solidFill>
-                <a:latin typeface="Calibri" pitchFamily="34" charset="0"/>
-                <a:ea typeface="Calibri" pitchFamily="34" charset="-122"/>
-                <a:cs typeface="Calibri" pitchFamily="34" charset="-120"/>
-              </a:rPr>
-              <a:t>CMR Form</a:t>
-            </a:r>
-            <a:endParaRPr lang="en-US" sz="1400" dirty="0"/>
-          </a:p>
-          <a:p>
-            <a:pPr marL="0" indent="0">
-              <a:lnSpc>
-                <a:spcPts val="1600"/>
-              </a:lnSpc>
-              <a:buNone/>
-            </a:pPr>
-            <a:r>
-              <a:rPr lang="en-US" sz="1250" dirty="0">
-                <a:solidFill>
-                  <a:srgbClr val="0F172A"/>
-                </a:solidFill>
-                <a:latin typeface="Calibri" pitchFamily="34" charset="0"/>
-                <a:ea typeface="Calibri" pitchFamily="34" charset="-122"/>
-                <a:cs typeface="Calibri" pitchFamily="34" charset="-120"/>
-              </a:rPr>
-              <a:t>Engineering, Item/Revision, On Hold</a:t>
-            </a:r>
-            <a:endParaRPr lang="en-US" sz="1400" dirty="0"/>
-          </a:p>
-        </p:txBody>
-      </p:sp>
-      <p:sp>
-        <p:nvSpPr>
-          <p:cNvPr id="114" name="Text 114"/>
-          <p:cNvSpPr/>
-          <p:nvPr/>
-        </p:nvSpPr>
-        <p:spPr>
-          <a:xfrm>
-            <a:off x="9557765" y="2926080"/>
-            <a:ext cx="320040" cy="1828800"/>
-          </a:xfrm>
-          <a:prstGeom prst="rect">
-            <a:avLst/>
-          </a:prstGeom>
-          <a:noFill/>
-          <a:ln/>
-        </p:spPr>
-        <p:txBody>
-          <a:bodyPr wrap="square" lIns="0" tIns="0" rIns="0" bIns="0" rtlCol="0" anchor="ctr"/>
-          <a:lstStyle/>
-          <a:p>
-            <a:pPr marL="0" indent="0" algn="ctr">
-              <a:buNone/>
-            </a:pPr>
-            <a:r>
-              <a:rPr lang="en-US" sz="1800" dirty="0">
-                <a:solidFill>
-                  <a:srgbClr val="059669"/>
-                </a:solidFill>
-                <a:latin typeface="Calibri" pitchFamily="34" charset="0"/>
-                <a:ea typeface="Calibri" pitchFamily="34" charset="-122"/>
-                <a:cs typeface="Calibri" pitchFamily="34" charset="-120"/>
-              </a:rPr>
-              <a:t>→</a:t>
-            </a:r>
-            <a:endParaRPr lang="en-US" sz="1800" dirty="0"/>
-          </a:p>
-        </p:txBody>
-      </p:sp>
-      <p:sp>
-        <p:nvSpPr>
-          <p:cNvPr id="115" name="Shape 115"/>
-          <p:cNvSpPr/>
-          <p:nvPr/>
-        </p:nvSpPr>
-        <p:spPr>
-          <a:xfrm>
-            <a:off x="9877805" y="2926080"/>
-            <a:ext cx="1490929" cy="1828800"/>
-          </a:xfrm>
-          <a:prstGeom prst="roundRect">
-            <a:avLst>
-              <a:gd name="adj" fmla="val 4438"/>
-            </a:avLst>
-          </a:prstGeom>
-          <a:solidFill>
-            <a:srgbClr val="F8FAFC"/>
-          </a:solidFill>
-          <a:ln w="12700">
-            <a:solidFill>
-              <a:srgbClr val="E2E8F0"/>
-            </a:solidFill>
-            <a:prstDash val="solid"/>
-          </a:ln>
-        </p:spPr>
-        <p:txBody>
-          <a:bodyPr/>
-          <a:lstStyle/>
-          <a:p>
-            <a:endParaRPr lang="en-US"/>
-          </a:p>
-        </p:txBody>
-      </p:sp>
-      <p:sp>
-        <p:nvSpPr>
-          <p:cNvPr id="116" name="Text 116"/>
-          <p:cNvSpPr/>
-          <p:nvPr/>
-        </p:nvSpPr>
-        <p:spPr>
-          <a:xfrm>
-            <a:off x="10042397" y="3090672"/>
-            <a:ext cx="1161745" cy="1554480"/>
-          </a:xfrm>
-          <a:prstGeom prst="rect">
-            <a:avLst/>
-          </a:prstGeom>
-          <a:noFill/>
-          <a:ln/>
-        </p:spPr>
-        <p:txBody>
-          <a:bodyPr wrap="square" lIns="0" tIns="0" rIns="0" bIns="0" rtlCol="0" anchor="t"/>
-          <a:lstStyle/>
-          <a:p>
-            <a:pPr marL="0" indent="0">
-              <a:lnSpc>
-                <a:spcPts val="1600"/>
-              </a:lnSpc>
-              <a:buNone/>
-            </a:pPr>
-            <a:r>
-              <a:rPr lang="en-US" sz="1400" b="1" dirty="0">
-                <a:solidFill>
-                  <a:srgbClr val="059669"/>
-                </a:solidFill>
-                <a:latin typeface="Calibri" pitchFamily="34" charset="0"/>
-                <a:ea typeface="Calibri" pitchFamily="34" charset="-122"/>
-                <a:cs typeface="Calibri" pitchFamily="34" charset="-120"/>
-              </a:rPr>
-              <a:t>Notify &amp; Close</a:t>
-            </a:r>
-            <a:endParaRPr lang="en-US" sz="1400" dirty="0"/>
-          </a:p>
-          <a:p>
-            <a:pPr marL="0" indent="0">
-              <a:lnSpc>
-                <a:spcPts val="1600"/>
-              </a:lnSpc>
-              <a:buNone/>
-            </a:pPr>
-            <a:r>
-              <a:rPr lang="en-US" sz="1250" dirty="0">
-                <a:solidFill>
-                  <a:srgbClr val="0F172A"/>
-                </a:solidFill>
-                <a:latin typeface="Calibri" pitchFamily="34" charset="0"/>
-                <a:ea typeface="Calibri" pitchFamily="34" charset="-122"/>
-                <a:cs typeface="Calibri" pitchFamily="34" charset="-120"/>
-              </a:rPr>
-              <a:t>Save, notify engineering, send CMR #</a:t>
-            </a:r>
-            <a:endParaRPr lang="en-US" sz="1400" dirty="0"/>
           </a:p>
         </p:txBody>
       </p:sp>
@@ -3674,7 +2515,7 @@
           <a:bodyPr/>
           <a:lstStyle/>
           <a:p>
-            <a:endParaRPr lang="en-US"/>
+            <a:endParaRPr lang="en-US" dirty="0"/>
           </a:p>
         </p:txBody>
       </p:sp>
@@ -3782,7 +2623,7 @@
           <a:bodyPr/>
           <a:lstStyle/>
           <a:p>
-            <a:endParaRPr lang="en-US"/>
+            <a:endParaRPr lang="en-US" dirty="0"/>
           </a:p>
         </p:txBody>
       </p:sp>
@@ -3809,7 +2650,7 @@
           <a:bodyPr/>
           <a:lstStyle/>
           <a:p>
-            <a:endParaRPr lang="en-US"/>
+            <a:endParaRPr lang="en-US" dirty="0"/>
           </a:p>
         </p:txBody>
       </p:sp>
@@ -3937,7 +2778,7 @@
           <a:bodyPr/>
           <a:lstStyle/>
           <a:p>
-            <a:endParaRPr lang="en-US"/>
+            <a:endParaRPr lang="en-US" dirty="0"/>
           </a:p>
         </p:txBody>
       </p:sp>
@@ -4065,7 +2906,7 @@
           <a:bodyPr/>
           <a:lstStyle/>
           <a:p>
-            <a:endParaRPr lang="en-US"/>
+            <a:endParaRPr lang="en-US" dirty="0"/>
           </a:p>
         </p:txBody>
       </p:sp>
@@ -4193,7 +3034,7 @@
           <a:bodyPr/>
           <a:lstStyle/>
           <a:p>
-            <a:endParaRPr lang="en-US"/>
+            <a:endParaRPr lang="en-US" dirty="0"/>
           </a:p>
         </p:txBody>
       </p:sp>
@@ -4321,7 +3162,7 @@
           <a:bodyPr/>
           <a:lstStyle/>
           <a:p>
-            <a:endParaRPr lang="en-US"/>
+            <a:endParaRPr lang="en-US" dirty="0"/>
           </a:p>
         </p:txBody>
       </p:sp>
@@ -4449,7 +3290,7 @@
           <a:bodyPr/>
           <a:lstStyle/>
           <a:p>
-            <a:endParaRPr lang="en-US"/>
+            <a:endParaRPr lang="en-US" dirty="0"/>
           </a:p>
         </p:txBody>
       </p:sp>
@@ -4577,7 +3418,7 @@
           <a:bodyPr/>
           <a:lstStyle/>
           <a:p>
-            <a:endParaRPr lang="en-US"/>
+            <a:endParaRPr lang="en-US" dirty="0"/>
           </a:p>
         </p:txBody>
       </p:sp>
@@ -4745,7 +3586,7 @@
           <a:bodyPr/>
           <a:lstStyle/>
           <a:p>
-            <a:endParaRPr lang="en-US"/>
+            <a:endParaRPr lang="en-US" dirty="0"/>
           </a:p>
         </p:txBody>
       </p:sp>
@@ -4859,7 +3700,7 @@
         </p:nvSpPr>
         <p:spPr>
           <a:xfrm>
-            <a:off x="457200" y="2148840"/>
+            <a:off x="457352" y="2139215"/>
             <a:ext cx="11277295" cy="4251960"/>
           </a:xfrm>
           <a:prstGeom prst="roundRect">
@@ -4888,7 +3729,7 @@
           <a:bodyPr/>
           <a:lstStyle/>
           <a:p>
-            <a:endParaRPr lang="en-US"/>
+            <a:endParaRPr lang="en-US" dirty="0"/>
           </a:p>
         </p:txBody>
       </p:sp>
@@ -4961,7 +3802,7 @@
           <a:bodyPr/>
           <a:lstStyle/>
           <a:p>
-            <a:endParaRPr lang="en-US"/>
+            <a:endParaRPr lang="en-US" dirty="0"/>
           </a:p>
         </p:txBody>
       </p:sp>
@@ -5021,7 +3862,7 @@
                 <a:ea typeface="Calibri" pitchFamily="34" charset="-122"/>
                 <a:cs typeface="Calibri" pitchFamily="34" charset="-120"/>
               </a:rPr>
-              <a:t>Carry over confirmed requirements from cmr-project</a:t>
+              <a:t>Work on confirmed requirements</a:t>
             </a:r>
             <a:endParaRPr lang="en-US" sz="1400" dirty="0"/>
           </a:p>
@@ -5096,7 +3937,7 @@
           <a:bodyPr/>
           <a:lstStyle/>
           <a:p>
-            <a:endParaRPr lang="en-US"/>
+            <a:endParaRPr lang="en-US" dirty="0"/>
           </a:p>
         </p:txBody>
       </p:sp>
@@ -5231,7 +4072,7 @@
           <a:bodyPr/>
           <a:lstStyle/>
           <a:p>
-            <a:endParaRPr lang="en-US"/>
+            <a:endParaRPr lang="en-US" dirty="0"/>
           </a:p>
         </p:txBody>
       </p:sp>
@@ -5366,7 +4207,7 @@
           <a:bodyPr/>
           <a:lstStyle/>
           <a:p>
-            <a:endParaRPr lang="en-US"/>
+            <a:endParaRPr lang="en-US" dirty="0"/>
           </a:p>
         </p:txBody>
       </p:sp>
@@ -5501,7 +4342,7 @@
           <a:bodyPr/>
           <a:lstStyle/>
           <a:p>
-            <a:endParaRPr lang="en-US"/>
+            <a:endParaRPr lang="en-US" dirty="0"/>
           </a:p>
         </p:txBody>
       </p:sp>
@@ -5576,6 +4417,496 @@
 </file>
 
 <file path=ppt/slides/slide4.xml><?xml version="1.0" encoding="utf-8"?>
+<p:sld xmlns:a="http://schemas.openxmlformats.org/drawingml/2006/main" xmlns:r="http://schemas.openxmlformats.org/officeDocument/2006/relationships" xmlns:p="http://schemas.openxmlformats.org/presentationml/2006/main">
+  <p:cSld name="Slide 5">
+    <p:bg>
+      <p:bgPr>
+        <a:solidFill>
+          <a:srgbClr val="F8FAFC"/>
+        </a:solidFill>
+        <a:effectLst/>
+      </p:bgPr>
+    </p:bg>
+    <p:spTree>
+      <p:nvGrpSpPr>
+        <p:cNvPr id="1" name=""/>
+        <p:cNvGrpSpPr/>
+        <p:nvPr/>
+      </p:nvGrpSpPr>
+      <p:grpSpPr>
+        <a:xfrm>
+          <a:off x="0" y="0"/>
+          <a:ext cx="0" cy="0"/>
+          <a:chOff x="0" y="0"/>
+          <a:chExt cx="0" cy="0"/>
+        </a:xfrm>
+      </p:grpSpPr>
+      <p:sp>
+        <p:nvSpPr>
+          <p:cNvPr id="2" name="Shape 0"/>
+          <p:cNvSpPr/>
+          <p:nvPr/>
+        </p:nvSpPr>
+        <p:spPr>
+          <a:xfrm>
+            <a:off x="457200" y="502920"/>
+            <a:ext cx="1371600" cy="1371600"/>
+          </a:xfrm>
+          <a:prstGeom prst="roundRect">
+            <a:avLst>
+              <a:gd name="adj" fmla="val 8000"/>
+            </a:avLst>
+          </a:prstGeom>
+          <a:solidFill>
+            <a:srgbClr val="ECFDF5"/>
+          </a:solidFill>
+          <a:ln w="12700">
+            <a:solidFill>
+              <a:srgbClr val="E2E8F0"/>
+            </a:solidFill>
+            <a:prstDash val="solid"/>
+          </a:ln>
+        </p:spPr>
+        <p:txBody>
+          <a:bodyPr/>
+          <a:lstStyle/>
+          <a:p>
+            <a:endParaRPr lang="en-US" dirty="0"/>
+          </a:p>
+        </p:txBody>
+      </p:sp>
+      <p:pic>
+        <p:nvPicPr>
+          <p:cNvPr id="3" name="Image 0" descr="icons/tag.png"/>
+          <p:cNvPicPr>
+            <a:picLocks noChangeAspect="1"/>
+          </p:cNvPicPr>
+          <p:nvPr/>
+        </p:nvPicPr>
+        <p:blipFill>
+          <a:blip r:embed="rId2"/>
+          <a:stretch>
+            <a:fillRect/>
+          </a:stretch>
+        </p:blipFill>
+        <p:spPr>
+          <a:xfrm>
+            <a:off x="800100" y="845820"/>
+            <a:ext cx="685800" cy="685800"/>
+          </a:xfrm>
+          <a:prstGeom prst="rect">
+            <a:avLst/>
+          </a:prstGeom>
+        </p:spPr>
+      </p:pic>
+      <p:sp>
+        <p:nvSpPr>
+          <p:cNvPr id="4" name="Text 1"/>
+          <p:cNvSpPr/>
+          <p:nvPr/>
+        </p:nvSpPr>
+        <p:spPr>
+          <a:xfrm>
+            <a:off x="2194560" y="502920"/>
+            <a:ext cx="9539935" cy="685800"/>
+          </a:xfrm>
+          <a:prstGeom prst="rect">
+            <a:avLst/>
+          </a:prstGeom>
+          <a:noFill/>
+          <a:ln/>
+        </p:spPr>
+        <p:txBody>
+          <a:bodyPr wrap="square" lIns="0" tIns="0" rIns="0" bIns="0" rtlCol="0" anchor="t"/>
+          <a:lstStyle/>
+          <a:p>
+            <a:pPr marL="0" indent="0" algn="l">
+              <a:buNone/>
+            </a:pPr>
+            <a:r>
+              <a:rPr lang="en-US" sz="3400" b="1" dirty="0">
+                <a:solidFill>
+                  <a:srgbClr val="0F172A"/>
+                </a:solidFill>
+                <a:latin typeface="Cambria" pitchFamily="34" charset="0"/>
+                <a:ea typeface="Cambria" pitchFamily="34" charset="-122"/>
+                <a:cs typeface="Cambria" pitchFamily="34" charset="-120"/>
+              </a:rPr>
+              <a:t>The current CMR process</a:t>
+            </a:r>
+            <a:endParaRPr lang="en-US" sz="3400" dirty="0"/>
+          </a:p>
+        </p:txBody>
+      </p:sp>
+      <p:sp>
+        <p:nvSpPr>
+          <p:cNvPr id="5" name="Text 2"/>
+          <p:cNvSpPr/>
+          <p:nvPr/>
+        </p:nvSpPr>
+        <p:spPr>
+          <a:xfrm>
+            <a:off x="2194560" y="1216152"/>
+            <a:ext cx="9539935" cy="640080"/>
+          </a:xfrm>
+          <a:prstGeom prst="rect">
+            <a:avLst/>
+          </a:prstGeom>
+          <a:noFill/>
+          <a:ln/>
+        </p:spPr>
+        <p:txBody>
+          <a:bodyPr wrap="square" lIns="0" tIns="0" rIns="0" bIns="0" rtlCol="0" anchor="t"/>
+          <a:lstStyle/>
+          <a:p>
+            <a:pPr marL="0" indent="0" algn="l">
+              <a:buNone/>
+            </a:pPr>
+            <a:r>
+              <a:rPr lang="en-US" sz="1600" dirty="0">
+                <a:solidFill>
+                  <a:srgbClr val="64748B"/>
+                </a:solidFill>
+                <a:latin typeface="Calibri" pitchFamily="34" charset="0"/>
+                <a:ea typeface="Calibri" pitchFamily="34" charset="-122"/>
+                <a:cs typeface="Calibri" pitchFamily="34" charset="-120"/>
+              </a:rPr>
+              <a:t>Create Change Request → Change Request Management → CMR — the three-form workflow today.</a:t>
+            </a:r>
+            <a:endParaRPr lang="en-US" sz="1600" dirty="0"/>
+          </a:p>
+        </p:txBody>
+      </p:sp>
+      <p:sp>
+        <p:nvSpPr>
+          <p:cNvPr id="6" name="Shape 3"/>
+          <p:cNvSpPr/>
+          <p:nvPr/>
+        </p:nvSpPr>
+        <p:spPr>
+          <a:xfrm>
+            <a:off x="360946" y="2418347"/>
+            <a:ext cx="7050507" cy="3982453"/>
+          </a:xfrm>
+          <a:prstGeom prst="roundRect">
+            <a:avLst>
+              <a:gd name="adj" fmla="val 2581"/>
+            </a:avLst>
+          </a:prstGeom>
+          <a:solidFill>
+            <a:srgbClr val="FFFFFF"/>
+          </a:solidFill>
+          <a:ln w="12700">
+            <a:solidFill>
+              <a:srgbClr val="E2E8F0"/>
+            </a:solidFill>
+            <a:prstDash val="solid"/>
+          </a:ln>
+          <a:effectLst>
+            <a:outerShdw blurRad="152400" dist="38100" dir="5400000" algn="bl" rotWithShape="0">
+              <a:srgbClr val="1E293B">
+                <a:alpha val="8000"/>
+              </a:srgbClr>
+            </a:outerShdw>
+          </a:effectLst>
+        </p:spPr>
+        <p:txBody>
+          <a:bodyPr/>
+          <a:lstStyle/>
+          <a:p>
+            <a:endParaRPr lang="en-US" dirty="0"/>
+          </a:p>
+        </p:txBody>
+      </p:sp>
+      <p:sp>
+        <p:nvSpPr>
+          <p:cNvPr id="7" name="Text 4"/>
+          <p:cNvSpPr/>
+          <p:nvPr/>
+        </p:nvSpPr>
+        <p:spPr>
+          <a:xfrm>
+            <a:off x="457200" y="2071548"/>
+            <a:ext cx="9144000" cy="365760"/>
+          </a:xfrm>
+          <a:prstGeom prst="rect">
+            <a:avLst/>
+          </a:prstGeom>
+          <a:noFill/>
+          <a:ln/>
+        </p:spPr>
+        <p:txBody>
+          <a:bodyPr wrap="square" lIns="0" tIns="0" rIns="0" bIns="0" rtlCol="0" anchor="t"/>
+          <a:lstStyle/>
+          <a:p>
+            <a:pPr marL="0" indent="0" algn="l">
+              <a:buNone/>
+            </a:pPr>
+            <a:r>
+              <a:rPr lang="en-US" sz="1500" b="1" dirty="0">
+                <a:solidFill>
+                  <a:srgbClr val="059669"/>
+                </a:solidFill>
+                <a:latin typeface="Calibri" pitchFamily="34" charset="0"/>
+                <a:ea typeface="Calibri" pitchFamily="34" charset="-122"/>
+                <a:cs typeface="Calibri" pitchFamily="34" charset="-120"/>
+              </a:rPr>
+              <a:t>Actual current process</a:t>
+            </a:r>
+            <a:endParaRPr lang="en-US" sz="1500" dirty="0"/>
+          </a:p>
+        </p:txBody>
+      </p:sp>
+      <p:sp>
+        <p:nvSpPr>
+          <p:cNvPr id="8" name="Text 5"/>
+          <p:cNvSpPr/>
+          <p:nvPr/>
+        </p:nvSpPr>
+        <p:spPr>
+          <a:xfrm>
+            <a:off x="457199" y="2743200"/>
+            <a:ext cx="6725653" cy="3526080"/>
+          </a:xfrm>
+          <a:prstGeom prst="rect">
+            <a:avLst/>
+          </a:prstGeom>
+          <a:noFill/>
+          <a:ln/>
+        </p:spPr>
+        <p:txBody>
+          <a:bodyPr wrap="square" lIns="0" tIns="0" rIns="0" bIns="0" rtlCol="0" anchor="t"/>
+          <a:lstStyle/>
+          <a:p>
+            <a:pPr marL="228600" indent="-228600">
+              <a:spcAft>
+                <a:spcPts val="1400"/>
+              </a:spcAft>
+              <a:buSzPct val="100000"/>
+              <a:buChar char="■"/>
+            </a:pPr>
+            <a:r>
+              <a:rPr lang="en-US" sz="1500" dirty="0">
+                <a:solidFill>
+                  <a:srgbClr val="0F172A"/>
+                </a:solidFill>
+                <a:latin typeface="Calibri" pitchFamily="34" charset="0"/>
+                <a:ea typeface="Calibri" pitchFamily="34" charset="-122"/>
+                <a:cs typeface="Calibri" pitchFamily="34" charset="-120"/>
+              </a:rPr>
+              <a:t>Production emails a PIR (Job, Serial #, Top Level PN, Sub Assembly PN, Part, Issue); </a:t>
+            </a:r>
+          </a:p>
+          <a:p>
+            <a:pPr marL="228600" indent="-228600">
+              <a:spcAft>
+                <a:spcPts val="1400"/>
+              </a:spcAft>
+              <a:buSzPct val="100000"/>
+              <a:buChar char="■"/>
+            </a:pPr>
+            <a:r>
+              <a:rPr lang="en-US" sz="1500" b="1" dirty="0">
+                <a:solidFill>
+                  <a:srgbClr val="0F172A"/>
+                </a:solidFill>
+                <a:latin typeface="Calibri" pitchFamily="34" charset="0"/>
+                <a:ea typeface="Calibri" pitchFamily="34" charset="-122"/>
+                <a:cs typeface="Calibri" pitchFamily="34" charset="-120"/>
+              </a:rPr>
+              <a:t>Create Change Request</a:t>
+            </a:r>
+            <a:r>
+              <a:rPr lang="en-US" sz="1500" dirty="0">
+                <a:solidFill>
+                  <a:srgbClr val="0F172A"/>
+                </a:solidFill>
+                <a:latin typeface="Calibri" pitchFamily="34" charset="0"/>
+                <a:ea typeface="Calibri" pitchFamily="34" charset="-122"/>
+                <a:cs typeface="Calibri" pitchFamily="34" charset="-120"/>
+              </a:rPr>
+              <a:t>: Priority, Initial Change, Requested By.</a:t>
+            </a:r>
+            <a:endParaRPr lang="en-US" sz="1500" dirty="0"/>
+          </a:p>
+          <a:p>
+            <a:pPr marL="228600" indent="-228600">
+              <a:spcAft>
+                <a:spcPts val="1400"/>
+              </a:spcAft>
+              <a:buSzPct val="100000"/>
+              <a:buChar char="■"/>
+            </a:pPr>
+            <a:r>
+              <a:rPr lang="en-US" sz="1500" b="1" dirty="0">
+                <a:solidFill>
+                  <a:srgbClr val="0F172A"/>
+                </a:solidFill>
+                <a:latin typeface="Calibri" pitchFamily="34" charset="0"/>
+                <a:ea typeface="Calibri" pitchFamily="34" charset="-122"/>
+                <a:cs typeface="Calibri" pitchFamily="34" charset="-120"/>
+              </a:rPr>
+              <a:t>Change Request Management</a:t>
+            </a:r>
+            <a:r>
+              <a:rPr lang="en-US" sz="1500" dirty="0">
+                <a:solidFill>
+                  <a:srgbClr val="0F172A"/>
+                </a:solidFill>
+                <a:latin typeface="Calibri" pitchFamily="34" charset="0"/>
+                <a:ea typeface="Calibri" pitchFamily="34" charset="-122"/>
+                <a:cs typeface="Calibri" pitchFamily="34" charset="-120"/>
+              </a:rPr>
+              <a:t>: everything’s already filled in – they just capture the CMR Number it generated.</a:t>
+            </a:r>
+            <a:endParaRPr lang="en-US" sz="1500" dirty="0"/>
+          </a:p>
+          <a:p>
+            <a:pPr marL="228600" indent="-228600">
+              <a:spcAft>
+                <a:spcPts val="1400"/>
+              </a:spcAft>
+              <a:buSzPct val="100000"/>
+              <a:buChar char="■"/>
+            </a:pPr>
+            <a:r>
+              <a:rPr lang="en-US" sz="1500" b="1" dirty="0">
+                <a:solidFill>
+                  <a:srgbClr val="0F172A"/>
+                </a:solidFill>
+                <a:latin typeface="Calibri" pitchFamily="34" charset="0"/>
+                <a:ea typeface="Calibri" pitchFamily="34" charset="-122"/>
+                <a:cs typeface="Calibri" pitchFamily="34" charset="-120"/>
+              </a:rPr>
+              <a:t>CMR Form</a:t>
+            </a:r>
+            <a:r>
+              <a:rPr lang="en-US" sz="1500" dirty="0">
+                <a:solidFill>
+                  <a:srgbClr val="0F172A"/>
+                </a:solidFill>
+                <a:latin typeface="Calibri" pitchFamily="34" charset="0"/>
+                <a:ea typeface="Calibri" pitchFamily="34" charset="-122"/>
+                <a:cs typeface="Calibri" pitchFamily="34" charset="-120"/>
+              </a:rPr>
+              <a:t>: assign engineering, pull Item/Revision from the drawing books, Disposition starts </a:t>
+            </a:r>
+            <a:r>
+              <a:rPr lang="en-US" sz="1500" b="1" dirty="0">
+                <a:solidFill>
+                  <a:srgbClr val="0F172A"/>
+                </a:solidFill>
+                <a:latin typeface="Calibri" pitchFamily="34" charset="0"/>
+                <a:ea typeface="Calibri" pitchFamily="34" charset="-122"/>
+                <a:cs typeface="Calibri" pitchFamily="34" charset="-120"/>
+              </a:rPr>
+              <a:t>On Hold</a:t>
+            </a:r>
+            <a:r>
+              <a:rPr lang="en-US" sz="1500" dirty="0">
+                <a:solidFill>
+                  <a:srgbClr val="0F172A"/>
+                </a:solidFill>
+                <a:latin typeface="Calibri" pitchFamily="34" charset="0"/>
+                <a:ea typeface="Calibri" pitchFamily="34" charset="-122"/>
+                <a:cs typeface="Calibri" pitchFamily="34" charset="-120"/>
+              </a:rPr>
+              <a:t>, RCA notes copied from the intake email (Serial #/LOT # currently get copied into the Notes here too).</a:t>
+            </a:r>
+            <a:endParaRPr lang="en-US" sz="1500" dirty="0"/>
+          </a:p>
+          <a:p>
+            <a:pPr marL="228600" indent="-228600">
+              <a:spcAft>
+                <a:spcPts val="1400"/>
+              </a:spcAft>
+              <a:buSzPct val="100000"/>
+              <a:buChar char="■"/>
+            </a:pPr>
+            <a:r>
+              <a:rPr lang="en-US" sz="1500" dirty="0">
+                <a:solidFill>
+                  <a:srgbClr val="0F172A"/>
+                </a:solidFill>
+                <a:latin typeface="Calibri" pitchFamily="34" charset="0"/>
+                <a:ea typeface="Calibri" pitchFamily="34" charset="-122"/>
+                <a:cs typeface="Calibri" pitchFamily="34" charset="-120"/>
+              </a:rPr>
+              <a:t>Save, notify engineering (follow up after 24 hrs), then send the CMR Number back to the requester.</a:t>
+            </a:r>
+            <a:endParaRPr lang="en-US" sz="1500" dirty="0"/>
+          </a:p>
+        </p:txBody>
+      </p:sp>
+      <p:pic>
+        <p:nvPicPr>
+          <p:cNvPr id="10" name="Picture 9">
+            <a:extLst>
+              <a:ext uri="{FF2B5EF4-FFF2-40B4-BE49-F238E27FC236}">
+                <a16:creationId xmlns:a16="http://schemas.microsoft.com/office/drawing/2014/main" id="{8CE6A3AA-1751-7994-8D3D-EA16944CF7AD}"/>
+              </a:ext>
+            </a:extLst>
+          </p:cNvPr>
+          <p:cNvPicPr>
+            <a:picLocks noChangeAspect="1"/>
+          </p:cNvPicPr>
+          <p:nvPr/>
+        </p:nvPicPr>
+        <p:blipFill>
+          <a:blip r:embed="rId3"/>
+          <a:stretch>
+            <a:fillRect/>
+          </a:stretch>
+        </p:blipFill>
+        <p:spPr>
+          <a:xfrm>
+            <a:off x="6964527" y="1640425"/>
+            <a:ext cx="5473569" cy="2905367"/>
+          </a:xfrm>
+          <a:prstGeom prst="rect">
+            <a:avLst/>
+          </a:prstGeom>
+        </p:spPr>
+      </p:pic>
+      <p:pic>
+        <p:nvPicPr>
+          <p:cNvPr id="20" name="Picture 19">
+            <a:extLst>
+              <a:ext uri="{FF2B5EF4-FFF2-40B4-BE49-F238E27FC236}">
+                <a16:creationId xmlns:a16="http://schemas.microsoft.com/office/drawing/2014/main" id="{A38A9BE8-2779-A6A5-799C-3F5EA44B6E40}"/>
+              </a:ext>
+            </a:extLst>
+          </p:cNvPr>
+          <p:cNvPicPr>
+            <a:picLocks noChangeAspect="1"/>
+          </p:cNvPicPr>
+          <p:nvPr/>
+        </p:nvPicPr>
+        <p:blipFill>
+          <a:blip r:embed="rId4"/>
+          <a:stretch>
+            <a:fillRect/>
+          </a:stretch>
+        </p:blipFill>
+        <p:spPr>
+          <a:xfrm>
+            <a:off x="8703026" y="2869241"/>
+            <a:ext cx="3683195" cy="3756761"/>
+          </a:xfrm>
+          <a:prstGeom prst="rect">
+            <a:avLst/>
+          </a:prstGeom>
+        </p:spPr>
+      </p:pic>
+    </p:spTree>
+  </p:cSld>
+  <p:clrMapOvr>
+    <a:masterClrMapping/>
+  </p:clrMapOvr>
+</p:sld>
+</file>
+
+<file path=ppt/slides/slide5.xml><?xml version="1.0" encoding="utf-8"?>
 <p:sld xmlns:a="http://schemas.openxmlformats.org/drawingml/2006/main" xmlns:r="http://schemas.openxmlformats.org/officeDocument/2006/relationships" xmlns:p="http://schemas.openxmlformats.org/presentationml/2006/main">
   <p:cSld name="Slide 4">
     <p:bg>
@@ -5708,7 +5039,7 @@
           <a:bodyPr/>
           <a:lstStyle/>
           <a:p>
-            <a:endParaRPr lang="en-US"/>
+            <a:endParaRPr lang="en-US" dirty="0"/>
           </a:p>
         </p:txBody>
       </p:sp>
@@ -5773,7 +5104,7 @@
           <a:bodyPr/>
           <a:lstStyle/>
           <a:p>
-            <a:endParaRPr lang="en-US"/>
+            <a:endParaRPr lang="en-US" dirty="0"/>
           </a:p>
         </p:txBody>
       </p:sp>
@@ -5920,7 +5251,7 @@
           <a:bodyPr/>
           <a:lstStyle/>
           <a:p>
-            <a:endParaRPr lang="en-US"/>
+            <a:endParaRPr lang="en-US" dirty="0"/>
           </a:p>
         </p:txBody>
       </p:sp>
@@ -5947,7 +5278,7 @@
           <a:bodyPr/>
           <a:lstStyle/>
           <a:p>
-            <a:endParaRPr lang="en-US"/>
+            <a:endParaRPr lang="en-US" dirty="0"/>
           </a:p>
         </p:txBody>
       </p:sp>
@@ -6023,7 +5354,7 @@
                 <a:ea typeface="Calibri" pitchFamily="34" charset="-122"/>
                 <a:cs typeface="Calibri" pitchFamily="34" charset="-120"/>
               </a:rPr>
-              <a:t>The key field — auto-number set in the IDO properties, increments every CMR automatically</a:t>
+              <a:t>The key field - auto-number set in the IDO properties, increments every CMR automatically</a:t>
             </a:r>
             <a:endParaRPr lang="en-US" sz="1300" dirty="0"/>
           </a:p>
@@ -6055,7 +5386,7 @@
           <a:bodyPr/>
           <a:lstStyle/>
           <a:p>
-            <a:endParaRPr lang="en-US"/>
+            <a:endParaRPr lang="en-US" dirty="0"/>
           </a:p>
         </p:txBody>
       </p:sp>
@@ -6163,7 +5494,7 @@
           <a:bodyPr/>
           <a:lstStyle/>
           <a:p>
-            <a:endParaRPr lang="en-US"/>
+            <a:endParaRPr lang="en-US" dirty="0"/>
           </a:p>
         </p:txBody>
       </p:sp>
@@ -6271,7 +5602,7 @@
           <a:bodyPr/>
           <a:lstStyle/>
           <a:p>
-            <a:endParaRPr lang="en-US"/>
+            <a:endParaRPr lang="en-US" dirty="0"/>
           </a:p>
         </p:txBody>
       </p:sp>
@@ -6379,7 +5710,7 @@
           <a:bodyPr/>
           <a:lstStyle/>
           <a:p>
-            <a:endParaRPr lang="en-US"/>
+            <a:endParaRPr lang="en-US" dirty="0"/>
           </a:p>
         </p:txBody>
       </p:sp>
@@ -6487,7 +5818,7 @@
           <a:bodyPr/>
           <a:lstStyle/>
           <a:p>
-            <a:endParaRPr lang="en-US"/>
+            <a:endParaRPr lang="en-US" dirty="0"/>
           </a:p>
         </p:txBody>
       </p:sp>
@@ -6595,7 +5926,7 @@
           <a:bodyPr/>
           <a:lstStyle/>
           <a:p>
-            <a:endParaRPr lang="en-US"/>
+            <a:endParaRPr lang="en-US" dirty="0"/>
           </a:p>
         </p:txBody>
       </p:sp>
@@ -6607,7 +5938,7 @@
 </p:sld>
 </file>
 
-<file path=ppt/slides/slide5.xml><?xml version="1.0" encoding="utf-8"?>
+<file path=ppt/slides/slide6.xml><?xml version="1.0" encoding="utf-8"?>
 <p:sld xmlns:a="http://schemas.openxmlformats.org/drawingml/2006/main" xmlns:r="http://schemas.openxmlformats.org/officeDocument/2006/relationships" xmlns:p="http://schemas.openxmlformats.org/presentationml/2006/main">
   <p:cSld name="Slide 5">
     <p:bg>
@@ -6662,7 +5993,7 @@
           <a:bodyPr/>
           <a:lstStyle/>
           <a:p>
-            <a:endParaRPr lang="en-US"/>
+            <a:endParaRPr lang="en-US" dirty="0"/>
           </a:p>
         </p:txBody>
       </p:sp>
@@ -6805,7 +6136,7 @@
           <a:bodyPr/>
           <a:lstStyle/>
           <a:p>
-            <a:endParaRPr lang="en-US"/>
+            <a:endParaRPr lang="en-US" dirty="0"/>
           </a:p>
         </p:txBody>
       </p:sp>
@@ -6925,7 +6256,7 @@
               <a:t>Build the </a:t>
             </a:r>
             <a:r>
-              <a:rPr lang="en-US" sz="1500" b="1" dirty="0" err="1">
+              <a:rPr lang="en-US" sz="1500" b="1" dirty="0">
                 <a:solidFill>
                   <a:srgbClr val="0F172A"/>
                 </a:solidFill>
@@ -7041,7 +6372,6 @@
               </a:rPr>
               <a:t>Import the form XML through Form Sync</a:t>
             </a:r>
-            <a:endParaRPr lang="en-US" sz="1500" dirty="0"/>
           </a:p>
         </p:txBody>
       </p:sp>
@@ -7053,7 +6383,7 @@
 </p:sld>
 </file>
 
-<file path=ppt/slides/slide6.xml><?xml version="1.0" encoding="utf-8"?>
+<file path=ppt/slides/slide7.xml><?xml version="1.0" encoding="utf-8"?>
 <p:sld xmlns:a="http://schemas.openxmlformats.org/drawingml/2006/main" xmlns:r="http://schemas.openxmlformats.org/officeDocument/2006/relationships" xmlns:p="http://schemas.openxmlformats.org/presentationml/2006/main">
   <p:cSld name="Slide 6">
     <p:bg>
@@ -7186,7 +6516,7 @@
           <a:bodyPr/>
           <a:lstStyle/>
           <a:p>
-            <a:endParaRPr lang="en-US"/>
+            <a:endParaRPr lang="en-US" dirty="0"/>
           </a:p>
         </p:txBody>
       </p:sp>
@@ -7222,7 +6552,7 @@
         </p:nvSpPr>
         <p:spPr>
           <a:xfrm>
-            <a:off x="457200" y="2148840"/>
+            <a:off x="501379" y="2200317"/>
             <a:ext cx="11277295" cy="4251960"/>
           </a:xfrm>
           <a:prstGeom prst="roundRect">
@@ -7251,7 +6581,7 @@
           <a:bodyPr/>
           <a:lstStyle/>
           <a:p>
-            <a:endParaRPr lang="en-US"/>
+            <a:endParaRPr lang="en-US" dirty="0"/>
           </a:p>
         </p:txBody>
       </p:sp>
@@ -7601,6 +6931,95 @@
                 <a:cs typeface="Calibri" pitchFamily="34" charset="-120"/>
               </a:rPr>
               <a:t>Run the full TRN test checklist before go-live: create path, persistence round-trip, Requirements checkbox cascade</a:t>
+            </a:r>
+          </a:p>
+        </p:txBody>
+      </p:sp>
+      <p:sp>
+        <p:nvSpPr>
+          <p:cNvPr id="19" name="Text 11">
+            <a:extLst>
+              <a:ext uri="{FF2B5EF4-FFF2-40B4-BE49-F238E27FC236}">
+                <a16:creationId xmlns:a16="http://schemas.microsoft.com/office/drawing/2014/main" id="{E87F5528-7C19-A626-5DA9-34357D16047F}"/>
+              </a:ext>
+            </a:extLst>
+          </p:cNvPr>
+          <p:cNvSpPr/>
+          <p:nvPr/>
+        </p:nvSpPr>
+        <p:spPr>
+          <a:xfrm>
+            <a:off x="822960" y="5559552"/>
+            <a:ext cx="365760" cy="594360"/>
+          </a:xfrm>
+          <a:prstGeom prst="rect">
+            <a:avLst/>
+          </a:prstGeom>
+          <a:noFill/>
+          <a:ln/>
+        </p:spPr>
+        <p:txBody>
+          <a:bodyPr wrap="square" lIns="0" tIns="0" rIns="0" bIns="0" rtlCol="0" anchor="t"/>
+          <a:lstStyle/>
+          <a:p>
+            <a:pPr marL="0" indent="0" algn="l">
+              <a:buNone/>
+            </a:pPr>
+            <a:r>
+              <a:rPr lang="en-US" sz="1500" b="1" dirty="0">
+                <a:solidFill>
+                  <a:srgbClr val="059669"/>
+                </a:solidFill>
+                <a:latin typeface="Calibri" pitchFamily="34" charset="0"/>
+                <a:ea typeface="Calibri" pitchFamily="34" charset="-122"/>
+                <a:cs typeface="Calibri" pitchFamily="34" charset="-120"/>
+              </a:rPr>
+              <a:t>5</a:t>
+            </a:r>
+            <a:endParaRPr lang="en-US" sz="1500" dirty="0"/>
+          </a:p>
+        </p:txBody>
+      </p:sp>
+      <p:sp>
+        <p:nvSpPr>
+          <p:cNvPr id="23" name="Text 12">
+            <a:extLst>
+              <a:ext uri="{FF2B5EF4-FFF2-40B4-BE49-F238E27FC236}">
+                <a16:creationId xmlns:a16="http://schemas.microsoft.com/office/drawing/2014/main" id="{9247ABB6-B95A-4F45-624C-0F3FAF63C6A8}"/>
+              </a:ext>
+            </a:extLst>
+          </p:cNvPr>
+          <p:cNvSpPr/>
+          <p:nvPr/>
+        </p:nvSpPr>
+        <p:spPr>
+          <a:xfrm>
+            <a:off x="1188720" y="5542449"/>
+            <a:ext cx="10134295" cy="594360"/>
+          </a:xfrm>
+          <a:prstGeom prst="rect">
+            <a:avLst/>
+          </a:prstGeom>
+          <a:noFill/>
+          <a:ln/>
+        </p:spPr>
+        <p:txBody>
+          <a:bodyPr wrap="square" lIns="0" tIns="0" rIns="0" bIns="0" rtlCol="0" anchor="t"/>
+          <a:lstStyle/>
+          <a:p>
+            <a:pPr marL="0" indent="0" algn="l">
+              <a:buNone/>
+            </a:pPr>
+            <a:r>
+              <a:rPr lang="en-US" sz="1500" dirty="0">
+                <a:solidFill>
+                  <a:srgbClr val="0F172A"/>
+                </a:solidFill>
+                <a:latin typeface="Calibri" pitchFamily="34" charset="0"/>
+                <a:ea typeface="Calibri" pitchFamily="34" charset="-122"/>
+                <a:cs typeface="Calibri" pitchFamily="34" charset="-120"/>
+              </a:rPr>
+              <a:t>Work on procedure documentation changes</a:t>
             </a:r>
           </a:p>
         </p:txBody>
@@ -7613,7 +7032,7 @@
 </p:sld>
 </file>
 
-<file path=ppt/slides/slide7.xml><?xml version="1.0" encoding="utf-8"?>
+<file path=ppt/slides/slide8.xml><?xml version="1.0" encoding="utf-8"?>
 <p:sld xmlns:a="http://schemas.openxmlformats.org/drawingml/2006/main" xmlns:r="http://schemas.openxmlformats.org/officeDocument/2006/relationships" xmlns:p="http://schemas.openxmlformats.org/presentationml/2006/main">
   <p:cSld name="Slide 8">
     <p:bg>
@@ -7661,7 +7080,7 @@
           <a:bodyPr/>
           <a:lstStyle/>
           <a:p>
-            <a:endParaRPr lang="en-US"/>
+            <a:endParaRPr lang="en-US" dirty="0"/>
           </a:p>
         </p:txBody>
       </p:sp>
@@ -7780,7 +7199,7 @@
           <a:bodyPr/>
           <a:lstStyle/>
           <a:p>
-            <a:endParaRPr lang="en-US"/>
+            <a:endParaRPr lang="en-US" dirty="0"/>
           </a:p>
         </p:txBody>
       </p:sp>
@@ -7946,7 +7365,7 @@
           <a:bodyPr/>
           <a:lstStyle/>
           <a:p>
-            <a:endParaRPr lang="en-US"/>
+            <a:endParaRPr lang="en-US" dirty="0"/>
           </a:p>
         </p:txBody>
       </p:sp>
@@ -8353,7 +7772,7 @@
 </p:sld>
 </file>
 
-<file path=ppt/slides/slide8.xml><?xml version="1.0" encoding="utf-8"?>
+<file path=ppt/slides/slide9.xml><?xml version="1.0" encoding="utf-8"?>
 <p:sld xmlns:a="http://schemas.openxmlformats.org/drawingml/2006/main" xmlns:r="http://schemas.openxmlformats.org/officeDocument/2006/relationships" xmlns:p="http://schemas.openxmlformats.org/presentationml/2006/main">
   <p:cSld name="Slide 7">
     <p:bg>
@@ -8408,7 +7827,7 @@
           <a:bodyPr/>
           <a:lstStyle/>
           <a:p>
-            <a:endParaRPr lang="en-US"/>
+            <a:endParaRPr lang="en-US" dirty="0"/>
           </a:p>
         </p:txBody>
       </p:sp>
@@ -8551,7 +7970,7 @@
           <a:bodyPr/>
           <a:lstStyle/>
           <a:p>
-            <a:endParaRPr lang="en-US"/>
+            <a:endParaRPr lang="en-US" dirty="0"/>
           </a:p>
         </p:txBody>
       </p:sp>
@@ -8666,51 +8085,7 @@
                 <a:ea typeface="Calibri" pitchFamily="34" charset="-122"/>
                 <a:cs typeface="Calibri" pitchFamily="34" charset="-120"/>
               </a:rPr>
-              <a:t>eCMRs replaces </a:t>
-            </a:r>
-            <a:r>
-              <a:rPr lang="en-US" sz="1500" dirty="0" err="1">
-                <a:solidFill>
-                  <a:srgbClr val="0F172A"/>
-                </a:solidFill>
-                <a:latin typeface="Calibri" pitchFamily="34" charset="0"/>
-                <a:ea typeface="Calibri" pitchFamily="34" charset="-122"/>
-                <a:cs typeface="Calibri" pitchFamily="34" charset="-120"/>
-              </a:rPr>
-              <a:t>cmrs</a:t>
-            </a:r>
-            <a:r>
-              <a:rPr lang="en-US" sz="1500" dirty="0">
-                <a:solidFill>
-                  <a:srgbClr val="0F172A"/>
-                </a:solidFill>
-                <a:latin typeface="Calibri" pitchFamily="34" charset="0"/>
-                <a:ea typeface="Calibri" pitchFamily="34" charset="-122"/>
-                <a:cs typeface="Calibri" pitchFamily="34" charset="-120"/>
-              </a:rPr>
-              <a:t> form, create change request and change request management forms, it runs alongside it until the </a:t>
-            </a:r>
-            <a:r>
-              <a:rPr lang="en-US" sz="1500" dirty="0" err="1">
-                <a:solidFill>
-                  <a:srgbClr val="0F172A"/>
-                </a:solidFill>
-                <a:latin typeface="Calibri" pitchFamily="34" charset="0"/>
-                <a:ea typeface="Calibri" pitchFamily="34" charset="-122"/>
-                <a:cs typeface="Calibri" pitchFamily="34" charset="-120"/>
-              </a:rPr>
-              <a:t>cmrproject</a:t>
-            </a:r>
-            <a:r>
-              <a:rPr lang="en-US" sz="1500" dirty="0">
-                <a:solidFill>
-                  <a:srgbClr val="0F172A"/>
-                </a:solidFill>
-                <a:latin typeface="Calibri" pitchFamily="34" charset="0"/>
-                <a:ea typeface="Calibri" pitchFamily="34" charset="-122"/>
-                <a:cs typeface="Calibri" pitchFamily="34" charset="-120"/>
-              </a:rPr>
-              <a:t> is retired once eCMRs is proven</a:t>
+              <a:t>eCMRs replaces CMR form, create change request and change request management forms, it runs alongside it until the CMR form is retired once eCMRs is proven</a:t>
             </a:r>
             <a:endParaRPr lang="en-US" sz="1500" dirty="0"/>
           </a:p>
@@ -8867,382 +8242,6 @@
                 <a:cs typeface="Calibri" pitchFamily="34" charset="-120"/>
               </a:rPr>
               <a:t>Retire Create Change Request, Change Request Management, and CMRs once live</a:t>
-            </a:r>
-            <a:endParaRPr lang="en-US" sz="1500" dirty="0"/>
-          </a:p>
-        </p:txBody>
-      </p:sp>
-    </p:spTree>
-  </p:cSld>
-  <p:clrMapOvr>
-    <a:masterClrMapping/>
-  </p:clrMapOvr>
-</p:sld>
-</file>
-
-<file path=ppt/slides/slide9.xml><?xml version="1.0" encoding="utf-8"?>
-<p:sld xmlns:a="http://schemas.openxmlformats.org/drawingml/2006/main" xmlns:r="http://schemas.openxmlformats.org/officeDocument/2006/relationships" xmlns:p="http://schemas.openxmlformats.org/presentationml/2006/main">
-  <p:cSld name="Slide 9">
-    <p:bg>
-      <p:bgPr>
-        <a:solidFill>
-          <a:srgbClr val="F8FAFC"/>
-        </a:solidFill>
-        <a:effectLst/>
-      </p:bgPr>
-    </p:bg>
-    <p:spTree>
-      <p:nvGrpSpPr>
-        <p:cNvPr id="1" name=""/>
-        <p:cNvGrpSpPr/>
-        <p:nvPr/>
-      </p:nvGrpSpPr>
-      <p:grpSpPr>
-        <a:xfrm>
-          <a:off x="0" y="0"/>
-          <a:ext cx="0" cy="0"/>
-          <a:chOff x="0" y="0"/>
-          <a:chExt cx="0" cy="0"/>
-        </a:xfrm>
-      </p:grpSpPr>
-      <p:sp>
-        <p:nvSpPr>
-          <p:cNvPr id="2" name="Text 0"/>
-          <p:cNvSpPr/>
-          <p:nvPr/>
-        </p:nvSpPr>
-        <p:spPr>
-          <a:xfrm>
-            <a:off x="457200" y="502920"/>
-            <a:ext cx="9539935" cy="685800"/>
-          </a:xfrm>
-          <a:prstGeom prst="rect">
-            <a:avLst/>
-          </a:prstGeom>
-          <a:noFill/>
-          <a:ln/>
-        </p:spPr>
-        <p:txBody>
-          <a:bodyPr wrap="square" lIns="0" tIns="0" rIns="0" bIns="0" rtlCol="0" anchor="t"/>
-          <a:lstStyle/>
-          <a:p>
-            <a:pPr marL="0" indent="0" algn="l">
-              <a:buNone/>
-            </a:pPr>
-            <a:r>
-              <a:rPr lang="en-US" sz="3400" b="1" dirty="0">
-                <a:solidFill>
-                  <a:srgbClr val="0F172A"/>
-                </a:solidFill>
-                <a:latin typeface="Cambria" pitchFamily="34" charset="0"/>
-                <a:ea typeface="Cambria" pitchFamily="34" charset="-122"/>
-                <a:cs typeface="Cambria" pitchFamily="34" charset="-120"/>
-              </a:rPr>
-              <a:t>Test</a:t>
-            </a:r>
-            <a:endParaRPr lang="en-US" sz="3400" dirty="0"/>
-          </a:p>
-        </p:txBody>
-      </p:sp>
-      <p:sp>
-        <p:nvSpPr>
-          <p:cNvPr id="3" name="Text 1"/>
-          <p:cNvSpPr/>
-          <p:nvPr/>
-        </p:nvSpPr>
-        <p:spPr>
-          <a:xfrm>
-            <a:off x="457200" y="1216152"/>
-            <a:ext cx="9539935" cy="640080"/>
-          </a:xfrm>
-          <a:prstGeom prst="rect">
-            <a:avLst/>
-          </a:prstGeom>
-          <a:noFill/>
-          <a:ln/>
-        </p:spPr>
-        <p:txBody>
-          <a:bodyPr wrap="square" lIns="0" tIns="0" rIns="0" bIns="0" rtlCol="0" anchor="t"/>
-          <a:lstStyle/>
-          <a:p>
-            <a:pPr marL="0" indent="0" algn="l">
-              <a:buNone/>
-            </a:pPr>
-            <a:r>
-              <a:rPr lang="en-US" sz="1600" dirty="0">
-                <a:solidFill>
-                  <a:srgbClr val="64748B"/>
-                </a:solidFill>
-                <a:latin typeface="Calibri" pitchFamily="34" charset="0"/>
-                <a:ea typeface="Calibri" pitchFamily="34" charset="-122"/>
-                <a:cs typeface="Calibri" pitchFamily="34" charset="-120"/>
-              </a:rPr>
-              <a:t>Run tests to make sure everything looks good.</a:t>
-            </a:r>
-            <a:endParaRPr lang="en-US" sz="1600" dirty="0"/>
-          </a:p>
-        </p:txBody>
-      </p:sp>
-      <p:sp>
-        <p:nvSpPr>
-          <p:cNvPr id="4" name="Shape 2"/>
-          <p:cNvSpPr/>
-          <p:nvPr/>
-        </p:nvSpPr>
-        <p:spPr>
-          <a:xfrm>
-            <a:off x="10362895" y="502920"/>
-            <a:ext cx="1371600" cy="1371600"/>
-          </a:xfrm>
-          <a:prstGeom prst="roundRect">
-            <a:avLst>
-              <a:gd name="adj" fmla="val 8000"/>
-            </a:avLst>
-          </a:prstGeom>
-          <a:solidFill>
-            <a:srgbClr val="ECFDF5"/>
-          </a:solidFill>
-          <a:ln w="12700">
-            <a:solidFill>
-              <a:srgbClr val="E2E8F0"/>
-            </a:solidFill>
-            <a:prstDash val="solid"/>
-          </a:ln>
-        </p:spPr>
-        <p:txBody>
-          <a:bodyPr/>
-          <a:lstStyle/>
-          <a:p>
-            <a:endParaRPr lang="en-US"/>
-          </a:p>
-        </p:txBody>
-      </p:sp>
-      <p:pic>
-        <p:nvPicPr>
-          <p:cNvPr id="5" name="Image 0" descr="icons/search.png"/>
-          <p:cNvPicPr>
-            <a:picLocks noChangeAspect="1"/>
-          </p:cNvPicPr>
-          <p:nvPr/>
-        </p:nvPicPr>
-        <p:blipFill>
-          <a:blip r:embed="rId3"/>
-          <a:stretch>
-            <a:fillRect/>
-          </a:stretch>
-        </p:blipFill>
-        <p:spPr>
-          <a:xfrm>
-            <a:off x="10705795" y="845820"/>
-            <a:ext cx="685800" cy="685800"/>
-          </a:xfrm>
-          <a:prstGeom prst="rect">
-            <a:avLst/>
-          </a:prstGeom>
-        </p:spPr>
-      </p:pic>
-      <p:sp>
-        <p:nvSpPr>
-          <p:cNvPr id="6" name="Shape 3"/>
-          <p:cNvSpPr/>
-          <p:nvPr/>
-        </p:nvSpPr>
-        <p:spPr>
-          <a:xfrm>
-            <a:off x="457199" y="2148840"/>
-            <a:ext cx="11277295" cy="4251960"/>
-          </a:xfrm>
-          <a:prstGeom prst="roundRect">
-            <a:avLst>
-              <a:gd name="adj" fmla="val 2581"/>
-            </a:avLst>
-          </a:prstGeom>
-          <a:solidFill>
-            <a:srgbClr val="FFFFFF"/>
-          </a:solidFill>
-          <a:ln w="12700">
-            <a:solidFill>
-              <a:srgbClr val="E2E8F0"/>
-            </a:solidFill>
-            <a:prstDash val="solid"/>
-          </a:ln>
-          <a:effectLst>
-            <a:outerShdw blurRad="152400" dist="38100" dir="5400000" algn="bl" rotWithShape="0">
-              <a:srgbClr val="1E293B">
-                <a:alpha val="8000"/>
-              </a:srgbClr>
-            </a:outerShdw>
-          </a:effectLst>
-        </p:spPr>
-        <p:txBody>
-          <a:bodyPr/>
-          <a:lstStyle/>
-          <a:p>
-            <a:endParaRPr lang="en-US"/>
-          </a:p>
-        </p:txBody>
-      </p:sp>
-      <p:sp>
-        <p:nvSpPr>
-          <p:cNvPr id="7" name="Text 4"/>
-          <p:cNvSpPr/>
-          <p:nvPr/>
-        </p:nvSpPr>
-        <p:spPr>
-          <a:xfrm>
-            <a:off x="822960" y="2514600"/>
-            <a:ext cx="9144000" cy="365760"/>
-          </a:xfrm>
-          <a:prstGeom prst="rect">
-            <a:avLst/>
-          </a:prstGeom>
-          <a:noFill/>
-          <a:ln/>
-        </p:spPr>
-        <p:txBody>
-          <a:bodyPr wrap="square" lIns="0" tIns="0" rIns="0" bIns="0" rtlCol="0" anchor="t"/>
-          <a:lstStyle/>
-          <a:p>
-            <a:pPr marL="0" indent="0" algn="l">
-              <a:buNone/>
-            </a:pPr>
-            <a:r>
-              <a:rPr lang="en-US" sz="1500" b="1" dirty="0">
-                <a:solidFill>
-                  <a:srgbClr val="059669"/>
-                </a:solidFill>
-                <a:latin typeface="Calibri" pitchFamily="34" charset="0"/>
-                <a:ea typeface="Calibri" pitchFamily="34" charset="-122"/>
-                <a:cs typeface="Calibri" pitchFamily="34" charset="-120"/>
-              </a:rPr>
-              <a:t>Actual Phase C test list</a:t>
-            </a:r>
-            <a:endParaRPr lang="en-US" sz="1500" dirty="0"/>
-          </a:p>
-        </p:txBody>
-      </p:sp>
-      <p:sp>
-        <p:nvSpPr>
-          <p:cNvPr id="8" name="Text 5"/>
-          <p:cNvSpPr/>
-          <p:nvPr/>
-        </p:nvSpPr>
-        <p:spPr>
-          <a:xfrm>
-            <a:off x="822960" y="2926080"/>
-            <a:ext cx="10545775" cy="2743200"/>
-          </a:xfrm>
-          <a:prstGeom prst="rect">
-            <a:avLst/>
-          </a:prstGeom>
-          <a:noFill/>
-          <a:ln/>
-        </p:spPr>
-        <p:txBody>
-          <a:bodyPr wrap="square" lIns="0" tIns="0" rIns="0" bIns="0" rtlCol="0" anchor="t"/>
-          <a:lstStyle/>
-          <a:p>
-            <a:pPr marL="228600" indent="-228600">
-              <a:spcAft>
-                <a:spcPts val="1600"/>
-              </a:spcAft>
-              <a:buSzPct val="100000"/>
-              <a:buChar char="■"/>
-            </a:pPr>
-            <a:r>
-              <a:rPr lang="en-US" sz="1500" dirty="0">
-                <a:solidFill>
-                  <a:srgbClr val="0F172A"/>
-                </a:solidFill>
-                <a:latin typeface="Calibri" pitchFamily="34" charset="0"/>
-                <a:ea typeface="Calibri" pitchFamily="34" charset="-122"/>
-                <a:cs typeface="Calibri" pitchFamily="34" charset="-120"/>
-              </a:rPr>
-              <a:t>Create a new CMR end-to-end</a:t>
-            </a:r>
-            <a:endParaRPr lang="en-US" sz="1500" dirty="0"/>
-          </a:p>
-          <a:p>
-            <a:pPr marL="228600" indent="-228600">
-              <a:spcAft>
-                <a:spcPts val="1600"/>
-              </a:spcAft>
-              <a:buSzPct val="100000"/>
-              <a:buChar char="■"/>
-            </a:pPr>
-            <a:r>
-              <a:rPr lang="en-US" sz="1500" dirty="0">
-                <a:solidFill>
-                  <a:srgbClr val="0F172A"/>
-                </a:solidFill>
-                <a:latin typeface="Calibri" pitchFamily="34" charset="0"/>
-                <a:ea typeface="Calibri" pitchFamily="34" charset="-122"/>
-                <a:cs typeface="Calibri" pitchFamily="34" charset="-120"/>
-              </a:rPr>
-              <a:t>Save and reopen</a:t>
-            </a:r>
-            <a:endParaRPr lang="en-US" sz="1500" dirty="0"/>
-          </a:p>
-          <a:p>
-            <a:pPr marL="228600" indent="-228600">
-              <a:spcAft>
-                <a:spcPts val="1600"/>
-              </a:spcAft>
-              <a:buSzPct val="100000"/>
-              <a:buChar char="■"/>
-            </a:pPr>
-            <a:r>
-              <a:rPr lang="en-US" sz="1500" dirty="0">
-                <a:solidFill>
-                  <a:srgbClr val="0F172A"/>
-                </a:solidFill>
-                <a:latin typeface="Calibri" pitchFamily="34" charset="0"/>
-                <a:ea typeface="Calibri" pitchFamily="34" charset="-122"/>
-                <a:cs typeface="Calibri" pitchFamily="34" charset="-120"/>
-              </a:rPr>
-              <a:t>Confirm numbering has no race condition</a:t>
-            </a:r>
-            <a:endParaRPr lang="en-US" sz="1500" dirty="0"/>
-          </a:p>
-          <a:p>
-            <a:pPr marL="228600" indent="-228600">
-              <a:spcAft>
-                <a:spcPts val="1600"/>
-              </a:spcAft>
-              <a:buSzPct val="100000"/>
-              <a:buChar char="■"/>
-            </a:pPr>
-            <a:r>
-              <a:rPr lang="en-US" sz="1500" dirty="0">
-                <a:solidFill>
-                  <a:srgbClr val="0F172A"/>
-                </a:solidFill>
-                <a:latin typeface="Calibri" pitchFamily="34" charset="0"/>
-                <a:ea typeface="Calibri" pitchFamily="34" charset="-122"/>
-                <a:cs typeface="Calibri" pitchFamily="34" charset="-120"/>
-              </a:rPr>
-              <a:t>Confirm the flow meets requirements</a:t>
-            </a:r>
-            <a:endParaRPr lang="en-US" sz="1500" dirty="0"/>
-          </a:p>
-          <a:p>
-            <a:pPr marL="228600" indent="-228600">
-              <a:spcAft>
-                <a:spcPts val="1600"/>
-              </a:spcAft>
-              <a:buSzPct val="100000"/>
-              <a:buChar char="■"/>
-            </a:pPr>
-            <a:r>
-              <a:rPr lang="en-US" sz="1500" dirty="0">
-                <a:solidFill>
-                  <a:srgbClr val="0F172A"/>
-                </a:solidFill>
-                <a:latin typeface="Calibri" pitchFamily="34" charset="0"/>
-                <a:ea typeface="Calibri" pitchFamily="34" charset="-122"/>
-                <a:cs typeface="Calibri" pitchFamily="34" charset="-120"/>
-              </a:rPr>
-              <a:t>Confirm all fields + lookup fields work</a:t>
             </a:r>
             <a:endParaRPr lang="en-US" sz="1500" dirty="0"/>
           </a:p>

--- a/docs/presentations/eCMRs_plan.pptx
+++ b/docs/presentations/eCMRs_plan.pptx
@@ -5264,7 +5264,7 @@
         <p:spPr>
           <a:xfrm>
             <a:off x="822960" y="3419856"/>
-            <a:ext cx="10545775" cy="472440"/>
+            <a:ext cx="10545775" cy="400000"/>
           </a:xfrm>
           <a:prstGeom prst="rect">
             <a:avLst/>
@@ -5291,7 +5291,7 @@
         <p:spPr>
           <a:xfrm>
             <a:off x="932688" y="3419856"/>
-            <a:ext cx="3054005" cy="472440"/>
+            <a:ext cx="3054005" cy="400000"/>
           </a:xfrm>
           <a:prstGeom prst="rect">
             <a:avLst/>
@@ -5330,7 +5330,7 @@
         <p:spPr>
           <a:xfrm>
             <a:off x="3986693" y="3419856"/>
-            <a:ext cx="7290603" cy="472440"/>
+            <a:ext cx="7290603" cy="400000"/>
           </a:xfrm>
           <a:prstGeom prst="rect">
             <a:avLst/>
@@ -5368,7 +5368,7 @@
         </p:nvSpPr>
         <p:spPr>
           <a:xfrm>
-            <a:off x="822960" y="3892296"/>
+            <a:off x="822960" y="3819856"/>
             <a:ext cx="10545775" cy="0"/>
           </a:xfrm>
           <a:prstGeom prst="line">
@@ -5398,8 +5398,8 @@
         </p:nvSpPr>
         <p:spPr>
           <a:xfrm>
-            <a:off x="932688" y="3892296"/>
-            <a:ext cx="3054005" cy="472440"/>
+            <a:off x="932688" y="3819856"/>
+            <a:ext cx="3054005" cy="400000"/>
           </a:xfrm>
           <a:prstGeom prst="rect">
             <a:avLst/>
@@ -5437,8 +5437,8 @@
         </p:nvSpPr>
         <p:spPr>
           <a:xfrm>
-            <a:off x="3986693" y="3892296"/>
-            <a:ext cx="7290603" cy="472440"/>
+            <a:off x="3986693" y="3819856"/>
+            <a:ext cx="7290603" cy="400000"/>
           </a:xfrm>
           <a:prstGeom prst="rect">
             <a:avLst/>
@@ -5476,7 +5476,7 @@
         </p:nvSpPr>
         <p:spPr>
           <a:xfrm>
-            <a:off x="822960" y="4364736"/>
+            <a:off x="822960" y="4219856"/>
             <a:ext cx="10545775" cy="0"/>
           </a:xfrm>
           <a:prstGeom prst="line">
@@ -5506,8 +5506,8 @@
         </p:nvSpPr>
         <p:spPr>
           <a:xfrm>
-            <a:off x="932688" y="4364736"/>
-            <a:ext cx="3054005" cy="472440"/>
+            <a:off x="932688" y="4219856"/>
+            <a:ext cx="3054005" cy="400000"/>
           </a:xfrm>
           <a:prstGeom prst="rect">
             <a:avLst/>
@@ -5545,8 +5545,8 @@
         </p:nvSpPr>
         <p:spPr>
           <a:xfrm>
-            <a:off x="3986693" y="4364736"/>
-            <a:ext cx="7290603" cy="472440"/>
+            <a:off x="3986693" y="4219856"/>
+            <a:ext cx="7290603" cy="400000"/>
           </a:xfrm>
           <a:prstGeom prst="rect">
             <a:avLst/>
@@ -5584,7 +5584,7 @@
         </p:nvSpPr>
         <p:spPr>
           <a:xfrm>
-            <a:off x="822960" y="4837176"/>
+            <a:off x="822960" y="4619856"/>
             <a:ext cx="10545775" cy="0"/>
           </a:xfrm>
           <a:prstGeom prst="line">
@@ -5614,8 +5614,8 @@
         </p:nvSpPr>
         <p:spPr>
           <a:xfrm>
-            <a:off x="932688" y="4837176"/>
-            <a:ext cx="3054005" cy="472440"/>
+            <a:off x="932688" y="4619856"/>
+            <a:ext cx="3054005" cy="400000"/>
           </a:xfrm>
           <a:prstGeom prst="rect">
             <a:avLst/>
@@ -5653,8 +5653,8 @@
         </p:nvSpPr>
         <p:spPr>
           <a:xfrm>
-            <a:off x="3986693" y="4837176"/>
-            <a:ext cx="7290603" cy="472440"/>
+            <a:off x="3986693" y="4619856"/>
+            <a:ext cx="7290603" cy="400000"/>
           </a:xfrm>
           <a:prstGeom prst="rect">
             <a:avLst/>
@@ -5692,7 +5692,7 @@
         </p:nvSpPr>
         <p:spPr>
           <a:xfrm>
-            <a:off x="822960" y="5309616"/>
+            <a:off x="822960" y="5019856"/>
             <a:ext cx="10545775" cy="0"/>
           </a:xfrm>
           <a:prstGeom prst="line">
@@ -5722,8 +5722,8 @@
         </p:nvSpPr>
         <p:spPr>
           <a:xfrm>
-            <a:off x="932688" y="5309616"/>
-            <a:ext cx="3054005" cy="472440"/>
+            <a:off x="932688" y="5019856"/>
+            <a:ext cx="3054005" cy="400000"/>
           </a:xfrm>
           <a:prstGeom prst="rect">
             <a:avLst/>
@@ -5761,8 +5761,8 @@
         </p:nvSpPr>
         <p:spPr>
           <a:xfrm>
-            <a:off x="3986693" y="5309616"/>
-            <a:ext cx="7290603" cy="472440"/>
+            <a:off x="3986693" y="5019856"/>
+            <a:ext cx="7290603" cy="400000"/>
           </a:xfrm>
           <a:prstGeom prst="rect">
             <a:avLst/>
@@ -5800,7 +5800,7 @@
         </p:nvSpPr>
         <p:spPr>
           <a:xfrm>
-            <a:off x="822960" y="5782056"/>
+            <a:off x="822960" y="5419856"/>
             <a:ext cx="10545775" cy="0"/>
           </a:xfrm>
           <a:prstGeom prst="line">
@@ -5830,8 +5830,8 @@
         </p:nvSpPr>
         <p:spPr>
           <a:xfrm>
-            <a:off x="932688" y="5782056"/>
-            <a:ext cx="3054005" cy="472440"/>
+            <a:off x="932688" y="5419856"/>
+            <a:ext cx="3054005" cy="400000"/>
           </a:xfrm>
           <a:prstGeom prst="rect">
             <a:avLst/>
@@ -5869,8 +5869,8 @@
         </p:nvSpPr>
         <p:spPr>
           <a:xfrm>
-            <a:off x="3986693" y="5782056"/>
-            <a:ext cx="7290603" cy="472440"/>
+            <a:off x="3986693" y="5419856"/>
+            <a:ext cx="7290603" cy="400000"/>
           </a:xfrm>
           <a:prstGeom prst="rect">
             <a:avLst/>
@@ -5902,13 +5902,121 @@
       </p:sp>
       <p:sp>
         <p:nvSpPr>
+          <p:cNvPr id="101" name="Shape 101"/>
+          <p:cNvSpPr/>
+          <p:nvPr/>
+        </p:nvSpPr>
+        <p:spPr>
+          <a:xfrm>
+            <a:off x="822960" y="5819856"/>
+            <a:ext cx="10545775" cy="0"/>
+          </a:xfrm>
+          <a:prstGeom prst="line">
+            <a:avLst/>
+          </a:prstGeom>
+          <a:noFill/>
+          <a:ln w="9525">
+            <a:solidFill>
+              <a:srgbClr val="E2E8F0"/>
+            </a:solidFill>
+            <a:prstDash val="solid"/>
+          </a:ln>
+        </p:spPr>
+        <p:txBody>
+          <a:bodyPr/>
+          <a:lstStyle/>
+          <a:p>
+            <a:endParaRPr lang="en-US" dirty="0"/>
+          </a:p>
+        </p:txBody>
+      </p:sp>
+      <p:sp>
+        <p:nvSpPr>
+          <p:cNvPr id="102" name="Text 102"/>
+          <p:cNvSpPr/>
+          <p:nvPr/>
+        </p:nvSpPr>
+        <p:spPr>
+          <a:xfrm>
+            <a:off x="932688" y="5819856"/>
+            <a:ext cx="3054005" cy="400000"/>
+          </a:xfrm>
+          <a:prstGeom prst="rect">
+            <a:avLst/>
+          </a:prstGeom>
+          <a:noFill/>
+          <a:ln/>
+        </p:spPr>
+        <p:txBody>
+          <a:bodyPr wrap="square" lIns="0" tIns="0" rIns="0" bIns="0" rtlCol="0" anchor="ctr"/>
+          <a:lstStyle/>
+          <a:p>
+            <a:pPr marL="0" indent="0">
+              <a:buNone/>
+            </a:pPr>
+            <a:r>
+              <a:rPr lang="en-US" sz="1300" b="1" dirty="0">
+                <a:solidFill>
+                  <a:srgbClr val="0F172A"/>
+                </a:solidFill>
+                <a:latin typeface="Calibri" pitchFamily="34" charset="0"/>
+                <a:ea typeface="Calibri" pitchFamily="34" charset="-122"/>
+                <a:cs typeface="Calibri" pitchFamily="34" charset="-120"/>
+              </a:rPr>
+              <a:t>reason_code + cause_code</a:t>
+            </a:r>
+            <a:endParaRPr lang="en-US" sz="1300" dirty="0"/>
+          </a:p>
+        </p:txBody>
+      </p:sp>
+      <p:sp>
+        <p:nvSpPr>
+          <p:cNvPr id="103" name="Text 103"/>
+          <p:cNvSpPr/>
+          <p:nvPr/>
+        </p:nvSpPr>
+        <p:spPr>
+          <a:xfrm>
+            <a:off x="3986693" y="5819856"/>
+            <a:ext cx="7290603" cy="400000"/>
+          </a:xfrm>
+          <a:prstGeom prst="rect">
+            <a:avLst/>
+          </a:prstGeom>
+          <a:noFill/>
+          <a:ln/>
+        </p:spPr>
+        <p:txBody>
+          <a:bodyPr wrap="square" lIns="0" tIns="0" rIns="0" bIns="0" rtlCol="0" anchor="ctr"/>
+          <a:lstStyle/>
+          <a:p>
+            <a:pPr marL="0" indent="0">
+              <a:buNone/>
+            </a:pPr>
+            <a:r>
+              <a:rPr lang="en-US" sz="1300" dirty="0">
+                <a:solidFill>
+                  <a:srgbClr val="0F172A"/>
+                </a:solidFill>
+                <a:latin typeface="Calibri" pitchFamily="34" charset="0"/>
+                <a:ea typeface="Calibri" pitchFamily="34" charset="-122"/>
+                <a:cs typeface="Calibri" pitchFamily="34" charset="-120"/>
+              </a:rPr>
+              <a:t>Reason Code + Cause Code combos, Quality section - reference the real QCReasonCode/QCCauseCode system Property Classes (same as QC_MRRs)</a:t>
+            </a:r>
+            <a:endParaRPr lang="en-US" sz="1300" dirty="0"/>
+          </a:p>
+        </p:txBody>
+      </p:sp>
+      <p:sp>
+        <p:nvSpPr>
           <p:cNvPr id="26" name="Shape 23"/>
           <p:cNvSpPr/>
           <p:nvPr/>
         </p:nvSpPr>
         <p:spPr>
           <a:xfrm>
-            <a:off x="822960" y="6254496"/>
+            <a:off x="822960" y="6219856"/>
             <a:ext cx="10545775" cy="0"/>
           </a:xfrm>
           <a:prstGeom prst="line">

--- a/docs/presentations/eCMRs_plan.pptx
+++ b/docs/presentations/eCMRs_plan.pptx
@@ -11,6 +11,7 @@
     <p:sldId id="256" r:id="rId2"/>
     <p:sldId id="257" r:id="rId3"/>
     <p:sldId id="258" r:id="rId4"/>
+    <p:sldId id="267" r:id="rId18"/>
     <p:sldId id="266" r:id="rId5"/>
     <p:sldId id="259" r:id="rId6"/>
     <p:sldId id="260" r:id="rId7"/>
@@ -2453,6 +2454,406 @@
 </p:sld>
 </file>
 
+<file path=ppt/slides/slide12.xml><?xml version="1.0" encoding="utf-8"?>
+<p:sld xmlns:a="http://schemas.openxmlformats.org/drawingml/2006/main" xmlns:r="http://schemas.openxmlformats.org/officeDocument/2006/relationships" xmlns:p="http://schemas.openxmlformats.org/presentationml/2006/main">
+  <p:cSld name="Slide 5">
+    <p:bg>
+      <p:bgPr>
+        <a:solidFill>
+          <a:srgbClr val="F8FAFC"/>
+        </a:solidFill>
+        <a:effectLst/>
+      </p:bgPr>
+    </p:bg>
+    <p:spTree>
+      <p:nvGrpSpPr>
+        <p:cNvPr id="1" name=""/>
+        <p:cNvGrpSpPr/>
+        <p:nvPr/>
+      </p:nvGrpSpPr>
+      <p:grpSpPr>
+        <a:xfrm>
+          <a:off x="0" y="0"/>
+          <a:ext cx="0" cy="0"/>
+          <a:chOff x="0" y="0"/>
+          <a:chExt cx="0" cy="0"/>
+        </a:xfrm>
+      </p:grpSpPr>
+      <p:sp>
+        <p:nvSpPr>
+          <p:cNvPr id="2" name="Shape 0"/>
+          <p:cNvSpPr/>
+          <p:nvPr/>
+        </p:nvSpPr>
+        <p:spPr>
+          <a:xfrm>
+            <a:off x="457200" y="502920"/>
+            <a:ext cx="1371600" cy="1371600"/>
+          </a:xfrm>
+          <a:prstGeom prst="roundRect">
+            <a:avLst>
+              <a:gd name="adj" fmla="val 8000"/>
+            </a:avLst>
+          </a:prstGeom>
+          <a:solidFill>
+            <a:srgbClr val="ECFDF5"/>
+          </a:solidFill>
+          <a:ln w="12700">
+            <a:solidFill>
+              <a:srgbClr val="E2E8F0"/>
+            </a:solidFill>
+            <a:prstDash val="solid"/>
+          </a:ln>
+        </p:spPr>
+        <p:txBody>
+          <a:bodyPr/>
+          <a:lstStyle/>
+          <a:p>
+            <a:endParaRPr lang="en-US" dirty="0"/>
+          </a:p>
+        </p:txBody>
+      </p:sp>
+      <p:pic>
+        <p:nvPicPr>
+          <p:cNvPr id="3" name="Image 0" descr="icons/clipboard.png"/>
+          <p:cNvPicPr>
+            <a:picLocks noChangeAspect="1"/>
+          </p:cNvPicPr>
+          <p:nvPr/>
+        </p:nvPicPr>
+        <p:blipFill>
+          <a:blip r:embed="rId3"/>
+          <a:stretch>
+            <a:fillRect/>
+          </a:stretch>
+        </p:blipFill>
+        <p:spPr>
+          <a:xfrm>
+            <a:off x="800100" y="845820"/>
+            <a:ext cx="685800" cy="685800"/>
+          </a:xfrm>
+          <a:prstGeom prst="rect">
+            <a:avLst/>
+          </a:prstGeom>
+        </p:spPr>
+      </p:pic>
+      <p:sp>
+        <p:nvSpPr>
+          <p:cNvPr id="4" name="Text 1"/>
+          <p:cNvSpPr/>
+          <p:nvPr/>
+        </p:nvSpPr>
+        <p:spPr>
+          <a:xfrm>
+            <a:off x="2194560" y="502920"/>
+            <a:ext cx="9539935" cy="685800"/>
+          </a:xfrm>
+          <a:prstGeom prst="rect">
+            <a:avLst/>
+          </a:prstGeom>
+          <a:noFill/>
+          <a:ln/>
+        </p:spPr>
+        <p:txBody>
+          <a:bodyPr wrap="square" lIns="0" tIns="0" rIns="0" bIns="0" rtlCol="0" anchor="t"/>
+          <a:lstStyle/>
+          <a:p>
+            <a:pPr marL="0" indent="0" algn="l">
+              <a:buNone/>
+            </a:pPr>
+            <a:r>
+              <a:rPr lang="en-US" sz="3400" b="1" dirty="0">
+                <a:solidFill>
+                  <a:srgbClr val="0F172A"/>
+                </a:solidFill>
+                <a:latin typeface="Cambria" pitchFamily="34" charset="0"/>
+                <a:ea typeface="Cambria" pitchFamily="34" charset="-122"/>
+                <a:cs typeface="Cambria" pitchFamily="34" charset="-120"/>
+              </a:rPr>
+              <a:t>BRD</a:t>
+            </a:r>
+            <a:endParaRPr lang="en-US" sz="3400" dirty="0"/>
+          </a:p>
+        </p:txBody>
+      </p:sp>
+      <p:sp>
+        <p:nvSpPr>
+          <p:cNvPr id="5" name="Text 2"/>
+          <p:cNvSpPr/>
+          <p:nvPr/>
+        </p:nvSpPr>
+        <p:spPr>
+          <a:xfrm>
+            <a:off x="2194560" y="1216152"/>
+            <a:ext cx="9539935" cy="640080"/>
+          </a:xfrm>
+          <a:prstGeom prst="rect">
+            <a:avLst/>
+          </a:prstGeom>
+          <a:noFill/>
+          <a:ln/>
+        </p:spPr>
+        <p:txBody>
+          <a:bodyPr wrap="square" lIns="0" tIns="0" rIns="0" bIns="0" rtlCol="0" anchor="t"/>
+          <a:lstStyle/>
+          <a:p>
+            <a:pPr marL="0" indent="0" algn="l">
+              <a:buNone/>
+            </a:pPr>
+            <a:r>
+              <a:rPr lang="en-US" sz="1600" dirty="0">
+                <a:solidFill>
+                  <a:srgbClr val="64748B"/>
+                </a:solidFill>
+                <a:latin typeface="Calibri" pitchFamily="34" charset="0"/>
+                <a:ea typeface="Calibri" pitchFamily="34" charset="-122"/>
+                <a:cs typeface="Calibri" pitchFamily="34" charset="-120"/>
+              </a:rPr>
+              <a:t>Business requirements, confirmed from the signed CMR Development SOW.</a:t>
+            </a:r>
+            <a:endParaRPr lang="en-US" sz="1600" dirty="0"/>
+          </a:p>
+        </p:txBody>
+      </p:sp>
+      <p:sp>
+        <p:nvSpPr>
+          <p:cNvPr id="6" name="Shape 3"/>
+          <p:cNvSpPr/>
+          <p:nvPr/>
+        </p:nvSpPr>
+        <p:spPr>
+          <a:xfrm>
+            <a:off x="457200" y="2148840"/>
+            <a:ext cx="11277295" cy="4251960"/>
+          </a:xfrm>
+          <a:prstGeom prst="roundRect">
+            <a:avLst>
+              <a:gd name="adj" fmla="val 2581"/>
+            </a:avLst>
+          </a:prstGeom>
+          <a:solidFill>
+            <a:srgbClr val="FFFFFF"/>
+          </a:solidFill>
+          <a:ln w="12700">
+            <a:solidFill>
+              <a:srgbClr val="E2E8F0"/>
+            </a:solidFill>
+            <a:prstDash val="solid"/>
+          </a:ln>
+          <a:effectLst>
+            <a:outerShdw blurRad="152400" dist="38100" dir="5400000" algn="bl" rotWithShape="0">
+              <a:srgbClr val="1E293B">
+                <a:alpha val="8000"/>
+              </a:srgbClr>
+            </a:outerShdw>
+          </a:effectLst>
+        </p:spPr>
+        <p:txBody>
+          <a:bodyPr/>
+          <a:lstStyle/>
+          <a:p>
+            <a:endParaRPr lang="en-US" dirty="0"/>
+          </a:p>
+        </p:txBody>
+      </p:sp>
+      <p:sp>
+        <p:nvSpPr>
+          <p:cNvPr id="7" name="Text 4"/>
+          <p:cNvSpPr/>
+          <p:nvPr/>
+        </p:nvSpPr>
+        <p:spPr>
+          <a:xfrm>
+            <a:off x="822960" y="2514600"/>
+            <a:ext cx="9144000" cy="365760"/>
+          </a:xfrm>
+          <a:prstGeom prst="rect">
+            <a:avLst/>
+          </a:prstGeom>
+          <a:noFill/>
+          <a:ln/>
+        </p:spPr>
+        <p:txBody>
+          <a:bodyPr wrap="square" lIns="0" tIns="0" rIns="0" bIns="0" rtlCol="0" anchor="t"/>
+          <a:lstStyle/>
+          <a:p>
+            <a:pPr marL="0" indent="0" algn="l">
+              <a:buNone/>
+            </a:pPr>
+            <a:r>
+              <a:rPr lang="en-US" sz="1500" b="1" dirty="0">
+                <a:solidFill>
+                  <a:srgbClr val="059669"/>
+                </a:solidFill>
+                <a:latin typeface="Calibri" pitchFamily="34" charset="0"/>
+                <a:ea typeface="Calibri" pitchFamily="34" charset="-122"/>
+                <a:cs typeface="Calibri" pitchFamily="34" charset="-120"/>
+              </a:rPr>
+              <a:t>Business requirements</a:t>
+            </a:r>
+            <a:endParaRPr lang="en-US" sz="1500" dirty="0"/>
+          </a:p>
+        </p:txBody>
+      </p:sp>
+      <p:sp>
+        <p:nvSpPr>
+          <p:cNvPr id="8" name="Text 5"/>
+          <p:cNvSpPr/>
+          <p:nvPr/>
+        </p:nvSpPr>
+        <p:spPr>
+          <a:xfrm>
+            <a:off x="822960" y="2926080"/>
+            <a:ext cx="10545775" cy="2743200"/>
+          </a:xfrm>
+          <a:prstGeom prst="rect">
+            <a:avLst/>
+          </a:prstGeom>
+          <a:noFill/>
+          <a:ln/>
+        </p:spPr>
+        <p:txBody>
+          <a:p>
+            <a:pPr marL="228600" indent="-228600">
+              <a:buSzPct val="100000"/>
+              <a:buChar char="■"/>
+            </a:pPr>
+            <a:r>
+              <a:rPr lang="en-US" sz="1500" dirty="0">
+                <a:solidFill>
+                  <a:srgbClr val="0F172A"/>
+                </a:solidFill>
+                <a:latin typeface="Calibri" pitchFamily="34" charset="0"/>
+                <a:ea typeface="Calibri" pitchFamily="34" charset="-122"/>
+                <a:cs typeface="Calibri" pitchFamily="34" charset="-120"/>
+              </a:rPr>
+              <a:t>Create a </a:t>
+            </a:r>
+            <a:r>
+              <a:rPr lang="en-US" sz="1500" b="1" dirty="0">
+                <a:solidFill>
+                  <a:srgbClr val="0F172A"/>
+                </a:solidFill>
+                <a:latin typeface="Calibri" pitchFamily="34" charset="0"/>
+                <a:ea typeface="Calibri" pitchFamily="34" charset="-122"/>
+                <a:cs typeface="Calibri" pitchFamily="34" charset="-120"/>
+              </a:rPr>
+              <a:t>standalone CMR form</a:t>
+            </a:r>
+            <a:r>
+              <a:rPr lang="en-US" sz="1500" dirty="0">
+                <a:solidFill>
+                  <a:srgbClr val="0F172A"/>
+                </a:solidFill>
+                <a:latin typeface="Calibri" pitchFamily="34" charset="0"/>
+                <a:ea typeface="Calibri" pitchFamily="34" charset="-122"/>
+                <a:cs typeface="Calibri" pitchFamily="34" charset="-120"/>
+              </a:rPr>
+              <a:t> - not dependent on Create Change Request/Change Request Management existing first</a:t>
+            </a:r>
+            <a:endParaRPr lang="en-US" sz="1500" dirty="0"/>
+          </a:p>
+          <a:p>
+            <a:pPr marL="228600" indent="-228600">
+              <a:buSzPct val="100000"/>
+              <a:buChar char="■"/>
+            </a:pPr>
+            <a:r>
+              <a:rPr lang="en-US" sz="1500" dirty="0">
+                <a:solidFill>
+                  <a:srgbClr val="0F172A"/>
+                </a:solidFill>
+                <a:latin typeface="Calibri" pitchFamily="34" charset="0"/>
+                <a:ea typeface="Calibri" pitchFamily="34" charset="-122"/>
+                <a:cs typeface="Calibri" pitchFamily="34" charset="-120"/>
+              </a:rPr>
+              <a:t>Pull data from existing CMR entries</a:t>
+            </a:r>
+            <a:r>
+              <a:rPr lang="en-US" sz="1500" dirty="0">
+                <a:solidFill>
+                  <a:srgbClr val="0F172A"/>
+                </a:solidFill>
+                <a:latin typeface="Calibri" pitchFamily="34" charset="0"/>
+                <a:ea typeface="Calibri" pitchFamily="34" charset="-122"/>
+                <a:cs typeface="Calibri" pitchFamily="34" charset="-120"/>
+              </a:rPr>
+              <a:t> into the new form</a:t>
+            </a:r>
+            <a:endParaRPr lang="en-US" sz="1500" dirty="0"/>
+          </a:p>
+          <a:p>
+            <a:pPr marL="228600" indent="-228600">
+              <a:buSzPct val="100000"/>
+              <a:buChar char="■"/>
+            </a:pPr>
+            <a:r>
+              <a:rPr lang="en-US" sz="1500" dirty="0">
+                <a:solidFill>
+                  <a:srgbClr val="0F172A"/>
+                </a:solidFill>
+                <a:latin typeface="Calibri" pitchFamily="34" charset="0"/>
+                <a:ea typeface="Calibri" pitchFamily="34" charset="-122"/>
+                <a:cs typeface="Calibri" pitchFamily="34" charset="-120"/>
+              </a:rPr>
+              <a:t>Create custom </a:t>
+            </a:r>
+            <a:r>
+              <a:rPr lang="en-US" sz="1500" b="1" dirty="0">
+                <a:solidFill>
+                  <a:srgbClr val="0F172A"/>
+                </a:solidFill>
+                <a:latin typeface="Calibri" pitchFamily="34" charset="0"/>
+                <a:ea typeface="Calibri" pitchFamily="34" charset="-122"/>
+                <a:cs typeface="Calibri" pitchFamily="34" charset="-120"/>
+              </a:rPr>
+              <a:t>Reason and Cause Codes</a:t>
+            </a:r>
+            <a:r>
+              <a:rPr lang="en-US" sz="1500" dirty="0">
+                <a:solidFill>
+                  <a:srgbClr val="0F172A"/>
+                </a:solidFill>
+                <a:latin typeface="Calibri" pitchFamily="34" charset="0"/>
+                <a:ea typeface="Calibri" pitchFamily="34" charset="-122"/>
+                <a:cs typeface="Calibri" pitchFamily="34" charset="-120"/>
+              </a:rPr>
+              <a:t>, with a new Ref Type </a:t>
+            </a:r>
+            <a:r>
+              <a:rPr lang="en-US" sz="1500" b="1" dirty="0">
+                <a:solidFill>
+                  <a:srgbClr val="0F172A"/>
+                </a:solidFill>
+                <a:latin typeface="Calibri" pitchFamily="34" charset="0"/>
+                <a:ea typeface="Calibri" pitchFamily="34" charset="-122"/>
+                <a:cs typeface="Calibri" pitchFamily="34" charset="-120"/>
+              </a:rPr>
+              <a:t>C</a:t>
+            </a:r>
+            <a:r>
+              <a:rPr lang="en-US" sz="1500" dirty="0">
+                <a:solidFill>
+                  <a:srgbClr val="0F172A"/>
+                </a:solidFill>
+                <a:latin typeface="Calibri" pitchFamily="34" charset="0"/>
+                <a:ea typeface="Calibri" pitchFamily="34" charset="-122"/>
+                <a:cs typeface="Calibri" pitchFamily="34" charset="-120"/>
+              </a:rPr>
+              <a:t> used for CMR Reason/Cause selection</a:t>
+            </a:r>
+            <a:endParaRPr lang="en-US" sz="1500" dirty="0"/>
+          </a:p>
+        </p:txBody>
+      </p:sp>
+    </p:spTree>
+  </p:cSld>
+  <p:clrMapOvr>
+    <a:masterClrMapping/>
+  </p:clrMapOvr>
+</p:sld>
+</file>
+
 <file path=ppt/slides/slide2.xml><?xml version="1.0" encoding="utf-8"?>
 <p:sld xmlns:a="http://schemas.openxmlformats.org/drawingml/2006/main" xmlns:r="http://schemas.openxmlformats.org/officeDocument/2006/relationships" xmlns:p="http://schemas.openxmlformats.org/presentationml/2006/main">
   <p:cSld name="Slide 2">
@@ -2487,7 +2888,7 @@
         <p:spPr>
           <a:xfrm>
             <a:off x="457200" y="457200"/>
-            <a:ext cx="11277295" cy="5943600"/>
+            <a:ext cx="11277295" cy="6144216"/>
           </a:xfrm>
           <a:prstGeom prst="roundRect">
             <a:avLst>
@@ -2552,7 +2953,7 @@
                 <a:ea typeface="Cambria" pitchFamily="34" charset="-122"/>
                 <a:cs typeface="Cambria" pitchFamily="34" charset="-120"/>
               </a:rPr>
-              <a:t>Seven milestones to production</a:t>
+              <a:t>Eight milestones to production</a:t>
             </a:r>
             <a:endParaRPr lang="en-US" sz="3800" dirty="0"/>
           </a:p>
@@ -2606,7 +3007,7 @@
         <p:spPr>
           <a:xfrm>
             <a:off x="1060704" y="2340864"/>
-            <a:ext cx="0" cy="3566160"/>
+            <a:ext cx="0" cy="3864000"/>
           </a:xfrm>
           <a:prstGeom prst="line">
             <a:avLst/>
@@ -2702,7 +3103,7 @@
         <p:spPr>
           <a:xfrm>
             <a:off x="1527048" y="2093976"/>
-            <a:ext cx="9144000" cy="594360"/>
+            <a:ext cx="9144000" cy="552000"/>
           </a:xfrm>
           <a:prstGeom prst="rect">
             <a:avLst/>
@@ -2763,7 +3164,7 @@
         </p:nvSpPr>
         <p:spPr>
           <a:xfrm>
-            <a:off x="868680" y="2743200"/>
+            <a:off x="868680" y="2700840"/>
             <a:ext cx="384048" cy="384048"/>
           </a:xfrm>
           <a:prstGeom prst="ellipse">
@@ -2790,7 +3191,7 @@
         </p:nvSpPr>
         <p:spPr>
           <a:xfrm>
-            <a:off x="868680" y="2743200"/>
+            <a:off x="868680" y="2700840"/>
             <a:ext cx="384048" cy="384048"/>
           </a:xfrm>
           <a:prstGeom prst="rect">
@@ -2829,8 +3230,8 @@
         </p:nvSpPr>
         <p:spPr>
           <a:xfrm>
-            <a:off x="1527048" y="2688336"/>
-            <a:ext cx="9144000" cy="594360"/>
+            <a:off x="1527048" y="2645976"/>
+            <a:ext cx="9144000" cy="552000"/>
           </a:xfrm>
           <a:prstGeom prst="rect">
             <a:avLst/>
@@ -2891,7 +3292,7 @@
         </p:nvSpPr>
         <p:spPr>
           <a:xfrm>
-            <a:off x="868680" y="3337560"/>
+            <a:off x="868680" y="3252840"/>
             <a:ext cx="384048" cy="384048"/>
           </a:xfrm>
           <a:prstGeom prst="ellipse">
@@ -2918,7 +3319,7 @@
         </p:nvSpPr>
         <p:spPr>
           <a:xfrm>
-            <a:off x="868680" y="3337560"/>
+            <a:off x="868680" y="3252840"/>
             <a:ext cx="384048" cy="384048"/>
           </a:xfrm>
           <a:prstGeom prst="rect">
@@ -2957,8 +3358,8 @@
         </p:nvSpPr>
         <p:spPr>
           <a:xfrm>
-            <a:off x="1527048" y="3282696"/>
-            <a:ext cx="9144000" cy="594360"/>
+            <a:off x="1527048" y="3197976"/>
+            <a:ext cx="9144000" cy="552000"/>
           </a:xfrm>
           <a:prstGeom prst="rect">
             <a:avLst/>
@@ -3019,7 +3420,7 @@
         </p:nvSpPr>
         <p:spPr>
           <a:xfrm>
-            <a:off x="868680" y="3931920"/>
+            <a:off x="868680" y="3804840"/>
             <a:ext cx="384048" cy="384048"/>
           </a:xfrm>
           <a:prstGeom prst="ellipse">
@@ -3046,7 +3447,7 @@
         </p:nvSpPr>
         <p:spPr>
           <a:xfrm>
-            <a:off x="868680" y="3931920"/>
+            <a:off x="868680" y="3804840"/>
             <a:ext cx="384048" cy="384048"/>
           </a:xfrm>
           <a:prstGeom prst="rect">
@@ -3085,8 +3486,8 @@
         </p:nvSpPr>
         <p:spPr>
           <a:xfrm>
-            <a:off x="1527048" y="3877056"/>
-            <a:ext cx="9144000" cy="594360"/>
+            <a:off x="1527048" y="3749976"/>
+            <a:ext cx="9144000" cy="552000"/>
           </a:xfrm>
           <a:prstGeom prst="rect">
             <a:avLst/>
@@ -3141,13 +3542,13 @@
       </p:sp>
       <p:sp>
         <p:nvSpPr>
-          <p:cNvPr id="18" name="Shape 16"/>
-          <p:cNvSpPr/>
-          <p:nvPr/>
-        </p:nvSpPr>
-        <p:spPr>
-          <a:xfrm>
-            <a:off x="868680" y="4526280"/>
+          <p:cNvPr id="101" name="Shape 101"/>
+          <p:cNvSpPr/>
+          <p:nvPr/>
+        </p:nvSpPr>
+        <p:spPr>
+          <a:xfrm>
+            <a:off x="868680" y="4356840"/>
             <a:ext cx="384048" cy="384048"/>
           </a:xfrm>
           <a:prstGeom prst="ellipse">
@@ -3168,13 +3569,13 @@
       </p:sp>
       <p:sp>
         <p:nvSpPr>
-          <p:cNvPr id="19" name="Text 17"/>
-          <p:cNvSpPr/>
-          <p:nvPr/>
-        </p:nvSpPr>
-        <p:spPr>
-          <a:xfrm>
-            <a:off x="868680" y="4526280"/>
+          <p:cNvPr id="102" name="Text 102"/>
+          <p:cNvSpPr/>
+          <p:nvPr/>
+        </p:nvSpPr>
+        <p:spPr>
+          <a:xfrm>
+            <a:off x="868680" y="4356840"/>
             <a:ext cx="384048" cy="384048"/>
           </a:xfrm>
           <a:prstGeom prst="rect">
@@ -3207,14 +3608,14 @@
       </p:sp>
       <p:sp>
         <p:nvSpPr>
-          <p:cNvPr id="20" name="Text 18"/>
-          <p:cNvSpPr/>
-          <p:nvPr/>
-        </p:nvSpPr>
-        <p:spPr>
-          <a:xfrm>
-            <a:off x="1527048" y="4471416"/>
-            <a:ext cx="9144000" cy="594360"/>
+          <p:cNvPr id="103" name="Text 103"/>
+          <p:cNvSpPr/>
+          <p:nvPr/>
+        </p:nvSpPr>
+        <p:spPr>
+          <a:xfrm>
+            <a:off x="1527048" y="4301976"/>
+            <a:ext cx="9144000" cy="552000"/>
           </a:xfrm>
           <a:prstGeom prst="rect">
             <a:avLst/>
@@ -3241,7 +3642,7 @@
                 <a:ea typeface="Calibri" pitchFamily="34" charset="-122"/>
                 <a:cs typeface="Calibri" pitchFamily="34" charset="-120"/>
               </a:rPr>
-              <a:t>Launch</a:t>
+              <a:t>Migration</a:t>
             </a:r>
             <a:endParaRPr lang="en-US" sz="1700" dirty="0"/>
           </a:p>
@@ -3261,7 +3662,7 @@
                 <a:ea typeface="Calibri" pitchFamily="34" charset="-122"/>
                 <a:cs typeface="Calibri" pitchFamily="34" charset="-120"/>
               </a:rPr>
-              <a:t>Deploy to production.</a:t>
+              <a:t>Bring historical CMR data into the new table, or decide to start fresh.</a:t>
             </a:r>
             <a:endParaRPr lang="en-US" sz="1700" dirty="0"/>
           </a:p>
@@ -3269,13 +3670,13 @@
       </p:sp>
       <p:sp>
         <p:nvSpPr>
-          <p:cNvPr id="21" name="Shape 19"/>
-          <p:cNvSpPr/>
-          <p:nvPr/>
-        </p:nvSpPr>
-        <p:spPr>
-          <a:xfrm>
-            <a:off x="868680" y="5120640"/>
+          <p:cNvPr id="18" name="Shape 16"/>
+          <p:cNvSpPr/>
+          <p:nvPr/>
+        </p:nvSpPr>
+        <p:spPr>
+          <a:xfrm>
+            <a:off x="868680" y="4908840"/>
             <a:ext cx="384048" cy="384048"/>
           </a:xfrm>
           <a:prstGeom prst="ellipse">
@@ -3296,13 +3697,13 @@
       </p:sp>
       <p:sp>
         <p:nvSpPr>
-          <p:cNvPr id="22" name="Text 20"/>
-          <p:cNvSpPr/>
-          <p:nvPr/>
-        </p:nvSpPr>
-        <p:spPr>
-          <a:xfrm>
-            <a:off x="868680" y="5120640"/>
+          <p:cNvPr id="19" name="Text 17"/>
+          <p:cNvSpPr/>
+          <p:nvPr/>
+        </p:nvSpPr>
+        <p:spPr>
+          <a:xfrm>
+            <a:off x="868680" y="4908840"/>
             <a:ext cx="384048" cy="384048"/>
           </a:xfrm>
           <a:prstGeom prst="rect">
@@ -3335,14 +3736,14 @@
       </p:sp>
       <p:sp>
         <p:nvSpPr>
-          <p:cNvPr id="23" name="Text 21"/>
-          <p:cNvSpPr/>
-          <p:nvPr/>
-        </p:nvSpPr>
-        <p:spPr>
-          <a:xfrm>
-            <a:off x="1527048" y="5065776"/>
-            <a:ext cx="9144000" cy="594360"/>
+          <p:cNvPr id="20" name="Text 18"/>
+          <p:cNvSpPr/>
+          <p:nvPr/>
+        </p:nvSpPr>
+        <p:spPr>
+          <a:xfrm>
+            <a:off x="1527048" y="4853976"/>
+            <a:ext cx="9144000" cy="552000"/>
           </a:xfrm>
           <a:prstGeom prst="rect">
             <a:avLst/>
@@ -3369,7 +3770,7 @@
                 <a:ea typeface="Calibri" pitchFamily="34" charset="-122"/>
                 <a:cs typeface="Calibri" pitchFamily="34" charset="-120"/>
               </a:rPr>
-              <a:t>Test</a:t>
+              <a:t>Launch</a:t>
             </a:r>
             <a:endParaRPr lang="en-US" sz="1700" dirty="0"/>
           </a:p>
@@ -3389,7 +3790,7 @@
                 <a:ea typeface="Calibri" pitchFamily="34" charset="-122"/>
                 <a:cs typeface="Calibri" pitchFamily="34" charset="-120"/>
               </a:rPr>
-              <a:t>Run tests to make sure everything looks good.</a:t>
+              <a:t>Deploy to production.</a:t>
             </a:r>
             <a:endParaRPr lang="en-US" sz="1700" dirty="0"/>
           </a:p>
@@ -3397,13 +3798,13 @@
       </p:sp>
       <p:sp>
         <p:nvSpPr>
-          <p:cNvPr id="24" name="Shape 22"/>
-          <p:cNvSpPr/>
-          <p:nvPr/>
-        </p:nvSpPr>
-        <p:spPr>
-          <a:xfrm>
-            <a:off x="868680" y="5715000"/>
+          <p:cNvPr id="21" name="Shape 19"/>
+          <p:cNvSpPr/>
+          <p:nvPr/>
+        </p:nvSpPr>
+        <p:spPr>
+          <a:xfrm>
+            <a:off x="868680" y="5460840"/>
             <a:ext cx="384048" cy="384048"/>
           </a:xfrm>
           <a:prstGeom prst="ellipse">
@@ -3424,13 +3825,141 @@
       </p:sp>
       <p:sp>
         <p:nvSpPr>
+          <p:cNvPr id="22" name="Text 20"/>
+          <p:cNvSpPr/>
+          <p:nvPr/>
+        </p:nvSpPr>
+        <p:spPr>
+          <a:xfrm>
+            <a:off x="868680" y="5460840"/>
+            <a:ext cx="384048" cy="384048"/>
+          </a:xfrm>
+          <a:prstGeom prst="rect">
+            <a:avLst/>
+          </a:prstGeom>
+          <a:noFill/>
+          <a:ln/>
+        </p:spPr>
+        <p:txBody>
+          <a:bodyPr wrap="square" lIns="0" tIns="0" rIns="0" bIns="0" rtlCol="0" anchor="ctr"/>
+          <a:lstStyle/>
+          <a:p>
+            <a:pPr marL="0" indent="0" algn="ctr">
+              <a:buNone/>
+            </a:pPr>
+            <a:r>
+              <a:rPr lang="en-US" sz="1400" b="1" dirty="0">
+                <a:solidFill>
+                  <a:srgbClr val="FFFFFF"/>
+                </a:solidFill>
+                <a:latin typeface="Calibri" pitchFamily="34" charset="0"/>
+                <a:ea typeface="Calibri" pitchFamily="34" charset="-122"/>
+                <a:cs typeface="Calibri" pitchFamily="34" charset="-120"/>
+              </a:rPr>
+              <a:t>7</a:t>
+            </a:r>
+            <a:endParaRPr lang="en-US" sz="1400" dirty="0"/>
+          </a:p>
+        </p:txBody>
+      </p:sp>
+      <p:sp>
+        <p:nvSpPr>
+          <p:cNvPr id="23" name="Text 21"/>
+          <p:cNvSpPr/>
+          <p:nvPr/>
+        </p:nvSpPr>
+        <p:spPr>
+          <a:xfrm>
+            <a:off x="1527048" y="5405976"/>
+            <a:ext cx="9144000" cy="552000"/>
+          </a:xfrm>
+          <a:prstGeom prst="rect">
+            <a:avLst/>
+          </a:prstGeom>
+          <a:noFill/>
+          <a:ln/>
+        </p:spPr>
+        <p:txBody>
+          <a:bodyPr wrap="square" lIns="0" tIns="0" rIns="0" bIns="0" rtlCol="0" anchor="t"/>
+          <a:lstStyle/>
+          <a:p>
+            <a:pPr marL="0" indent="0">
+              <a:lnSpc>
+                <a:spcPts val="1900"/>
+              </a:lnSpc>
+              <a:buNone/>
+            </a:pPr>
+            <a:r>
+              <a:rPr lang="en-US" sz="1700" b="1" dirty="0">
+                <a:solidFill>
+                  <a:srgbClr val="0F172A"/>
+                </a:solidFill>
+                <a:latin typeface="Calibri" pitchFamily="34" charset="0"/>
+                <a:ea typeface="Calibri" pitchFamily="34" charset="-122"/>
+                <a:cs typeface="Calibri" pitchFamily="34" charset="-120"/>
+              </a:rPr>
+              <a:t>Test</a:t>
+            </a:r>
+            <a:endParaRPr lang="en-US" sz="1700" dirty="0"/>
+          </a:p>
+          <a:p>
+            <a:pPr marL="0" indent="0">
+              <a:lnSpc>
+                <a:spcPts val="1900"/>
+              </a:lnSpc>
+              <a:buNone/>
+            </a:pPr>
+            <a:r>
+              <a:rPr lang="en-US" sz="1350" dirty="0">
+                <a:solidFill>
+                  <a:srgbClr val="64748B"/>
+                </a:solidFill>
+                <a:latin typeface="Calibri" pitchFamily="34" charset="0"/>
+                <a:ea typeface="Calibri" pitchFamily="34" charset="-122"/>
+                <a:cs typeface="Calibri" pitchFamily="34" charset="-120"/>
+              </a:rPr>
+              <a:t>Run tests to make sure everything looks good.</a:t>
+            </a:r>
+            <a:endParaRPr lang="en-US" sz="1700" dirty="0"/>
+          </a:p>
+        </p:txBody>
+      </p:sp>
+      <p:sp>
+        <p:nvSpPr>
+          <p:cNvPr id="24" name="Shape 22"/>
+          <p:cNvSpPr/>
+          <p:nvPr/>
+        </p:nvSpPr>
+        <p:spPr>
+          <a:xfrm>
+            <a:off x="868680" y="6012840"/>
+            <a:ext cx="384048" cy="384048"/>
+          </a:xfrm>
+          <a:prstGeom prst="ellipse">
+            <a:avLst/>
+          </a:prstGeom>
+          <a:solidFill>
+            <a:srgbClr val="059669"/>
+          </a:solidFill>
+          <a:ln/>
+        </p:spPr>
+        <p:txBody>
+          <a:bodyPr/>
+          <a:lstStyle/>
+          <a:p>
+            <a:endParaRPr lang="en-US" dirty="0"/>
+          </a:p>
+        </p:txBody>
+      </p:sp>
+      <p:sp>
+        <p:nvSpPr>
           <p:cNvPr id="25" name="Text 23"/>
           <p:cNvSpPr/>
           <p:nvPr/>
         </p:nvSpPr>
         <p:spPr>
           <a:xfrm>
-            <a:off x="868680" y="5715000"/>
+            <a:off x="868680" y="6012840"/>
             <a:ext cx="384048" cy="384048"/>
           </a:xfrm>
           <a:prstGeom prst="rect">
@@ -3455,7 +3984,7 @@
                 <a:ea typeface="Calibri" pitchFamily="34" charset="-122"/>
                 <a:cs typeface="Calibri" pitchFamily="34" charset="-120"/>
               </a:rPr>
-              <a:t>7</a:t>
+              <a:t>8</a:t>
             </a:r>
             <a:endParaRPr lang="en-US" sz="1400" dirty="0"/>
           </a:p>
@@ -3469,8 +3998,8 @@
         </p:nvSpPr>
         <p:spPr>
           <a:xfrm>
-            <a:off x="1527048" y="5660136"/>
-            <a:ext cx="9144000" cy="594360"/>
+            <a:off x="1527048" y="5957976"/>
+            <a:ext cx="9144000" cy="552000"/>
           </a:xfrm>
           <a:prstGeom prst="rect">
             <a:avLst/>
@@ -7174,15 +7703,22 @@
         <p:spPr>
           <a:xfrm>
             <a:off x="457200" y="502920"/>
-            <a:ext cx="457200" cy="45720"/>
-          </a:xfrm>
-          <a:prstGeom prst="rect">
-            <a:avLst/>
+            <a:ext cx="1371600" cy="1371600"/>
+          </a:xfrm>
+          <a:prstGeom prst="roundRect">
+            <a:avLst>
+              <a:gd name="adj" fmla="val 8000"/>
+            </a:avLst>
           </a:prstGeom>
           <a:solidFill>
-            <a:srgbClr val="059669"/>
+            <a:srgbClr val="ECFDF5"/>
           </a:solidFill>
-          <a:ln/>
+          <a:ln w="12700">
+            <a:solidFill>
+              <a:srgbClr val="E2E8F0"/>
+            </a:solidFill>
+            <a:prstDash val="solid"/>
+          </a:ln>
         </p:spPr>
         <p:txBody>
           <a:bodyPr/>
@@ -7192,6 +7728,30 @@
           </a:p>
         </p:txBody>
       </p:sp>
+      <p:pic>
+        <p:nvPicPr>
+          <p:cNvPr id="27" name="Image 0" descr="icons/database.png"/>
+          <p:cNvPicPr>
+            <a:picLocks noChangeAspect="1"/>
+          </p:cNvPicPr>
+          <p:nvPr/>
+        </p:nvPicPr>
+        <p:blipFill>
+          <a:blip r:embed="rId3"/>
+          <a:stretch>
+            <a:fillRect/>
+          </a:stretch>
+        </p:blipFill>
+        <p:spPr>
+          <a:xfrm>
+            <a:off x="800100" y="845820"/>
+            <a:ext cx="685800" cy="685800"/>
+          </a:xfrm>
+          <a:prstGeom prst="rect">
+            <a:avLst/>
+          </a:prstGeom>
+        </p:spPr>
+      </p:pic>
       <p:sp>
         <p:nvSpPr>
           <p:cNvPr id="3" name="Text 1"/>
@@ -7200,8 +7760,8 @@
         </p:nvSpPr>
         <p:spPr>
           <a:xfrm>
-            <a:off x="457200" y="621792"/>
-            <a:ext cx="10058400" cy="777240"/>
+            <a:off x="2194560" y="621792"/>
+            <a:ext cx="8321040" cy="777240"/>
           </a:xfrm>
           <a:prstGeom prst="rect">
             <a:avLst/>
@@ -7239,8 +7799,8 @@
         </p:nvSpPr>
         <p:spPr>
           <a:xfrm>
-            <a:off x="457200" y="1325880"/>
-            <a:ext cx="10058400" cy="457200"/>
+            <a:off x="2194560" y="1325880"/>
+            <a:ext cx="8321040" cy="457200"/>
           </a:xfrm>
           <a:prstGeom prst="rect">
             <a:avLst/>

--- a/docs/presentations/eCMRs_plan.pptx
+++ b/docs/presentations/eCMRs_plan.pptx
@@ -2704,7 +2704,7 @@
         <p:spPr>
           <a:xfrm>
             <a:off x="822960" y="2926080"/>
-            <a:ext cx="10545775" cy="2743200"/>
+            <a:ext cx="10545775" cy="3474720"/>
           </a:xfrm>
           <a:prstGeom prst="rect">
             <a:avLst/>
@@ -2841,6 +2841,115 @@
                 <a:cs typeface="Calibri" pitchFamily="34" charset="-120"/>
               </a:rPr>
               <a:t> used for CMR Reason/Cause selection</a:t>
+            </a:r>
+            <a:endParaRPr lang="en-US" sz="1500" dirty="0"/>
+          </a:p>
+          <a:p>
+            <a:pPr marL="228600" indent="-228600">
+              <a:buSzPct val="100000"/>
+              <a:buChar char="■"/>
+            </a:pPr>
+            <a:r>
+              <a:rPr lang="en-US" sz="1500" dirty="0">
+                <a:solidFill>
+                  <a:srgbClr val="0F172A"/>
+                </a:solidFill>
+                <a:latin typeface="Calibri" pitchFamily="34" charset="0"/>
+                <a:ea typeface="Calibri" pitchFamily="34" charset="-122"/>
+                <a:cs typeface="Calibri" pitchFamily="34" charset="-120"/>
+              </a:rPr>
+              <a:t>Include fields from the </a:t>
+            </a:r>
+            <a:r>
+              <a:rPr lang="en-US" sz="1500" b="1" dirty="0">
+                <a:solidFill>
+                  <a:srgbClr val="0F172A"/>
+                </a:solidFill>
+                <a:latin typeface="Calibri" pitchFamily="34" charset="0"/>
+                <a:ea typeface="Calibri" pitchFamily="34" charset="-122"/>
+                <a:cs typeface="Calibri" pitchFamily="34" charset="-120"/>
+              </a:rPr>
+              <a:t>Create Change Request</a:t>
+            </a:r>
+            <a:r>
+              <a:rPr lang="en-US" sz="1500" dirty="0">
+                <a:solidFill>
+                  <a:srgbClr val="0F172A"/>
+                </a:solidFill>
+                <a:latin typeface="Calibri" pitchFamily="34" charset="0"/>
+                <a:ea typeface="Calibri" pitchFamily="34" charset="-122"/>
+                <a:cs typeface="Calibri" pitchFamily="34" charset="-120"/>
+              </a:rPr>
+              <a:t> form that will be needed</a:t>
+            </a:r>
+            <a:endParaRPr lang="en-US" sz="1500" dirty="0"/>
+          </a:p>
+          <a:p>
+            <a:pPr marL="228600" indent="-228600">
+              <a:buSzPct val="100000"/>
+              <a:buChar char="■"/>
+            </a:pPr>
+            <a:r>
+              <a:rPr lang="en-US" sz="1500" dirty="0">
+                <a:solidFill>
+                  <a:srgbClr val="0F172A"/>
+                </a:solidFill>
+                <a:latin typeface="Calibri" pitchFamily="34" charset="0"/>
+                <a:ea typeface="Calibri" pitchFamily="34" charset="-122"/>
+                <a:cs typeface="Calibri" pitchFamily="34" charset="-120"/>
+              </a:rPr>
+              <a:t>Include additional fields such as </a:t>
+            </a:r>
+            <a:r>
+              <a:rPr lang="en-US" sz="1500" b="1" dirty="0">
+                <a:solidFill>
+                  <a:srgbClr val="0F172A"/>
+                </a:solidFill>
+                <a:latin typeface="Calibri" pitchFamily="34" charset="0"/>
+                <a:ea typeface="Calibri" pitchFamily="34" charset="-122"/>
+                <a:cs typeface="Calibri" pitchFamily="34" charset="-120"/>
+              </a:rPr>
+              <a:t>JOB, Serial#, Lot#, Top Level PN, Sub Assembly, Part</a:t>
+            </a:r>
+            <a:endParaRPr lang="en-US" sz="1500" dirty="0"/>
+          </a:p>
+          <a:p>
+            <a:pPr marL="228600" indent="-228600">
+              <a:buSzPct val="100000"/>
+              <a:buChar char="■"/>
+            </a:pPr>
+            <a:r>
+              <a:rPr lang="en-US" sz="1500" dirty="0">
+                <a:solidFill>
+                  <a:srgbClr val="0F172A"/>
+                </a:solidFill>
+                <a:latin typeface="Calibri" pitchFamily="34" charset="0"/>
+                <a:ea typeface="Calibri" pitchFamily="34" charset="-122"/>
+                <a:cs typeface="Calibri" pitchFamily="34" charset="-120"/>
+              </a:rPr>
+              <a:t>The CMR needs a </a:t>
+            </a:r>
+            <a:r>
+              <a:rPr lang="en-US" sz="1500" b="1" dirty="0">
+                <a:solidFill>
+                  <a:srgbClr val="0F172A"/>
+                </a:solidFill>
+                <a:latin typeface="Calibri" pitchFamily="34" charset="0"/>
+                <a:ea typeface="Calibri" pitchFamily="34" charset="-122"/>
+                <a:cs typeface="Calibri" pitchFamily="34" charset="-120"/>
+              </a:rPr>
+              <a:t>unique identifier</a:t>
+            </a:r>
+            <a:r>
+              <a:rPr lang="en-US" sz="1500" dirty="0">
+                <a:solidFill>
+                  <a:srgbClr val="0F172A"/>
+                </a:solidFill>
+                <a:latin typeface="Calibri" pitchFamily="34" charset="0"/>
+                <a:ea typeface="Calibri" pitchFamily="34" charset="-122"/>
+                <a:cs typeface="Calibri" pitchFamily="34" charset="-120"/>
+              </a:rPr>
+              <a:t> that can be used to reference the working CMR</a:t>
             </a:r>
             <a:endParaRPr lang="en-US" sz="1500" dirty="0"/>
           </a:p>
@@ -8192,7 +8301,7 @@
                 <a:ea typeface="Calibri" pitchFamily="34" charset="-122"/>
                 <a:cs typeface="Calibri" pitchFamily="34" charset="-120"/>
               </a:rPr>
-              <a:t>Still to decide</a:t>
+              <a:t>How we’ll migrate</a:t>
             </a:r>
             <a:endParaRPr lang="en-US" sz="1500" dirty="0"/>
           </a:p>
@@ -8231,7 +8340,7 @@
                 <a:ea typeface="Calibri" pitchFamily="34" charset="-122"/>
                 <a:cs typeface="Calibri" pitchFamily="34" charset="-120"/>
               </a:rPr>
-              <a:t>?</a:t>
+              <a:t>1</a:t>
             </a:r>
             <a:endParaRPr lang="en-US" sz="1600" dirty="0"/>
           </a:p>
@@ -8270,7 +8379,7 @@
                 <a:ea typeface="Calibri" pitchFamily="34" charset="-122"/>
                 <a:cs typeface="Calibri" pitchFamily="34" charset="-120"/>
               </a:rPr>
-              <a:t>Numbering: historical rows carry their original numbers, but cmr_num auto-numbers on the IDO properties - how do the two coexist?</a:t>
+              <a:t>Numbering: cmr_num just needs to be a unique auto-generated value — migrated rows get a fresh one on insert, like any new CMR.</a:t>
             </a:r>
             <a:endParaRPr lang="en-US" sz="1500" dirty="0"/>
           </a:p>
@@ -8309,7 +8418,7 @@
                 <a:ea typeface="Calibri" pitchFamily="34" charset="-122"/>
                 <a:cs typeface="Calibri" pitchFamily="34" charset="-120"/>
               </a:rPr>
-              <a:t>?</a:t>
+              <a:t>2</a:t>
             </a:r>
             <a:endParaRPr lang="en-US" sz="1600" dirty="0"/>
           </a:p>
@@ -8348,7 +8457,7 @@
                 <a:ea typeface="Calibri" pitchFamily="34" charset="-122"/>
                 <a:cs typeface="Calibri" pitchFamily="34" charset="-120"/>
               </a:rPr>
-              <a:t>?</a:t>
+              <a:t>Field mapping: every rs_cmr/rs_crcvr column copies to its own real column on ue_ecmrs, per docs/field-mapping.md — no join back.</a:t>
             </a:r>
             <a:endParaRPr lang="en-US" sz="1500" dirty="0"/>
           </a:p>
@@ -8387,7 +8496,7 @@
                 <a:ea typeface="Calibri" pitchFamily="34" charset="-122"/>
                 <a:cs typeface="Calibri" pitchFamily="34" charset="-120"/>
               </a:rPr>
-              <a:t>?</a:t>
+              <a:t>3</a:t>
             </a:r>
             <a:endParaRPr lang="en-US" sz="1600" dirty="0"/>
           </a:p>
@@ -8426,7 +8535,7 @@
                 <a:ea typeface="Calibri" pitchFamily="34" charset="-122"/>
                 <a:cs typeface="Calibri" pitchFamily="34" charset="-120"/>
               </a:rPr>
-              <a:t>?</a:t>
+              <a:t>Load: a one-time script inserts each mapped row directly into ue_ecmrs — never a live join, never a client-computed key.</a:t>
             </a:r>
             <a:endParaRPr lang="en-US" sz="1500" dirty="0"/>
           </a:p>

--- a/docs/presentations/eCMRs_plan.pptx
+++ b/docs/presentations/eCMRs_plan.pptx
@@ -14,6 +14,7 @@
     <p:sldId id="267" r:id="rId18"/>
     <p:sldId id="266" r:id="rId5"/>
     <p:sldId id="259" r:id="rId6"/>
+    <p:sldId id="268" r:id="rId19"/>
     <p:sldId id="260" r:id="rId7"/>
     <p:sldId id="261" r:id="rId8"/>
     <p:sldId id="263" r:id="rId9"/>
@@ -2952,6 +2953,1038 @@
               <a:t> that can be used to reference the working CMR</a:t>
             </a:r>
             <a:endParaRPr lang="en-US" sz="1500" dirty="0"/>
+          </a:p>
+        </p:txBody>
+      </p:sp>
+    </p:spTree>
+  </p:cSld>
+  <p:clrMapOvr>
+    <a:masterClrMapping/>
+  </p:clrMapOvr>
+</p:sld>
+</file>
+
+<file path=ppt/slides/slide13.xml><?xml version="1.0" encoding="utf-8"?>
+<p:sld xmlns:a="http://schemas.openxmlformats.org/drawingml/2006/main" xmlns:r="http://schemas.openxmlformats.org/officeDocument/2006/relationships" xmlns:p="http://schemas.openxmlformats.org/presentationml/2006/main">
+  <p:cSld name="Slide 4">
+    <p:bg>
+      <p:bgPr>
+        <a:solidFill>
+          <a:srgbClr val="F8FAFC"/>
+        </a:solidFill>
+        <a:effectLst/>
+      </p:bgPr>
+    </p:bg>
+    <p:spTree>
+      <p:nvGrpSpPr>
+        <p:cNvPr id="1" name=""/>
+        <p:cNvGrpSpPr/>
+        <p:nvPr/>
+      </p:nvGrpSpPr>
+      <p:grpSpPr>
+        <a:xfrm>
+          <a:off x="0" y="0"/>
+          <a:ext cx="0" cy="0"/>
+          <a:chOff x="0" y="0"/>
+          <a:chExt cx="0" cy="0"/>
+        </a:xfrm>
+      </p:grpSpPr>
+      <p:sp>
+        <p:nvSpPr>
+          <p:cNvPr id="2" name="Text 0"/>
+          <p:cNvSpPr/>
+          <p:nvPr/>
+        </p:nvSpPr>
+        <p:spPr>
+          <a:xfrm>
+            <a:off x="457200" y="502920"/>
+            <a:ext cx="9539935" cy="685800"/>
+          </a:xfrm>
+          <a:prstGeom prst="rect">
+            <a:avLst/>
+          </a:prstGeom>
+          <a:noFill/>
+          <a:ln/>
+        </p:spPr>
+        <p:txBody>
+          <a:bodyPr wrap="square" lIns="0" tIns="0" rIns="0" bIns="0" rtlCol="0" anchor="t"/>
+          <a:lstStyle/>
+          <a:p>
+            <a:pPr marL="0" indent="0" algn="l">
+              <a:buNone/>
+            </a:pPr>
+            <a:r>
+              <a:rPr lang="en-US" sz="3400" b="1" dirty="0">
+                <a:solidFill>
+                  <a:srgbClr val="0F172A"/>
+                </a:solidFill>
+                <a:latin typeface="Cambria" pitchFamily="34" charset="0"/>
+                <a:ea typeface="Cambria" pitchFamily="34" charset="-122"/>
+                <a:cs typeface="Cambria" pitchFamily="34" charset="-120"/>
+              </a:rPr>
+              <a:t>Design</a:t>
+            </a:r>
+            <a:endParaRPr lang="en-US" sz="3400" dirty="0"/>
+          </a:p>
+        </p:txBody>
+      </p:sp>
+      <p:sp>
+        <p:nvSpPr>
+          <p:cNvPr id="3" name="Text 1"/>
+          <p:cNvSpPr/>
+          <p:nvPr/>
+        </p:nvSpPr>
+        <p:spPr>
+          <a:xfrm>
+            <a:off x="457200" y="1216152"/>
+            <a:ext cx="9539935" cy="640080"/>
+          </a:xfrm>
+          <a:prstGeom prst="rect">
+            <a:avLst/>
+          </a:prstGeom>
+          <a:noFill/>
+          <a:ln/>
+        </p:spPr>
+        <p:txBody>
+          <a:bodyPr wrap="square" lIns="0" tIns="0" rIns="0" bIns="0" rtlCol="0" anchor="t"/>
+          <a:lstStyle/>
+          <a:p>
+            <a:pPr marL="0" indent="0" algn="l">
+              <a:buNone/>
+            </a:pPr>
+            <a:r>
+              <a:rPr lang="en-US" sz="1600" dirty="0">
+                <a:solidFill>
+                  <a:srgbClr val="64748B"/>
+                </a:solidFill>
+                <a:latin typeface="Calibri" pitchFamily="34" charset="0"/>
+                <a:ea typeface="Calibri" pitchFamily="34" charset="-122"/>
+                <a:cs typeface="Calibri" pitchFamily="34" charset="-120"/>
+              </a:rPr>
+              <a:t>Fields the BRD calls out as needing their own field — not part of the Create Change Request carryover.</a:t>
+            </a:r>
+            <a:endParaRPr lang="en-US" sz="1600" dirty="0"/>
+          </a:p>
+        </p:txBody>
+      </p:sp>
+      <p:sp>
+        <p:nvSpPr>
+          <p:cNvPr id="4" name="Shape 2"/>
+          <p:cNvSpPr/>
+          <p:nvPr/>
+        </p:nvSpPr>
+        <p:spPr>
+          <a:xfrm>
+            <a:off x="10362895" y="502920"/>
+            <a:ext cx="1371600" cy="1371600"/>
+          </a:xfrm>
+          <a:prstGeom prst="roundRect">
+            <a:avLst>
+              <a:gd name="adj" fmla="val 8000"/>
+            </a:avLst>
+          </a:prstGeom>
+          <a:solidFill>
+            <a:srgbClr val="ECFDF5"/>
+          </a:solidFill>
+          <a:ln w="12700">
+            <a:solidFill>
+              <a:srgbClr val="E2E8F0"/>
+            </a:solidFill>
+            <a:prstDash val="solid"/>
+          </a:ln>
+        </p:spPr>
+        <p:txBody>
+          <a:bodyPr/>
+          <a:lstStyle/>
+          <a:p>
+            <a:endParaRPr lang="en-US" dirty="0"/>
+          </a:p>
+        </p:txBody>
+      </p:sp>
+      <p:pic>
+        <p:nvPicPr>
+          <p:cNvPr id="5" name="Image 0" descr="icons/pencil.png"/>
+          <p:cNvPicPr>
+            <a:picLocks noChangeAspect="1"/>
+          </p:cNvPicPr>
+          <p:nvPr/>
+        </p:nvPicPr>
+        <p:blipFill>
+          <a:blip r:embed="rId3"/>
+          <a:stretch>
+            <a:fillRect/>
+          </a:stretch>
+        </p:blipFill>
+        <p:spPr>
+          <a:xfrm>
+            <a:off x="10705795" y="845820"/>
+            <a:ext cx="685800" cy="685800"/>
+          </a:xfrm>
+          <a:prstGeom prst="rect">
+            <a:avLst/>
+          </a:prstGeom>
+        </p:spPr>
+      </p:pic>
+      <p:sp>
+        <p:nvSpPr>
+          <p:cNvPr id="6" name="Shape 3"/>
+          <p:cNvSpPr/>
+          <p:nvPr/>
+        </p:nvSpPr>
+        <p:spPr>
+          <a:xfrm>
+            <a:off x="457200" y="2148840"/>
+            <a:ext cx="11277295" cy="4251960"/>
+          </a:xfrm>
+          <a:prstGeom prst="roundRect">
+            <a:avLst>
+              <a:gd name="adj" fmla="val 2581"/>
+            </a:avLst>
+          </a:prstGeom>
+          <a:solidFill>
+            <a:srgbClr val="FFFFFF"/>
+          </a:solidFill>
+          <a:ln w="12700">
+            <a:solidFill>
+              <a:srgbClr val="E2E8F0"/>
+            </a:solidFill>
+            <a:prstDash val="solid"/>
+          </a:ln>
+          <a:effectLst>
+            <a:outerShdw blurRad="152400" dist="38100" dir="5400000" algn="bl" rotWithShape="0">
+              <a:srgbClr val="1E293B">
+                <a:alpha val="8000"/>
+              </a:srgbClr>
+            </a:outerShdw>
+          </a:effectLst>
+        </p:spPr>
+        <p:txBody>
+          <a:bodyPr/>
+          <a:lstStyle/>
+          <a:p>
+            <a:endParaRPr lang="en-US" dirty="0"/>
+          </a:p>
+        </p:txBody>
+      </p:sp>
+      <p:sp>
+        <p:nvSpPr>
+          <p:cNvPr id="7" name="Text 4"/>
+          <p:cNvSpPr/>
+          <p:nvPr/>
+        </p:nvSpPr>
+        <p:spPr>
+          <a:xfrm>
+            <a:off x="822960" y="2514600"/>
+            <a:ext cx="9144000" cy="365760"/>
+          </a:xfrm>
+          <a:prstGeom prst="rect">
+            <a:avLst/>
+          </a:prstGeom>
+          <a:noFill/>
+          <a:ln/>
+        </p:spPr>
+        <p:txBody>
+          <a:bodyPr wrap="square" lIns="0" tIns="0" rIns="0" bIns="0" rtlCol="0" anchor="t"/>
+          <a:lstStyle/>
+          <a:p>
+            <a:pPr marL="0" indent="0" algn="l">
+              <a:buNone/>
+            </a:pPr>
+            <a:r>
+              <a:rPr lang="en-US" sz="1500" b="1" dirty="0">
+                <a:solidFill>
+                  <a:srgbClr val="059669"/>
+                </a:solidFill>
+                <a:latin typeface="Calibri" pitchFamily="34" charset="0"/>
+                <a:ea typeface="Calibri" pitchFamily="34" charset="-122"/>
+                <a:cs typeface="Calibri" pitchFamily="34" charset="-120"/>
+              </a:rPr>
+              <a:t>Additional fields — new, not carried over from Create Change Request</a:t>
+            </a:r>
+            <a:endParaRPr lang="en-US" sz="1500" dirty="0"/>
+          </a:p>
+        </p:txBody>
+      </p:sp>
+      <p:sp>
+        <p:nvSpPr>
+          <p:cNvPr id="8" name="Text 5"/>
+          <p:cNvSpPr/>
+          <p:nvPr/>
+        </p:nvSpPr>
+        <p:spPr>
+          <a:xfrm>
+            <a:off x="822960" y="2926080"/>
+            <a:ext cx="3163733" cy="347472"/>
+          </a:xfrm>
+          <a:prstGeom prst="rect">
+            <a:avLst/>
+          </a:prstGeom>
+          <a:noFill/>
+          <a:ln/>
+        </p:spPr>
+        <p:txBody>
+          <a:bodyPr wrap="square" lIns="0" tIns="0" rIns="0" bIns="0" rtlCol="0" anchor="ctr"/>
+          <a:lstStyle/>
+          <a:p>
+            <a:pPr marL="0" indent="0">
+              <a:buNone/>
+            </a:pPr>
+            <a:r>
+              <a:rPr lang="en-US" sz="1250" b="1" dirty="0">
+                <a:solidFill>
+                  <a:srgbClr val="64748B"/>
+                </a:solidFill>
+                <a:latin typeface="Calibri" pitchFamily="34" charset="0"/>
+                <a:ea typeface="Calibri" pitchFamily="34" charset="-122"/>
+                <a:cs typeface="Calibri" pitchFamily="34" charset="-120"/>
+              </a:rPr>
+              <a:t>New field</a:t>
+            </a:r>
+            <a:endParaRPr lang="en-US" sz="1250" dirty="0"/>
+          </a:p>
+        </p:txBody>
+      </p:sp>
+      <p:sp>
+        <p:nvSpPr>
+          <p:cNvPr id="9" name="Text 6"/>
+          <p:cNvSpPr/>
+          <p:nvPr/>
+        </p:nvSpPr>
+        <p:spPr>
+          <a:xfrm>
+            <a:off x="3986693" y="2926080"/>
+            <a:ext cx="7382043" cy="347472"/>
+          </a:xfrm>
+          <a:prstGeom prst="rect">
+            <a:avLst/>
+          </a:prstGeom>
+          <a:noFill/>
+          <a:ln/>
+        </p:spPr>
+        <p:txBody>
+          <a:bodyPr wrap="square" lIns="0" tIns="0" rIns="0" bIns="0" rtlCol="0" anchor="ctr"/>
+          <a:lstStyle/>
+          <a:p>
+            <a:pPr marL="0" indent="0">
+              <a:buNone/>
+            </a:pPr>
+            <a:r>
+              <a:rPr lang="en-US" sz="1250" b="1" dirty="0">
+                <a:solidFill>
+                  <a:srgbClr val="64748B"/>
+                </a:solidFill>
+                <a:latin typeface="Calibri" pitchFamily="34" charset="0"/>
+                <a:ea typeface="Calibri" pitchFamily="34" charset="-122"/>
+                <a:cs typeface="Calibri" pitchFamily="34" charset="-120"/>
+              </a:rPr>
+              <a:t>What it is</a:t>
+            </a:r>
+            <a:endParaRPr lang="en-US" sz="1250" dirty="0"/>
+          </a:p>
+        </p:txBody>
+      </p:sp>
+      <p:sp>
+        <p:nvSpPr>
+          <p:cNvPr id="10" name="Shape 7"/>
+          <p:cNvSpPr/>
+          <p:nvPr/>
+        </p:nvSpPr>
+        <p:spPr>
+          <a:xfrm>
+            <a:off x="822960" y="3328416"/>
+            <a:ext cx="10545775" cy="0"/>
+          </a:xfrm>
+          <a:prstGeom prst="line">
+            <a:avLst/>
+          </a:prstGeom>
+          <a:noFill/>
+          <a:ln w="12700">
+            <a:solidFill>
+              <a:srgbClr val="E2E8F0"/>
+            </a:solidFill>
+            <a:prstDash val="solid"/>
+          </a:ln>
+        </p:spPr>
+        <p:txBody>
+          <a:bodyPr/>
+          <a:lstStyle/>
+          <a:p>
+            <a:endParaRPr lang="en-US" dirty="0"/>
+          </a:p>
+        </p:txBody>
+      </p:sp>
+      <p:sp>
+        <p:nvSpPr>
+          <p:cNvPr id="11" name="Shape 8"/>
+          <p:cNvSpPr/>
+          <p:nvPr/>
+        </p:nvSpPr>
+        <p:spPr>
+          <a:xfrm>
+            <a:off x="822960" y="3419856"/>
+            <a:ext cx="10545775" cy="400000"/>
+          </a:xfrm>
+          <a:prstGeom prst="rect">
+            <a:avLst/>
+          </a:prstGeom>
+          <a:solidFill>
+            <a:srgbClr val="ECFDF5"/>
+          </a:solidFill>
+          <a:ln/>
+        </p:spPr>
+        <p:txBody>
+          <a:bodyPr/>
+          <a:lstStyle/>
+          <a:p>
+            <a:endParaRPr lang="en-US" dirty="0"/>
+          </a:p>
+        </p:txBody>
+      </p:sp>
+      <p:sp>
+        <p:nvSpPr>
+          <p:cNvPr id="12" name="Text 9"/>
+          <p:cNvSpPr/>
+          <p:nvPr/>
+        </p:nvSpPr>
+        <p:spPr>
+          <a:xfrm>
+            <a:off x="932688" y="3419856"/>
+            <a:ext cx="3054005" cy="400000"/>
+          </a:xfrm>
+          <a:prstGeom prst="rect">
+            <a:avLst/>
+          </a:prstGeom>
+          <a:noFill/>
+          <a:ln/>
+        </p:spPr>
+        <p:txBody>
+          <a:bodyPr wrap="square" lIns="0" tIns="0" rIns="0" bIns="0" rtlCol="0" anchor="ctr"/>
+          <a:lstStyle/>
+          <a:p>
+            <a:pPr marL="0" indent="0">
+              <a:buNone/>
+            </a:pPr>
+            <a:r>
+              <a:rPr lang="en-US" sz="1300" b="1" dirty="0">
+                <a:solidFill>
+                  <a:srgbClr val="0F172A"/>
+                </a:solidFill>
+                <a:latin typeface="Calibri" pitchFamily="34" charset="0"/>
+                <a:ea typeface="Calibri" pitchFamily="34" charset="-122"/>
+                <a:cs typeface="Calibri" pitchFamily="34" charset="-120"/>
+              </a:rPr>
+              <a:t>JOB (job_num)</a:t>
+            </a:r>
+            <a:endParaRPr lang="en-US" sz="1300" dirty="0"/>
+          </a:p>
+        </p:txBody>
+      </p:sp>
+      <p:sp>
+        <p:nvSpPr>
+          <p:cNvPr id="13" name="Text 10"/>
+          <p:cNvSpPr/>
+          <p:nvPr/>
+        </p:nvSpPr>
+        <p:spPr>
+          <a:xfrm>
+            <a:off x="3986693" y="3419856"/>
+            <a:ext cx="7290603" cy="400000"/>
+          </a:xfrm>
+          <a:prstGeom prst="rect">
+            <a:avLst/>
+          </a:prstGeom>
+          <a:noFill/>
+          <a:ln/>
+        </p:spPr>
+        <p:txBody>
+          <a:bodyPr wrap="square" lIns="0" tIns="0" rIns="0" bIns="0" rtlCol="0" anchor="ctr"/>
+          <a:lstStyle/>
+          <a:p>
+            <a:pPr marL="0" indent="0">
+              <a:buNone/>
+            </a:pPr>
+            <a:r>
+              <a:rPr lang="en-US" sz="1300" dirty="0">
+                <a:solidFill>
+                  <a:srgbClr val="0F172A"/>
+                </a:solidFill>
+                <a:latin typeface="Calibri" pitchFamily="34" charset="0"/>
+                <a:ea typeface="Calibri" pitchFamily="34" charset="-122"/>
+                <a:cs typeface="Calibri" pitchFamily="34" charset="-120"/>
+              </a:rPr>
+              <a:t>Combo lookup (SLMatltrans/RefNum) — already built and on the form.</a:t>
+            </a:r>
+            <a:endParaRPr lang="en-US" sz="1300" dirty="0"/>
+          </a:p>
+        </p:txBody>
+      </p:sp>
+      <p:sp>
+        <p:nvSpPr>
+          <p:cNvPr id="14" name="Shape 11"/>
+          <p:cNvSpPr/>
+          <p:nvPr/>
+        </p:nvSpPr>
+        <p:spPr>
+          <a:xfrm>
+            <a:off x="822960" y="3819856"/>
+            <a:ext cx="10545775" cy="0"/>
+          </a:xfrm>
+          <a:prstGeom prst="line">
+            <a:avLst/>
+          </a:prstGeom>
+          <a:noFill/>
+          <a:ln w="9525">
+            <a:solidFill>
+              <a:srgbClr val="E2E8F0"/>
+            </a:solidFill>
+            <a:prstDash val="solid"/>
+          </a:ln>
+        </p:spPr>
+        <p:txBody>
+          <a:bodyPr/>
+          <a:lstStyle/>
+          <a:p>
+            <a:endParaRPr lang="en-US" dirty="0"/>
+          </a:p>
+        </p:txBody>
+      </p:sp>
+      <p:sp>
+        <p:nvSpPr>
+          <p:cNvPr id="27" name="Text 24"/>
+          <p:cNvSpPr/>
+          <p:nvPr/>
+        </p:nvSpPr>
+        <p:spPr>
+          <a:xfrm>
+            <a:off x="932688" y="3819856"/>
+            <a:ext cx="3054005" cy="400000"/>
+          </a:xfrm>
+          <a:prstGeom prst="rect">
+            <a:avLst/>
+          </a:prstGeom>
+          <a:noFill/>
+          <a:ln/>
+        </p:spPr>
+        <p:txBody>
+          <a:bodyPr wrap="square" lIns="0" tIns="0" rIns="0" bIns="0" rtlCol="0" anchor="ctr"/>
+          <a:lstStyle/>
+          <a:p>
+            <a:pPr marL="0" indent="0">
+              <a:buNone/>
+            </a:pPr>
+            <a:r>
+              <a:rPr lang="en-US" sz="1300" b="1" dirty="0">
+                <a:solidFill>
+                  <a:srgbClr val="0F172A"/>
+                </a:solidFill>
+                <a:latin typeface="Calibri" pitchFamily="34" charset="0"/>
+                <a:ea typeface="Calibri" pitchFamily="34" charset="-122"/>
+                <a:cs typeface="Calibri" pitchFamily="34" charset="-120"/>
+              </a:rPr>
+              <a:t>Serial # (serial_num)</a:t>
+            </a:r>
+            <a:endParaRPr lang="en-US" sz="1300" dirty="0"/>
+          </a:p>
+        </p:txBody>
+      </p:sp>
+      <p:sp>
+        <p:nvSpPr>
+          <p:cNvPr id="28" name="Text 25"/>
+          <p:cNvSpPr/>
+          <p:nvPr/>
+        </p:nvSpPr>
+        <p:spPr>
+          <a:xfrm>
+            <a:off x="3986693" y="3819856"/>
+            <a:ext cx="7290603" cy="400000"/>
+          </a:xfrm>
+          <a:prstGeom prst="rect">
+            <a:avLst/>
+          </a:prstGeom>
+          <a:noFill/>
+          <a:ln/>
+        </p:spPr>
+        <p:txBody>
+          <a:bodyPr wrap="square" lIns="0" tIns="0" rIns="0" bIns="0" rtlCol="0" anchor="ctr"/>
+          <a:lstStyle/>
+          <a:p>
+            <a:pPr marL="0" indent="0">
+              <a:buNone/>
+            </a:pPr>
+            <a:r>
+              <a:rPr lang="en-US" sz="1300" dirty="0">
+                <a:solidFill>
+                  <a:srgbClr val="0F172A"/>
+                </a:solidFill>
+                <a:latin typeface="Calibri" pitchFamily="34" charset="0"/>
+                <a:ea typeface="Calibri" pitchFamily="34" charset="-122"/>
+                <a:cs typeface="Calibri" pitchFamily="34" charset="-120"/>
+              </a:rPr>
+              <a:t>Free-text field (char, 50) — already built; previously just copied into the Notes section on the legacy 3-form process.</a:t>
+            </a:r>
+            <a:endParaRPr lang="en-US" sz="1300" dirty="0"/>
+          </a:p>
+        </p:txBody>
+      </p:sp>
+      <p:sp>
+        <p:nvSpPr>
+          <p:cNvPr id="29" name="Shape 26"/>
+          <p:cNvSpPr/>
+          <p:nvPr/>
+        </p:nvSpPr>
+        <p:spPr>
+          <a:xfrm>
+            <a:off x="822960" y="4219856"/>
+            <a:ext cx="10545775" cy="0"/>
+          </a:xfrm>
+          <a:prstGeom prst="line">
+            <a:avLst/>
+          </a:prstGeom>
+          <a:noFill/>
+          <a:ln w="9525">
+            <a:solidFill>
+              <a:srgbClr val="E2E8F0"/>
+            </a:solidFill>
+            <a:prstDash val="solid"/>
+          </a:ln>
+        </p:spPr>
+        <p:txBody>
+          <a:bodyPr/>
+          <a:lstStyle/>
+          <a:p>
+            <a:endParaRPr lang="en-US" dirty="0"/>
+          </a:p>
+        </p:txBody>
+      </p:sp>
+      <p:sp>
+        <p:nvSpPr>
+          <p:cNvPr id="15" name="Text 12"/>
+          <p:cNvSpPr/>
+          <p:nvPr/>
+        </p:nvSpPr>
+        <p:spPr>
+          <a:xfrm>
+            <a:off x="932688" y="4219856"/>
+            <a:ext cx="3054005" cy="400000"/>
+          </a:xfrm>
+          <a:prstGeom prst="rect">
+            <a:avLst/>
+          </a:prstGeom>
+          <a:noFill/>
+          <a:ln/>
+        </p:spPr>
+        <p:txBody>
+          <a:bodyPr wrap="square" lIns="0" tIns="0" rIns="0" bIns="0" rtlCol="0" anchor="ctr"/>
+          <a:lstStyle/>
+          <a:p>
+            <a:pPr marL="0" indent="0">
+              <a:buNone/>
+            </a:pPr>
+            <a:r>
+              <a:rPr lang="en-US" sz="1300" b="1" dirty="0">
+                <a:solidFill>
+                  <a:srgbClr val="0F172A"/>
+                </a:solidFill>
+                <a:latin typeface="Calibri" pitchFamily="34" charset="0"/>
+                <a:ea typeface="Calibri" pitchFamily="34" charset="-122"/>
+                <a:cs typeface="Calibri" pitchFamily="34" charset="-120"/>
+              </a:rPr>
+              <a:t>Lot # (lot_num)</a:t>
+            </a:r>
+            <a:endParaRPr lang="en-US" sz="1300" dirty="0"/>
+          </a:p>
+        </p:txBody>
+      </p:sp>
+      <p:sp>
+        <p:nvSpPr>
+          <p:cNvPr id="16" name="Text 13"/>
+          <p:cNvSpPr/>
+          <p:nvPr/>
+        </p:nvSpPr>
+        <p:spPr>
+          <a:xfrm>
+            <a:off x="3986693" y="4219856"/>
+            <a:ext cx="7290603" cy="400000"/>
+          </a:xfrm>
+          <a:prstGeom prst="rect">
+            <a:avLst/>
+          </a:prstGeom>
+          <a:noFill/>
+          <a:ln/>
+        </p:spPr>
+        <p:txBody>
+          <a:bodyPr wrap="square" lIns="0" tIns="0" rIns="0" bIns="0" rtlCol="0" anchor="ctr"/>
+          <a:lstStyle/>
+          <a:p>
+            <a:pPr marL="0" indent="0">
+              <a:buNone/>
+            </a:pPr>
+            <a:r>
+              <a:rPr lang="en-US" sz="1300" dirty="0">
+                <a:solidFill>
+                  <a:srgbClr val="0F172A"/>
+                </a:solidFill>
+                <a:latin typeface="Calibri" pitchFamily="34" charset="0"/>
+                <a:ea typeface="Calibri" pitchFamily="34" charset="-122"/>
+                <a:cs typeface="Calibri" pitchFamily="34" charset="-120"/>
+              </a:rPr>
+              <a:t>Free-text field (char, 50) — already built, same as Serial #.</a:t>
+            </a:r>
+            <a:endParaRPr lang="en-US" sz="1300" dirty="0"/>
+          </a:p>
+        </p:txBody>
+      </p:sp>
+      <p:sp>
+        <p:nvSpPr>
+          <p:cNvPr id="17" name="Shape 14"/>
+          <p:cNvSpPr/>
+          <p:nvPr/>
+        </p:nvSpPr>
+        <p:spPr>
+          <a:xfrm>
+            <a:off x="822960" y="4619856"/>
+            <a:ext cx="10545775" cy="0"/>
+          </a:xfrm>
+          <a:prstGeom prst="line">
+            <a:avLst/>
+          </a:prstGeom>
+          <a:noFill/>
+          <a:ln w="9525">
+            <a:solidFill>
+              <a:srgbClr val="E2E8F0"/>
+            </a:solidFill>
+            <a:prstDash val="solid"/>
+          </a:ln>
+        </p:spPr>
+        <p:txBody>
+          <a:bodyPr/>
+          <a:lstStyle/>
+          <a:p>
+            <a:endParaRPr lang="en-US" dirty="0"/>
+          </a:p>
+        </p:txBody>
+      </p:sp>
+      <p:sp>
+        <p:nvSpPr>
+          <p:cNvPr id="18" name="Text 15"/>
+          <p:cNvSpPr/>
+          <p:nvPr/>
+        </p:nvSpPr>
+        <p:spPr>
+          <a:xfrm>
+            <a:off x="932688" y="4619856"/>
+            <a:ext cx="3054005" cy="400000"/>
+          </a:xfrm>
+          <a:prstGeom prst="rect">
+            <a:avLst/>
+          </a:prstGeom>
+          <a:noFill/>
+          <a:ln/>
+        </p:spPr>
+        <p:txBody>
+          <a:bodyPr wrap="square" lIns="0" tIns="0" rIns="0" bIns="0" rtlCol="0" anchor="ctr"/>
+          <a:lstStyle/>
+          <a:p>
+            <a:pPr marL="0" indent="0">
+              <a:buNone/>
+            </a:pPr>
+            <a:r>
+              <a:rPr lang="en-US" sz="1300" b="1" dirty="0">
+                <a:solidFill>
+                  <a:srgbClr val="0F172A"/>
+                </a:solidFill>
+                <a:latin typeface="Calibri" pitchFamily="34" charset="0"/>
+                <a:ea typeface="Calibri" pitchFamily="34" charset="-122"/>
+                <a:cs typeface="Calibri" pitchFamily="34" charset="-120"/>
+              </a:rPr>
+              <a:t>Top Level PN</a:t>
+            </a:r>
+            <a:endParaRPr lang="en-US" sz="1300" dirty="0"/>
+          </a:p>
+        </p:txBody>
+      </p:sp>
+      <p:sp>
+        <p:nvSpPr>
+          <p:cNvPr id="19" name="Text 16"/>
+          <p:cNvSpPr/>
+          <p:nvPr/>
+        </p:nvSpPr>
+        <p:spPr>
+          <a:xfrm>
+            <a:off x="3986693" y="4619856"/>
+            <a:ext cx="7290603" cy="400000"/>
+          </a:xfrm>
+          <a:prstGeom prst="rect">
+            <a:avLst/>
+          </a:prstGeom>
+          <a:noFill/>
+          <a:ln/>
+        </p:spPr>
+        <p:txBody>
+          <a:bodyPr wrap="square" lIns="0" tIns="0" rIns="0" bIns="0" rtlCol="0" anchor="ctr"/>
+          <a:lstStyle/>
+          <a:p>
+            <a:pPr marL="0" indent="0">
+              <a:buNone/>
+            </a:pPr>
+            <a:r>
+              <a:rPr lang="en-US" sz="1300" dirty="0">
+                <a:solidFill>
+                  <a:srgbClr val="0F172A"/>
+                </a:solidFill>
+                <a:latin typeface="Calibri" pitchFamily="34" charset="0"/>
+                <a:ea typeface="Calibri" pitchFamily="34" charset="-122"/>
+                <a:cs typeface="Calibri" pitchFamily="34" charset="-120"/>
+              </a:rPr>
+              <a:t>Not yet built — needs a new column, IDO property, and form control.</a:t>
+            </a:r>
+            <a:endParaRPr lang="en-US" sz="1300" dirty="0"/>
+          </a:p>
+        </p:txBody>
+      </p:sp>
+      <p:sp>
+        <p:nvSpPr>
+          <p:cNvPr id="20" name="Shape 17"/>
+          <p:cNvSpPr/>
+          <p:nvPr/>
+        </p:nvSpPr>
+        <p:spPr>
+          <a:xfrm>
+            <a:off x="822960" y="5019856"/>
+            <a:ext cx="10545775" cy="0"/>
+          </a:xfrm>
+          <a:prstGeom prst="line">
+            <a:avLst/>
+          </a:prstGeom>
+          <a:noFill/>
+          <a:ln w="9525">
+            <a:solidFill>
+              <a:srgbClr val="E2E8F0"/>
+            </a:solidFill>
+            <a:prstDash val="solid"/>
+          </a:ln>
+        </p:spPr>
+        <p:txBody>
+          <a:bodyPr/>
+          <a:lstStyle/>
+          <a:p>
+            <a:endParaRPr lang="en-US" dirty="0"/>
+          </a:p>
+        </p:txBody>
+      </p:sp>
+      <p:sp>
+        <p:nvSpPr>
+          <p:cNvPr id="21" name="Text 18"/>
+          <p:cNvSpPr/>
+          <p:nvPr/>
+        </p:nvSpPr>
+        <p:spPr>
+          <a:xfrm>
+            <a:off x="932688" y="5019856"/>
+            <a:ext cx="3054005" cy="400000"/>
+          </a:xfrm>
+          <a:prstGeom prst="rect">
+            <a:avLst/>
+          </a:prstGeom>
+          <a:noFill/>
+          <a:ln/>
+        </p:spPr>
+        <p:txBody>
+          <a:bodyPr wrap="square" lIns="0" tIns="0" rIns="0" bIns="0" rtlCol="0" anchor="ctr"/>
+          <a:lstStyle/>
+          <a:p>
+            <a:pPr marL="0" indent="0">
+              <a:buNone/>
+            </a:pPr>
+            <a:r>
+              <a:rPr lang="en-US" sz="1300" b="1" dirty="0">
+                <a:solidFill>
+                  <a:srgbClr val="0F172A"/>
+                </a:solidFill>
+                <a:latin typeface="Calibri" pitchFamily="34" charset="0"/>
+                <a:ea typeface="Calibri" pitchFamily="34" charset="-122"/>
+                <a:cs typeface="Calibri" pitchFamily="34" charset="-120"/>
+              </a:rPr>
+              <a:t>Sub Assembly</a:t>
+            </a:r>
+            <a:endParaRPr lang="en-US" sz="1300" dirty="0"/>
+          </a:p>
+        </p:txBody>
+      </p:sp>
+      <p:sp>
+        <p:nvSpPr>
+          <p:cNvPr id="22" name="Text 19"/>
+          <p:cNvSpPr/>
+          <p:nvPr/>
+        </p:nvSpPr>
+        <p:spPr>
+          <a:xfrm>
+            <a:off x="3986693" y="5019856"/>
+            <a:ext cx="7290603" cy="400000"/>
+          </a:xfrm>
+          <a:prstGeom prst="rect">
+            <a:avLst/>
+          </a:prstGeom>
+          <a:noFill/>
+          <a:ln/>
+        </p:spPr>
+        <p:txBody>
+          <a:bodyPr wrap="square" lIns="0" tIns="0" rIns="0" bIns="0" rtlCol="0" anchor="ctr"/>
+          <a:lstStyle/>
+          <a:p>
+            <a:pPr marL="0" indent="0">
+              <a:buNone/>
+            </a:pPr>
+            <a:r>
+              <a:rPr lang="en-US" sz="1300" dirty="0">
+                <a:solidFill>
+                  <a:srgbClr val="0F172A"/>
+                </a:solidFill>
+                <a:latin typeface="Calibri" pitchFamily="34" charset="0"/>
+                <a:ea typeface="Calibri" pitchFamily="34" charset="-122"/>
+                <a:cs typeface="Calibri" pitchFamily="34" charset="-120"/>
+              </a:rPr>
+              <a:t>Not yet built — open question whether this is the same concept as the existing next_assy_item (Next Level Assembly) or a distinct field.</a:t>
+            </a:r>
+            <a:endParaRPr lang="en-US" sz="1300" dirty="0"/>
+          </a:p>
+        </p:txBody>
+      </p:sp>
+      <p:sp>
+        <p:nvSpPr>
+          <p:cNvPr id="23" name="Shape 20"/>
+          <p:cNvSpPr/>
+          <p:nvPr/>
+        </p:nvSpPr>
+        <p:spPr>
+          <a:xfrm>
+            <a:off x="822960" y="5419856"/>
+            <a:ext cx="10545775" cy="0"/>
+          </a:xfrm>
+          <a:prstGeom prst="line">
+            <a:avLst/>
+          </a:prstGeom>
+          <a:noFill/>
+          <a:ln w="9525">
+            <a:solidFill>
+              <a:srgbClr val="E2E8F0"/>
+            </a:solidFill>
+            <a:prstDash val="solid"/>
+          </a:ln>
+        </p:spPr>
+        <p:txBody>
+          <a:bodyPr/>
+          <a:lstStyle/>
+          <a:p>
+            <a:endParaRPr lang="en-US" dirty="0"/>
+          </a:p>
+        </p:txBody>
+      </p:sp>
+      <p:sp>
+        <p:nvSpPr>
+          <p:cNvPr id="24" name="Text 21"/>
+          <p:cNvSpPr/>
+          <p:nvPr/>
+        </p:nvSpPr>
+        <p:spPr>
+          <a:xfrm>
+            <a:off x="932688" y="5419856"/>
+            <a:ext cx="3054005" cy="400000"/>
+          </a:xfrm>
+          <a:prstGeom prst="rect">
+            <a:avLst/>
+          </a:prstGeom>
+          <a:noFill/>
+          <a:ln/>
+        </p:spPr>
+        <p:txBody>
+          <a:bodyPr wrap="square" lIns="0" tIns="0" rIns="0" bIns="0" rtlCol="0" anchor="ctr"/>
+          <a:lstStyle/>
+          <a:p>
+            <a:pPr marL="0" indent="0">
+              <a:buNone/>
+            </a:pPr>
+            <a:r>
+              <a:rPr lang="en-US" sz="1300" b="1" dirty="0">
+                <a:solidFill>
+                  <a:srgbClr val="0F172A"/>
+                </a:solidFill>
+                <a:latin typeface="Calibri" pitchFamily="34" charset="0"/>
+                <a:ea typeface="Calibri" pitchFamily="34" charset="-122"/>
+                <a:cs typeface="Calibri" pitchFamily="34" charset="-120"/>
+              </a:rPr>
+              <a:t>Part (item)</a:t>
+            </a:r>
+            <a:endParaRPr lang="en-US" sz="1300" dirty="0"/>
+          </a:p>
+        </p:txBody>
+      </p:sp>
+      <p:sp>
+        <p:nvSpPr>
+          <p:cNvPr id="25" name="Text 22"/>
+          <p:cNvSpPr/>
+          <p:nvPr/>
+        </p:nvSpPr>
+        <p:spPr>
+          <a:xfrm>
+            <a:off x="3986693" y="5419856"/>
+            <a:ext cx="7290603" cy="400000"/>
+          </a:xfrm>
+          <a:prstGeom prst="rect">
+            <a:avLst/>
+          </a:prstGeom>
+          <a:noFill/>
+          <a:ln/>
+        </p:spPr>
+        <p:txBody>
+          <a:bodyPr wrap="square" lIns="0" tIns="0" rIns="0" bIns="0" rtlCol="0" anchor="ctr"/>
+          <a:lstStyle/>
+          <a:p>
+            <a:pPr marL="0" indent="0">
+              <a:buNone/>
+            </a:pPr>
+            <a:r>
+              <a:rPr lang="en-US" sz="1300" dirty="0">
+                <a:solidFill>
+                  <a:srgbClr val="0F172A"/>
+                </a:solidFill>
+                <a:latin typeface="Calibri" pitchFamily="34" charset="0"/>
+                <a:ea typeface="Calibri" pitchFamily="34" charset="-122"/>
+                <a:cs typeface="Calibri" pitchFamily="34" charset="-120"/>
+              </a:rPr>
+              <a:t>Already built as the Item combo — covered on the previous Design slide.</a:t>
+            </a:r>
+            <a:endParaRPr lang="en-US" sz="1300" dirty="0"/>
+          </a:p>
+        </p:txBody>
+      </p:sp>
+      <p:sp>
+        <p:nvSpPr>
+          <p:cNvPr id="101" name="Shape 101"/>
+          <p:cNvSpPr/>
+          <p:nvPr/>
+        </p:nvSpPr>
+        <p:spPr>
+          <a:xfrm>
+            <a:off x="822960" y="5819856"/>
+            <a:ext cx="10545775" cy="0"/>
+          </a:xfrm>
+          <a:prstGeom prst="line">
+            <a:avLst/>
+          </a:prstGeom>
+          <a:noFill/>
+          <a:ln w="9525">
+            <a:solidFill>
+              <a:srgbClr val="E2E8F0"/>
+            </a:solidFill>
+            <a:prstDash val="solid"/>
+          </a:ln>
+        </p:spPr>
+        <p:txBody>
+          <a:bodyPr/>
+          <a:lstStyle/>
+          <a:p>
+            <a:endParaRPr lang="en-US" dirty="0"/>
           </a:p>
         </p:txBody>
       </p:sp>

--- a/docs/presentations/eCMRs_plan.pptx
+++ b/docs/presentations/eCMRs_plan.pptx
@@ -3697,7 +3697,7 @@
                 <a:ea typeface="Calibri" pitchFamily="34" charset="-122"/>
                 <a:cs typeface="Calibri" pitchFamily="34" charset="-120"/>
               </a:rPr>
-              <a:t>Top Level PN</a:t>
+              <a:t>Top Level PN (top_level_pn)</a:t>
             </a:r>
             <a:endParaRPr lang="en-US" sz="1300" dirty="0"/>
           </a:p>
@@ -3736,7 +3736,7 @@
                 <a:ea typeface="Calibri" pitchFamily="34" charset="-122"/>
                 <a:cs typeface="Calibri" pitchFamily="34" charset="-120"/>
               </a:rPr>
-              <a:t>Not yet built — needs a new column, IDO property, and form control.</a:t>
+              <a:t>Free-text field (char, 30) — built, highlighted purple on the form as a new field.</a:t>
             </a:r>
             <a:endParaRPr lang="en-US" sz="1300" dirty="0"/>
           </a:p>
@@ -3805,7 +3805,7 @@
                 <a:ea typeface="Calibri" pitchFamily="34" charset="-122"/>
                 <a:cs typeface="Calibri" pitchFamily="34" charset="-120"/>
               </a:rPr>
-              <a:t>Sub Assembly</a:t>
+              <a:t>Sub Assembly (sub_assembly)</a:t>
             </a:r>
             <a:endParaRPr lang="en-US" sz="1300" dirty="0"/>
           </a:p>
@@ -3844,7 +3844,7 @@
                 <a:ea typeface="Calibri" pitchFamily="34" charset="-122"/>
                 <a:cs typeface="Calibri" pitchFamily="34" charset="-120"/>
               </a:rPr>
-              <a:t>Not yet built — open question whether this is the same concept as the existing next_assy_item (Next Level Assembly) or a distinct field.</a:t>
+              <a:t>Free-text field (char, 30), built distinct from Next Lvl Assy — still an open question whether they’re the same concept.</a:t>
             </a:r>
             <a:endParaRPr lang="en-US" sz="1300" dirty="0"/>
           </a:p>

--- a/docs/presentations/eCMRs_plan.pptx
+++ b/docs/presentations/eCMRs_plan.pptx
@@ -1496,91 +1496,57 @@
           <a:chExt cx="0" cy="0"/>
         </a:xfrm>
       </p:grpSpPr>
-      <p:sp>
-        <p:nvSpPr>
-          <p:cNvPr id="2" name="Shape 0"/>
-          <p:cNvSpPr/>
-          <p:nvPr/>
-        </p:nvSpPr>
-        <p:spPr>
-          <a:xfrm>
-            <a:off x="8778240" y="-1097280"/>
-            <a:ext cx="4754880" cy="4754880"/>
-          </a:xfrm>
-          <a:prstGeom prst="ellipse">
-            <a:avLst/>
-          </a:prstGeom>
-          <a:solidFill>
-            <a:srgbClr val="252525"/>
-          </a:solidFill>
-          <a:ln/>
-        </p:spPr>
-        <p:txBody>
-          <a:bodyPr/>
-          <a:lstStyle/>
-          <a:p>
-            <a:endParaRPr lang="en-US" dirty="0"/>
-          </a:p>
-        </p:txBody>
-      </p:sp>
-      <p:sp>
-        <p:nvSpPr>
-          <p:cNvPr id="3" name="Shape 1"/>
-          <p:cNvSpPr/>
-          <p:nvPr/>
-        </p:nvSpPr>
-        <p:spPr>
-          <a:xfrm>
-            <a:off x="9509760" y="640080"/>
-            <a:ext cx="1645920" cy="1645920"/>
-          </a:xfrm>
-          <a:prstGeom prst="roundRect">
-            <a:avLst>
-              <a:gd name="adj" fmla="val 6667"/>
-            </a:avLst>
-          </a:prstGeom>
-          <a:solidFill>
-            <a:srgbClr val="B41832"/>
-          </a:solidFill>
-          <a:ln w="12700">
-            <a:solidFill>
-              <a:srgbClr val="B41832"/>
-            </a:solidFill>
-            <a:prstDash val="solid"/>
-          </a:ln>
-        </p:spPr>
-        <p:txBody>
-          <a:bodyPr/>
-          <a:lstStyle/>
-          <a:p>
-            <a:endParaRPr lang="en-US" dirty="0"/>
-          </a:p>
-        </p:txBody>
-      </p:sp>
       <p:pic>
         <p:nvPicPr>
-          <p:cNvPr id="4" name="Image 0" descr="icons/clipboard.png"/>
+          <p:cNvPr id="20" name="Enflite Logo" descr="Enflite logo"/>
           <p:cNvPicPr>
             <a:picLocks noChangeAspect="1"/>
           </p:cNvPicPr>
           <p:nvPr/>
         </p:nvPicPr>
         <p:blipFill>
-          <a:blip r:embed="rId3"/>
+          <a:blip r:embed="rId4"/>
           <a:stretch>
             <a:fillRect/>
           </a:stretch>
         </p:blipFill>
         <p:spPr>
           <a:xfrm>
-            <a:off x="9921240" y="1051560"/>
-            <a:ext cx="822960" cy="822960"/>
+            <a:off x="457200" y="457200"/>
+            <a:ext cx="2743200" cy="572798"/>
           </a:xfrm>
           <a:prstGeom prst="rect">
             <a:avLst/>
           </a:prstGeom>
         </p:spPr>
       </p:pic>
+      <p:sp>
+        <p:nvSpPr>
+          <p:cNvPr id="2" name="Shape 0"/>
+          <p:cNvSpPr/>
+          <p:nvPr/>
+        </p:nvSpPr>
+        <p:spPr>
+          <a:xfrm>
+            <a:off x="8778240" y="-1097280"/>
+            <a:ext cx="4754880" cy="4754880"/>
+          </a:xfrm>
+          <a:prstGeom prst="ellipse">
+            <a:avLst/>
+          </a:prstGeom>
+          <a:solidFill>
+            <a:srgbClr val="252525"/>
+          </a:solidFill>
+          <a:ln/>
+        </p:spPr>
+        <p:txBody>
+          <a:bodyPr/>
+          <a:lstStyle/>
+          <a:p>
+            <a:endParaRPr lang="en-US" dirty="0"/>
+          </a:p>
+        </p:txBody>
+      </p:sp>
       <p:sp>
         <p:nvSpPr>
           <p:cNvPr id="5" name="Text 2"/>
@@ -1608,7 +1574,7 @@
             <a:r>
               <a:rPr lang="en-US" sz="1400" b="1" kern="0" spc="200" dirty="0">
                 <a:solidFill>
-                  <a:srgbClr val="B41832"/>
+                  <a:srgbClr val="CF0C2C"/>
                 </a:solidFill>
                 <a:latin typeface="Calibri" pitchFamily="34" charset="0"/>
                 <a:ea typeface="Calibri" pitchFamily="34" charset="-122"/>
@@ -1645,13 +1611,13 @@
               <a:buNone/>
             </a:pPr>
             <a:r>
-              <a:rPr lang="en-US" sz="6000" b="1" dirty="0">
+              <a:rPr lang="en-US" sz="6000" dirty="0">
                 <a:solidFill>
                   <a:srgbClr val="FFFFFF"/>
                 </a:solidFill>
-                <a:latin typeface="Segoe UI Semibold" pitchFamily="34" charset="0"/>
-                <a:ea typeface="Segoe UI Semibold" pitchFamily="34" charset="-122"/>
-                <a:cs typeface="Segoe UI Semibold" pitchFamily="34" charset="-120"/>
+                <a:latin typeface="Segoe UI Light" pitchFamily="34" charset="0"/>
+                <a:ea typeface="Segoe UI Light" pitchFamily="34" charset="-122"/>
+                <a:cs typeface="Segoe UI Light" pitchFamily="34" charset="-120"/>
               </a:rPr>
               <a:t>CMRs plan</a:t>
             </a:r>
@@ -1756,13 +1722,13 @@
               <a:buNone/>
             </a:pPr>
             <a:r>
-              <a:rPr lang="en-US" sz="3400" b="1" dirty="0">
+              <a:rPr lang="en-US" sz="3400" dirty="0">
                 <a:solidFill>
                   <a:srgbClr val="1A1A1A"/>
                 </a:solidFill>
-                <a:latin typeface="Segoe UI Semibold" pitchFamily="34" charset="0"/>
-                <a:ea typeface="Segoe UI Semibold" pitchFamily="34" charset="-122"/>
-                <a:cs typeface="Segoe UI Semibold" pitchFamily="34" charset="-120"/>
+                <a:latin typeface="Segoe UI Light" pitchFamily="34" charset="0"/>
+                <a:ea typeface="Segoe UI Light" pitchFamily="34" charset="-122"/>
+                <a:cs typeface="Segoe UI Light" pitchFamily="34" charset="-120"/>
               </a:rPr>
               <a:t>Staging</a:t>
             </a:r>
@@ -1825,14 +1791,9 @@
               <a:gd name="adj" fmla="val 8000"/>
             </a:avLst>
           </a:prstGeom>
-          <a:solidFill>
-            <a:srgbClr val="F8E8EA"/>
-          </a:solidFill>
-          <a:ln w="12700">
-            <a:solidFill>
-              <a:srgbClr val="E5E5E5"/>
-            </a:solidFill>
-            <a:prstDash val="solid"/>
+          <a:noFill/>
+          <a:ln>
+            <a:noFill/>
           </a:ln>
         </p:spPr>
         <p:txBody>
@@ -1883,22 +1844,10 @@
               <a:gd name="adj" fmla="val 2581"/>
             </a:avLst>
           </a:prstGeom>
-          <a:solidFill>
-            <a:srgbClr val="FFFFFF"/>
-          </a:solidFill>
-          <a:ln w="12700">
-            <a:solidFill>
-              <a:srgbClr val="E5E5E5"/>
-            </a:solidFill>
-            <a:prstDash val="solid"/>
+          <a:noFill/>
+          <a:ln>
+            <a:noFill/>
           </a:ln>
-          <a:effectLst>
-            <a:outerShdw blurRad="152400" dist="38100" dir="5400000" algn="bl" rotWithShape="0">
-              <a:srgbClr val="252525">
-                <a:alpha val="8000"/>
-              </a:srgbClr>
-            </a:outerShdw>
-          </a:effectLst>
         </p:spPr>
         <p:txBody>
           <a:bodyPr/>
@@ -1935,7 +1884,7 @@
             <a:r>
               <a:rPr lang="en-US" sz="1500" b="1" dirty="0">
                 <a:solidFill>
-                  <a:srgbClr val="B41832"/>
+                  <a:srgbClr val="CF0C2C"/>
                 </a:solidFill>
                 <a:latin typeface="Calibri" pitchFamily="34" charset="0"/>
                 <a:ea typeface="Calibri" pitchFamily="34" charset="-122"/>
@@ -1974,7 +1923,7 @@
             <a:r>
               <a:rPr lang="en-US" sz="1500" b="1" dirty="0">
                 <a:solidFill>
-                  <a:srgbClr val="B41832"/>
+                  <a:srgbClr val="CF0C2C"/>
                 </a:solidFill>
                 <a:latin typeface="Calibri" pitchFamily="34" charset="0"/>
                 <a:ea typeface="Calibri" pitchFamily="34" charset="-122"/>
@@ -2052,7 +2001,7 @@
             <a:r>
               <a:rPr lang="en-US" sz="1500" b="1" dirty="0">
                 <a:solidFill>
-                  <a:srgbClr val="B41832"/>
+                  <a:srgbClr val="CF0C2C"/>
                 </a:solidFill>
                 <a:latin typeface="Calibri" pitchFamily="34" charset="0"/>
                 <a:ea typeface="Calibri" pitchFamily="34" charset="-122"/>
@@ -2130,7 +2079,7 @@
             <a:r>
               <a:rPr lang="en-US" sz="1500" b="1" dirty="0">
                 <a:solidFill>
-                  <a:srgbClr val="B41832"/>
+                  <a:srgbClr val="CF0C2C"/>
                 </a:solidFill>
                 <a:latin typeface="Calibri" pitchFamily="34" charset="0"/>
                 <a:ea typeface="Calibri" pitchFamily="34" charset="-122"/>
@@ -2208,7 +2157,7 @@
             <a:r>
               <a:rPr lang="en-US" sz="1500" b="1" dirty="0">
                 <a:solidFill>
-                  <a:srgbClr val="B41832"/>
+                  <a:srgbClr val="CF0C2C"/>
                 </a:solidFill>
                 <a:latin typeface="Calibri" pitchFamily="34" charset="0"/>
                 <a:ea typeface="Calibri" pitchFamily="34" charset="-122"/>
@@ -2291,7 +2240,7 @@
             <a:r>
               <a:rPr lang="en-US" sz="1500" b="1" dirty="0">
                 <a:solidFill>
-                  <a:srgbClr val="B41832"/>
+                  <a:srgbClr val="CF0C2C"/>
                 </a:solidFill>
                 <a:latin typeface="Calibri" pitchFamily="34" charset="0"/>
                 <a:ea typeface="Calibri" pitchFamily="34" charset="-122"/>
@@ -2396,14 +2345,9 @@
               <a:gd name="adj" fmla="val 8000"/>
             </a:avLst>
           </a:prstGeom>
-          <a:solidFill>
-            <a:srgbClr val="F8E8EA"/>
-          </a:solidFill>
-          <a:ln w="12700">
-            <a:solidFill>
-              <a:srgbClr val="E5E5E5"/>
-            </a:solidFill>
-            <a:prstDash val="solid"/>
+          <a:noFill/>
+          <a:ln>
+            <a:noFill/>
           </a:ln>
         </p:spPr>
         <p:txBody>
@@ -2463,13 +2407,13 @@
               <a:buNone/>
             </a:pPr>
             <a:r>
-              <a:rPr lang="en-US" sz="3600" b="1" dirty="0">
+              <a:rPr lang="en-US" sz="3600" dirty="0">
                 <a:solidFill>
                   <a:srgbClr val="1A1A1A"/>
                 </a:solidFill>
-                <a:latin typeface="Segoe UI Semibold" pitchFamily="34" charset="0"/>
-                <a:ea typeface="Segoe UI Semibold" pitchFamily="34" charset="-122"/>
-                <a:cs typeface="Segoe UI Semibold" pitchFamily="34" charset="-120"/>
+                <a:latin typeface="Segoe UI Light" pitchFamily="34" charset="0"/>
+                <a:ea typeface="Segoe UI Light" pitchFamily="34" charset="-122"/>
+                <a:cs typeface="Segoe UI Light" pitchFamily="34" charset="-120"/>
               </a:rPr>
               <a:t>Migrating the old CMR data</a:t>
             </a:r>
@@ -2532,22 +2476,10 @@
               <a:gd name="adj" fmla="val 6486"/>
             </a:avLst>
           </a:prstGeom>
-          <a:solidFill>
-            <a:srgbClr val="FFFFFF"/>
-          </a:solidFill>
-          <a:ln w="12700">
-            <a:solidFill>
-              <a:srgbClr val="E5E5E5"/>
-            </a:solidFill>
-            <a:prstDash val="solid"/>
+          <a:noFill/>
+          <a:ln>
+            <a:noFill/>
           </a:ln>
-          <a:effectLst>
-            <a:outerShdw blurRad="152400" dist="38100" dir="5400000" algn="bl" rotWithShape="0">
-              <a:srgbClr val="252525">
-                <a:alpha val="8000"/>
-              </a:srgbClr>
-            </a:outerShdw>
-          </a:effectLst>
         </p:spPr>
         <p:txBody>
           <a:bodyPr/>
@@ -2698,22 +2630,10 @@
               <a:gd name="adj" fmla="val 6486"/>
             </a:avLst>
           </a:prstGeom>
-          <a:solidFill>
-            <a:srgbClr val="FFFFFF"/>
-          </a:solidFill>
-          <a:ln w="12700">
-            <a:solidFill>
-              <a:srgbClr val="E5E5E5"/>
-            </a:solidFill>
-            <a:prstDash val="solid"/>
+          <a:noFill/>
+          <a:ln>
+            <a:noFill/>
           </a:ln>
-          <a:effectLst>
-            <a:outerShdw blurRad="152400" dist="38100" dir="5400000" algn="bl" rotWithShape="0">
-              <a:srgbClr val="252525">
-                <a:alpha val="8000"/>
-              </a:srgbClr>
-            </a:outerShdw>
-          </a:effectLst>
         </p:spPr>
         <p:txBody>
           <a:bodyPr/>
@@ -2820,22 +2740,10 @@
               <a:gd name="adj" fmla="val 4364"/>
             </a:avLst>
           </a:prstGeom>
-          <a:solidFill>
-            <a:srgbClr val="FFFFFF"/>
-          </a:solidFill>
-          <a:ln w="12700">
-            <a:solidFill>
-              <a:srgbClr val="E5E5E5"/>
-            </a:solidFill>
-            <a:prstDash val="solid"/>
+          <a:noFill/>
+          <a:ln>
+            <a:noFill/>
           </a:ln>
-          <a:effectLst>
-            <a:outerShdw blurRad="152400" dist="38100" dir="5400000" algn="bl" rotWithShape="0">
-              <a:srgbClr val="252525">
-                <a:alpha val="8000"/>
-              </a:srgbClr>
-            </a:outerShdw>
-          </a:effectLst>
         </p:spPr>
         <p:txBody>
           <a:bodyPr/>
@@ -2872,7 +2780,7 @@
             <a:r>
               <a:rPr lang="en-US" sz="1500" b="1" dirty="0">
                 <a:solidFill>
-                  <a:srgbClr val="B41832"/>
+                  <a:srgbClr val="CF0C2C"/>
                 </a:solidFill>
                 <a:latin typeface="Calibri" pitchFamily="34" charset="0"/>
                 <a:ea typeface="Calibri" pitchFamily="34" charset="-122"/>
@@ -2911,7 +2819,7 @@
             <a:r>
               <a:rPr lang="en-US" sz="1600" b="1" dirty="0">
                 <a:solidFill>
-                  <a:srgbClr val="B41832"/>
+                  <a:srgbClr val="CF0C2C"/>
                 </a:solidFill>
                 <a:latin typeface="Calibri" pitchFamily="34" charset="0"/>
                 <a:ea typeface="Calibri" pitchFamily="34" charset="-122"/>
@@ -2989,7 +2897,7 @@
             <a:r>
               <a:rPr lang="en-US" sz="1600" b="1" dirty="0">
                 <a:solidFill>
-                  <a:srgbClr val="B41832"/>
+                  <a:srgbClr val="CF0C2C"/>
                 </a:solidFill>
                 <a:latin typeface="Calibri" pitchFamily="34" charset="0"/>
                 <a:ea typeface="Calibri" pitchFamily="34" charset="-122"/>
@@ -3067,7 +2975,7 @@
             <a:r>
               <a:rPr lang="en-US" sz="1600" b="1" dirty="0">
                 <a:solidFill>
-                  <a:srgbClr val="B41832"/>
+                  <a:srgbClr val="CF0C2C"/>
                 </a:solidFill>
                 <a:latin typeface="Calibri" pitchFamily="34" charset="0"/>
                 <a:ea typeface="Calibri" pitchFamily="34" charset="-122"/>
@@ -3167,14 +3075,9 @@
               <a:gd name="adj" fmla="val 8000"/>
             </a:avLst>
           </a:prstGeom>
-          <a:solidFill>
-            <a:srgbClr val="F8E8EA"/>
-          </a:solidFill>
-          <a:ln w="12700">
-            <a:solidFill>
-              <a:srgbClr val="E5E5E5"/>
-            </a:solidFill>
-            <a:prstDash val="solid"/>
+          <a:noFill/>
+          <a:ln>
+            <a:noFill/>
           </a:ln>
         </p:spPr>
         <p:txBody>
@@ -3234,13 +3137,13 @@
               <a:buNone/>
             </a:pPr>
             <a:r>
-              <a:rPr lang="en-US" sz="3400" b="1" dirty="0">
+              <a:rPr lang="en-US" sz="3400" dirty="0">
                 <a:solidFill>
                   <a:srgbClr val="1A1A1A"/>
                 </a:solidFill>
-                <a:latin typeface="Segoe UI Semibold" pitchFamily="34" charset="0"/>
-                <a:ea typeface="Segoe UI Semibold" pitchFamily="34" charset="-122"/>
-                <a:cs typeface="Segoe UI Semibold" pitchFamily="34" charset="-120"/>
+                <a:latin typeface="Segoe UI Light" pitchFamily="34" charset="0"/>
+                <a:ea typeface="Segoe UI Light" pitchFamily="34" charset="-122"/>
+                <a:cs typeface="Segoe UI Light" pitchFamily="34" charset="-120"/>
               </a:rPr>
               <a:t>Launch</a:t>
             </a:r>
@@ -3303,22 +3206,10 @@
               <a:gd name="adj" fmla="val 2581"/>
             </a:avLst>
           </a:prstGeom>
-          <a:solidFill>
-            <a:srgbClr val="FFFFFF"/>
-          </a:solidFill>
-          <a:ln w="12700">
-            <a:solidFill>
-              <a:srgbClr val="E5E5E5"/>
-            </a:solidFill>
-            <a:prstDash val="solid"/>
+          <a:noFill/>
+          <a:ln>
+            <a:noFill/>
           </a:ln>
-          <a:effectLst>
-            <a:outerShdw blurRad="152400" dist="38100" dir="5400000" algn="bl" rotWithShape="0">
-              <a:srgbClr val="252525">
-                <a:alpha val="8000"/>
-              </a:srgbClr>
-            </a:outerShdw>
-          </a:effectLst>
         </p:spPr>
         <p:txBody>
           <a:bodyPr/>
@@ -3355,7 +3246,7 @@
             <a:r>
               <a:rPr lang="en-US" sz="1500" b="1" dirty="0">
                 <a:solidFill>
-                  <a:srgbClr val="B41832"/>
+                  <a:srgbClr val="CF0C2C"/>
                 </a:solidFill>
                 <a:latin typeface="Calibri" pitchFamily="34" charset="0"/>
                 <a:ea typeface="Calibri" pitchFamily="34" charset="-122"/>
@@ -3394,7 +3285,7 @@
             <a:r>
               <a:rPr lang="en-US" sz="1500" b="1" dirty="0">
                 <a:solidFill>
-                  <a:srgbClr val="B41832"/>
+                  <a:srgbClr val="CF0C2C"/>
                 </a:solidFill>
                 <a:latin typeface="Calibri" pitchFamily="34" charset="0"/>
                 <a:ea typeface="Calibri" pitchFamily="34" charset="-122"/>
@@ -3472,7 +3363,7 @@
             <a:r>
               <a:rPr lang="en-US" sz="1500" b="1" dirty="0">
                 <a:solidFill>
-                  <a:srgbClr val="B41832"/>
+                  <a:srgbClr val="CF0C2C"/>
                 </a:solidFill>
                 <a:latin typeface="Calibri" pitchFamily="34" charset="0"/>
                 <a:ea typeface="Calibri" pitchFamily="34" charset="-122"/>
@@ -3550,7 +3441,7 @@
             <a:r>
               <a:rPr lang="en-US" sz="1500" b="1" dirty="0">
                 <a:solidFill>
-                  <a:srgbClr val="B41832"/>
+                  <a:srgbClr val="CF0C2C"/>
                 </a:solidFill>
                 <a:latin typeface="Calibri" pitchFamily="34" charset="0"/>
                 <a:ea typeface="Calibri" pitchFamily="34" charset="-122"/>
@@ -3659,13 +3550,13 @@
               <a:buNone/>
             </a:pPr>
             <a:r>
-              <a:rPr lang="en-US" sz="3400" b="1" dirty="0">
+              <a:rPr lang="en-US" sz="3400" dirty="0">
                 <a:solidFill>
                   <a:srgbClr val="1A1A1A"/>
                 </a:solidFill>
-                <a:latin typeface="Segoe UI Semibold" pitchFamily="34" charset="0"/>
-                <a:ea typeface="Segoe UI Semibold" pitchFamily="34" charset="-122"/>
-                <a:cs typeface="Segoe UI Semibold" pitchFamily="34" charset="-120"/>
+                <a:latin typeface="Segoe UI Light" pitchFamily="34" charset="0"/>
+                <a:ea typeface="Segoe UI Light" pitchFamily="34" charset="-122"/>
+                <a:cs typeface="Segoe UI Light" pitchFamily="34" charset="-120"/>
               </a:rPr>
               <a:t>Test</a:t>
             </a:r>
@@ -3728,14 +3619,9 @@
               <a:gd name="adj" fmla="val 8000"/>
             </a:avLst>
           </a:prstGeom>
-          <a:solidFill>
-            <a:srgbClr val="F8E8EA"/>
-          </a:solidFill>
-          <a:ln w="12700">
-            <a:solidFill>
-              <a:srgbClr val="E5E5E5"/>
-            </a:solidFill>
-            <a:prstDash val="solid"/>
+          <a:noFill/>
+          <a:ln>
+            <a:noFill/>
           </a:ln>
         </p:spPr>
         <p:txBody>
@@ -3786,22 +3672,10 @@
               <a:gd name="adj" fmla="val 2581"/>
             </a:avLst>
           </a:prstGeom>
-          <a:solidFill>
-            <a:srgbClr val="FFFFFF"/>
-          </a:solidFill>
-          <a:ln w="12700">
-            <a:solidFill>
-              <a:srgbClr val="E5E5E5"/>
-            </a:solidFill>
-            <a:prstDash val="solid"/>
+          <a:noFill/>
+          <a:ln>
+            <a:noFill/>
           </a:ln>
-          <a:effectLst>
-            <a:outerShdw blurRad="152400" dist="38100" dir="5400000" algn="bl" rotWithShape="0">
-              <a:srgbClr val="252525">
-                <a:alpha val="8000"/>
-              </a:srgbClr>
-            </a:outerShdw>
-          </a:effectLst>
         </p:spPr>
         <p:txBody>
           <a:bodyPr/>
@@ -3838,7 +3712,7 @@
             <a:r>
               <a:rPr lang="en-US" sz="1500" b="1" dirty="0">
                 <a:solidFill>
-                  <a:srgbClr val="B41832"/>
+                  <a:srgbClr val="CF0C2C"/>
                 </a:solidFill>
                 <a:latin typeface="Calibri" pitchFamily="34" charset="0"/>
                 <a:ea typeface="Calibri" pitchFamily="34" charset="-122"/>
@@ -4081,11 +3955,11 @@
             </a:avLst>
           </a:prstGeom>
           <a:solidFill>
-            <a:srgbClr val="B41832"/>
+            <a:srgbClr val="CF0C2C"/>
           </a:solidFill>
           <a:ln w="12700">
             <a:solidFill>
-              <a:srgbClr val="B41832"/>
+              <a:srgbClr val="CF0C2C"/>
             </a:solidFill>
             <a:prstDash val="solid"/>
           </a:ln>
@@ -4147,13 +4021,13 @@
               <a:buNone/>
             </a:pPr>
             <a:r>
-              <a:rPr lang="en-US" sz="4800" b="1" dirty="0">
+              <a:rPr lang="en-US" sz="4800" dirty="0">
                 <a:solidFill>
                   <a:srgbClr val="FFFFFF"/>
                 </a:solidFill>
-                <a:latin typeface="Segoe UI Semibold" pitchFamily="34" charset="0"/>
-                <a:ea typeface="Segoe UI Semibold" pitchFamily="34" charset="-122"/>
-                <a:cs typeface="Segoe UI Semibold" pitchFamily="34" charset="-120"/>
+                <a:latin typeface="Segoe UI Light" pitchFamily="34" charset="0"/>
+                <a:ea typeface="Segoe UI Light" pitchFamily="34" charset="-122"/>
+                <a:cs typeface="Segoe UI Light" pitchFamily="34" charset="-120"/>
               </a:rPr>
               <a:t>Optimize</a:t>
             </a:r>
@@ -4261,7 +4135,7 @@
             <a:r>
               <a:rPr lang="en-US" sz="1500" b="1" dirty="0">
                 <a:solidFill>
-                  <a:srgbClr val="B41832"/>
+                  <a:srgbClr val="CF0C2C"/>
                 </a:solidFill>
                 <a:latin typeface="Calibri" pitchFamily="34" charset="0"/>
                 <a:ea typeface="Calibri" pitchFamily="34" charset="-122"/>
@@ -4399,22 +4273,10 @@
               <a:gd name="adj" fmla="val 1846"/>
             </a:avLst>
           </a:prstGeom>
-          <a:solidFill>
-            <a:srgbClr val="FFFFFF"/>
-          </a:solidFill>
-          <a:ln w="12700">
-            <a:solidFill>
-              <a:srgbClr val="E5E5E5"/>
-            </a:solidFill>
-            <a:prstDash val="solid"/>
+          <a:noFill/>
+          <a:ln>
+            <a:noFill/>
           </a:ln>
-          <a:effectLst>
-            <a:outerShdw blurRad="152400" dist="38100" dir="5400000" algn="bl" rotWithShape="0">
-              <a:srgbClr val="252525">
-                <a:alpha val="8000"/>
-              </a:srgbClr>
-            </a:outerShdw>
-          </a:effectLst>
         </p:spPr>
         <p:txBody>
           <a:bodyPr/>
@@ -4449,13 +4311,13 @@
               <a:buNone/>
             </a:pPr>
             <a:r>
-              <a:rPr lang="en-US" sz="3800" b="1" dirty="0">
+              <a:rPr lang="en-US" sz="3800" dirty="0">
                 <a:solidFill>
                   <a:srgbClr val="1A1A1A"/>
                 </a:solidFill>
-                <a:latin typeface="Segoe UI Semibold" pitchFamily="34" charset="0"/>
-                <a:ea typeface="Segoe UI Semibold" pitchFamily="34" charset="-122"/>
-                <a:cs typeface="Segoe UI Semibold" pitchFamily="34" charset="-120"/>
+                <a:latin typeface="Segoe UI Light" pitchFamily="34" charset="0"/>
+                <a:ea typeface="Segoe UI Light" pitchFamily="34" charset="-122"/>
+                <a:cs typeface="Segoe UI Light" pitchFamily="34" charset="-120"/>
               </a:rPr>
               <a:t>Eight milestones to production</a:t>
             </a:r>
@@ -4546,10 +4408,13 @@
           <a:prstGeom prst="ellipse">
             <a:avLst/>
           </a:prstGeom>
-          <a:solidFill>
-            <a:srgbClr val="B41832"/>
-          </a:solidFill>
-          <a:ln/>
+          <a:noFill/>
+          <a:ln w="19050">
+            <a:solidFill>
+              <a:srgbClr val="CF0C2C"/>
+            </a:solidFill>
+            <a:prstDash val="solid"/>
+          </a:ln>
         </p:spPr>
         <p:txBody>
           <a:bodyPr/>
@@ -4586,7 +4451,7 @@
             <a:r>
               <a:rPr lang="en-US" sz="1400" b="1" dirty="0">
                 <a:solidFill>
-                  <a:srgbClr val="FFFFFF"/>
+                  <a:srgbClr val="CF0C2C"/>
                 </a:solidFill>
                 <a:latin typeface="Calibri" pitchFamily="34" charset="0"/>
                 <a:ea typeface="Calibri" pitchFamily="34" charset="-122"/>
@@ -4674,10 +4539,13 @@
           <a:prstGeom prst="ellipse">
             <a:avLst/>
           </a:prstGeom>
-          <a:solidFill>
-            <a:srgbClr val="B41832"/>
-          </a:solidFill>
-          <a:ln/>
+          <a:noFill/>
+          <a:ln w="19050">
+            <a:solidFill>
+              <a:srgbClr val="CF0C2C"/>
+            </a:solidFill>
+            <a:prstDash val="solid"/>
+          </a:ln>
         </p:spPr>
         <p:txBody>
           <a:bodyPr/>
@@ -4714,7 +4582,7 @@
             <a:r>
               <a:rPr lang="en-US" sz="1400" b="1" dirty="0">
                 <a:solidFill>
-                  <a:srgbClr val="FFFFFF"/>
+                  <a:srgbClr val="CF0C2C"/>
                 </a:solidFill>
                 <a:latin typeface="Calibri" pitchFamily="34" charset="0"/>
                 <a:ea typeface="Calibri" pitchFamily="34" charset="-122"/>
@@ -4802,10 +4670,13 @@
           <a:prstGeom prst="ellipse">
             <a:avLst/>
           </a:prstGeom>
-          <a:solidFill>
-            <a:srgbClr val="B41832"/>
-          </a:solidFill>
-          <a:ln/>
+          <a:noFill/>
+          <a:ln w="19050">
+            <a:solidFill>
+              <a:srgbClr val="CF0C2C"/>
+            </a:solidFill>
+            <a:prstDash val="solid"/>
+          </a:ln>
         </p:spPr>
         <p:txBody>
           <a:bodyPr/>
@@ -4842,7 +4713,7 @@
             <a:r>
               <a:rPr lang="en-US" sz="1400" b="1" dirty="0">
                 <a:solidFill>
-                  <a:srgbClr val="FFFFFF"/>
+                  <a:srgbClr val="CF0C2C"/>
                 </a:solidFill>
                 <a:latin typeface="Calibri" pitchFamily="34" charset="0"/>
                 <a:ea typeface="Calibri" pitchFamily="34" charset="-122"/>
@@ -4930,10 +4801,13 @@
           <a:prstGeom prst="ellipse">
             <a:avLst/>
           </a:prstGeom>
-          <a:solidFill>
-            <a:srgbClr val="B41832"/>
-          </a:solidFill>
-          <a:ln/>
+          <a:noFill/>
+          <a:ln w="19050">
+            <a:solidFill>
+              <a:srgbClr val="CF0C2C"/>
+            </a:solidFill>
+            <a:prstDash val="solid"/>
+          </a:ln>
         </p:spPr>
         <p:txBody>
           <a:bodyPr/>
@@ -4970,7 +4844,7 @@
             <a:r>
               <a:rPr lang="en-US" sz="1400" b="1" dirty="0">
                 <a:solidFill>
-                  <a:srgbClr val="FFFFFF"/>
+                  <a:srgbClr val="CF0C2C"/>
                 </a:solidFill>
                 <a:latin typeface="Calibri" pitchFamily="34" charset="0"/>
                 <a:ea typeface="Calibri" pitchFamily="34" charset="-122"/>
@@ -5058,10 +4932,13 @@
           <a:prstGeom prst="ellipse">
             <a:avLst/>
           </a:prstGeom>
-          <a:solidFill>
-            <a:srgbClr val="B41832"/>
-          </a:solidFill>
-          <a:ln/>
+          <a:noFill/>
+          <a:ln w="19050">
+            <a:solidFill>
+              <a:srgbClr val="CF0C2C"/>
+            </a:solidFill>
+            <a:prstDash val="solid"/>
+          </a:ln>
         </p:spPr>
         <p:txBody>
           <a:bodyPr/>
@@ -5098,7 +4975,7 @@
             <a:r>
               <a:rPr lang="en-US" sz="1400" b="1" dirty="0">
                 <a:solidFill>
-                  <a:srgbClr val="FFFFFF"/>
+                  <a:srgbClr val="CF0C2C"/>
                 </a:solidFill>
                 <a:latin typeface="Calibri" pitchFamily="34" charset="0"/>
                 <a:ea typeface="Calibri" pitchFamily="34" charset="-122"/>
@@ -5186,10 +5063,13 @@
           <a:prstGeom prst="ellipse">
             <a:avLst/>
           </a:prstGeom>
-          <a:solidFill>
-            <a:srgbClr val="B41832"/>
-          </a:solidFill>
-          <a:ln/>
+          <a:noFill/>
+          <a:ln w="19050">
+            <a:solidFill>
+              <a:srgbClr val="CF0C2C"/>
+            </a:solidFill>
+            <a:prstDash val="solid"/>
+          </a:ln>
         </p:spPr>
         <p:txBody>
           <a:bodyPr/>
@@ -5226,7 +5106,7 @@
             <a:r>
               <a:rPr lang="en-US" sz="1400" b="1" dirty="0">
                 <a:solidFill>
-                  <a:srgbClr val="FFFFFF"/>
+                  <a:srgbClr val="CF0C2C"/>
                 </a:solidFill>
                 <a:latin typeface="Calibri" pitchFamily="34" charset="0"/>
                 <a:ea typeface="Calibri" pitchFamily="34" charset="-122"/>
@@ -5314,10 +5194,13 @@
           <a:prstGeom prst="ellipse">
             <a:avLst/>
           </a:prstGeom>
-          <a:solidFill>
-            <a:srgbClr val="B41832"/>
-          </a:solidFill>
-          <a:ln/>
+          <a:noFill/>
+          <a:ln w="19050">
+            <a:solidFill>
+              <a:srgbClr val="CF0C2C"/>
+            </a:solidFill>
+            <a:prstDash val="solid"/>
+          </a:ln>
         </p:spPr>
         <p:txBody>
           <a:bodyPr/>
@@ -5354,7 +5237,7 @@
             <a:r>
               <a:rPr lang="en-US" sz="1400" b="1" dirty="0">
                 <a:solidFill>
-                  <a:srgbClr val="FFFFFF"/>
+                  <a:srgbClr val="CF0C2C"/>
                 </a:solidFill>
                 <a:latin typeface="Calibri" pitchFamily="34" charset="0"/>
                 <a:ea typeface="Calibri" pitchFamily="34" charset="-122"/>
@@ -5442,10 +5325,13 @@
           <a:prstGeom prst="ellipse">
             <a:avLst/>
           </a:prstGeom>
-          <a:solidFill>
-            <a:srgbClr val="B41832"/>
-          </a:solidFill>
-          <a:ln/>
+          <a:noFill/>
+          <a:ln w="19050">
+            <a:solidFill>
+              <a:srgbClr val="CF0C2C"/>
+            </a:solidFill>
+            <a:prstDash val="solid"/>
+          </a:ln>
         </p:spPr>
         <p:txBody>
           <a:bodyPr/>
@@ -5482,7 +5368,7 @@
             <a:r>
               <a:rPr lang="en-US" sz="1400" b="1" dirty="0">
                 <a:solidFill>
-                  <a:srgbClr val="FFFFFF"/>
+                  <a:srgbClr val="CF0C2C"/>
                 </a:solidFill>
                 <a:latin typeface="Calibri" pitchFamily="34" charset="0"/>
                 <a:ea typeface="Calibri" pitchFamily="34" charset="-122"/>
@@ -5605,14 +5491,9 @@
               <a:gd name="adj" fmla="val 8000"/>
             </a:avLst>
           </a:prstGeom>
-          <a:solidFill>
-            <a:srgbClr val="F8E8EA"/>
-          </a:solidFill>
-          <a:ln w="12700">
-            <a:solidFill>
-              <a:srgbClr val="E5E5E5"/>
-            </a:solidFill>
-            <a:prstDash val="solid"/>
+          <a:noFill/>
+          <a:ln>
+            <a:noFill/>
           </a:ln>
         </p:spPr>
         <p:txBody>
@@ -5672,13 +5553,13 @@
               <a:buNone/>
             </a:pPr>
             <a:r>
-              <a:rPr lang="en-US" sz="3400" b="1" dirty="0">
+              <a:rPr lang="en-US" sz="3400" dirty="0">
                 <a:solidFill>
                   <a:srgbClr val="1A1A1A"/>
                 </a:solidFill>
-                <a:latin typeface="Segoe UI Semibold" pitchFamily="34" charset="0"/>
-                <a:ea typeface="Segoe UI Semibold" pitchFamily="34" charset="-122"/>
-                <a:cs typeface="Segoe UI Semibold" pitchFamily="34" charset="-120"/>
+                <a:latin typeface="Segoe UI Light" pitchFamily="34" charset="0"/>
+                <a:ea typeface="Segoe UI Light" pitchFamily="34" charset="-122"/>
+                <a:cs typeface="Segoe UI Light" pitchFamily="34" charset="-120"/>
               </a:rPr>
               <a:t>Scope</a:t>
             </a:r>
@@ -5741,22 +5622,10 @@
               <a:gd name="adj" fmla="val 2581"/>
             </a:avLst>
           </a:prstGeom>
-          <a:solidFill>
-            <a:srgbClr val="FFFFFF"/>
-          </a:solidFill>
-          <a:ln w="12700">
-            <a:solidFill>
-              <a:srgbClr val="E5E5E5"/>
-            </a:solidFill>
-            <a:prstDash val="solid"/>
+          <a:noFill/>
+          <a:ln>
+            <a:noFill/>
           </a:ln>
-          <a:effectLst>
-            <a:outerShdw blurRad="152400" dist="38100" dir="5400000" algn="bl" rotWithShape="0">
-              <a:srgbClr val="252525">
-                <a:alpha val="8000"/>
-              </a:srgbClr>
-            </a:outerShdw>
-          </a:effectLst>
         </p:spPr>
         <p:txBody>
           <a:bodyPr/>
@@ -5793,7 +5662,7 @@
             <a:r>
               <a:rPr lang="en-US" sz="1500" b="1" dirty="0">
                 <a:solidFill>
-                  <a:srgbClr val="B41832"/>
+                  <a:srgbClr val="CF0C2C"/>
                 </a:solidFill>
                 <a:latin typeface="Calibri" pitchFamily="34" charset="0"/>
                 <a:ea typeface="Calibri" pitchFamily="34" charset="-122"/>
@@ -5869,7 +5738,7 @@
             <a:r>
               <a:rPr lang="en-US" sz="1400" b="1" dirty="0">
                 <a:solidFill>
-                  <a:srgbClr val="B41832"/>
+                  <a:srgbClr val="CF0C2C"/>
                 </a:solidFill>
                 <a:latin typeface="Calibri" pitchFamily="34" charset="0"/>
                 <a:ea typeface="Calibri" pitchFamily="34" charset="-122"/>
@@ -5928,7 +5797,7 @@
             <a:r>
               <a:rPr lang="en-US" sz="1800" dirty="0">
                 <a:solidFill>
-                  <a:srgbClr val="B41832"/>
+                  <a:srgbClr val="CF0C2C"/>
                 </a:solidFill>
                 <a:latin typeface="Calibri" pitchFamily="34" charset="0"/>
                 <a:ea typeface="Calibri" pitchFamily="34" charset="-122"/>
@@ -6004,7 +5873,7 @@
             <a:r>
               <a:rPr lang="en-US" sz="1400" b="1" dirty="0">
                 <a:solidFill>
-                  <a:srgbClr val="B41832"/>
+                  <a:srgbClr val="CF0C2C"/>
                 </a:solidFill>
                 <a:latin typeface="Calibri" pitchFamily="34" charset="0"/>
                 <a:ea typeface="Calibri" pitchFamily="34" charset="-122"/>
@@ -6063,7 +5932,7 @@
             <a:r>
               <a:rPr lang="en-US" sz="1800" dirty="0">
                 <a:solidFill>
-                  <a:srgbClr val="B41832"/>
+                  <a:srgbClr val="CF0C2C"/>
                 </a:solidFill>
                 <a:latin typeface="Calibri" pitchFamily="34" charset="0"/>
                 <a:ea typeface="Calibri" pitchFamily="34" charset="-122"/>
@@ -6139,7 +6008,7 @@
             <a:r>
               <a:rPr lang="en-US" sz="1400" b="1" dirty="0">
                 <a:solidFill>
-                  <a:srgbClr val="B41832"/>
+                  <a:srgbClr val="CF0C2C"/>
                 </a:solidFill>
                 <a:latin typeface="Calibri" pitchFamily="34" charset="0"/>
                 <a:ea typeface="Calibri" pitchFamily="34" charset="-122"/>
@@ -6198,7 +6067,7 @@
             <a:r>
               <a:rPr lang="en-US" sz="1800" dirty="0">
                 <a:solidFill>
-                  <a:srgbClr val="B41832"/>
+                  <a:srgbClr val="CF0C2C"/>
                 </a:solidFill>
                 <a:latin typeface="Calibri" pitchFamily="34" charset="0"/>
                 <a:ea typeface="Calibri" pitchFamily="34" charset="-122"/>
@@ -6274,7 +6143,7 @@
             <a:r>
               <a:rPr lang="en-US" sz="1400" b="1" dirty="0">
                 <a:solidFill>
-                  <a:srgbClr val="B41832"/>
+                  <a:srgbClr val="CF0C2C"/>
                 </a:solidFill>
                 <a:latin typeface="Calibri" pitchFamily="34" charset="0"/>
                 <a:ea typeface="Calibri" pitchFamily="34" charset="-122"/>
@@ -6333,7 +6202,7 @@
             <a:r>
               <a:rPr lang="en-US" sz="1800" dirty="0">
                 <a:solidFill>
-                  <a:srgbClr val="B41832"/>
+                  <a:srgbClr val="CF0C2C"/>
                 </a:solidFill>
                 <a:latin typeface="Calibri" pitchFamily="34" charset="0"/>
                 <a:ea typeface="Calibri" pitchFamily="34" charset="-122"/>
@@ -6409,7 +6278,7 @@
             <a:r>
               <a:rPr lang="en-US" sz="1400" b="1" dirty="0">
                 <a:solidFill>
-                  <a:srgbClr val="B41832"/>
+                  <a:srgbClr val="CF0C2C"/>
                 </a:solidFill>
                 <a:latin typeface="Calibri" pitchFamily="34" charset="0"/>
                 <a:ea typeface="Calibri" pitchFamily="34" charset="-122"/>
@@ -6490,14 +6359,9 @@
               <a:gd name="adj" fmla="val 8000"/>
             </a:avLst>
           </a:prstGeom>
-          <a:solidFill>
-            <a:srgbClr val="F8E8EA"/>
-          </a:solidFill>
-          <a:ln w="12700">
-            <a:solidFill>
-              <a:srgbClr val="E5E5E5"/>
-            </a:solidFill>
-            <a:prstDash val="solid"/>
+          <a:noFill/>
+          <a:ln>
+            <a:noFill/>
           </a:ln>
         </p:spPr>
         <p:txBody>
@@ -6557,13 +6421,13 @@
               <a:buNone/>
             </a:pPr>
             <a:r>
-              <a:rPr lang="en-US" sz="3400" b="1" dirty="0">
+              <a:rPr lang="en-US" sz="3400" dirty="0">
                 <a:solidFill>
                   <a:srgbClr val="1A1A1A"/>
                 </a:solidFill>
-                <a:latin typeface="Segoe UI Semibold" pitchFamily="34" charset="0"/>
-                <a:ea typeface="Segoe UI Semibold" pitchFamily="34" charset="-122"/>
-                <a:cs typeface="Segoe UI Semibold" pitchFamily="34" charset="-120"/>
+                <a:latin typeface="Segoe UI Light" pitchFamily="34" charset="0"/>
+                <a:ea typeface="Segoe UI Light" pitchFamily="34" charset="-122"/>
+                <a:cs typeface="Segoe UI Light" pitchFamily="34" charset="-120"/>
               </a:rPr>
               <a:t>BRD</a:t>
             </a:r>
@@ -6626,22 +6490,10 @@
               <a:gd name="adj" fmla="val 2581"/>
             </a:avLst>
           </a:prstGeom>
-          <a:solidFill>
-            <a:srgbClr val="FFFFFF"/>
-          </a:solidFill>
-          <a:ln w="12700">
-            <a:solidFill>
-              <a:srgbClr val="E5E5E5"/>
-            </a:solidFill>
-            <a:prstDash val="solid"/>
+          <a:noFill/>
+          <a:ln>
+            <a:noFill/>
           </a:ln>
-          <a:effectLst>
-            <a:outerShdw blurRad="152400" dist="38100" dir="5400000" algn="bl" rotWithShape="0">
-              <a:srgbClr val="252525">
-                <a:alpha val="8000"/>
-              </a:srgbClr>
-            </a:outerShdw>
-          </a:effectLst>
         </p:spPr>
         <p:txBody>
           <a:bodyPr/>
@@ -6678,7 +6530,7 @@
             <a:r>
               <a:rPr lang="en-US" sz="1500" b="1" dirty="0">
                 <a:solidFill>
-                  <a:srgbClr val="B41832"/>
+                  <a:srgbClr val="CF0C2C"/>
                 </a:solidFill>
                 <a:latin typeface="Calibri" pitchFamily="34" charset="0"/>
                 <a:ea typeface="Calibri" pitchFamily="34" charset="-122"/>
@@ -6990,14 +6842,9 @@
               <a:gd name="adj" fmla="val 8000"/>
             </a:avLst>
           </a:prstGeom>
-          <a:solidFill>
-            <a:srgbClr val="F8E8EA"/>
-          </a:solidFill>
-          <a:ln w="12700">
-            <a:solidFill>
-              <a:srgbClr val="E5E5E5"/>
-            </a:solidFill>
-            <a:prstDash val="solid"/>
+          <a:noFill/>
+          <a:ln>
+            <a:noFill/>
           </a:ln>
         </p:spPr>
         <p:txBody>
@@ -7057,13 +6904,13 @@
               <a:buNone/>
             </a:pPr>
             <a:r>
-              <a:rPr lang="en-US" sz="3400" b="1" dirty="0">
+              <a:rPr lang="en-US" sz="3400" dirty="0">
                 <a:solidFill>
                   <a:srgbClr val="1A1A1A"/>
                 </a:solidFill>
-                <a:latin typeface="Segoe UI Semibold" pitchFamily="34" charset="0"/>
-                <a:ea typeface="Segoe UI Semibold" pitchFamily="34" charset="-122"/>
-                <a:cs typeface="Segoe UI Semibold" pitchFamily="34" charset="-120"/>
+                <a:latin typeface="Segoe UI Light" pitchFamily="34" charset="0"/>
+                <a:ea typeface="Segoe UI Light" pitchFamily="34" charset="-122"/>
+                <a:cs typeface="Segoe UI Light" pitchFamily="34" charset="-120"/>
               </a:rPr>
               <a:t>The current CMR process</a:t>
             </a:r>
@@ -7126,22 +6973,10 @@
               <a:gd name="adj" fmla="val 2581"/>
             </a:avLst>
           </a:prstGeom>
-          <a:solidFill>
-            <a:srgbClr val="FFFFFF"/>
-          </a:solidFill>
-          <a:ln w="12700">
-            <a:solidFill>
-              <a:srgbClr val="E5E5E5"/>
-            </a:solidFill>
-            <a:prstDash val="solid"/>
+          <a:noFill/>
+          <a:ln>
+            <a:noFill/>
           </a:ln>
-          <a:effectLst>
-            <a:outerShdw blurRad="152400" dist="38100" dir="5400000" algn="bl" rotWithShape="0">
-              <a:srgbClr val="252525">
-                <a:alpha val="8000"/>
-              </a:srgbClr>
-            </a:outerShdw>
-          </a:effectLst>
         </p:spPr>
         <p:txBody>
           <a:bodyPr/>
@@ -7178,7 +7013,7 @@
             <a:r>
               <a:rPr lang="en-US" sz="1500" b="1" dirty="0">
                 <a:solidFill>
-                  <a:srgbClr val="B41832"/>
+                  <a:srgbClr val="CF0C2C"/>
                 </a:solidFill>
                 <a:latin typeface="Calibri" pitchFamily="34" charset="0"/>
                 <a:ea typeface="Calibri" pitchFamily="34" charset="-122"/>
@@ -7489,13 +7324,13 @@
               <a:buNone/>
             </a:pPr>
             <a:r>
-              <a:rPr lang="en-US" sz="3400" b="1" dirty="0">
+              <a:rPr lang="en-US" sz="3400" dirty="0">
                 <a:solidFill>
                   <a:srgbClr val="1A1A1A"/>
                 </a:solidFill>
-                <a:latin typeface="Segoe UI Semibold" pitchFamily="34" charset="0"/>
-                <a:ea typeface="Segoe UI Semibold" pitchFamily="34" charset="-122"/>
-                <a:cs typeface="Segoe UI Semibold" pitchFamily="34" charset="-120"/>
+                <a:latin typeface="Segoe UI Light" pitchFamily="34" charset="0"/>
+                <a:ea typeface="Segoe UI Light" pitchFamily="34" charset="-122"/>
+                <a:cs typeface="Segoe UI Light" pitchFamily="34" charset="-120"/>
               </a:rPr>
               <a:t>Design</a:t>
             </a:r>
@@ -7558,14 +7393,9 @@
               <a:gd name="adj" fmla="val 8000"/>
             </a:avLst>
           </a:prstGeom>
-          <a:solidFill>
-            <a:srgbClr val="F8E8EA"/>
-          </a:solidFill>
-          <a:ln w="12700">
-            <a:solidFill>
-              <a:srgbClr val="E5E5E5"/>
-            </a:solidFill>
-            <a:prstDash val="solid"/>
+          <a:noFill/>
+          <a:ln>
+            <a:noFill/>
           </a:ln>
         </p:spPr>
         <p:txBody>
@@ -7616,169 +7446,157 @@
               <a:gd name="adj" fmla="val 2581"/>
             </a:avLst>
           </a:prstGeom>
-          <a:solidFill>
-            <a:srgbClr val="FFFFFF"/>
-          </a:solidFill>
+          <a:noFill/>
+          <a:ln>
+            <a:noFill/>
+          </a:ln>
+        </p:spPr>
+        <p:txBody>
+          <a:bodyPr/>
+          <a:lstStyle/>
+          <a:p>
+            <a:endParaRPr lang="en-US" dirty="0"/>
+          </a:p>
+        </p:txBody>
+      </p:sp>
+      <p:sp>
+        <p:nvSpPr>
+          <p:cNvPr id="7" name="Text 4"/>
+          <p:cNvSpPr/>
+          <p:nvPr/>
+        </p:nvSpPr>
+        <p:spPr>
+          <a:xfrm>
+            <a:off x="822960" y="2514600"/>
+            <a:ext cx="9144000" cy="365760"/>
+          </a:xfrm>
+          <a:prstGeom prst="rect">
+            <a:avLst/>
+          </a:prstGeom>
+          <a:noFill/>
+          <a:ln/>
+        </p:spPr>
+        <p:txBody>
+          <a:bodyPr wrap="square" lIns="0" tIns="0" rIns="0" bIns="0" rtlCol="0" anchor="t"/>
+          <a:lstStyle/>
+          <a:p>
+            <a:pPr marL="0" indent="0" algn="l">
+              <a:buNone/>
+            </a:pPr>
+            <a:r>
+              <a:rPr lang="en-US" sz="1500" b="1" dirty="0">
+                <a:solidFill>
+                  <a:srgbClr val="CF0C2C"/>
+                </a:solidFill>
+                <a:latin typeface="Calibri" pitchFamily="34" charset="0"/>
+                <a:ea typeface="Calibri" pitchFamily="34" charset="-122"/>
+                <a:cs typeface="Calibri" pitchFamily="34" charset="-120"/>
+              </a:rPr>
+              <a:t>Actual field mapping — from Create Change Request </a:t>
+            </a:r>
+            <a:endParaRPr lang="en-US" sz="1500" dirty="0"/>
+          </a:p>
+        </p:txBody>
+      </p:sp>
+      <p:sp>
+        <p:nvSpPr>
+          <p:cNvPr id="8" name="Text 5"/>
+          <p:cNvSpPr/>
+          <p:nvPr/>
+        </p:nvSpPr>
+        <p:spPr>
+          <a:xfrm>
+            <a:off x="822960" y="2926080"/>
+            <a:ext cx="3163733" cy="347472"/>
+          </a:xfrm>
+          <a:prstGeom prst="rect">
+            <a:avLst/>
+          </a:prstGeom>
+          <a:noFill/>
+          <a:ln/>
+        </p:spPr>
+        <p:txBody>
+          <a:bodyPr wrap="square" lIns="0" tIns="0" rIns="0" bIns="0" rtlCol="0" anchor="ctr"/>
+          <a:lstStyle/>
+          <a:p>
+            <a:pPr marL="0" indent="0">
+              <a:buNone/>
+            </a:pPr>
+            <a:r>
+              <a:rPr lang="en-US" sz="1250" b="1" dirty="0">
+                <a:solidFill>
+                  <a:srgbClr val="4A4A4A"/>
+                </a:solidFill>
+                <a:latin typeface="Calibri" pitchFamily="34" charset="0"/>
+                <a:ea typeface="Calibri" pitchFamily="34" charset="-122"/>
+                <a:cs typeface="Calibri" pitchFamily="34" charset="-120"/>
+              </a:rPr>
+              <a:t>New column</a:t>
+            </a:r>
+            <a:endParaRPr lang="en-US" sz="1250" dirty="0"/>
+          </a:p>
+        </p:txBody>
+      </p:sp>
+      <p:sp>
+        <p:nvSpPr>
+          <p:cNvPr id="9" name="Text 6"/>
+          <p:cNvSpPr/>
+          <p:nvPr/>
+        </p:nvSpPr>
+        <p:spPr>
+          <a:xfrm>
+            <a:off x="3986693" y="2926080"/>
+            <a:ext cx="7382043" cy="347472"/>
+          </a:xfrm>
+          <a:prstGeom prst="rect">
+            <a:avLst/>
+          </a:prstGeom>
+          <a:noFill/>
+          <a:ln/>
+        </p:spPr>
+        <p:txBody>
+          <a:bodyPr wrap="square" lIns="0" tIns="0" rIns="0" bIns="0" rtlCol="0" anchor="ctr"/>
+          <a:lstStyle/>
+          <a:p>
+            <a:pPr marL="0" indent="0">
+              <a:buNone/>
+            </a:pPr>
+            <a:r>
+              <a:rPr lang="en-US" sz="1250" b="1" dirty="0">
+                <a:solidFill>
+                  <a:srgbClr val="4A4A4A"/>
+                </a:solidFill>
+                <a:latin typeface="Calibri" pitchFamily="34" charset="0"/>
+                <a:ea typeface="Calibri" pitchFamily="34" charset="-122"/>
+                <a:cs typeface="Calibri" pitchFamily="34" charset="-120"/>
+              </a:rPr>
+              <a:t>What it carries over</a:t>
+            </a:r>
+            <a:endParaRPr lang="en-US" sz="1250" dirty="0"/>
+          </a:p>
+        </p:txBody>
+      </p:sp>
+      <p:sp>
+        <p:nvSpPr>
+          <p:cNvPr id="10" name="Shape 7"/>
+          <p:cNvSpPr/>
+          <p:nvPr/>
+        </p:nvSpPr>
+        <p:spPr>
+          <a:xfrm>
+            <a:off x="822960" y="3328416"/>
+            <a:ext cx="10545775" cy="0"/>
+          </a:xfrm>
+          <a:prstGeom prst="line">
+            <a:avLst/>
+          </a:prstGeom>
+          <a:noFill/>
           <a:ln w="12700">
             <a:solidFill>
               <a:srgbClr val="E5E5E5"/>
             </a:solidFill>
             <a:prstDash val="solid"/>
           </a:ln>
-          <a:effectLst>
-            <a:outerShdw blurRad="152400" dist="38100" dir="5400000" algn="bl" rotWithShape="0">
-              <a:srgbClr val="252525">
-                <a:alpha val="8000"/>
-              </a:srgbClr>
-            </a:outerShdw>
-          </a:effectLst>
-        </p:spPr>
-        <p:txBody>
-          <a:bodyPr/>
-          <a:lstStyle/>
-          <a:p>
-            <a:endParaRPr lang="en-US" dirty="0"/>
-          </a:p>
-        </p:txBody>
-      </p:sp>
-      <p:sp>
-        <p:nvSpPr>
-          <p:cNvPr id="7" name="Text 4"/>
-          <p:cNvSpPr/>
-          <p:nvPr/>
-        </p:nvSpPr>
-        <p:spPr>
-          <a:xfrm>
-            <a:off x="822960" y="2514600"/>
-            <a:ext cx="9144000" cy="365760"/>
-          </a:xfrm>
-          <a:prstGeom prst="rect">
-            <a:avLst/>
-          </a:prstGeom>
-          <a:noFill/>
-          <a:ln/>
-        </p:spPr>
-        <p:txBody>
-          <a:bodyPr wrap="square" lIns="0" tIns="0" rIns="0" bIns="0" rtlCol="0" anchor="t"/>
-          <a:lstStyle/>
-          <a:p>
-            <a:pPr marL="0" indent="0" algn="l">
-              <a:buNone/>
-            </a:pPr>
-            <a:r>
-              <a:rPr lang="en-US" sz="1500" b="1" dirty="0">
-                <a:solidFill>
-                  <a:srgbClr val="B41832"/>
-                </a:solidFill>
-                <a:latin typeface="Calibri" pitchFamily="34" charset="0"/>
-                <a:ea typeface="Calibri" pitchFamily="34" charset="-122"/>
-                <a:cs typeface="Calibri" pitchFamily="34" charset="-120"/>
-              </a:rPr>
-              <a:t>Actual field mapping — from Create Change Request </a:t>
-            </a:r>
-            <a:endParaRPr lang="en-US" sz="1500" dirty="0"/>
-          </a:p>
-        </p:txBody>
-      </p:sp>
-      <p:sp>
-        <p:nvSpPr>
-          <p:cNvPr id="8" name="Text 5"/>
-          <p:cNvSpPr/>
-          <p:nvPr/>
-        </p:nvSpPr>
-        <p:spPr>
-          <a:xfrm>
-            <a:off x="822960" y="2926080"/>
-            <a:ext cx="3163733" cy="347472"/>
-          </a:xfrm>
-          <a:prstGeom prst="rect">
-            <a:avLst/>
-          </a:prstGeom>
-          <a:noFill/>
-          <a:ln/>
-        </p:spPr>
-        <p:txBody>
-          <a:bodyPr wrap="square" lIns="0" tIns="0" rIns="0" bIns="0" rtlCol="0" anchor="ctr"/>
-          <a:lstStyle/>
-          <a:p>
-            <a:pPr marL="0" indent="0">
-              <a:buNone/>
-            </a:pPr>
-            <a:r>
-              <a:rPr lang="en-US" sz="1250" b="1" dirty="0">
-                <a:solidFill>
-                  <a:srgbClr val="4A4A4A"/>
-                </a:solidFill>
-                <a:latin typeface="Calibri" pitchFamily="34" charset="0"/>
-                <a:ea typeface="Calibri" pitchFamily="34" charset="-122"/>
-                <a:cs typeface="Calibri" pitchFamily="34" charset="-120"/>
-              </a:rPr>
-              <a:t>New column</a:t>
-            </a:r>
-            <a:endParaRPr lang="en-US" sz="1250" dirty="0"/>
-          </a:p>
-        </p:txBody>
-      </p:sp>
-      <p:sp>
-        <p:nvSpPr>
-          <p:cNvPr id="9" name="Text 6"/>
-          <p:cNvSpPr/>
-          <p:nvPr/>
-        </p:nvSpPr>
-        <p:spPr>
-          <a:xfrm>
-            <a:off x="3986693" y="2926080"/>
-            <a:ext cx="7382043" cy="347472"/>
-          </a:xfrm>
-          <a:prstGeom prst="rect">
-            <a:avLst/>
-          </a:prstGeom>
-          <a:noFill/>
-          <a:ln/>
-        </p:spPr>
-        <p:txBody>
-          <a:bodyPr wrap="square" lIns="0" tIns="0" rIns="0" bIns="0" rtlCol="0" anchor="ctr"/>
-          <a:lstStyle/>
-          <a:p>
-            <a:pPr marL="0" indent="0">
-              <a:buNone/>
-            </a:pPr>
-            <a:r>
-              <a:rPr lang="en-US" sz="1250" b="1" dirty="0">
-                <a:solidFill>
-                  <a:srgbClr val="4A4A4A"/>
-                </a:solidFill>
-                <a:latin typeface="Calibri" pitchFamily="34" charset="0"/>
-                <a:ea typeface="Calibri" pitchFamily="34" charset="-122"/>
-                <a:cs typeface="Calibri" pitchFamily="34" charset="-120"/>
-              </a:rPr>
-              <a:t>What it carries over</a:t>
-            </a:r>
-            <a:endParaRPr lang="en-US" sz="1250" dirty="0"/>
-          </a:p>
-        </p:txBody>
-      </p:sp>
-      <p:sp>
-        <p:nvSpPr>
-          <p:cNvPr id="10" name="Shape 7"/>
-          <p:cNvSpPr/>
-          <p:nvPr/>
-        </p:nvSpPr>
-        <p:spPr>
-          <a:xfrm>
-            <a:off x="822960" y="3328416"/>
-            <a:ext cx="10545775" cy="0"/>
-          </a:xfrm>
-          <a:prstGeom prst="line">
-            <a:avLst/>
-          </a:prstGeom>
-          <a:noFill/>
-          <a:ln w="12700">
-            <a:solidFill>
-              <a:srgbClr val="E5E5E5"/>
-            </a:solidFill>
-            <a:prstDash val="solid"/>
-          </a:ln>
         </p:spPr>
         <p:txBody>
           <a:bodyPr/>
@@ -7802,9 +7620,7 @@
           <a:prstGeom prst="rect">
             <a:avLst/>
           </a:prstGeom>
-          <a:solidFill>
-            <a:srgbClr val="F8E8EA"/>
-          </a:solidFill>
+          <a:noFill/>
           <a:ln/>
         </p:spPr>
         <p:txBody>
@@ -8629,13 +8445,13 @@
               <a:buNone/>
             </a:pPr>
             <a:r>
-              <a:rPr lang="en-US" sz="3400" b="1" dirty="0">
+              <a:rPr lang="en-US" sz="3400" dirty="0">
                 <a:solidFill>
                   <a:srgbClr val="1A1A1A"/>
                 </a:solidFill>
-                <a:latin typeface="Segoe UI Semibold" pitchFamily="34" charset="0"/>
-                <a:ea typeface="Segoe UI Semibold" pitchFamily="34" charset="-122"/>
-                <a:cs typeface="Segoe UI Semibold" pitchFamily="34" charset="-120"/>
+                <a:latin typeface="Segoe UI Light" pitchFamily="34" charset="0"/>
+                <a:ea typeface="Segoe UI Light" pitchFamily="34" charset="-122"/>
+                <a:cs typeface="Segoe UI Light" pitchFamily="34" charset="-120"/>
               </a:rPr>
               <a:t>Design</a:t>
             </a:r>
@@ -8698,14 +8514,9 @@
               <a:gd name="adj" fmla="val 8000"/>
             </a:avLst>
           </a:prstGeom>
-          <a:solidFill>
-            <a:srgbClr val="F8E8EA"/>
-          </a:solidFill>
-          <a:ln w="12700">
-            <a:solidFill>
-              <a:srgbClr val="E5E5E5"/>
-            </a:solidFill>
-            <a:prstDash val="solid"/>
+          <a:noFill/>
+          <a:ln>
+            <a:noFill/>
           </a:ln>
         </p:spPr>
         <p:txBody>
@@ -8756,169 +8567,157 @@
               <a:gd name="adj" fmla="val 2581"/>
             </a:avLst>
           </a:prstGeom>
-          <a:solidFill>
-            <a:srgbClr val="FFFFFF"/>
-          </a:solidFill>
+          <a:noFill/>
+          <a:ln>
+            <a:noFill/>
+          </a:ln>
+        </p:spPr>
+        <p:txBody>
+          <a:bodyPr/>
+          <a:lstStyle/>
+          <a:p>
+            <a:endParaRPr lang="en-US" dirty="0"/>
+          </a:p>
+        </p:txBody>
+      </p:sp>
+      <p:sp>
+        <p:nvSpPr>
+          <p:cNvPr id="7" name="Text 4"/>
+          <p:cNvSpPr/>
+          <p:nvPr/>
+        </p:nvSpPr>
+        <p:spPr>
+          <a:xfrm>
+            <a:off x="822960" y="2514600"/>
+            <a:ext cx="9144000" cy="365760"/>
+          </a:xfrm>
+          <a:prstGeom prst="rect">
+            <a:avLst/>
+          </a:prstGeom>
+          <a:noFill/>
+          <a:ln/>
+        </p:spPr>
+        <p:txBody>
+          <a:bodyPr wrap="square" lIns="0" tIns="0" rIns="0" bIns="0" rtlCol="0" anchor="t"/>
+          <a:lstStyle/>
+          <a:p>
+            <a:pPr marL="0" indent="0" algn="l">
+              <a:buNone/>
+            </a:pPr>
+            <a:r>
+              <a:rPr lang="en-US" sz="1500" b="1" dirty="0">
+                <a:solidFill>
+                  <a:srgbClr val="CF0C2C"/>
+                </a:solidFill>
+                <a:latin typeface="Calibri" pitchFamily="34" charset="0"/>
+                <a:ea typeface="Calibri" pitchFamily="34" charset="-122"/>
+                <a:cs typeface="Calibri" pitchFamily="34" charset="-120"/>
+              </a:rPr>
+              <a:t>Additional fields — new, not carried over from Create Change Request</a:t>
+            </a:r>
+            <a:endParaRPr lang="en-US" sz="1500" dirty="0"/>
+          </a:p>
+        </p:txBody>
+      </p:sp>
+      <p:sp>
+        <p:nvSpPr>
+          <p:cNvPr id="8" name="Text 5"/>
+          <p:cNvSpPr/>
+          <p:nvPr/>
+        </p:nvSpPr>
+        <p:spPr>
+          <a:xfrm>
+            <a:off x="822960" y="2926080"/>
+            <a:ext cx="3163733" cy="347472"/>
+          </a:xfrm>
+          <a:prstGeom prst="rect">
+            <a:avLst/>
+          </a:prstGeom>
+          <a:noFill/>
+          <a:ln/>
+        </p:spPr>
+        <p:txBody>
+          <a:bodyPr wrap="square" lIns="0" tIns="0" rIns="0" bIns="0" rtlCol="0" anchor="ctr"/>
+          <a:lstStyle/>
+          <a:p>
+            <a:pPr marL="0" indent="0">
+              <a:buNone/>
+            </a:pPr>
+            <a:r>
+              <a:rPr lang="en-US" sz="1250" b="1" dirty="0">
+                <a:solidFill>
+                  <a:srgbClr val="4A4A4A"/>
+                </a:solidFill>
+                <a:latin typeface="Calibri" pitchFamily="34" charset="0"/>
+                <a:ea typeface="Calibri" pitchFamily="34" charset="-122"/>
+                <a:cs typeface="Calibri" pitchFamily="34" charset="-120"/>
+              </a:rPr>
+              <a:t>New field</a:t>
+            </a:r>
+            <a:endParaRPr lang="en-US" sz="1250" dirty="0"/>
+          </a:p>
+        </p:txBody>
+      </p:sp>
+      <p:sp>
+        <p:nvSpPr>
+          <p:cNvPr id="9" name="Text 6"/>
+          <p:cNvSpPr/>
+          <p:nvPr/>
+        </p:nvSpPr>
+        <p:spPr>
+          <a:xfrm>
+            <a:off x="3986693" y="2926080"/>
+            <a:ext cx="7382043" cy="347472"/>
+          </a:xfrm>
+          <a:prstGeom prst="rect">
+            <a:avLst/>
+          </a:prstGeom>
+          <a:noFill/>
+          <a:ln/>
+        </p:spPr>
+        <p:txBody>
+          <a:bodyPr wrap="square" lIns="0" tIns="0" rIns="0" bIns="0" rtlCol="0" anchor="ctr"/>
+          <a:lstStyle/>
+          <a:p>
+            <a:pPr marL="0" indent="0">
+              <a:buNone/>
+            </a:pPr>
+            <a:r>
+              <a:rPr lang="en-US" sz="1250" b="1" dirty="0">
+                <a:solidFill>
+                  <a:srgbClr val="4A4A4A"/>
+                </a:solidFill>
+                <a:latin typeface="Calibri" pitchFamily="34" charset="0"/>
+                <a:ea typeface="Calibri" pitchFamily="34" charset="-122"/>
+                <a:cs typeface="Calibri" pitchFamily="34" charset="-120"/>
+              </a:rPr>
+              <a:t>What it is</a:t>
+            </a:r>
+            <a:endParaRPr lang="en-US" sz="1250" dirty="0"/>
+          </a:p>
+        </p:txBody>
+      </p:sp>
+      <p:sp>
+        <p:nvSpPr>
+          <p:cNvPr id="10" name="Shape 7"/>
+          <p:cNvSpPr/>
+          <p:nvPr/>
+        </p:nvSpPr>
+        <p:spPr>
+          <a:xfrm>
+            <a:off x="822960" y="3328416"/>
+            <a:ext cx="10545775" cy="0"/>
+          </a:xfrm>
+          <a:prstGeom prst="line">
+            <a:avLst/>
+          </a:prstGeom>
+          <a:noFill/>
           <a:ln w="12700">
             <a:solidFill>
               <a:srgbClr val="E5E5E5"/>
             </a:solidFill>
             <a:prstDash val="solid"/>
           </a:ln>
-          <a:effectLst>
-            <a:outerShdw blurRad="152400" dist="38100" dir="5400000" algn="bl" rotWithShape="0">
-              <a:srgbClr val="252525">
-                <a:alpha val="8000"/>
-              </a:srgbClr>
-            </a:outerShdw>
-          </a:effectLst>
-        </p:spPr>
-        <p:txBody>
-          <a:bodyPr/>
-          <a:lstStyle/>
-          <a:p>
-            <a:endParaRPr lang="en-US" dirty="0"/>
-          </a:p>
-        </p:txBody>
-      </p:sp>
-      <p:sp>
-        <p:nvSpPr>
-          <p:cNvPr id="7" name="Text 4"/>
-          <p:cNvSpPr/>
-          <p:nvPr/>
-        </p:nvSpPr>
-        <p:spPr>
-          <a:xfrm>
-            <a:off x="822960" y="2514600"/>
-            <a:ext cx="9144000" cy="365760"/>
-          </a:xfrm>
-          <a:prstGeom prst="rect">
-            <a:avLst/>
-          </a:prstGeom>
-          <a:noFill/>
-          <a:ln/>
-        </p:spPr>
-        <p:txBody>
-          <a:bodyPr wrap="square" lIns="0" tIns="0" rIns="0" bIns="0" rtlCol="0" anchor="t"/>
-          <a:lstStyle/>
-          <a:p>
-            <a:pPr marL="0" indent="0" algn="l">
-              <a:buNone/>
-            </a:pPr>
-            <a:r>
-              <a:rPr lang="en-US" sz="1500" b="1" dirty="0">
-                <a:solidFill>
-                  <a:srgbClr val="B41832"/>
-                </a:solidFill>
-                <a:latin typeface="Calibri" pitchFamily="34" charset="0"/>
-                <a:ea typeface="Calibri" pitchFamily="34" charset="-122"/>
-                <a:cs typeface="Calibri" pitchFamily="34" charset="-120"/>
-              </a:rPr>
-              <a:t>Additional fields — new, not carried over from Create Change Request</a:t>
-            </a:r>
-            <a:endParaRPr lang="en-US" sz="1500" dirty="0"/>
-          </a:p>
-        </p:txBody>
-      </p:sp>
-      <p:sp>
-        <p:nvSpPr>
-          <p:cNvPr id="8" name="Text 5"/>
-          <p:cNvSpPr/>
-          <p:nvPr/>
-        </p:nvSpPr>
-        <p:spPr>
-          <a:xfrm>
-            <a:off x="822960" y="2926080"/>
-            <a:ext cx="3163733" cy="347472"/>
-          </a:xfrm>
-          <a:prstGeom prst="rect">
-            <a:avLst/>
-          </a:prstGeom>
-          <a:noFill/>
-          <a:ln/>
-        </p:spPr>
-        <p:txBody>
-          <a:bodyPr wrap="square" lIns="0" tIns="0" rIns="0" bIns="0" rtlCol="0" anchor="ctr"/>
-          <a:lstStyle/>
-          <a:p>
-            <a:pPr marL="0" indent="0">
-              <a:buNone/>
-            </a:pPr>
-            <a:r>
-              <a:rPr lang="en-US" sz="1250" b="1" dirty="0">
-                <a:solidFill>
-                  <a:srgbClr val="4A4A4A"/>
-                </a:solidFill>
-                <a:latin typeface="Calibri" pitchFamily="34" charset="0"/>
-                <a:ea typeface="Calibri" pitchFamily="34" charset="-122"/>
-                <a:cs typeface="Calibri" pitchFamily="34" charset="-120"/>
-              </a:rPr>
-              <a:t>New field</a:t>
-            </a:r>
-            <a:endParaRPr lang="en-US" sz="1250" dirty="0"/>
-          </a:p>
-        </p:txBody>
-      </p:sp>
-      <p:sp>
-        <p:nvSpPr>
-          <p:cNvPr id="9" name="Text 6"/>
-          <p:cNvSpPr/>
-          <p:nvPr/>
-        </p:nvSpPr>
-        <p:spPr>
-          <a:xfrm>
-            <a:off x="3986693" y="2926080"/>
-            <a:ext cx="7382043" cy="347472"/>
-          </a:xfrm>
-          <a:prstGeom prst="rect">
-            <a:avLst/>
-          </a:prstGeom>
-          <a:noFill/>
-          <a:ln/>
-        </p:spPr>
-        <p:txBody>
-          <a:bodyPr wrap="square" lIns="0" tIns="0" rIns="0" bIns="0" rtlCol="0" anchor="ctr"/>
-          <a:lstStyle/>
-          <a:p>
-            <a:pPr marL="0" indent="0">
-              <a:buNone/>
-            </a:pPr>
-            <a:r>
-              <a:rPr lang="en-US" sz="1250" b="1" dirty="0">
-                <a:solidFill>
-                  <a:srgbClr val="4A4A4A"/>
-                </a:solidFill>
-                <a:latin typeface="Calibri" pitchFamily="34" charset="0"/>
-                <a:ea typeface="Calibri" pitchFamily="34" charset="-122"/>
-                <a:cs typeface="Calibri" pitchFamily="34" charset="-120"/>
-              </a:rPr>
-              <a:t>What it is</a:t>
-            </a:r>
-            <a:endParaRPr lang="en-US" sz="1250" dirty="0"/>
-          </a:p>
-        </p:txBody>
-      </p:sp>
-      <p:sp>
-        <p:nvSpPr>
-          <p:cNvPr id="10" name="Shape 7"/>
-          <p:cNvSpPr/>
-          <p:nvPr/>
-        </p:nvSpPr>
-        <p:spPr>
-          <a:xfrm>
-            <a:off x="822960" y="3328416"/>
-            <a:ext cx="10545775" cy="0"/>
-          </a:xfrm>
-          <a:prstGeom prst="line">
-            <a:avLst/>
-          </a:prstGeom>
-          <a:noFill/>
-          <a:ln w="12700">
-            <a:solidFill>
-              <a:srgbClr val="E5E5E5"/>
-            </a:solidFill>
-            <a:prstDash val="solid"/>
-          </a:ln>
         </p:spPr>
         <p:txBody>
           <a:bodyPr/>
@@ -8942,9 +8741,7 @@
           <a:prstGeom prst="rect">
             <a:avLst/>
           </a:prstGeom>
-          <a:solidFill>
-            <a:srgbClr val="F8E8EA"/>
-          </a:solidFill>
+          <a:noFill/>
           <a:ln/>
         </p:spPr>
         <p:txBody>
@@ -9652,14 +9449,9 @@
               <a:gd name="adj" fmla="val 8000"/>
             </a:avLst>
           </a:prstGeom>
-          <a:solidFill>
-            <a:srgbClr val="F8E8EA"/>
-          </a:solidFill>
-          <a:ln w="12700">
-            <a:solidFill>
-              <a:srgbClr val="E5E5E5"/>
-            </a:solidFill>
-            <a:prstDash val="solid"/>
+          <a:noFill/>
+          <a:ln>
+            <a:noFill/>
           </a:ln>
         </p:spPr>
         <p:txBody>
@@ -9719,13 +9511,13 @@
               <a:buNone/>
             </a:pPr>
             <a:r>
-              <a:rPr lang="en-US" sz="3400" b="1" dirty="0">
+              <a:rPr lang="en-US" sz="3400" dirty="0">
                 <a:solidFill>
                   <a:srgbClr val="1A1A1A"/>
                 </a:solidFill>
-                <a:latin typeface="Segoe UI Semibold" pitchFamily="34" charset="0"/>
-                <a:ea typeface="Segoe UI Semibold" pitchFamily="34" charset="-122"/>
-                <a:cs typeface="Segoe UI Semibold" pitchFamily="34" charset="-120"/>
+                <a:latin typeface="Segoe UI Light" pitchFamily="34" charset="0"/>
+                <a:ea typeface="Segoe UI Light" pitchFamily="34" charset="-122"/>
+                <a:cs typeface="Segoe UI Light" pitchFamily="34" charset="-120"/>
               </a:rPr>
               <a:t>Develop</a:t>
             </a:r>
@@ -9788,22 +9580,10 @@
               <a:gd name="adj" fmla="val 2581"/>
             </a:avLst>
           </a:prstGeom>
-          <a:solidFill>
-            <a:srgbClr val="FFFFFF"/>
-          </a:solidFill>
-          <a:ln w="12700">
-            <a:solidFill>
-              <a:srgbClr val="E5E5E5"/>
-            </a:solidFill>
-            <a:prstDash val="solid"/>
+          <a:noFill/>
+          <a:ln>
+            <a:noFill/>
           </a:ln>
-          <a:effectLst>
-            <a:outerShdw blurRad="152400" dist="38100" dir="5400000" algn="bl" rotWithShape="0">
-              <a:srgbClr val="252525">
-                <a:alpha val="8000"/>
-              </a:srgbClr>
-            </a:outerShdw>
-          </a:effectLst>
         </p:spPr>
         <p:txBody>
           <a:bodyPr/>
@@ -9840,7 +9620,7 @@
             <a:r>
               <a:rPr lang="en-US" sz="1500" b="1" dirty="0">
                 <a:solidFill>
-                  <a:srgbClr val="B41832"/>
+                  <a:srgbClr val="CF0C2C"/>
                 </a:solidFill>
                 <a:latin typeface="Calibri" pitchFamily="34" charset="0"/>
                 <a:ea typeface="Calibri" pitchFamily="34" charset="-122"/>
@@ -10073,7 +9853,7 @@
         <a:srgbClr val="E7E6E6"/>
       </a:lt2>
       <a:accent1>
-        <a:srgbClr val="B41832"/>
+        <a:srgbClr val="CF0C2C"/>
       </a:accent1>
       <a:accent2>
         <a:srgbClr val="ED7D31"/>
@@ -10099,7 +9879,7 @@
     </a:clrScheme>
     <a:fontScheme name="Office">
       <a:majorFont>
-        <a:latin typeface="Segoe UI Semibold" panose="020F0302020204030204"/>
+        <a:latin typeface="Segoe UI Light" panose="020F0302020204030204"/>
         <a:ea typeface=""/>
         <a:cs typeface=""/>
         <a:font script="Jpan" typeface="游ゴシック Light"/>

--- a/docs/presentations/eCMRs_plan.pptx
+++ b/docs/presentations/eCMRs_plan.pptx
@@ -15,6 +15,7 @@
     <p:sldId id="266" r:id="rId6"/>
     <p:sldId id="259" r:id="rId7"/>
     <p:sldId id="268" r:id="rId8"/>
+    <p:sldId id="269" r:id="rId21"/>
     <p:sldId id="260" r:id="rId10"/>
     <p:sldId id="261" r:id="rId11"/>
     <p:sldId id="263" r:id="rId12"/>
@@ -1477,7 +1478,7 @@
     <p:bg>
       <p:bgPr>
         <a:solidFill>
-          <a:srgbClr val="1A1A1A"/>
+          <a:srgbClr val="FFFFFF"/>
         </a:solidFill>
         <a:effectLst/>
       </p:bgPr>
@@ -1535,7 +1536,7 @@
             <a:avLst/>
           </a:prstGeom>
           <a:solidFill>
-            <a:srgbClr val="252525"/>
+            <a:srgbClr val="F7F7F7"/>
           </a:solidFill>
           <a:ln/>
         </p:spPr>
@@ -1613,7 +1614,7 @@
             <a:r>
               <a:rPr lang="en-US" sz="6000" dirty="0">
                 <a:solidFill>
-                  <a:srgbClr val="FFFFFF"/>
+                  <a:srgbClr val="CF0C2C"/>
                 </a:solidFill>
                 <a:latin typeface="Segoe UI Light" pitchFamily="34" charset="0"/>
                 <a:ea typeface="Segoe UI Light" pitchFamily="34" charset="-122"/>
@@ -1652,7 +1653,7 @@
             <a:r>
               <a:rPr lang="en-US" sz="1700" dirty="0">
                 <a:solidFill>
-                  <a:srgbClr val="CFCFCF"/>
+                  <a:srgbClr val="4A4A4A"/>
                 </a:solidFill>
                 <a:latin typeface="Calibri" pitchFamily="34" charset="0"/>
                 <a:ea typeface="Calibri" pitchFamily="34" charset="-122"/>
@@ -1884,7 +1885,7 @@
             <a:r>
               <a:rPr lang="en-US" sz="1500" b="1" dirty="0">
                 <a:solidFill>
-                  <a:srgbClr val="CF0C2C"/>
+                  <a:srgbClr val="1A1A1A"/>
                 </a:solidFill>
                 <a:latin typeface="Calibri" pitchFamily="34" charset="0"/>
                 <a:ea typeface="Calibri" pitchFamily="34" charset="-122"/>
@@ -1923,7 +1924,7 @@
             <a:r>
               <a:rPr lang="en-US" sz="1500" b="1" dirty="0">
                 <a:solidFill>
-                  <a:srgbClr val="CF0C2C"/>
+                  <a:srgbClr val="1A1A1A"/>
                 </a:solidFill>
                 <a:latin typeface="Calibri" pitchFamily="34" charset="0"/>
                 <a:ea typeface="Calibri" pitchFamily="34" charset="-122"/>
@@ -2001,7 +2002,7 @@
             <a:r>
               <a:rPr lang="en-US" sz="1500" b="1" dirty="0">
                 <a:solidFill>
-                  <a:srgbClr val="CF0C2C"/>
+                  <a:srgbClr val="1A1A1A"/>
                 </a:solidFill>
                 <a:latin typeface="Calibri" pitchFamily="34" charset="0"/>
                 <a:ea typeface="Calibri" pitchFamily="34" charset="-122"/>
@@ -2079,7 +2080,7 @@
             <a:r>
               <a:rPr lang="en-US" sz="1500" b="1" dirty="0">
                 <a:solidFill>
-                  <a:srgbClr val="CF0C2C"/>
+                  <a:srgbClr val="1A1A1A"/>
                 </a:solidFill>
                 <a:latin typeface="Calibri" pitchFamily="34" charset="0"/>
                 <a:ea typeface="Calibri" pitchFamily="34" charset="-122"/>
@@ -2157,7 +2158,7 @@
             <a:r>
               <a:rPr lang="en-US" sz="1500" b="1" dirty="0">
                 <a:solidFill>
-                  <a:srgbClr val="CF0C2C"/>
+                  <a:srgbClr val="1A1A1A"/>
                 </a:solidFill>
                 <a:latin typeface="Calibri" pitchFamily="34" charset="0"/>
                 <a:ea typeface="Calibri" pitchFamily="34" charset="-122"/>
@@ -2240,7 +2241,7 @@
             <a:r>
               <a:rPr lang="en-US" sz="1500" b="1" dirty="0">
                 <a:solidFill>
-                  <a:srgbClr val="CF0C2C"/>
+                  <a:srgbClr val="1A1A1A"/>
                 </a:solidFill>
                 <a:latin typeface="Calibri" pitchFamily="34" charset="0"/>
                 <a:ea typeface="Calibri" pitchFamily="34" charset="-122"/>
@@ -2780,7 +2781,7 @@
             <a:r>
               <a:rPr lang="en-US" sz="1500" b="1" dirty="0">
                 <a:solidFill>
-                  <a:srgbClr val="CF0C2C"/>
+                  <a:srgbClr val="1A1A1A"/>
                 </a:solidFill>
                 <a:latin typeface="Calibri" pitchFamily="34" charset="0"/>
                 <a:ea typeface="Calibri" pitchFamily="34" charset="-122"/>
@@ -2819,7 +2820,7 @@
             <a:r>
               <a:rPr lang="en-US" sz="1600" b="1" dirty="0">
                 <a:solidFill>
-                  <a:srgbClr val="CF0C2C"/>
+                  <a:srgbClr val="1A1A1A"/>
                 </a:solidFill>
                 <a:latin typeface="Calibri" pitchFamily="34" charset="0"/>
                 <a:ea typeface="Calibri" pitchFamily="34" charset="-122"/>
@@ -2897,7 +2898,7 @@
             <a:r>
               <a:rPr lang="en-US" sz="1600" b="1" dirty="0">
                 <a:solidFill>
-                  <a:srgbClr val="CF0C2C"/>
+                  <a:srgbClr val="1A1A1A"/>
                 </a:solidFill>
                 <a:latin typeface="Calibri" pitchFamily="34" charset="0"/>
                 <a:ea typeface="Calibri" pitchFamily="34" charset="-122"/>
@@ -2975,7 +2976,7 @@
             <a:r>
               <a:rPr lang="en-US" sz="1600" b="1" dirty="0">
                 <a:solidFill>
-                  <a:srgbClr val="CF0C2C"/>
+                  <a:srgbClr val="1A1A1A"/>
                 </a:solidFill>
                 <a:latin typeface="Calibri" pitchFamily="34" charset="0"/>
                 <a:ea typeface="Calibri" pitchFamily="34" charset="-122"/>
@@ -3246,7 +3247,7 @@
             <a:r>
               <a:rPr lang="en-US" sz="1500" b="1" dirty="0">
                 <a:solidFill>
-                  <a:srgbClr val="CF0C2C"/>
+                  <a:srgbClr val="1A1A1A"/>
                 </a:solidFill>
                 <a:latin typeface="Calibri" pitchFamily="34" charset="0"/>
                 <a:ea typeface="Calibri" pitchFamily="34" charset="-122"/>
@@ -3285,7 +3286,7 @@
             <a:r>
               <a:rPr lang="en-US" sz="1500" b="1" dirty="0">
                 <a:solidFill>
-                  <a:srgbClr val="CF0C2C"/>
+                  <a:srgbClr val="1A1A1A"/>
                 </a:solidFill>
                 <a:latin typeface="Calibri" pitchFamily="34" charset="0"/>
                 <a:ea typeface="Calibri" pitchFamily="34" charset="-122"/>
@@ -3363,7 +3364,7 @@
             <a:r>
               <a:rPr lang="en-US" sz="1500" b="1" dirty="0">
                 <a:solidFill>
-                  <a:srgbClr val="CF0C2C"/>
+                  <a:srgbClr val="1A1A1A"/>
                 </a:solidFill>
                 <a:latin typeface="Calibri" pitchFamily="34" charset="0"/>
                 <a:ea typeface="Calibri" pitchFamily="34" charset="-122"/>
@@ -3441,7 +3442,7 @@
             <a:r>
               <a:rPr lang="en-US" sz="1500" b="1" dirty="0">
                 <a:solidFill>
-                  <a:srgbClr val="CF0C2C"/>
+                  <a:srgbClr val="1A1A1A"/>
                 </a:solidFill>
                 <a:latin typeface="Calibri" pitchFamily="34" charset="0"/>
                 <a:ea typeface="Calibri" pitchFamily="34" charset="-122"/>
@@ -3712,7 +3713,7 @@
             <a:r>
               <a:rPr lang="en-US" sz="1500" b="1" dirty="0">
                 <a:solidFill>
-                  <a:srgbClr val="CF0C2C"/>
+                  <a:srgbClr val="1A1A1A"/>
                 </a:solidFill>
                 <a:latin typeface="Calibri" pitchFamily="34" charset="0"/>
                 <a:ea typeface="Calibri" pitchFamily="34" charset="-122"/>
@@ -3865,7 +3866,7 @@
     <p:bg>
       <p:bgPr>
         <a:solidFill>
-          <a:srgbClr val="1A1A1A"/>
+          <a:srgbClr val="FFFFFF"/>
         </a:solidFill>
         <a:effectLst/>
       </p:bgPr>
@@ -3899,7 +3900,7 @@
             <a:avLst/>
           </a:prstGeom>
           <a:solidFill>
-            <a:srgbClr val="252525"/>
+            <a:srgbClr val="F7F7F7"/>
           </a:solidFill>
           <a:ln/>
         </p:spPr>
@@ -3926,7 +3927,7 @@
             <a:avLst/>
           </a:prstGeom>
           <a:solidFill>
-            <a:srgbClr val="252525"/>
+            <a:srgbClr val="F7F7F7"/>
           </a:solidFill>
           <a:ln/>
         </p:spPr>
@@ -4023,7 +4024,7 @@
             <a:r>
               <a:rPr lang="en-US" sz="4800" dirty="0">
                 <a:solidFill>
-                  <a:srgbClr val="FFFFFF"/>
+                  <a:srgbClr val="CF0C2C"/>
                 </a:solidFill>
                 <a:latin typeface="Segoe UI Light" pitchFamily="34" charset="0"/>
                 <a:ea typeface="Segoe UI Light" pitchFamily="34" charset="-122"/>
@@ -4062,7 +4063,7 @@
             <a:r>
               <a:rPr lang="en-US" sz="1700" dirty="0">
                 <a:solidFill>
-                  <a:srgbClr val="CFCFCF"/>
+                  <a:srgbClr val="4A4A4A"/>
                 </a:solidFill>
                 <a:latin typeface="Calibri" pitchFamily="34" charset="0"/>
                 <a:ea typeface="Calibri" pitchFamily="34" charset="-122"/>
@@ -4090,14 +4091,9 @@
               <a:gd name="adj" fmla="val 4138"/>
             </a:avLst>
           </a:prstGeom>
-          <a:solidFill>
-            <a:srgbClr val="252525"/>
-          </a:solidFill>
-          <a:ln w="12700">
-            <a:solidFill>
-              <a:srgbClr val="3A3A3A"/>
-            </a:solidFill>
-            <a:prstDash val="solid"/>
+          <a:noFill/>
+          <a:ln>
+            <a:noFill/>
           </a:ln>
         </p:spPr>
         <p:txBody>
@@ -4135,7 +4131,7 @@
             <a:r>
               <a:rPr lang="en-US" sz="1500" b="1" dirty="0">
                 <a:solidFill>
-                  <a:srgbClr val="CF0C2C"/>
+                  <a:srgbClr val="1A1A1A"/>
                 </a:solidFill>
                 <a:latin typeface="Calibri" pitchFamily="34" charset="0"/>
                 <a:ea typeface="Calibri" pitchFamily="34" charset="-122"/>
@@ -4178,7 +4174,7 @@
             <a:r>
               <a:rPr lang="en-US" sz="1500" dirty="0">
                 <a:solidFill>
-                  <a:srgbClr val="FFFFFF"/>
+                  <a:srgbClr val="1A1A1A"/>
                 </a:solidFill>
                 <a:latin typeface="Calibri" pitchFamily="34" charset="0"/>
                 <a:ea typeface="Calibri" pitchFamily="34" charset="-122"/>
@@ -4195,7 +4191,7 @@
             <a:r>
               <a:rPr lang="en-US" sz="1500" dirty="0">
                 <a:solidFill>
-                  <a:srgbClr val="FFFFFF"/>
+                  <a:srgbClr val="1A1A1A"/>
                 </a:solidFill>
                 <a:latin typeface="Calibri" pitchFamily="34" charset="0"/>
                 <a:ea typeface="Calibri" pitchFamily="34" charset="-122"/>
@@ -4212,7 +4208,7 @@
             <a:r>
               <a:rPr lang="en-US" sz="1500" dirty="0">
                 <a:solidFill>
-                  <a:srgbClr val="FFFFFF"/>
+                  <a:srgbClr val="1A1A1A"/>
                 </a:solidFill>
                 <a:latin typeface="Calibri" pitchFamily="34" charset="0"/>
                 <a:ea typeface="Calibri" pitchFamily="34" charset="-122"/>
@@ -4224,6 +4220,229 @@
           </a:p>
         </p:txBody>
       </p:sp>
+    </p:spTree>
+  </p:cSld>
+  <p:clrMapOvr>
+    <a:masterClrMapping/>
+  </p:clrMapOvr>
+</p:sld>
+</file>
+
+<file path=ppt/slides/slide15.xml><?xml version="1.0" encoding="utf-8"?>
+<p:sld xmlns:a="http://schemas.openxmlformats.org/drawingml/2006/main" xmlns:r="http://schemas.openxmlformats.org/officeDocument/2006/relationships" xmlns:p="http://schemas.openxmlformats.org/presentationml/2006/main">
+  <p:cSld name="Slide 4">
+    <p:bg>
+      <p:bgPr>
+        <a:solidFill>
+          <a:srgbClr val="F7F7F7"/>
+        </a:solidFill>
+        <a:effectLst/>
+      </p:bgPr>
+    </p:bg>
+    <p:spTree>
+      <p:nvGrpSpPr>
+        <p:cNvPr id="1" name=""/>
+        <p:cNvGrpSpPr/>
+        <p:nvPr/>
+      </p:nvGrpSpPr>
+      <p:grpSpPr>
+        <a:xfrm>
+          <a:off x="0" y="0"/>
+          <a:ext cx="0" cy="0"/>
+          <a:chOff x="0" y="0"/>
+          <a:chExt cx="0" cy="0"/>
+        </a:xfrm>
+      </p:grpSpPr>
+      <p:sp>
+        <p:nvSpPr>
+          <p:cNvPr id="2" name="Text 0"/>
+          <p:cNvSpPr/>
+          <p:nvPr/>
+        </p:nvSpPr>
+        <p:spPr>
+          <a:xfrm>
+            <a:off x="457200" y="502920"/>
+            <a:ext cx="9539935" cy="685800"/>
+          </a:xfrm>
+          <a:prstGeom prst="rect">
+            <a:avLst/>
+          </a:prstGeom>
+          <a:noFill/>
+          <a:ln/>
+        </p:spPr>
+        <p:txBody>
+          <a:bodyPr wrap="square" lIns="0" tIns="0" rIns="0" bIns="0" rtlCol="0" anchor="t"/>
+          <a:lstStyle/>
+          <a:p>
+            <a:pPr marL="0" indent="0" algn="l">
+              <a:buNone/>
+            </a:pPr>
+            <a:r>
+              <a:rPr lang="en-US" sz="3400" dirty="0">
+                <a:solidFill>
+                  <a:srgbClr val="1A1A1A"/>
+                </a:solidFill>
+                <a:latin typeface="Segoe UI Light" pitchFamily="34" charset="0"/>
+                <a:ea typeface="Segoe UI Light" pitchFamily="34" charset="-122"/>
+                <a:cs typeface="Segoe UI Light" pitchFamily="34" charset="-120"/>
+              </a:rPr>
+              <a:t>Design</a:t>
+            </a:r>
+            <a:endParaRPr lang="en-US" sz="3400" dirty="0"/>
+          </a:p>
+        </p:txBody>
+      </p:sp>
+      <p:sp>
+        <p:nvSpPr>
+          <p:cNvPr id="3" name="Text 1"/>
+          <p:cNvSpPr/>
+          <p:nvPr/>
+        </p:nvSpPr>
+        <p:spPr>
+          <a:xfrm>
+            <a:off x="457200" y="1216152"/>
+            <a:ext cx="9539935" cy="640080"/>
+          </a:xfrm>
+          <a:prstGeom prst="rect">
+            <a:avLst/>
+          </a:prstGeom>
+          <a:noFill/>
+          <a:ln/>
+        </p:spPr>
+        <p:txBody>
+          <a:bodyPr wrap="square" lIns="0" tIns="0" rIns="0" bIns="0" rtlCol="0" anchor="t"/>
+          <a:lstStyle/>
+          <a:p>
+            <a:pPr marL="0" indent="0" algn="l">
+              <a:buNone/>
+            </a:pPr>
+            <a:r>
+              <a:rPr lang="en-US" sz="1600" dirty="0">
+                <a:solidFill>
+                  <a:srgbClr val="4A4A4A"/>
+                </a:solidFill>
+                <a:latin typeface="Calibri" pitchFamily="34" charset="0"/>
+                <a:ea typeface="Calibri" pitchFamily="34" charset="-122"/>
+                <a:cs typeface="Calibri" pitchFamily="34" charset="-120"/>
+              </a:rPr>
+              <a:t>What the eCMRs screen actually looks like, with the additional and Change Request fields shown in place above Quality.</a:t>
+            </a:r>
+            <a:endParaRPr lang="en-US" sz="1600" dirty="0"/>
+          </a:p>
+        </p:txBody>
+      </p:sp>
+      <p:sp>
+        <p:nvSpPr>
+          <p:cNvPr id="4" name="Shape 2"/>
+          <p:cNvSpPr/>
+          <p:nvPr/>
+        </p:nvSpPr>
+        <p:spPr>
+          <a:xfrm>
+            <a:off x="10362895" y="502920"/>
+            <a:ext cx="1371600" cy="1371600"/>
+          </a:xfrm>
+          <a:prstGeom prst="roundRect">
+            <a:avLst>
+              <a:gd name="adj" fmla="val 8000"/>
+            </a:avLst>
+          </a:prstGeom>
+          <a:noFill/>
+          <a:ln>
+            <a:noFill/>
+          </a:ln>
+        </p:spPr>
+        <p:txBody>
+          <a:bodyPr/>
+          <a:lstStyle/>
+          <a:p>
+            <a:endParaRPr lang="en-US" dirty="0"/>
+          </a:p>
+        </p:txBody>
+      </p:sp>
+      <p:pic>
+        <p:nvPicPr>
+          <p:cNvPr id="5" name="Image 0" descr="icons/pencil.png"/>
+          <p:cNvPicPr>
+            <a:picLocks noChangeAspect="1"/>
+          </p:cNvPicPr>
+          <p:nvPr/>
+        </p:nvPicPr>
+        <p:blipFill>
+          <a:blip r:embed="rId2"/>
+          <a:stretch>
+            <a:fillRect/>
+          </a:stretch>
+        </p:blipFill>
+        <p:spPr>
+          <a:xfrm>
+            <a:off x="10705795" y="845820"/>
+            <a:ext cx="685800" cy="685800"/>
+          </a:xfrm>
+          <a:prstGeom prst="rect">
+            <a:avLst/>
+          </a:prstGeom>
+        </p:spPr>
+      </p:pic>
+      <p:sp>
+        <p:nvSpPr>
+          <p:cNvPr id="6" name="Shape 3"/>
+          <p:cNvSpPr/>
+          <p:nvPr/>
+        </p:nvSpPr>
+        <p:spPr>
+          <a:xfrm>
+            <a:off x="457200" y="2148840"/>
+            <a:ext cx="11277295" cy="4251960"/>
+          </a:xfrm>
+          <a:prstGeom prst="roundRect">
+            <a:avLst>
+              <a:gd name="adj" fmla="val 2581"/>
+            </a:avLst>
+          </a:prstGeom>
+          <a:noFill/>
+          <a:ln>
+            <a:noFill/>
+          </a:ln>
+        </p:spPr>
+        <p:txBody>
+          <a:bodyPr/>
+          <a:lstStyle/>
+          <a:p>
+            <a:endParaRPr lang="en-US" dirty="0"/>
+          </a:p>
+        </p:txBody>
+      </p:sp>
+      <p:pic>
+        <p:nvPicPr>
+          <p:cNvPr id="50" name="eCMRs Form Mockup" descr="eCMRs form mockup screenshot"/>
+          <p:cNvPicPr>
+            <a:picLocks noChangeAspect="1"/>
+          </p:cNvPicPr>
+          <p:nvPr/>
+        </p:nvPicPr>
+        <p:blipFill>
+          <a:blip r:embed="rId3"/>
+          <a:stretch>
+            <a:fillRect/>
+          </a:stretch>
+        </p:blipFill>
+        <p:spPr>
+          <a:xfrm>
+            <a:off x="4664652" y="2148840"/>
+            <a:ext cx="2862695" cy="4251960"/>
+          </a:xfrm>
+          <a:prstGeom prst="rect">
+            <a:avLst/>
+          </a:prstGeom>
+          <a:ln w="9525">
+            <a:solidFill>
+              <a:srgbClr val="E5E5E5"/>
+            </a:solidFill>
+            <a:prstDash val="solid"/>
+          </a:ln>
+        </p:spPr>
+      </p:pic>
     </p:spTree>
   </p:cSld>
   <p:clrMapOvr>
@@ -4451,7 +4670,7 @@
             <a:r>
               <a:rPr lang="en-US" sz="1400" b="1" dirty="0">
                 <a:solidFill>
-                  <a:srgbClr val="CF0C2C"/>
+                  <a:srgbClr val="1A1A1A"/>
                 </a:solidFill>
                 <a:latin typeface="Calibri" pitchFamily="34" charset="0"/>
                 <a:ea typeface="Calibri" pitchFamily="34" charset="-122"/>
@@ -4582,7 +4801,7 @@
             <a:r>
               <a:rPr lang="en-US" sz="1400" b="1" dirty="0">
                 <a:solidFill>
-                  <a:srgbClr val="CF0C2C"/>
+                  <a:srgbClr val="1A1A1A"/>
                 </a:solidFill>
                 <a:latin typeface="Calibri" pitchFamily="34" charset="0"/>
                 <a:ea typeface="Calibri" pitchFamily="34" charset="-122"/>
@@ -4713,7 +4932,7 @@
             <a:r>
               <a:rPr lang="en-US" sz="1400" b="1" dirty="0">
                 <a:solidFill>
-                  <a:srgbClr val="CF0C2C"/>
+                  <a:srgbClr val="1A1A1A"/>
                 </a:solidFill>
                 <a:latin typeface="Calibri" pitchFamily="34" charset="0"/>
                 <a:ea typeface="Calibri" pitchFamily="34" charset="-122"/>
@@ -4844,7 +5063,7 @@
             <a:r>
               <a:rPr lang="en-US" sz="1400" b="1" dirty="0">
                 <a:solidFill>
-                  <a:srgbClr val="CF0C2C"/>
+                  <a:srgbClr val="1A1A1A"/>
                 </a:solidFill>
                 <a:latin typeface="Calibri" pitchFamily="34" charset="0"/>
                 <a:ea typeface="Calibri" pitchFamily="34" charset="-122"/>
@@ -4975,7 +5194,7 @@
             <a:r>
               <a:rPr lang="en-US" sz="1400" b="1" dirty="0">
                 <a:solidFill>
-                  <a:srgbClr val="CF0C2C"/>
+                  <a:srgbClr val="1A1A1A"/>
                 </a:solidFill>
                 <a:latin typeface="Calibri" pitchFamily="34" charset="0"/>
                 <a:ea typeface="Calibri" pitchFamily="34" charset="-122"/>
@@ -5106,7 +5325,7 @@
             <a:r>
               <a:rPr lang="en-US" sz="1400" b="1" dirty="0">
                 <a:solidFill>
-                  <a:srgbClr val="CF0C2C"/>
+                  <a:srgbClr val="1A1A1A"/>
                 </a:solidFill>
                 <a:latin typeface="Calibri" pitchFamily="34" charset="0"/>
                 <a:ea typeface="Calibri" pitchFamily="34" charset="-122"/>
@@ -5237,7 +5456,7 @@
             <a:r>
               <a:rPr lang="en-US" sz="1400" b="1" dirty="0">
                 <a:solidFill>
-                  <a:srgbClr val="CF0C2C"/>
+                  <a:srgbClr val="1A1A1A"/>
                 </a:solidFill>
                 <a:latin typeface="Calibri" pitchFamily="34" charset="0"/>
                 <a:ea typeface="Calibri" pitchFamily="34" charset="-122"/>
@@ -5368,7 +5587,7 @@
             <a:r>
               <a:rPr lang="en-US" sz="1400" b="1" dirty="0">
                 <a:solidFill>
-                  <a:srgbClr val="CF0C2C"/>
+                  <a:srgbClr val="1A1A1A"/>
                 </a:solidFill>
                 <a:latin typeface="Calibri" pitchFamily="34" charset="0"/>
                 <a:ea typeface="Calibri" pitchFamily="34" charset="-122"/>
@@ -5662,7 +5881,7 @@
             <a:r>
               <a:rPr lang="en-US" sz="1500" b="1" dirty="0">
                 <a:solidFill>
-                  <a:srgbClr val="CF0C2C"/>
+                  <a:srgbClr val="1A1A1A"/>
                 </a:solidFill>
                 <a:latin typeface="Calibri" pitchFamily="34" charset="0"/>
                 <a:ea typeface="Calibri" pitchFamily="34" charset="-122"/>
@@ -5738,7 +5957,7 @@
             <a:r>
               <a:rPr lang="en-US" sz="1400" b="1" dirty="0">
                 <a:solidFill>
-                  <a:srgbClr val="CF0C2C"/>
+                  <a:srgbClr val="1A1A1A"/>
                 </a:solidFill>
                 <a:latin typeface="Calibri" pitchFamily="34" charset="0"/>
                 <a:ea typeface="Calibri" pitchFamily="34" charset="-122"/>
@@ -5873,7 +6092,7 @@
             <a:r>
               <a:rPr lang="en-US" sz="1400" b="1" dirty="0">
                 <a:solidFill>
-                  <a:srgbClr val="CF0C2C"/>
+                  <a:srgbClr val="1A1A1A"/>
                 </a:solidFill>
                 <a:latin typeface="Calibri" pitchFamily="34" charset="0"/>
                 <a:ea typeface="Calibri" pitchFamily="34" charset="-122"/>
@@ -6008,7 +6227,7 @@
             <a:r>
               <a:rPr lang="en-US" sz="1400" b="1" dirty="0">
                 <a:solidFill>
-                  <a:srgbClr val="CF0C2C"/>
+                  <a:srgbClr val="1A1A1A"/>
                 </a:solidFill>
                 <a:latin typeface="Calibri" pitchFamily="34" charset="0"/>
                 <a:ea typeface="Calibri" pitchFamily="34" charset="-122"/>
@@ -6143,7 +6362,7 @@
             <a:r>
               <a:rPr lang="en-US" sz="1400" b="1" dirty="0">
                 <a:solidFill>
-                  <a:srgbClr val="CF0C2C"/>
+                  <a:srgbClr val="1A1A1A"/>
                 </a:solidFill>
                 <a:latin typeface="Calibri" pitchFamily="34" charset="0"/>
                 <a:ea typeface="Calibri" pitchFamily="34" charset="-122"/>
@@ -6278,7 +6497,7 @@
             <a:r>
               <a:rPr lang="en-US" sz="1400" b="1" dirty="0">
                 <a:solidFill>
-                  <a:srgbClr val="CF0C2C"/>
+                  <a:srgbClr val="1A1A1A"/>
                 </a:solidFill>
                 <a:latin typeface="Calibri" pitchFamily="34" charset="0"/>
                 <a:ea typeface="Calibri" pitchFamily="34" charset="-122"/>
@@ -6530,7 +6749,7 @@
             <a:r>
               <a:rPr lang="en-US" sz="1500" b="1" dirty="0">
                 <a:solidFill>
-                  <a:srgbClr val="CF0C2C"/>
+                  <a:srgbClr val="1A1A1A"/>
                 </a:solidFill>
                 <a:latin typeface="Calibri" pitchFamily="34" charset="0"/>
                 <a:ea typeface="Calibri" pitchFamily="34" charset="-122"/>
@@ -7013,7 +7232,7 @@
             <a:r>
               <a:rPr lang="en-US" sz="1500" b="1" dirty="0">
                 <a:solidFill>
-                  <a:srgbClr val="CF0C2C"/>
+                  <a:srgbClr val="1A1A1A"/>
                 </a:solidFill>
                 <a:latin typeface="Calibri" pitchFamily="34" charset="0"/>
                 <a:ea typeface="Calibri" pitchFamily="34" charset="-122"/>
@@ -7486,7 +7705,7 @@
             <a:r>
               <a:rPr lang="en-US" sz="1500" b="1" dirty="0">
                 <a:solidFill>
-                  <a:srgbClr val="CF0C2C"/>
+                  <a:srgbClr val="1A1A1A"/>
                 </a:solidFill>
                 <a:latin typeface="Calibri" pitchFamily="34" charset="0"/>
                 <a:ea typeface="Calibri" pitchFamily="34" charset="-122"/>
@@ -7500,14 +7719,14 @@
       </p:sp>
       <p:sp>
         <p:nvSpPr>
-          <p:cNvPr id="8" name="Text 5"/>
+          <p:cNvPr id="100" name="Header Field 0"/>
           <p:cNvSpPr/>
           <p:nvPr/>
         </p:nvSpPr>
         <p:spPr>
           <a:xfrm>
             <a:off x="822960" y="2926080"/>
-            <a:ext cx="3163733" cy="347472"/>
+            <a:ext cx="1450000" cy="300000"/>
           </a:xfrm>
           <a:prstGeom prst="rect">
             <a:avLst/>
@@ -7523,7 +7742,7 @@
               <a:buNone/>
             </a:pPr>
             <a:r>
-              <a:rPr lang="en-US" sz="1250" b="1" dirty="0">
+              <a:rPr lang="en-US" sz="1150" b="1" dirty="0">
                 <a:solidFill>
                   <a:srgbClr val="4A4A4A"/>
                 </a:solidFill>
@@ -7531,22 +7750,22 @@
                 <a:ea typeface="Calibri" pitchFamily="34" charset="-122"/>
                 <a:cs typeface="Calibri" pitchFamily="34" charset="-120"/>
               </a:rPr>
-              <a:t>New column</a:t>
-            </a:r>
-            <a:endParaRPr lang="en-US" sz="1250" dirty="0"/>
-          </a:p>
-        </p:txBody>
-      </p:sp>
-      <p:sp>
-        <p:nvSpPr>
-          <p:cNvPr id="9" name="Text 6"/>
-          <p:cNvSpPr/>
-          <p:nvPr/>
-        </p:nvSpPr>
-        <p:spPr>
-          <a:xfrm>
-            <a:off x="3986693" y="2926080"/>
-            <a:ext cx="7382043" cy="347472"/>
+              <a:t>Field</a:t>
+            </a:r>
+            <a:endParaRPr lang="en-US" sz="1150" dirty="0"/>
+          </a:p>
+        </p:txBody>
+      </p:sp>
+      <p:sp>
+        <p:nvSpPr>
+          <p:cNvPr id="101" name="Header What 0"/>
+          <p:cNvSpPr/>
+          <p:nvPr/>
+        </p:nvSpPr>
+        <p:spPr>
+          <a:xfrm>
+            <a:off x="2372960" y="2926080"/>
+            <a:ext cx="3400000" cy="300000"/>
           </a:xfrm>
           <a:prstGeom prst="rect">
             <a:avLst/>
@@ -7562,7 +7781,7 @@
               <a:buNone/>
             </a:pPr>
             <a:r>
-              <a:rPr lang="en-US" sz="1250" b="1" dirty="0">
+              <a:rPr lang="en-US" sz="1150" b="1" dirty="0">
                 <a:solidFill>
                   <a:srgbClr val="4A4A4A"/>
                 </a:solidFill>
@@ -7570,155 +7789,22 @@
                 <a:ea typeface="Calibri" pitchFamily="34" charset="-122"/>
                 <a:cs typeface="Calibri" pitchFamily="34" charset="-120"/>
               </a:rPr>
-              <a:t>What it carries over</a:t>
-            </a:r>
-            <a:endParaRPr lang="en-US" sz="1250" dirty="0"/>
-          </a:p>
-        </p:txBody>
-      </p:sp>
-      <p:sp>
-        <p:nvSpPr>
-          <p:cNvPr id="10" name="Shape 7"/>
-          <p:cNvSpPr/>
-          <p:nvPr/>
-        </p:nvSpPr>
-        <p:spPr>
-          <a:xfrm>
-            <a:off x="822960" y="3328416"/>
-            <a:ext cx="10545775" cy="0"/>
-          </a:xfrm>
-          <a:prstGeom prst="line">
-            <a:avLst/>
-          </a:prstGeom>
-          <a:noFill/>
-          <a:ln w="12700">
-            <a:solidFill>
-              <a:srgbClr val="E5E5E5"/>
-            </a:solidFill>
-            <a:prstDash val="solid"/>
-          </a:ln>
-        </p:spPr>
-        <p:txBody>
-          <a:bodyPr/>
-          <a:lstStyle/>
-          <a:p>
-            <a:endParaRPr lang="en-US" dirty="0"/>
-          </a:p>
-        </p:txBody>
-      </p:sp>
-      <p:sp>
-        <p:nvSpPr>
-          <p:cNvPr id="11" name="Shape 8"/>
-          <p:cNvSpPr/>
-          <p:nvPr/>
-        </p:nvSpPr>
-        <p:spPr>
-          <a:xfrm>
-            <a:off x="822960" y="3419856"/>
-            <a:ext cx="10545775" cy="400000"/>
-          </a:xfrm>
-          <a:prstGeom prst="rect">
-            <a:avLst/>
-          </a:prstGeom>
-          <a:noFill/>
-          <a:ln/>
-        </p:spPr>
-        <p:txBody>
-          <a:bodyPr/>
-          <a:lstStyle/>
-          <a:p>
-            <a:endParaRPr lang="en-US" dirty="0"/>
-          </a:p>
-        </p:txBody>
-      </p:sp>
-      <p:sp>
-        <p:nvSpPr>
-          <p:cNvPr id="12" name="Text 9"/>
-          <p:cNvSpPr/>
-          <p:nvPr/>
-        </p:nvSpPr>
-        <p:spPr>
-          <a:xfrm>
-            <a:off x="932688" y="3419856"/>
-            <a:ext cx="3054005" cy="400000"/>
-          </a:xfrm>
-          <a:prstGeom prst="rect">
-            <a:avLst/>
-          </a:prstGeom>
-          <a:noFill/>
-          <a:ln/>
-        </p:spPr>
-        <p:txBody>
-          <a:bodyPr wrap="square" lIns="0" tIns="0" rIns="0" bIns="0" rtlCol="0" anchor="ctr"/>
-          <a:lstStyle/>
-          <a:p>
-            <a:pPr marL="0" indent="0">
-              <a:buNone/>
-            </a:pPr>
-            <a:r>
-              <a:rPr lang="en-US" sz="1300" b="1" dirty="0">
-                <a:solidFill>
-                  <a:srgbClr val="1A1A1A"/>
-                </a:solidFill>
-                <a:latin typeface="Calibri" pitchFamily="34" charset="0"/>
-                <a:ea typeface="Calibri" pitchFamily="34" charset="-122"/>
-                <a:cs typeface="Calibri" pitchFamily="34" charset="-120"/>
-              </a:rPr>
-              <a:t>cmr_num</a:t>
-            </a:r>
-            <a:endParaRPr lang="en-US" sz="1300" dirty="0"/>
-          </a:p>
-        </p:txBody>
-      </p:sp>
-      <p:sp>
-        <p:nvSpPr>
-          <p:cNvPr id="13" name="Text 10"/>
-          <p:cNvSpPr/>
-          <p:nvPr/>
-        </p:nvSpPr>
-        <p:spPr>
-          <a:xfrm>
-            <a:off x="3986693" y="3419856"/>
-            <a:ext cx="7290603" cy="400000"/>
-          </a:xfrm>
-          <a:prstGeom prst="rect">
-            <a:avLst/>
-          </a:prstGeom>
-          <a:noFill/>
-          <a:ln/>
-        </p:spPr>
-        <p:txBody>
-          <a:bodyPr wrap="square" lIns="0" tIns="0" rIns="0" bIns="0" rtlCol="0" anchor="ctr"/>
-          <a:lstStyle/>
-          <a:p>
-            <a:pPr marL="0" indent="0">
-              <a:buNone/>
-            </a:pPr>
-            <a:r>
-              <a:rPr lang="en-US" sz="1300" dirty="0">
-                <a:solidFill>
-                  <a:srgbClr val="1A1A1A"/>
-                </a:solidFill>
-                <a:latin typeface="Calibri" pitchFamily="34" charset="0"/>
-                <a:ea typeface="Calibri" pitchFamily="34" charset="-122"/>
-                <a:cs typeface="Calibri" pitchFamily="34" charset="-120"/>
-              </a:rPr>
-              <a:t>The key field - auto-number set in the IDO properties, increments every CMR automatically</a:t>
-            </a:r>
-            <a:endParaRPr lang="en-US" sz="1300" dirty="0"/>
-          </a:p>
-        </p:txBody>
-      </p:sp>
-      <p:sp>
-        <p:nvSpPr>
-          <p:cNvPr id="14" name="Shape 11"/>
-          <p:cNvSpPr/>
-          <p:nvPr/>
-        </p:nvSpPr>
-        <p:spPr>
-          <a:xfrm>
-            <a:off x="822960" y="3819856"/>
-            <a:ext cx="10545775" cy="0"/>
+              <a:t>What it is</a:t>
+            </a:r>
+            <a:endParaRPr lang="en-US" sz="1150" dirty="0"/>
+          </a:p>
+        </p:txBody>
+      </p:sp>
+      <p:sp>
+        <p:nvSpPr>
+          <p:cNvPr id="102" name="HeaderDivider 0"/>
+          <p:cNvSpPr/>
+          <p:nvPr/>
+        </p:nvSpPr>
+        <p:spPr>
+          <a:xfrm>
+            <a:off x="822960" y="3256080"/>
+            <a:ext cx="4950000" cy="0"/>
           </a:xfrm>
           <a:prstGeom prst="line">
             <a:avLst/>
@@ -7741,14 +7827,14 @@
       </p:sp>
       <p:sp>
         <p:nvSpPr>
-          <p:cNvPr id="27" name="Text 24"/>
-          <p:cNvSpPr/>
-          <p:nvPr/>
-        </p:nvSpPr>
-        <p:spPr>
-          <a:xfrm>
-            <a:off x="932688" y="3819856"/>
-            <a:ext cx="3054005" cy="400000"/>
+          <p:cNvPr id="103" name="Header Field 1"/>
+          <p:cNvSpPr/>
+          <p:nvPr/>
+        </p:nvSpPr>
+        <p:spPr>
+          <a:xfrm>
+            <a:off x="6172960" y="2926080"/>
+            <a:ext cx="1450000" cy="300000"/>
           </a:xfrm>
           <a:prstGeom prst="rect">
             <a:avLst/>
@@ -7764,30 +7850,30 @@
               <a:buNone/>
             </a:pPr>
             <a:r>
-              <a:rPr lang="en-US" sz="1300" b="1" dirty="0">
-                <a:solidFill>
-                  <a:srgbClr val="1A1A1A"/>
-                </a:solidFill>
-                <a:latin typeface="Calibri" pitchFamily="34" charset="0"/>
-                <a:ea typeface="Calibri" pitchFamily="34" charset="-122"/>
-                <a:cs typeface="Calibri" pitchFamily="34" charset="-120"/>
-              </a:rPr>
-              <a:t>Serial # + LOT #</a:t>
-            </a:r>
-            <a:endParaRPr lang="en-US" sz="1300" dirty="0"/>
-          </a:p>
-        </p:txBody>
-      </p:sp>
-      <p:sp>
-        <p:nvSpPr>
-          <p:cNvPr id="28" name="Text 25"/>
-          <p:cNvSpPr/>
-          <p:nvPr/>
-        </p:nvSpPr>
-        <p:spPr>
-          <a:xfrm>
-            <a:off x="3986693" y="3819856"/>
-            <a:ext cx="7290603" cy="400000"/>
+              <a:rPr lang="en-US" sz="1150" b="1" dirty="0">
+                <a:solidFill>
+                  <a:srgbClr val="4A4A4A"/>
+                </a:solidFill>
+                <a:latin typeface="Calibri" pitchFamily="34" charset="0"/>
+                <a:ea typeface="Calibri" pitchFamily="34" charset="-122"/>
+                <a:cs typeface="Calibri" pitchFamily="34" charset="-120"/>
+              </a:rPr>
+              <a:t>Field</a:t>
+            </a:r>
+            <a:endParaRPr lang="en-US" sz="1150" dirty="0"/>
+          </a:p>
+        </p:txBody>
+      </p:sp>
+      <p:sp>
+        <p:nvSpPr>
+          <p:cNvPr id="104" name="Header What 1"/>
+          <p:cNvSpPr/>
+          <p:nvPr/>
+        </p:nvSpPr>
+        <p:spPr>
+          <a:xfrm>
+            <a:off x="7722960" y="2926080"/>
+            <a:ext cx="3400000" cy="300000"/>
           </a:xfrm>
           <a:prstGeom prst="rect">
             <a:avLst/>
@@ -7803,30 +7889,30 @@
               <a:buNone/>
             </a:pPr>
             <a:r>
-              <a:rPr lang="en-US" sz="1300" dirty="0">
-                <a:solidFill>
-                  <a:srgbClr val="1A1A1A"/>
-                </a:solidFill>
-                <a:latin typeface="Calibri" pitchFamily="34" charset="0"/>
-                <a:ea typeface="Calibri" pitchFamily="34" charset="-122"/>
-                <a:cs typeface="Calibri" pitchFamily="34" charset="-120"/>
-              </a:rPr>
-              <a:t>Currently these are added in the notes section, but we want new fields for these commonly used field</a:t>
-            </a:r>
-            <a:endParaRPr lang="en-US" sz="1300" dirty="0"/>
-          </a:p>
-        </p:txBody>
-      </p:sp>
-      <p:sp>
-        <p:nvSpPr>
-          <p:cNvPr id="29" name="Shape 26"/>
-          <p:cNvSpPr/>
-          <p:nvPr/>
-        </p:nvSpPr>
-        <p:spPr>
-          <a:xfrm>
-            <a:off x="822960" y="4219856"/>
-            <a:ext cx="10545775" cy="0"/>
+              <a:rPr lang="en-US" sz="1150" b="1" dirty="0">
+                <a:solidFill>
+                  <a:srgbClr val="4A4A4A"/>
+                </a:solidFill>
+                <a:latin typeface="Calibri" pitchFamily="34" charset="0"/>
+                <a:ea typeface="Calibri" pitchFamily="34" charset="-122"/>
+                <a:cs typeface="Calibri" pitchFamily="34" charset="-120"/>
+              </a:rPr>
+              <a:t>What it is</a:t>
+            </a:r>
+            <a:endParaRPr lang="en-US" sz="1150" dirty="0"/>
+          </a:p>
+        </p:txBody>
+      </p:sp>
+      <p:sp>
+        <p:nvSpPr>
+          <p:cNvPr id="105" name="HeaderDivider 1"/>
+          <p:cNvSpPr/>
+          <p:nvPr/>
+        </p:nvSpPr>
+        <p:spPr>
+          <a:xfrm>
+            <a:off x="6172960" y="3256080"/>
+            <a:ext cx="4950000" cy="0"/>
           </a:xfrm>
           <a:prstGeom prst="line">
             <a:avLst/>
@@ -7849,14 +7935,14 @@
       </p:sp>
       <p:sp>
         <p:nvSpPr>
-          <p:cNvPr id="15" name="Text 12"/>
-          <p:cNvSpPr/>
-          <p:nvPr/>
-        </p:nvSpPr>
-        <p:spPr>
-          <a:xfrm>
-            <a:off x="932688" y="4219856"/>
-            <a:ext cx="3054005" cy="400000"/>
+          <p:cNvPr id="106" name="Field 0 cmr_num"/>
+          <p:cNvSpPr/>
+          <p:nvPr/>
+        </p:nvSpPr>
+        <p:spPr>
+          <a:xfrm>
+            <a:off x="822960" y="3286080"/>
+            <a:ext cx="1450000" cy="320000"/>
           </a:xfrm>
           <a:prstGeom prst="rect">
             <a:avLst/>
@@ -7872,30 +7958,30 @@
               <a:buNone/>
             </a:pPr>
             <a:r>
-              <a:rPr lang="en-US" sz="1300" b="1" dirty="0">
-                <a:solidFill>
-                  <a:srgbClr val="1A1A1A"/>
-                </a:solidFill>
-                <a:latin typeface="Calibri" pitchFamily="34" charset="0"/>
-                <a:ea typeface="Calibri" pitchFamily="34" charset="-122"/>
-                <a:cs typeface="Calibri" pitchFamily="34" charset="-120"/>
-              </a:rPr>
-              <a:t>item + item_description</a:t>
-            </a:r>
-            <a:endParaRPr lang="en-US" sz="1300" dirty="0"/>
-          </a:p>
-        </p:txBody>
-      </p:sp>
-      <p:sp>
-        <p:nvSpPr>
-          <p:cNvPr id="16" name="Text 13"/>
-          <p:cNvSpPr/>
-          <p:nvPr/>
-        </p:nvSpPr>
-        <p:spPr>
-          <a:xfrm>
-            <a:off x="3986693" y="4219856"/>
-            <a:ext cx="7290603" cy="400000"/>
+              <a:rPr lang="en-US" sz="1100" b="1" dirty="0">
+                <a:solidFill>
+                  <a:srgbClr val="1A1A1A"/>
+                </a:solidFill>
+                <a:latin typeface="Calibri" pitchFamily="34" charset="0"/>
+                <a:ea typeface="Calibri" pitchFamily="34" charset="-122"/>
+                <a:cs typeface="Calibri" pitchFamily="34" charset="-120"/>
+              </a:rPr>
+              <a:t>cmr_num</a:t>
+            </a:r>
+            <a:endParaRPr lang="en-US" sz="1100" dirty="0"/>
+          </a:p>
+        </p:txBody>
+      </p:sp>
+      <p:sp>
+        <p:nvSpPr>
+          <p:cNvPr id="107" name="Desc 0 cmr_num"/>
+          <p:cNvSpPr/>
+          <p:nvPr/>
+        </p:nvSpPr>
+        <p:spPr>
+          <a:xfrm>
+            <a:off x="2372960" y="3286080"/>
+            <a:ext cx="3400000" cy="320000"/>
           </a:xfrm>
           <a:prstGeom prst="rect">
             <a:avLst/>
@@ -7911,30 +7997,30 @@
               <a:buNone/>
             </a:pPr>
             <a:r>
-              <a:rPr lang="en-US" sz="1300" dirty="0">
-                <a:solidFill>
-                  <a:srgbClr val="1A1A1A"/>
-                </a:solidFill>
-                <a:latin typeface="Calibri" pitchFamily="34" charset="0"/>
-                <a:ea typeface="Calibri" pitchFamily="34" charset="-122"/>
-                <a:cs typeface="Calibri" pitchFamily="34" charset="-120"/>
-              </a:rPr>
-              <a:t>Item combo and description</a:t>
-            </a:r>
-            <a:endParaRPr lang="en-US" sz="1300" dirty="0"/>
-          </a:p>
-        </p:txBody>
-      </p:sp>
-      <p:sp>
-        <p:nvSpPr>
-          <p:cNvPr id="17" name="Shape 14"/>
-          <p:cNvSpPr/>
-          <p:nvPr/>
-        </p:nvSpPr>
-        <p:spPr>
-          <a:xfrm>
-            <a:off x="822960" y="4619856"/>
-            <a:ext cx="10545775" cy="0"/>
+              <a:rPr lang="en-US" sz="1100" dirty="0">
+                <a:solidFill>
+                  <a:srgbClr val="1A1A1A"/>
+                </a:solidFill>
+                <a:latin typeface="Calibri" pitchFamily="34" charset="0"/>
+                <a:ea typeface="Calibri" pitchFamily="34" charset="-122"/>
+                <a:cs typeface="Calibri" pitchFamily="34" charset="-120"/>
+              </a:rPr>
+              <a:t>Key field, auto-numbers in the IDO properties every CMR</a:t>
+            </a:r>
+            <a:endParaRPr lang="en-US" sz="1100" dirty="0"/>
+          </a:p>
+        </p:txBody>
+      </p:sp>
+      <p:sp>
+        <p:nvSpPr>
+          <p:cNvPr id="108" name="Divider 0 cmr_num"/>
+          <p:cNvSpPr/>
+          <p:nvPr/>
+        </p:nvSpPr>
+        <p:spPr>
+          <a:xfrm>
+            <a:off x="822960" y="3606080"/>
+            <a:ext cx="4950000" cy="0"/>
           </a:xfrm>
           <a:prstGeom prst="line">
             <a:avLst/>
@@ -7957,14 +8043,14 @@
       </p:sp>
       <p:sp>
         <p:nvSpPr>
-          <p:cNvPr id="18" name="Text 15"/>
-          <p:cNvSpPr/>
-          <p:nvPr/>
-        </p:nvSpPr>
-        <p:spPr>
-          <a:xfrm>
-            <a:off x="932688" y="4619856"/>
-            <a:ext cx="3054005" cy="400000"/>
+          <p:cNvPr id="109" name="Field 0 item"/>
+          <p:cNvSpPr/>
+          <p:nvPr/>
+        </p:nvSpPr>
+        <p:spPr>
+          <a:xfrm>
+            <a:off x="822960" y="3606080"/>
+            <a:ext cx="1450000" cy="320000"/>
           </a:xfrm>
           <a:prstGeom prst="rect">
             <a:avLst/>
@@ -7980,30 +8066,30 @@
               <a:buNone/>
             </a:pPr>
             <a:r>
-              <a:rPr lang="en-US" sz="1300" b="1" dirty="0">
-                <a:solidFill>
-                  <a:srgbClr val="1A1A1A"/>
-                </a:solidFill>
-                <a:latin typeface="Calibri" pitchFamily="34" charset="0"/>
-                <a:ea typeface="Calibri" pitchFamily="34" charset="-122"/>
-                <a:cs typeface="Calibri" pitchFamily="34" charset="-120"/>
-              </a:rPr>
-              <a:t>dept + wc + descriptions</a:t>
-            </a:r>
-            <a:endParaRPr lang="en-US" sz="1300" dirty="0"/>
-          </a:p>
-        </p:txBody>
-      </p:sp>
-      <p:sp>
-        <p:nvSpPr>
-          <p:cNvPr id="19" name="Text 16"/>
-          <p:cNvSpPr/>
-          <p:nvPr/>
-        </p:nvSpPr>
-        <p:spPr>
-          <a:xfrm>
-            <a:off x="3986693" y="4619856"/>
-            <a:ext cx="7290603" cy="400000"/>
+              <a:rPr lang="en-US" sz="1100" b="1" dirty="0">
+                <a:solidFill>
+                  <a:srgbClr val="1A1A1A"/>
+                </a:solidFill>
+                <a:latin typeface="Calibri" pitchFamily="34" charset="0"/>
+                <a:ea typeface="Calibri" pitchFamily="34" charset="-122"/>
+                <a:cs typeface="Calibri" pitchFamily="34" charset="-120"/>
+              </a:rPr>
+              <a:t>item</a:t>
+            </a:r>
+            <a:endParaRPr lang="en-US" sz="1100" dirty="0"/>
+          </a:p>
+        </p:txBody>
+      </p:sp>
+      <p:sp>
+        <p:nvSpPr>
+          <p:cNvPr id="110" name="Desc 0 item"/>
+          <p:cNvSpPr/>
+          <p:nvPr/>
+        </p:nvSpPr>
+        <p:spPr>
+          <a:xfrm>
+            <a:off x="2372960" y="3606080"/>
+            <a:ext cx="3400000" cy="320000"/>
           </a:xfrm>
           <a:prstGeom prst="rect">
             <a:avLst/>
@@ -8019,30 +8105,30 @@
               <a:buNone/>
             </a:pPr>
             <a:r>
-              <a:rPr lang="en-US" sz="1300" dirty="0">
-                <a:solidFill>
-                  <a:srgbClr val="1A1A1A"/>
-                </a:solidFill>
-                <a:latin typeface="Calibri" pitchFamily="34" charset="0"/>
-                <a:ea typeface="Calibri" pitchFamily="34" charset="-122"/>
-                <a:cs typeface="Calibri" pitchFamily="34" charset="-120"/>
-              </a:rPr>
-              <a:t>Dept and WC combos with their descriptions</a:t>
-            </a:r>
-            <a:endParaRPr lang="en-US" sz="1300" dirty="0"/>
-          </a:p>
-        </p:txBody>
-      </p:sp>
-      <p:sp>
-        <p:nvSpPr>
-          <p:cNvPr id="20" name="Shape 17"/>
-          <p:cNvSpPr/>
-          <p:nvPr/>
-        </p:nvSpPr>
-        <p:spPr>
-          <a:xfrm>
-            <a:off x="822960" y="5019856"/>
-            <a:ext cx="10545775" cy="0"/>
+              <a:rPr lang="en-US" sz="1100" dirty="0">
+                <a:solidFill>
+                  <a:srgbClr val="1A1A1A"/>
+                </a:solidFill>
+                <a:latin typeface="Calibri" pitchFamily="34" charset="0"/>
+                <a:ea typeface="Calibri" pitchFamily="34" charset="-122"/>
+                <a:cs typeface="Calibri" pitchFamily="34" charset="-120"/>
+              </a:rPr>
+              <a:t>Item combo, SLItems list source</a:t>
+            </a:r>
+            <a:endParaRPr lang="en-US" sz="1100" dirty="0"/>
+          </a:p>
+        </p:txBody>
+      </p:sp>
+      <p:sp>
+        <p:nvSpPr>
+          <p:cNvPr id="111" name="Divider 0 item"/>
+          <p:cNvSpPr/>
+          <p:nvPr/>
+        </p:nvSpPr>
+        <p:spPr>
+          <a:xfrm>
+            <a:off x="822960" y="3926080"/>
+            <a:ext cx="4950000" cy="0"/>
           </a:xfrm>
           <a:prstGeom prst="line">
             <a:avLst/>
@@ -8065,14 +8151,14 @@
       </p:sp>
       <p:sp>
         <p:nvSpPr>
-          <p:cNvPr id="21" name="Text 18"/>
-          <p:cNvSpPr/>
-          <p:nvPr/>
-        </p:nvSpPr>
-        <p:spPr>
-          <a:xfrm>
-            <a:off x="932688" y="5019856"/>
-            <a:ext cx="3054005" cy="400000"/>
+          <p:cNvPr id="112" name="Field 0 item_description"/>
+          <p:cNvSpPr/>
+          <p:nvPr/>
+        </p:nvSpPr>
+        <p:spPr>
+          <a:xfrm>
+            <a:off x="822960" y="3926080"/>
+            <a:ext cx="1450000" cy="320000"/>
           </a:xfrm>
           <a:prstGeom prst="rect">
             <a:avLst/>
@@ -8088,30 +8174,30 @@
               <a:buNone/>
             </a:pPr>
             <a:r>
-              <a:rPr lang="en-US" sz="1300" b="1" dirty="0">
-                <a:solidFill>
-                  <a:srgbClr val="1A1A1A"/>
-                </a:solidFill>
-                <a:latin typeface="Calibri" pitchFamily="34" charset="0"/>
-                <a:ea typeface="Calibri" pitchFamily="34" charset="-122"/>
-                <a:cs typeface="Calibri" pitchFamily="34" charset="-120"/>
-              </a:rPr>
-              <a:t>initial_change + 5 requirement checks</a:t>
-            </a:r>
-            <a:endParaRPr lang="en-US" sz="1300" dirty="0"/>
-          </a:p>
-        </p:txBody>
-      </p:sp>
-      <p:sp>
-        <p:nvSpPr>
-          <p:cNvPr id="22" name="Text 19"/>
-          <p:cNvSpPr/>
-          <p:nvPr/>
-        </p:nvSpPr>
-        <p:spPr>
-          <a:xfrm>
-            <a:off x="3986693" y="5019856"/>
-            <a:ext cx="7290603" cy="400000"/>
+              <a:rPr lang="en-US" sz="1100" b="1" dirty="0">
+                <a:solidFill>
+                  <a:srgbClr val="1A1A1A"/>
+                </a:solidFill>
+                <a:latin typeface="Calibri" pitchFamily="34" charset="0"/>
+                <a:ea typeface="Calibri" pitchFamily="34" charset="-122"/>
+                <a:cs typeface="Calibri" pitchFamily="34" charset="-120"/>
+              </a:rPr>
+              <a:t>item_description</a:t>
+            </a:r>
+            <a:endParaRPr lang="en-US" sz="1100" dirty="0"/>
+          </a:p>
+        </p:txBody>
+      </p:sp>
+      <p:sp>
+        <p:nvSpPr>
+          <p:cNvPr id="113" name="Desc 0 item_description"/>
+          <p:cNvSpPr/>
+          <p:nvPr/>
+        </p:nvSpPr>
+        <p:spPr>
+          <a:xfrm>
+            <a:off x="2372960" y="3926080"/>
+            <a:ext cx="3400000" cy="320000"/>
           </a:xfrm>
           <a:prstGeom prst="rect">
             <a:avLst/>
@@ -8127,30 +8213,30 @@
               <a:buNone/>
             </a:pPr>
             <a:r>
-              <a:rPr lang="en-US" sz="1300" dirty="0">
-                <a:solidFill>
-                  <a:srgbClr val="1A1A1A"/>
-                </a:solidFill>
-                <a:latin typeface="Calibri" pitchFamily="34" charset="0"/>
-                <a:ea typeface="Calibri" pitchFamily="34" charset="-122"/>
-                <a:cs typeface="Calibri" pitchFamily="34" charset="-120"/>
-              </a:rPr>
-              <a:t>Initial Change plus Costing, Documentation, Material, Process, Tool/Machine</a:t>
-            </a:r>
-            <a:endParaRPr lang="en-US" sz="1300" dirty="0"/>
-          </a:p>
-        </p:txBody>
-      </p:sp>
-      <p:sp>
-        <p:nvSpPr>
-          <p:cNvPr id="23" name="Shape 20"/>
-          <p:cNvSpPr/>
-          <p:nvPr/>
-        </p:nvSpPr>
-        <p:spPr>
-          <a:xfrm>
-            <a:off x="822960" y="5419856"/>
-            <a:ext cx="10545775" cy="0"/>
+              <a:rPr lang="en-US" sz="1100" dirty="0">
+                <a:solidFill>
+                  <a:srgbClr val="1A1A1A"/>
+                </a:solidFill>
+                <a:latin typeface="Calibri" pitchFamily="34" charset="0"/>
+                <a:ea typeface="Calibri" pitchFamily="34" charset="-122"/>
+                <a:cs typeface="Calibri" pitchFamily="34" charset="-120"/>
+              </a:rPr>
+              <a:t>Read-only, auto-fills via DefaultFrom</a:t>
+            </a:r>
+            <a:endParaRPr lang="en-US" sz="1100" dirty="0"/>
+          </a:p>
+        </p:txBody>
+      </p:sp>
+      <p:sp>
+        <p:nvSpPr>
+          <p:cNvPr id="114" name="Divider 0 item_description"/>
+          <p:cNvSpPr/>
+          <p:nvPr/>
+        </p:nvSpPr>
+        <p:spPr>
+          <a:xfrm>
+            <a:off x="822960" y="4246080"/>
+            <a:ext cx="4950000" cy="0"/>
           </a:xfrm>
           <a:prstGeom prst="line">
             <a:avLst/>
@@ -8173,14 +8259,14 @@
       </p:sp>
       <p:sp>
         <p:nvSpPr>
-          <p:cNvPr id="24" name="Text 21"/>
-          <p:cNvSpPr/>
-          <p:nvPr/>
-        </p:nvSpPr>
-        <p:spPr>
-          <a:xfrm>
-            <a:off x="932688" y="5419856"/>
-            <a:ext cx="3054005" cy="400000"/>
+          <p:cNvPr id="115" name="Field 0 dept"/>
+          <p:cNvSpPr/>
+          <p:nvPr/>
+        </p:nvSpPr>
+        <p:spPr>
+          <a:xfrm>
+            <a:off x="822960" y="4246080"/>
+            <a:ext cx="1450000" cy="320000"/>
           </a:xfrm>
           <a:prstGeom prst="rect">
             <a:avLst/>
@@ -8196,30 +8282,30 @@
               <a:buNone/>
             </a:pPr>
             <a:r>
-              <a:rPr lang="en-US" sz="1300" b="1" dirty="0">
-                <a:solidFill>
-                  <a:srgbClr val="1A1A1A"/>
-                </a:solidFill>
-                <a:latin typeface="Calibri" pitchFamily="34" charset="0"/>
-                <a:ea typeface="Calibri" pitchFamily="34" charset="-122"/>
-                <a:cs typeface="Calibri" pitchFamily="34" charset="-120"/>
-              </a:rPr>
-              <a:t>priority, due_date, note, reported by</a:t>
-            </a:r>
-            <a:endParaRPr lang="en-US" sz="1300" dirty="0"/>
-          </a:p>
-        </p:txBody>
-      </p:sp>
-      <p:sp>
-        <p:nvSpPr>
-          <p:cNvPr id="25" name="Text 22"/>
-          <p:cNvSpPr/>
-          <p:nvPr/>
-        </p:nvSpPr>
-        <p:spPr>
-          <a:xfrm>
-            <a:off x="3986693" y="5419856"/>
-            <a:ext cx="7290603" cy="400000"/>
+              <a:rPr lang="en-US" sz="1100" b="1" dirty="0">
+                <a:solidFill>
+                  <a:srgbClr val="1A1A1A"/>
+                </a:solidFill>
+                <a:latin typeface="Calibri" pitchFamily="34" charset="0"/>
+                <a:ea typeface="Calibri" pitchFamily="34" charset="-122"/>
+                <a:cs typeface="Calibri" pitchFamily="34" charset="-120"/>
+              </a:rPr>
+              <a:t>dept</a:t>
+            </a:r>
+            <a:endParaRPr lang="en-US" sz="1100" dirty="0"/>
+          </a:p>
+        </p:txBody>
+      </p:sp>
+      <p:sp>
+        <p:nvSpPr>
+          <p:cNvPr id="116" name="Desc 0 dept"/>
+          <p:cNvSpPr/>
+          <p:nvPr/>
+        </p:nvSpPr>
+        <p:spPr>
+          <a:xfrm>
+            <a:off x="2372960" y="4246080"/>
+            <a:ext cx="3400000" cy="320000"/>
           </a:xfrm>
           <a:prstGeom prst="rect">
             <a:avLst/>
@@ -8235,30 +8321,30 @@
               <a:buNone/>
             </a:pPr>
             <a:r>
-              <a:rPr lang="en-US" sz="1300" dirty="0">
-                <a:solidFill>
-                  <a:srgbClr val="1A1A1A"/>
-                </a:solidFill>
-                <a:latin typeface="Calibri" pitchFamily="34" charset="0"/>
-                <a:ea typeface="Calibri" pitchFamily="34" charset="-122"/>
-                <a:cs typeface="Calibri" pitchFamily="34" charset="-120"/>
-              </a:rPr>
-              <a:t>Priority combo, Due Date, Note, and Reported By</a:t>
-            </a:r>
-            <a:endParaRPr lang="en-US" sz="1300" dirty="0"/>
-          </a:p>
-        </p:txBody>
-      </p:sp>
-      <p:sp>
-        <p:nvSpPr>
-          <p:cNvPr id="101" name="Shape 101"/>
-          <p:cNvSpPr/>
-          <p:nvPr/>
-        </p:nvSpPr>
-        <p:spPr>
-          <a:xfrm>
-            <a:off x="822960" y="5819856"/>
-            <a:ext cx="10545775" cy="0"/>
+              <a:rPr lang="en-US" sz="1100" dirty="0">
+                <a:solidFill>
+                  <a:srgbClr val="1A1A1A"/>
+                </a:solidFill>
+                <a:latin typeface="Calibri" pitchFamily="34" charset="0"/>
+                <a:ea typeface="Calibri" pitchFamily="34" charset="-122"/>
+                <a:cs typeface="Calibri" pitchFamily="34" charset="-120"/>
+              </a:rPr>
+              <a:t>Dept combo, SLDepts list source</a:t>
+            </a:r>
+            <a:endParaRPr lang="en-US" sz="1100" dirty="0"/>
+          </a:p>
+        </p:txBody>
+      </p:sp>
+      <p:sp>
+        <p:nvSpPr>
+          <p:cNvPr id="117" name="Divider 0 dept"/>
+          <p:cNvSpPr/>
+          <p:nvPr/>
+        </p:nvSpPr>
+        <p:spPr>
+          <a:xfrm>
+            <a:off x="822960" y="4566080"/>
+            <a:ext cx="4950000" cy="0"/>
           </a:xfrm>
           <a:prstGeom prst="line">
             <a:avLst/>
@@ -8281,14 +8367,14 @@
       </p:sp>
       <p:sp>
         <p:nvSpPr>
-          <p:cNvPr id="102" name="Text 102"/>
-          <p:cNvSpPr/>
-          <p:nvPr/>
-        </p:nvSpPr>
-        <p:spPr>
-          <a:xfrm>
-            <a:off x="932688" y="5819856"/>
-            <a:ext cx="3054005" cy="400000"/>
+          <p:cNvPr id="118" name="Field 0 dept_description"/>
+          <p:cNvSpPr/>
+          <p:nvPr/>
+        </p:nvSpPr>
+        <p:spPr>
+          <a:xfrm>
+            <a:off x="822960" y="4566080"/>
+            <a:ext cx="1450000" cy="320000"/>
           </a:xfrm>
           <a:prstGeom prst="rect">
             <a:avLst/>
@@ -8304,30 +8390,30 @@
               <a:buNone/>
             </a:pPr>
             <a:r>
-              <a:rPr lang="en-US" sz="1300" b="1" dirty="0">
-                <a:solidFill>
-                  <a:srgbClr val="1A1A1A"/>
-                </a:solidFill>
-                <a:latin typeface="Calibri" pitchFamily="34" charset="0"/>
-                <a:ea typeface="Calibri" pitchFamily="34" charset="-122"/>
-                <a:cs typeface="Calibri" pitchFamily="34" charset="-120"/>
-              </a:rPr>
-              <a:t>reason_code + cause_code</a:t>
-            </a:r>
-            <a:endParaRPr lang="en-US" sz="1300" dirty="0"/>
-          </a:p>
-        </p:txBody>
-      </p:sp>
-      <p:sp>
-        <p:nvSpPr>
-          <p:cNvPr id="103" name="Text 103"/>
-          <p:cNvSpPr/>
-          <p:nvPr/>
-        </p:nvSpPr>
-        <p:spPr>
-          <a:xfrm>
-            <a:off x="3986693" y="5819856"/>
-            <a:ext cx="7290603" cy="400000"/>
+              <a:rPr lang="en-US" sz="1100" b="1" dirty="0">
+                <a:solidFill>
+                  <a:srgbClr val="1A1A1A"/>
+                </a:solidFill>
+                <a:latin typeface="Calibri" pitchFamily="34" charset="0"/>
+                <a:ea typeface="Calibri" pitchFamily="34" charset="-122"/>
+                <a:cs typeface="Calibri" pitchFamily="34" charset="-120"/>
+              </a:rPr>
+              <a:t>dept_description</a:t>
+            </a:r>
+            <a:endParaRPr lang="en-US" sz="1100" dirty="0"/>
+          </a:p>
+        </p:txBody>
+      </p:sp>
+      <p:sp>
+        <p:nvSpPr>
+          <p:cNvPr id="119" name="Desc 0 dept_description"/>
+          <p:cNvSpPr/>
+          <p:nvPr/>
+        </p:nvSpPr>
+        <p:spPr>
+          <a:xfrm>
+            <a:off x="2372960" y="4566080"/>
+            <a:ext cx="3400000" cy="320000"/>
           </a:xfrm>
           <a:prstGeom prst="rect">
             <a:avLst/>
@@ -8343,30 +8429,1542 @@
               <a:buNone/>
             </a:pPr>
             <a:r>
-              <a:rPr lang="en-US" sz="1300" dirty="0">
-                <a:solidFill>
-                  <a:srgbClr val="1A1A1A"/>
-                </a:solidFill>
-                <a:latin typeface="Calibri" pitchFamily="34" charset="0"/>
-                <a:ea typeface="Calibri" pitchFamily="34" charset="-122"/>
-                <a:cs typeface="Calibri" pitchFamily="34" charset="-120"/>
-              </a:rPr>
-              <a:t>Reason Code + Cause Code combos, Quality section - reference the real QCReasonCode/QCCauseCode system Property Classes (same as QC_MRRs)</a:t>
-            </a:r>
-            <a:endParaRPr lang="en-US" sz="1300" dirty="0"/>
-          </a:p>
-        </p:txBody>
-      </p:sp>
-      <p:sp>
-        <p:nvSpPr>
-          <p:cNvPr id="26" name="Shape 23"/>
-          <p:cNvSpPr/>
-          <p:nvPr/>
-        </p:nvSpPr>
-        <p:spPr>
-          <a:xfrm>
-            <a:off x="822960" y="6219856"/>
-            <a:ext cx="10545775" cy="0"/>
+              <a:rPr lang="en-US" sz="1100" dirty="0">
+                <a:solidFill>
+                  <a:srgbClr val="1A1A1A"/>
+                </a:solidFill>
+                <a:latin typeface="Calibri" pitchFamily="34" charset="0"/>
+                <a:ea typeface="Calibri" pitchFamily="34" charset="-122"/>
+                <a:cs typeface="Calibri" pitchFamily="34" charset="-120"/>
+              </a:rPr>
+              <a:t>Read-only, auto-fills via DefaultFrom</a:t>
+            </a:r>
+            <a:endParaRPr lang="en-US" sz="1100" dirty="0"/>
+          </a:p>
+        </p:txBody>
+      </p:sp>
+      <p:sp>
+        <p:nvSpPr>
+          <p:cNvPr id="120" name="Divider 0 dept_description"/>
+          <p:cNvSpPr/>
+          <p:nvPr/>
+        </p:nvSpPr>
+        <p:spPr>
+          <a:xfrm>
+            <a:off x="822960" y="4886080"/>
+            <a:ext cx="4950000" cy="0"/>
+          </a:xfrm>
+          <a:prstGeom prst="line">
+            <a:avLst/>
+          </a:prstGeom>
+          <a:noFill/>
+          <a:ln w="9525">
+            <a:solidFill>
+              <a:srgbClr val="E5E5E5"/>
+            </a:solidFill>
+            <a:prstDash val="solid"/>
+          </a:ln>
+        </p:spPr>
+        <p:txBody>
+          <a:bodyPr/>
+          <a:lstStyle/>
+          <a:p>
+            <a:endParaRPr lang="en-US" dirty="0"/>
+          </a:p>
+        </p:txBody>
+      </p:sp>
+      <p:sp>
+        <p:nvSpPr>
+          <p:cNvPr id="121" name="Field 0 wc"/>
+          <p:cNvSpPr/>
+          <p:nvPr/>
+        </p:nvSpPr>
+        <p:spPr>
+          <a:xfrm>
+            <a:off x="822960" y="4886080"/>
+            <a:ext cx="1450000" cy="320000"/>
+          </a:xfrm>
+          <a:prstGeom prst="rect">
+            <a:avLst/>
+          </a:prstGeom>
+          <a:noFill/>
+          <a:ln/>
+        </p:spPr>
+        <p:txBody>
+          <a:bodyPr wrap="square" lIns="0" tIns="0" rIns="0" bIns="0" rtlCol="0" anchor="ctr"/>
+          <a:lstStyle/>
+          <a:p>
+            <a:pPr marL="0" indent="0">
+              <a:buNone/>
+            </a:pPr>
+            <a:r>
+              <a:rPr lang="en-US" sz="1100" b="1" dirty="0">
+                <a:solidFill>
+                  <a:srgbClr val="1A1A1A"/>
+                </a:solidFill>
+                <a:latin typeface="Calibri" pitchFamily="34" charset="0"/>
+                <a:ea typeface="Calibri" pitchFamily="34" charset="-122"/>
+                <a:cs typeface="Calibri" pitchFamily="34" charset="-120"/>
+              </a:rPr>
+              <a:t>wc</a:t>
+            </a:r>
+            <a:endParaRPr lang="en-US" sz="1100" dirty="0"/>
+          </a:p>
+        </p:txBody>
+      </p:sp>
+      <p:sp>
+        <p:nvSpPr>
+          <p:cNvPr id="122" name="Desc 0 wc"/>
+          <p:cNvSpPr/>
+          <p:nvPr/>
+        </p:nvSpPr>
+        <p:spPr>
+          <a:xfrm>
+            <a:off x="2372960" y="4886080"/>
+            <a:ext cx="3400000" cy="320000"/>
+          </a:xfrm>
+          <a:prstGeom prst="rect">
+            <a:avLst/>
+          </a:prstGeom>
+          <a:noFill/>
+          <a:ln/>
+        </p:spPr>
+        <p:txBody>
+          <a:bodyPr wrap="square" lIns="0" tIns="0" rIns="0" bIns="0" rtlCol="0" anchor="ctr"/>
+          <a:lstStyle/>
+          <a:p>
+            <a:pPr marL="0" indent="0">
+              <a:buNone/>
+            </a:pPr>
+            <a:r>
+              <a:rPr lang="en-US" sz="1100" dirty="0">
+                <a:solidFill>
+                  <a:srgbClr val="1A1A1A"/>
+                </a:solidFill>
+                <a:latin typeface="Calibri" pitchFamily="34" charset="0"/>
+                <a:ea typeface="Calibri" pitchFamily="34" charset="-122"/>
+                <a:cs typeface="Calibri" pitchFamily="34" charset="-120"/>
+              </a:rPr>
+              <a:t>Work Center combo, SLWcs list source</a:t>
+            </a:r>
+            <a:endParaRPr lang="en-US" sz="1100" dirty="0"/>
+          </a:p>
+        </p:txBody>
+      </p:sp>
+      <p:sp>
+        <p:nvSpPr>
+          <p:cNvPr id="123" name="Divider 0 wc"/>
+          <p:cNvSpPr/>
+          <p:nvPr/>
+        </p:nvSpPr>
+        <p:spPr>
+          <a:xfrm>
+            <a:off x="822960" y="5206080"/>
+            <a:ext cx="4950000" cy="0"/>
+          </a:xfrm>
+          <a:prstGeom prst="line">
+            <a:avLst/>
+          </a:prstGeom>
+          <a:noFill/>
+          <a:ln w="9525">
+            <a:solidFill>
+              <a:srgbClr val="E5E5E5"/>
+            </a:solidFill>
+            <a:prstDash val="solid"/>
+          </a:ln>
+        </p:spPr>
+        <p:txBody>
+          <a:bodyPr/>
+          <a:lstStyle/>
+          <a:p>
+            <a:endParaRPr lang="en-US" dirty="0"/>
+          </a:p>
+        </p:txBody>
+      </p:sp>
+      <p:sp>
+        <p:nvSpPr>
+          <p:cNvPr id="124" name="Field 0 wc_description"/>
+          <p:cNvSpPr/>
+          <p:nvPr/>
+        </p:nvSpPr>
+        <p:spPr>
+          <a:xfrm>
+            <a:off x="822960" y="5206080"/>
+            <a:ext cx="1450000" cy="320000"/>
+          </a:xfrm>
+          <a:prstGeom prst="rect">
+            <a:avLst/>
+          </a:prstGeom>
+          <a:noFill/>
+          <a:ln/>
+        </p:spPr>
+        <p:txBody>
+          <a:bodyPr wrap="square" lIns="0" tIns="0" rIns="0" bIns="0" rtlCol="0" anchor="ctr"/>
+          <a:lstStyle/>
+          <a:p>
+            <a:pPr marL="0" indent="0">
+              <a:buNone/>
+            </a:pPr>
+            <a:r>
+              <a:rPr lang="en-US" sz="1100" b="1" dirty="0">
+                <a:solidFill>
+                  <a:srgbClr val="1A1A1A"/>
+                </a:solidFill>
+                <a:latin typeface="Calibri" pitchFamily="34" charset="0"/>
+                <a:ea typeface="Calibri" pitchFamily="34" charset="-122"/>
+                <a:cs typeface="Calibri" pitchFamily="34" charset="-120"/>
+              </a:rPr>
+              <a:t>wc_description</a:t>
+            </a:r>
+            <a:endParaRPr lang="en-US" sz="1100" dirty="0"/>
+          </a:p>
+        </p:txBody>
+      </p:sp>
+      <p:sp>
+        <p:nvSpPr>
+          <p:cNvPr id="125" name="Desc 0 wc_description"/>
+          <p:cNvSpPr/>
+          <p:nvPr/>
+        </p:nvSpPr>
+        <p:spPr>
+          <a:xfrm>
+            <a:off x="2372960" y="5206080"/>
+            <a:ext cx="3400000" cy="320000"/>
+          </a:xfrm>
+          <a:prstGeom prst="rect">
+            <a:avLst/>
+          </a:prstGeom>
+          <a:noFill/>
+          <a:ln/>
+        </p:spPr>
+        <p:txBody>
+          <a:bodyPr wrap="square" lIns="0" tIns="0" rIns="0" bIns="0" rtlCol="0" anchor="ctr"/>
+          <a:lstStyle/>
+          <a:p>
+            <a:pPr marL="0" indent="0">
+              <a:buNone/>
+            </a:pPr>
+            <a:r>
+              <a:rPr lang="en-US" sz="1100" dirty="0">
+                <a:solidFill>
+                  <a:srgbClr val="1A1A1A"/>
+                </a:solidFill>
+                <a:latin typeface="Calibri" pitchFamily="34" charset="0"/>
+                <a:ea typeface="Calibri" pitchFamily="34" charset="-122"/>
+                <a:cs typeface="Calibri" pitchFamily="34" charset="-120"/>
+              </a:rPr>
+              <a:t>Read-only, auto-fills via DefaultFrom</a:t>
+            </a:r>
+            <a:endParaRPr lang="en-US" sz="1100" dirty="0"/>
+          </a:p>
+        </p:txBody>
+      </p:sp>
+      <p:sp>
+        <p:nvSpPr>
+          <p:cNvPr id="126" name="Divider 0 wc_description"/>
+          <p:cNvSpPr/>
+          <p:nvPr/>
+        </p:nvSpPr>
+        <p:spPr>
+          <a:xfrm>
+            <a:off x="822960" y="5526080"/>
+            <a:ext cx="4950000" cy="0"/>
+          </a:xfrm>
+          <a:prstGeom prst="line">
+            <a:avLst/>
+          </a:prstGeom>
+          <a:noFill/>
+          <a:ln w="9525">
+            <a:solidFill>
+              <a:srgbClr val="E5E5E5"/>
+            </a:solidFill>
+            <a:prstDash val="solid"/>
+          </a:ln>
+        </p:spPr>
+        <p:txBody>
+          <a:bodyPr/>
+          <a:lstStyle/>
+          <a:p>
+            <a:endParaRPr lang="en-US" dirty="0"/>
+          </a:p>
+        </p:txBody>
+      </p:sp>
+      <p:sp>
+        <p:nvSpPr>
+          <p:cNvPr id="127" name="Field 0 initial_change"/>
+          <p:cNvSpPr/>
+          <p:nvPr/>
+        </p:nvSpPr>
+        <p:spPr>
+          <a:xfrm>
+            <a:off x="822960" y="5526080"/>
+            <a:ext cx="1450000" cy="320000"/>
+          </a:xfrm>
+          <a:prstGeom prst="rect">
+            <a:avLst/>
+          </a:prstGeom>
+          <a:noFill/>
+          <a:ln/>
+        </p:spPr>
+        <p:txBody>
+          <a:bodyPr wrap="square" lIns="0" tIns="0" rIns="0" bIns="0" rtlCol="0" anchor="ctr"/>
+          <a:lstStyle/>
+          <a:p>
+            <a:pPr marL="0" indent="0">
+              <a:buNone/>
+            </a:pPr>
+            <a:r>
+              <a:rPr lang="en-US" sz="1100" b="1" dirty="0">
+                <a:solidFill>
+                  <a:srgbClr val="1A1A1A"/>
+                </a:solidFill>
+                <a:latin typeface="Calibri" pitchFamily="34" charset="0"/>
+                <a:ea typeface="Calibri" pitchFamily="34" charset="-122"/>
+                <a:cs typeface="Calibri" pitchFamily="34" charset="-120"/>
+              </a:rPr>
+              <a:t>initial_change</a:t>
+            </a:r>
+            <a:endParaRPr lang="en-US" sz="1100" dirty="0"/>
+          </a:p>
+        </p:txBody>
+      </p:sp>
+      <p:sp>
+        <p:nvSpPr>
+          <p:cNvPr id="128" name="Desc 0 initial_change"/>
+          <p:cNvSpPr/>
+          <p:nvPr/>
+        </p:nvSpPr>
+        <p:spPr>
+          <a:xfrm>
+            <a:off x="2372960" y="5526080"/>
+            <a:ext cx="3400000" cy="320000"/>
+          </a:xfrm>
+          <a:prstGeom prst="rect">
+            <a:avLst/>
+          </a:prstGeom>
+          <a:noFill/>
+          <a:ln/>
+        </p:spPr>
+        <p:txBody>
+          <a:bodyPr wrap="square" lIns="0" tIns="0" rIns="0" bIns="0" rtlCol="0" anchor="ctr"/>
+          <a:lstStyle/>
+          <a:p>
+            <a:pPr marL="0" indent="0">
+              <a:buNone/>
+            </a:pPr>
+            <a:r>
+              <a:rPr lang="en-US" sz="1100" dirty="0">
+                <a:solidFill>
+                  <a:srgbClr val="1A1A1A"/>
+                </a:solidFill>
+                <a:latin typeface="Calibri" pitchFamily="34" charset="0"/>
+                <a:ea typeface="Calibri" pitchFamily="34" charset="-122"/>
+                <a:cs typeface="Calibri" pitchFamily="34" charset="-120"/>
+              </a:rPr>
+              <a:t>Drives the Requirements checkbox cascade</a:t>
+            </a:r>
+            <a:endParaRPr lang="en-US" sz="1100" dirty="0"/>
+          </a:p>
+        </p:txBody>
+      </p:sp>
+      <p:sp>
+        <p:nvSpPr>
+          <p:cNvPr id="129" name="Divider 0 initial_change"/>
+          <p:cNvSpPr/>
+          <p:nvPr/>
+        </p:nvSpPr>
+        <p:spPr>
+          <a:xfrm>
+            <a:off x="822960" y="5846080"/>
+            <a:ext cx="4950000" cy="0"/>
+          </a:xfrm>
+          <a:prstGeom prst="line">
+            <a:avLst/>
+          </a:prstGeom>
+          <a:noFill/>
+          <a:ln w="9525">
+            <a:solidFill>
+              <a:srgbClr val="E5E5E5"/>
+            </a:solidFill>
+            <a:prstDash val="solid"/>
+          </a:ln>
+        </p:spPr>
+        <p:txBody>
+          <a:bodyPr/>
+          <a:lstStyle/>
+          <a:p>
+            <a:endParaRPr lang="en-US" dirty="0"/>
+          </a:p>
+        </p:txBody>
+      </p:sp>
+      <p:sp>
+        <p:nvSpPr>
+          <p:cNvPr id="130" name="Field 0 req_costing"/>
+          <p:cNvSpPr/>
+          <p:nvPr/>
+        </p:nvSpPr>
+        <p:spPr>
+          <a:xfrm>
+            <a:off x="822960" y="5846080"/>
+            <a:ext cx="1450000" cy="320000"/>
+          </a:xfrm>
+          <a:prstGeom prst="rect">
+            <a:avLst/>
+          </a:prstGeom>
+          <a:noFill/>
+          <a:ln/>
+        </p:spPr>
+        <p:txBody>
+          <a:bodyPr wrap="square" lIns="0" tIns="0" rIns="0" bIns="0" rtlCol="0" anchor="ctr"/>
+          <a:lstStyle/>
+          <a:p>
+            <a:pPr marL="0" indent="0">
+              <a:buNone/>
+            </a:pPr>
+            <a:r>
+              <a:rPr lang="en-US" sz="1100" b="1" dirty="0">
+                <a:solidFill>
+                  <a:srgbClr val="1A1A1A"/>
+                </a:solidFill>
+                <a:latin typeface="Calibri" pitchFamily="34" charset="0"/>
+                <a:ea typeface="Calibri" pitchFamily="34" charset="-122"/>
+                <a:cs typeface="Calibri" pitchFamily="34" charset="-120"/>
+              </a:rPr>
+              <a:t>req_costing</a:t>
+            </a:r>
+            <a:endParaRPr lang="en-US" sz="1100" dirty="0"/>
+          </a:p>
+        </p:txBody>
+      </p:sp>
+      <p:sp>
+        <p:nvSpPr>
+          <p:cNvPr id="131" name="Desc 0 req_costing"/>
+          <p:cNvSpPr/>
+          <p:nvPr/>
+        </p:nvSpPr>
+        <p:spPr>
+          <a:xfrm>
+            <a:off x="2372960" y="5846080"/>
+            <a:ext cx="3400000" cy="320000"/>
+          </a:xfrm>
+          <a:prstGeom prst="rect">
+            <a:avLst/>
+          </a:prstGeom>
+          <a:noFill/>
+          <a:ln/>
+        </p:spPr>
+        <p:txBody>
+          <a:bodyPr wrap="square" lIns="0" tIns="0" rIns="0" bIns="0" rtlCol="0" anchor="ctr"/>
+          <a:lstStyle/>
+          <a:p>
+            <a:pPr marL="0" indent="0">
+              <a:buNone/>
+            </a:pPr>
+            <a:r>
+              <a:rPr lang="en-US" sz="1100" dirty="0">
+                <a:solidFill>
+                  <a:srgbClr val="1A1A1A"/>
+                </a:solidFill>
+                <a:latin typeface="Calibri" pitchFamily="34" charset="0"/>
+                <a:ea typeface="Calibri" pitchFamily="34" charset="-122"/>
+                <a:cs typeface="Calibri" pitchFamily="34" charset="-120"/>
+              </a:rPr>
+              <a:t>Requirement checkbox: Costing</a:t>
+            </a:r>
+            <a:endParaRPr lang="en-US" sz="1100" dirty="0"/>
+          </a:p>
+        </p:txBody>
+      </p:sp>
+      <p:sp>
+        <p:nvSpPr>
+          <p:cNvPr id="132" name="Divider 0 req_costing"/>
+          <p:cNvSpPr/>
+          <p:nvPr/>
+        </p:nvSpPr>
+        <p:spPr>
+          <a:xfrm>
+            <a:off x="822960" y="6166080"/>
+            <a:ext cx="4950000" cy="0"/>
+          </a:xfrm>
+          <a:prstGeom prst="line">
+            <a:avLst/>
+          </a:prstGeom>
+          <a:noFill/>
+          <a:ln w="9525">
+            <a:solidFill>
+              <a:srgbClr val="E5E5E5"/>
+            </a:solidFill>
+            <a:prstDash val="solid"/>
+          </a:ln>
+        </p:spPr>
+        <p:txBody>
+          <a:bodyPr/>
+          <a:lstStyle/>
+          <a:p>
+            <a:endParaRPr lang="en-US" dirty="0"/>
+          </a:p>
+        </p:txBody>
+      </p:sp>
+      <p:sp>
+        <p:nvSpPr>
+          <p:cNvPr id="133" name="Field 0 req_documentation"/>
+          <p:cNvSpPr/>
+          <p:nvPr/>
+        </p:nvSpPr>
+        <p:spPr>
+          <a:xfrm>
+            <a:off x="822960" y="6166080"/>
+            <a:ext cx="1450000" cy="320000"/>
+          </a:xfrm>
+          <a:prstGeom prst="rect">
+            <a:avLst/>
+          </a:prstGeom>
+          <a:noFill/>
+          <a:ln/>
+        </p:spPr>
+        <p:txBody>
+          <a:bodyPr wrap="square" lIns="0" tIns="0" rIns="0" bIns="0" rtlCol="0" anchor="ctr"/>
+          <a:lstStyle/>
+          <a:p>
+            <a:pPr marL="0" indent="0">
+              <a:buNone/>
+            </a:pPr>
+            <a:r>
+              <a:rPr lang="en-US" sz="1100" b="1" dirty="0">
+                <a:solidFill>
+                  <a:srgbClr val="1A1A1A"/>
+                </a:solidFill>
+                <a:latin typeface="Calibri" pitchFamily="34" charset="0"/>
+                <a:ea typeface="Calibri" pitchFamily="34" charset="-122"/>
+                <a:cs typeface="Calibri" pitchFamily="34" charset="-120"/>
+              </a:rPr>
+              <a:t>req_documentation</a:t>
+            </a:r>
+            <a:endParaRPr lang="en-US" sz="1100" dirty="0"/>
+          </a:p>
+        </p:txBody>
+      </p:sp>
+      <p:sp>
+        <p:nvSpPr>
+          <p:cNvPr id="134" name="Desc 0 req_documentation"/>
+          <p:cNvSpPr/>
+          <p:nvPr/>
+        </p:nvSpPr>
+        <p:spPr>
+          <a:xfrm>
+            <a:off x="2372960" y="6166080"/>
+            <a:ext cx="3400000" cy="320000"/>
+          </a:xfrm>
+          <a:prstGeom prst="rect">
+            <a:avLst/>
+          </a:prstGeom>
+          <a:noFill/>
+          <a:ln/>
+        </p:spPr>
+        <p:txBody>
+          <a:bodyPr wrap="square" lIns="0" tIns="0" rIns="0" bIns="0" rtlCol="0" anchor="ctr"/>
+          <a:lstStyle/>
+          <a:p>
+            <a:pPr marL="0" indent="0">
+              <a:buNone/>
+            </a:pPr>
+            <a:r>
+              <a:rPr lang="en-US" sz="1100" dirty="0">
+                <a:solidFill>
+                  <a:srgbClr val="1A1A1A"/>
+                </a:solidFill>
+                <a:latin typeface="Calibri" pitchFamily="34" charset="0"/>
+                <a:ea typeface="Calibri" pitchFamily="34" charset="-122"/>
+                <a:cs typeface="Calibri" pitchFamily="34" charset="-120"/>
+              </a:rPr>
+              <a:t>Requirement checkbox: Documentation</a:t>
+            </a:r>
+            <a:endParaRPr lang="en-US" sz="1100" dirty="0"/>
+          </a:p>
+        </p:txBody>
+      </p:sp>
+      <p:sp>
+        <p:nvSpPr>
+          <p:cNvPr id="135" name="Divider 0 req_documentation"/>
+          <p:cNvSpPr/>
+          <p:nvPr/>
+        </p:nvSpPr>
+        <p:spPr>
+          <a:xfrm>
+            <a:off x="822960" y="6486080"/>
+            <a:ext cx="4950000" cy="0"/>
+          </a:xfrm>
+          <a:prstGeom prst="line">
+            <a:avLst/>
+          </a:prstGeom>
+          <a:noFill/>
+          <a:ln w="9525">
+            <a:solidFill>
+              <a:srgbClr val="E5E5E5"/>
+            </a:solidFill>
+            <a:prstDash val="solid"/>
+          </a:ln>
+        </p:spPr>
+        <p:txBody>
+          <a:bodyPr/>
+          <a:lstStyle/>
+          <a:p>
+            <a:endParaRPr lang="en-US" dirty="0"/>
+          </a:p>
+        </p:txBody>
+      </p:sp>
+      <p:sp>
+        <p:nvSpPr>
+          <p:cNvPr id="136" name="Field 1 req_material"/>
+          <p:cNvSpPr/>
+          <p:nvPr/>
+        </p:nvSpPr>
+        <p:spPr>
+          <a:xfrm>
+            <a:off x="6172960" y="3286080"/>
+            <a:ext cx="1450000" cy="320000"/>
+          </a:xfrm>
+          <a:prstGeom prst="rect">
+            <a:avLst/>
+          </a:prstGeom>
+          <a:noFill/>
+          <a:ln/>
+        </p:spPr>
+        <p:txBody>
+          <a:bodyPr wrap="square" lIns="0" tIns="0" rIns="0" bIns="0" rtlCol="0" anchor="ctr"/>
+          <a:lstStyle/>
+          <a:p>
+            <a:pPr marL="0" indent="0">
+              <a:buNone/>
+            </a:pPr>
+            <a:r>
+              <a:rPr lang="en-US" sz="1100" b="1" dirty="0">
+                <a:solidFill>
+                  <a:srgbClr val="1A1A1A"/>
+                </a:solidFill>
+                <a:latin typeface="Calibri" pitchFamily="34" charset="0"/>
+                <a:ea typeface="Calibri" pitchFamily="34" charset="-122"/>
+                <a:cs typeface="Calibri" pitchFamily="34" charset="-120"/>
+              </a:rPr>
+              <a:t>req_material</a:t>
+            </a:r>
+            <a:endParaRPr lang="en-US" sz="1100" dirty="0"/>
+          </a:p>
+        </p:txBody>
+      </p:sp>
+      <p:sp>
+        <p:nvSpPr>
+          <p:cNvPr id="137" name="Desc 1 req_material"/>
+          <p:cNvSpPr/>
+          <p:nvPr/>
+        </p:nvSpPr>
+        <p:spPr>
+          <a:xfrm>
+            <a:off x="7722960" y="3286080"/>
+            <a:ext cx="3400000" cy="320000"/>
+          </a:xfrm>
+          <a:prstGeom prst="rect">
+            <a:avLst/>
+          </a:prstGeom>
+          <a:noFill/>
+          <a:ln/>
+        </p:spPr>
+        <p:txBody>
+          <a:bodyPr wrap="square" lIns="0" tIns="0" rIns="0" bIns="0" rtlCol="0" anchor="ctr"/>
+          <a:lstStyle/>
+          <a:p>
+            <a:pPr marL="0" indent="0">
+              <a:buNone/>
+            </a:pPr>
+            <a:r>
+              <a:rPr lang="en-US" sz="1100" dirty="0">
+                <a:solidFill>
+                  <a:srgbClr val="1A1A1A"/>
+                </a:solidFill>
+                <a:latin typeface="Calibri" pitchFamily="34" charset="0"/>
+                <a:ea typeface="Calibri" pitchFamily="34" charset="-122"/>
+                <a:cs typeface="Calibri" pitchFamily="34" charset="-120"/>
+              </a:rPr>
+              <a:t>Requirement checkbox: Material</a:t>
+            </a:r>
+            <a:endParaRPr lang="en-US" sz="1100" dirty="0"/>
+          </a:p>
+        </p:txBody>
+      </p:sp>
+      <p:sp>
+        <p:nvSpPr>
+          <p:cNvPr id="138" name="Divider 1 req_material"/>
+          <p:cNvSpPr/>
+          <p:nvPr/>
+        </p:nvSpPr>
+        <p:spPr>
+          <a:xfrm>
+            <a:off x="6172960" y="3606080"/>
+            <a:ext cx="4950000" cy="0"/>
+          </a:xfrm>
+          <a:prstGeom prst="line">
+            <a:avLst/>
+          </a:prstGeom>
+          <a:noFill/>
+          <a:ln w="9525">
+            <a:solidFill>
+              <a:srgbClr val="E5E5E5"/>
+            </a:solidFill>
+            <a:prstDash val="solid"/>
+          </a:ln>
+        </p:spPr>
+        <p:txBody>
+          <a:bodyPr/>
+          <a:lstStyle/>
+          <a:p>
+            <a:endParaRPr lang="en-US" dirty="0"/>
+          </a:p>
+        </p:txBody>
+      </p:sp>
+      <p:sp>
+        <p:nvSpPr>
+          <p:cNvPr id="139" name="Field 1 req_process"/>
+          <p:cNvSpPr/>
+          <p:nvPr/>
+        </p:nvSpPr>
+        <p:spPr>
+          <a:xfrm>
+            <a:off x="6172960" y="3606080"/>
+            <a:ext cx="1450000" cy="320000"/>
+          </a:xfrm>
+          <a:prstGeom prst="rect">
+            <a:avLst/>
+          </a:prstGeom>
+          <a:noFill/>
+          <a:ln/>
+        </p:spPr>
+        <p:txBody>
+          <a:bodyPr wrap="square" lIns="0" tIns="0" rIns="0" bIns="0" rtlCol="0" anchor="ctr"/>
+          <a:lstStyle/>
+          <a:p>
+            <a:pPr marL="0" indent="0">
+              <a:buNone/>
+            </a:pPr>
+            <a:r>
+              <a:rPr lang="en-US" sz="1100" b="1" dirty="0">
+                <a:solidFill>
+                  <a:srgbClr val="1A1A1A"/>
+                </a:solidFill>
+                <a:latin typeface="Calibri" pitchFamily="34" charset="0"/>
+                <a:ea typeface="Calibri" pitchFamily="34" charset="-122"/>
+                <a:cs typeface="Calibri" pitchFamily="34" charset="-120"/>
+              </a:rPr>
+              <a:t>req_process</a:t>
+            </a:r>
+            <a:endParaRPr lang="en-US" sz="1100" dirty="0"/>
+          </a:p>
+        </p:txBody>
+      </p:sp>
+      <p:sp>
+        <p:nvSpPr>
+          <p:cNvPr id="140" name="Desc 1 req_process"/>
+          <p:cNvSpPr/>
+          <p:nvPr/>
+        </p:nvSpPr>
+        <p:spPr>
+          <a:xfrm>
+            <a:off x="7722960" y="3606080"/>
+            <a:ext cx="3400000" cy="320000"/>
+          </a:xfrm>
+          <a:prstGeom prst="rect">
+            <a:avLst/>
+          </a:prstGeom>
+          <a:noFill/>
+          <a:ln/>
+        </p:spPr>
+        <p:txBody>
+          <a:bodyPr wrap="square" lIns="0" tIns="0" rIns="0" bIns="0" rtlCol="0" anchor="ctr"/>
+          <a:lstStyle/>
+          <a:p>
+            <a:pPr marL="0" indent="0">
+              <a:buNone/>
+            </a:pPr>
+            <a:r>
+              <a:rPr lang="en-US" sz="1100" dirty="0">
+                <a:solidFill>
+                  <a:srgbClr val="1A1A1A"/>
+                </a:solidFill>
+                <a:latin typeface="Calibri" pitchFamily="34" charset="0"/>
+                <a:ea typeface="Calibri" pitchFamily="34" charset="-122"/>
+                <a:cs typeface="Calibri" pitchFamily="34" charset="-120"/>
+              </a:rPr>
+              <a:t>Requirement checkbox: Process</a:t>
+            </a:r>
+            <a:endParaRPr lang="en-US" sz="1100" dirty="0"/>
+          </a:p>
+        </p:txBody>
+      </p:sp>
+      <p:sp>
+        <p:nvSpPr>
+          <p:cNvPr id="141" name="Divider 1 req_process"/>
+          <p:cNvSpPr/>
+          <p:nvPr/>
+        </p:nvSpPr>
+        <p:spPr>
+          <a:xfrm>
+            <a:off x="6172960" y="3926080"/>
+            <a:ext cx="4950000" cy="0"/>
+          </a:xfrm>
+          <a:prstGeom prst="line">
+            <a:avLst/>
+          </a:prstGeom>
+          <a:noFill/>
+          <a:ln w="9525">
+            <a:solidFill>
+              <a:srgbClr val="E5E5E5"/>
+            </a:solidFill>
+            <a:prstDash val="solid"/>
+          </a:ln>
+        </p:spPr>
+        <p:txBody>
+          <a:bodyPr/>
+          <a:lstStyle/>
+          <a:p>
+            <a:endParaRPr lang="en-US" dirty="0"/>
+          </a:p>
+        </p:txBody>
+      </p:sp>
+      <p:sp>
+        <p:nvSpPr>
+          <p:cNvPr id="142" name="Field 1 req_tool_machine"/>
+          <p:cNvSpPr/>
+          <p:nvPr/>
+        </p:nvSpPr>
+        <p:spPr>
+          <a:xfrm>
+            <a:off x="6172960" y="3926080"/>
+            <a:ext cx="1450000" cy="320000"/>
+          </a:xfrm>
+          <a:prstGeom prst="rect">
+            <a:avLst/>
+          </a:prstGeom>
+          <a:noFill/>
+          <a:ln/>
+        </p:spPr>
+        <p:txBody>
+          <a:bodyPr wrap="square" lIns="0" tIns="0" rIns="0" bIns="0" rtlCol="0" anchor="ctr"/>
+          <a:lstStyle/>
+          <a:p>
+            <a:pPr marL="0" indent="0">
+              <a:buNone/>
+            </a:pPr>
+            <a:r>
+              <a:rPr lang="en-US" sz="1100" b="1" dirty="0">
+                <a:solidFill>
+                  <a:srgbClr val="1A1A1A"/>
+                </a:solidFill>
+                <a:latin typeface="Calibri" pitchFamily="34" charset="0"/>
+                <a:ea typeface="Calibri" pitchFamily="34" charset="-122"/>
+                <a:cs typeface="Calibri" pitchFamily="34" charset="-120"/>
+              </a:rPr>
+              <a:t>req_tool_machine</a:t>
+            </a:r>
+            <a:endParaRPr lang="en-US" sz="1100" dirty="0"/>
+          </a:p>
+        </p:txBody>
+      </p:sp>
+      <p:sp>
+        <p:nvSpPr>
+          <p:cNvPr id="143" name="Desc 1 req_tool_machine"/>
+          <p:cNvSpPr/>
+          <p:nvPr/>
+        </p:nvSpPr>
+        <p:spPr>
+          <a:xfrm>
+            <a:off x="7722960" y="3926080"/>
+            <a:ext cx="3400000" cy="320000"/>
+          </a:xfrm>
+          <a:prstGeom prst="rect">
+            <a:avLst/>
+          </a:prstGeom>
+          <a:noFill/>
+          <a:ln/>
+        </p:spPr>
+        <p:txBody>
+          <a:bodyPr wrap="square" lIns="0" tIns="0" rIns="0" bIns="0" rtlCol="0" anchor="ctr"/>
+          <a:lstStyle/>
+          <a:p>
+            <a:pPr marL="0" indent="0">
+              <a:buNone/>
+            </a:pPr>
+            <a:r>
+              <a:rPr lang="en-US" sz="1100" dirty="0">
+                <a:solidFill>
+                  <a:srgbClr val="1A1A1A"/>
+                </a:solidFill>
+                <a:latin typeface="Calibri" pitchFamily="34" charset="0"/>
+                <a:ea typeface="Calibri" pitchFamily="34" charset="-122"/>
+                <a:cs typeface="Calibri" pitchFamily="34" charset="-120"/>
+              </a:rPr>
+              <a:t>Requirement checkbox: Tool/Machine</a:t>
+            </a:r>
+            <a:endParaRPr lang="en-US" sz="1100" dirty="0"/>
+          </a:p>
+        </p:txBody>
+      </p:sp>
+      <p:sp>
+        <p:nvSpPr>
+          <p:cNvPr id="144" name="Divider 1 req_tool_machine"/>
+          <p:cNvSpPr/>
+          <p:nvPr/>
+        </p:nvSpPr>
+        <p:spPr>
+          <a:xfrm>
+            <a:off x="6172960" y="4246080"/>
+            <a:ext cx="4950000" cy="0"/>
+          </a:xfrm>
+          <a:prstGeom prst="line">
+            <a:avLst/>
+          </a:prstGeom>
+          <a:noFill/>
+          <a:ln w="9525">
+            <a:solidFill>
+              <a:srgbClr val="E5E5E5"/>
+            </a:solidFill>
+            <a:prstDash val="solid"/>
+          </a:ln>
+        </p:spPr>
+        <p:txBody>
+          <a:bodyPr/>
+          <a:lstStyle/>
+          <a:p>
+            <a:endParaRPr lang="en-US" dirty="0"/>
+          </a:p>
+        </p:txBody>
+      </p:sp>
+      <p:sp>
+        <p:nvSpPr>
+          <p:cNvPr id="145" name="Field 1 priority"/>
+          <p:cNvSpPr/>
+          <p:nvPr/>
+        </p:nvSpPr>
+        <p:spPr>
+          <a:xfrm>
+            <a:off x="6172960" y="4246080"/>
+            <a:ext cx="1450000" cy="320000"/>
+          </a:xfrm>
+          <a:prstGeom prst="rect">
+            <a:avLst/>
+          </a:prstGeom>
+          <a:noFill/>
+          <a:ln/>
+        </p:spPr>
+        <p:txBody>
+          <a:bodyPr wrap="square" lIns="0" tIns="0" rIns="0" bIns="0" rtlCol="0" anchor="ctr"/>
+          <a:lstStyle/>
+          <a:p>
+            <a:pPr marL="0" indent="0">
+              <a:buNone/>
+            </a:pPr>
+            <a:r>
+              <a:rPr lang="en-US" sz="1100" b="1" dirty="0">
+                <a:solidFill>
+                  <a:srgbClr val="1A1A1A"/>
+                </a:solidFill>
+                <a:latin typeface="Calibri" pitchFamily="34" charset="0"/>
+                <a:ea typeface="Calibri" pitchFamily="34" charset="-122"/>
+                <a:cs typeface="Calibri" pitchFamily="34" charset="-120"/>
+              </a:rPr>
+              <a:t>priority</a:t>
+            </a:r>
+            <a:endParaRPr lang="en-US" sz="1100" dirty="0"/>
+          </a:p>
+        </p:txBody>
+      </p:sp>
+      <p:sp>
+        <p:nvSpPr>
+          <p:cNvPr id="146" name="Desc 1 priority"/>
+          <p:cNvSpPr/>
+          <p:nvPr/>
+        </p:nvSpPr>
+        <p:spPr>
+          <a:xfrm>
+            <a:off x="7722960" y="4246080"/>
+            <a:ext cx="3400000" cy="320000"/>
+          </a:xfrm>
+          <a:prstGeom prst="rect">
+            <a:avLst/>
+          </a:prstGeom>
+          <a:noFill/>
+          <a:ln/>
+        </p:spPr>
+        <p:txBody>
+          <a:bodyPr wrap="square" lIns="0" tIns="0" rIns="0" bIns="0" rtlCol="0" anchor="ctr"/>
+          <a:lstStyle/>
+          <a:p>
+            <a:pPr marL="0" indent="0">
+              <a:buNone/>
+            </a:pPr>
+            <a:r>
+              <a:rPr lang="en-US" sz="1100" dirty="0">
+                <a:solidFill>
+                  <a:srgbClr val="1A1A1A"/>
+                </a:solidFill>
+                <a:latin typeface="Calibri" pitchFamily="34" charset="0"/>
+                <a:ea typeface="Calibri" pitchFamily="34" charset="-122"/>
+                <a:cs typeface="Calibri" pitchFamily="34" charset="-120"/>
+              </a:rPr>
+              <a:t>Priority combo</a:t>
+            </a:r>
+            <a:endParaRPr lang="en-US" sz="1100" dirty="0"/>
+          </a:p>
+        </p:txBody>
+      </p:sp>
+      <p:sp>
+        <p:nvSpPr>
+          <p:cNvPr id="147" name="Divider 1 priority"/>
+          <p:cNvSpPr/>
+          <p:nvPr/>
+        </p:nvSpPr>
+        <p:spPr>
+          <a:xfrm>
+            <a:off x="6172960" y="4566080"/>
+            <a:ext cx="4950000" cy="0"/>
+          </a:xfrm>
+          <a:prstGeom prst="line">
+            <a:avLst/>
+          </a:prstGeom>
+          <a:noFill/>
+          <a:ln w="9525">
+            <a:solidFill>
+              <a:srgbClr val="E5E5E5"/>
+            </a:solidFill>
+            <a:prstDash val="solid"/>
+          </a:ln>
+        </p:spPr>
+        <p:txBody>
+          <a:bodyPr/>
+          <a:lstStyle/>
+          <a:p>
+            <a:endParaRPr lang="en-US" dirty="0"/>
+          </a:p>
+        </p:txBody>
+      </p:sp>
+      <p:sp>
+        <p:nvSpPr>
+          <p:cNvPr id="148" name="Field 1 due_date"/>
+          <p:cNvSpPr/>
+          <p:nvPr/>
+        </p:nvSpPr>
+        <p:spPr>
+          <a:xfrm>
+            <a:off x="6172960" y="4566080"/>
+            <a:ext cx="1450000" cy="320000"/>
+          </a:xfrm>
+          <a:prstGeom prst="rect">
+            <a:avLst/>
+          </a:prstGeom>
+          <a:noFill/>
+          <a:ln/>
+        </p:spPr>
+        <p:txBody>
+          <a:bodyPr wrap="square" lIns="0" tIns="0" rIns="0" bIns="0" rtlCol="0" anchor="ctr"/>
+          <a:lstStyle/>
+          <a:p>
+            <a:pPr marL="0" indent="0">
+              <a:buNone/>
+            </a:pPr>
+            <a:r>
+              <a:rPr lang="en-US" sz="1100" b="1" dirty="0">
+                <a:solidFill>
+                  <a:srgbClr val="1A1A1A"/>
+                </a:solidFill>
+                <a:latin typeface="Calibri" pitchFamily="34" charset="0"/>
+                <a:ea typeface="Calibri" pitchFamily="34" charset="-122"/>
+                <a:cs typeface="Calibri" pitchFamily="34" charset="-120"/>
+              </a:rPr>
+              <a:t>due_date</a:t>
+            </a:r>
+            <a:endParaRPr lang="en-US" sz="1100" dirty="0"/>
+          </a:p>
+        </p:txBody>
+      </p:sp>
+      <p:sp>
+        <p:nvSpPr>
+          <p:cNvPr id="149" name="Desc 1 due_date"/>
+          <p:cNvSpPr/>
+          <p:nvPr/>
+        </p:nvSpPr>
+        <p:spPr>
+          <a:xfrm>
+            <a:off x="7722960" y="4566080"/>
+            <a:ext cx="3400000" cy="320000"/>
+          </a:xfrm>
+          <a:prstGeom prst="rect">
+            <a:avLst/>
+          </a:prstGeom>
+          <a:noFill/>
+          <a:ln/>
+        </p:spPr>
+        <p:txBody>
+          <a:bodyPr wrap="square" lIns="0" tIns="0" rIns="0" bIns="0" rtlCol="0" anchor="ctr"/>
+          <a:lstStyle/>
+          <a:p>
+            <a:pPr marL="0" indent="0">
+              <a:buNone/>
+            </a:pPr>
+            <a:r>
+              <a:rPr lang="en-US" sz="1100" dirty="0">
+                <a:solidFill>
+                  <a:srgbClr val="1A1A1A"/>
+                </a:solidFill>
+                <a:latin typeface="Calibri" pitchFamily="34" charset="0"/>
+                <a:ea typeface="Calibri" pitchFamily="34" charset="-122"/>
+                <a:cs typeface="Calibri" pitchFamily="34" charset="-120"/>
+              </a:rPr>
+              <a:t>Due Date</a:t>
+            </a:r>
+            <a:endParaRPr lang="en-US" sz="1100" dirty="0"/>
+          </a:p>
+        </p:txBody>
+      </p:sp>
+      <p:sp>
+        <p:nvSpPr>
+          <p:cNvPr id="150" name="Divider 1 due_date"/>
+          <p:cNvSpPr/>
+          <p:nvPr/>
+        </p:nvSpPr>
+        <p:spPr>
+          <a:xfrm>
+            <a:off x="6172960" y="4886080"/>
+            <a:ext cx="4950000" cy="0"/>
+          </a:xfrm>
+          <a:prstGeom prst="line">
+            <a:avLst/>
+          </a:prstGeom>
+          <a:noFill/>
+          <a:ln w="9525">
+            <a:solidFill>
+              <a:srgbClr val="E5E5E5"/>
+            </a:solidFill>
+            <a:prstDash val="solid"/>
+          </a:ln>
+        </p:spPr>
+        <p:txBody>
+          <a:bodyPr/>
+          <a:lstStyle/>
+          <a:p>
+            <a:endParaRPr lang="en-US" dirty="0"/>
+          </a:p>
+        </p:txBody>
+      </p:sp>
+      <p:sp>
+        <p:nvSpPr>
+          <p:cNvPr id="151" name="Field 1 general_note"/>
+          <p:cNvSpPr/>
+          <p:nvPr/>
+        </p:nvSpPr>
+        <p:spPr>
+          <a:xfrm>
+            <a:off x="6172960" y="4886080"/>
+            <a:ext cx="1450000" cy="320000"/>
+          </a:xfrm>
+          <a:prstGeom prst="rect">
+            <a:avLst/>
+          </a:prstGeom>
+          <a:noFill/>
+          <a:ln/>
+        </p:spPr>
+        <p:txBody>
+          <a:bodyPr wrap="square" lIns="0" tIns="0" rIns="0" bIns="0" rtlCol="0" anchor="ctr"/>
+          <a:lstStyle/>
+          <a:p>
+            <a:pPr marL="0" indent="0">
+              <a:buNone/>
+            </a:pPr>
+            <a:r>
+              <a:rPr lang="en-US" sz="1100" b="1" dirty="0">
+                <a:solidFill>
+                  <a:srgbClr val="1A1A1A"/>
+                </a:solidFill>
+                <a:latin typeface="Calibri" pitchFamily="34" charset="0"/>
+                <a:ea typeface="Calibri" pitchFamily="34" charset="-122"/>
+                <a:cs typeface="Calibri" pitchFamily="34" charset="-120"/>
+              </a:rPr>
+              <a:t>general_note</a:t>
+            </a:r>
+            <a:endParaRPr lang="en-US" sz="1100" dirty="0"/>
+          </a:p>
+        </p:txBody>
+      </p:sp>
+      <p:sp>
+        <p:nvSpPr>
+          <p:cNvPr id="152" name="Desc 1 general_note"/>
+          <p:cNvSpPr/>
+          <p:nvPr/>
+        </p:nvSpPr>
+        <p:spPr>
+          <a:xfrm>
+            <a:off x="7722960" y="4886080"/>
+            <a:ext cx="3400000" cy="320000"/>
+          </a:xfrm>
+          <a:prstGeom prst="rect">
+            <a:avLst/>
+          </a:prstGeom>
+          <a:noFill/>
+          <a:ln/>
+        </p:spPr>
+        <p:txBody>
+          <a:bodyPr wrap="square" lIns="0" tIns="0" rIns="0" bIns="0" rtlCol="0" anchor="ctr"/>
+          <a:lstStyle/>
+          <a:p>
+            <a:pPr marL="0" indent="0">
+              <a:buNone/>
+            </a:pPr>
+            <a:r>
+              <a:rPr lang="en-US" sz="1100" dirty="0">
+                <a:solidFill>
+                  <a:srgbClr val="1A1A1A"/>
+                </a:solidFill>
+                <a:latin typeface="Calibri" pitchFamily="34" charset="0"/>
+                <a:ea typeface="Calibri" pitchFamily="34" charset="-122"/>
+                <a:cs typeface="Calibri" pitchFamily="34" charset="-120"/>
+              </a:rPr>
+              <a:t>Note (free text)</a:t>
+            </a:r>
+            <a:endParaRPr lang="en-US" sz="1100" dirty="0"/>
+          </a:p>
+        </p:txBody>
+      </p:sp>
+      <p:sp>
+        <p:nvSpPr>
+          <p:cNvPr id="153" name="Divider 1 general_note"/>
+          <p:cNvSpPr/>
+          <p:nvPr/>
+        </p:nvSpPr>
+        <p:spPr>
+          <a:xfrm>
+            <a:off x="6172960" y="5206080"/>
+            <a:ext cx="4950000" cy="0"/>
+          </a:xfrm>
+          <a:prstGeom prst="line">
+            <a:avLst/>
+          </a:prstGeom>
+          <a:noFill/>
+          <a:ln w="9525">
+            <a:solidFill>
+              <a:srgbClr val="E5E5E5"/>
+            </a:solidFill>
+            <a:prstDash val="solid"/>
+          </a:ln>
+        </p:spPr>
+        <p:txBody>
+          <a:bodyPr/>
+          <a:lstStyle/>
+          <a:p>
+            <a:endParaRPr lang="en-US" dirty="0"/>
+          </a:p>
+        </p:txBody>
+      </p:sp>
+      <p:sp>
+        <p:nvSpPr>
+          <p:cNvPr id="154" name="Field 1 reported_by"/>
+          <p:cNvSpPr/>
+          <p:nvPr/>
+        </p:nvSpPr>
+        <p:spPr>
+          <a:xfrm>
+            <a:off x="6172960" y="5206080"/>
+            <a:ext cx="1450000" cy="320000"/>
+          </a:xfrm>
+          <a:prstGeom prst="rect">
+            <a:avLst/>
+          </a:prstGeom>
+          <a:noFill/>
+          <a:ln/>
+        </p:spPr>
+        <p:txBody>
+          <a:bodyPr wrap="square" lIns="0" tIns="0" rIns="0" bIns="0" rtlCol="0" anchor="ctr"/>
+          <a:lstStyle/>
+          <a:p>
+            <a:pPr marL="0" indent="0">
+              <a:buNone/>
+            </a:pPr>
+            <a:r>
+              <a:rPr lang="en-US" sz="1100" b="1" dirty="0">
+                <a:solidFill>
+                  <a:srgbClr val="1A1A1A"/>
+                </a:solidFill>
+                <a:latin typeface="Calibri" pitchFamily="34" charset="0"/>
+                <a:ea typeface="Calibri" pitchFamily="34" charset="-122"/>
+                <a:cs typeface="Calibri" pitchFamily="34" charset="-120"/>
+              </a:rPr>
+              <a:t>reported_by</a:t>
+            </a:r>
+            <a:endParaRPr lang="en-US" sz="1100" dirty="0"/>
+          </a:p>
+        </p:txBody>
+      </p:sp>
+      <p:sp>
+        <p:nvSpPr>
+          <p:cNvPr id="155" name="Desc 1 reported_by"/>
+          <p:cNvSpPr/>
+          <p:nvPr/>
+        </p:nvSpPr>
+        <p:spPr>
+          <a:xfrm>
+            <a:off x="7722960" y="5206080"/>
+            <a:ext cx="3400000" cy="320000"/>
+          </a:xfrm>
+          <a:prstGeom prst="rect">
+            <a:avLst/>
+          </a:prstGeom>
+          <a:noFill/>
+          <a:ln/>
+        </p:spPr>
+        <p:txBody>
+          <a:bodyPr wrap="square" lIns="0" tIns="0" rIns="0" bIns="0" rtlCol="0" anchor="ctr"/>
+          <a:lstStyle/>
+          <a:p>
+            <a:pPr marL="0" indent="0">
+              <a:buNone/>
+            </a:pPr>
+            <a:r>
+              <a:rPr lang="en-US" sz="1100" dirty="0">
+                <a:solidFill>
+                  <a:srgbClr val="1A1A1A"/>
+                </a:solidFill>
+                <a:latin typeface="Calibri" pitchFamily="34" charset="0"/>
+                <a:ea typeface="Calibri" pitchFamily="34" charset="-122"/>
+                <a:cs typeface="Calibri" pitchFamily="34" charset="-120"/>
+              </a:rPr>
+              <a:t>Reported By - who requested the change</a:t>
+            </a:r>
+            <a:endParaRPr lang="en-US" sz="1100" dirty="0"/>
+          </a:p>
+        </p:txBody>
+      </p:sp>
+      <p:sp>
+        <p:nvSpPr>
+          <p:cNvPr id="156" name="Divider 1 reported_by"/>
+          <p:cNvSpPr/>
+          <p:nvPr/>
+        </p:nvSpPr>
+        <p:spPr>
+          <a:xfrm>
+            <a:off x="6172960" y="5526080"/>
+            <a:ext cx="4950000" cy="0"/>
+          </a:xfrm>
+          <a:prstGeom prst="line">
+            <a:avLst/>
+          </a:prstGeom>
+          <a:noFill/>
+          <a:ln w="9525">
+            <a:solidFill>
+              <a:srgbClr val="E5E5E5"/>
+            </a:solidFill>
+            <a:prstDash val="solid"/>
+          </a:ln>
+        </p:spPr>
+        <p:txBody>
+          <a:bodyPr/>
+          <a:lstStyle/>
+          <a:p>
+            <a:endParaRPr lang="en-US" dirty="0"/>
+          </a:p>
+        </p:txBody>
+      </p:sp>
+      <p:sp>
+        <p:nvSpPr>
+          <p:cNvPr id="157" name="Field 1 reason_code"/>
+          <p:cNvSpPr/>
+          <p:nvPr/>
+        </p:nvSpPr>
+        <p:spPr>
+          <a:xfrm>
+            <a:off x="6172960" y="5526080"/>
+            <a:ext cx="1450000" cy="320000"/>
+          </a:xfrm>
+          <a:prstGeom prst="rect">
+            <a:avLst/>
+          </a:prstGeom>
+          <a:noFill/>
+          <a:ln/>
+        </p:spPr>
+        <p:txBody>
+          <a:bodyPr wrap="square" lIns="0" tIns="0" rIns="0" bIns="0" rtlCol="0" anchor="ctr"/>
+          <a:lstStyle/>
+          <a:p>
+            <a:pPr marL="0" indent="0">
+              <a:buNone/>
+            </a:pPr>
+            <a:r>
+              <a:rPr lang="en-US" sz="1100" b="1" dirty="0">
+                <a:solidFill>
+                  <a:srgbClr val="1A1A1A"/>
+                </a:solidFill>
+                <a:latin typeface="Calibri" pitchFamily="34" charset="0"/>
+                <a:ea typeface="Calibri" pitchFamily="34" charset="-122"/>
+                <a:cs typeface="Calibri" pitchFamily="34" charset="-120"/>
+              </a:rPr>
+              <a:t>reason_code</a:t>
+            </a:r>
+            <a:endParaRPr lang="en-US" sz="1100" dirty="0"/>
+          </a:p>
+        </p:txBody>
+      </p:sp>
+      <p:sp>
+        <p:nvSpPr>
+          <p:cNvPr id="158" name="Desc 1 reason_code"/>
+          <p:cNvSpPr/>
+          <p:nvPr/>
+        </p:nvSpPr>
+        <p:spPr>
+          <a:xfrm>
+            <a:off x="7722960" y="5526080"/>
+            <a:ext cx="3400000" cy="320000"/>
+          </a:xfrm>
+          <a:prstGeom prst="rect">
+            <a:avLst/>
+          </a:prstGeom>
+          <a:noFill/>
+          <a:ln/>
+        </p:spPr>
+        <p:txBody>
+          <a:bodyPr wrap="square" lIns="0" tIns="0" rIns="0" bIns="0" rtlCol="0" anchor="ctr"/>
+          <a:lstStyle/>
+          <a:p>
+            <a:pPr marL="0" indent="0">
+              <a:buNone/>
+            </a:pPr>
+            <a:r>
+              <a:rPr lang="en-US" sz="1100" dirty="0">
+                <a:solidFill>
+                  <a:srgbClr val="1A1A1A"/>
+                </a:solidFill>
+                <a:latin typeface="Calibri" pitchFamily="34" charset="0"/>
+                <a:ea typeface="Calibri" pitchFamily="34" charset="-122"/>
+                <a:cs typeface="Calibri" pitchFamily="34" charset="-120"/>
+              </a:rPr>
+              <a:t>Reason Code combo, Quality section - real QCReasonCode class</a:t>
+            </a:r>
+            <a:endParaRPr lang="en-US" sz="1100" dirty="0"/>
+          </a:p>
+        </p:txBody>
+      </p:sp>
+      <p:sp>
+        <p:nvSpPr>
+          <p:cNvPr id="159" name="Divider 1 reason_code"/>
+          <p:cNvSpPr/>
+          <p:nvPr/>
+        </p:nvSpPr>
+        <p:spPr>
+          <a:xfrm>
+            <a:off x="6172960" y="5846080"/>
+            <a:ext cx="4950000" cy="0"/>
+          </a:xfrm>
+          <a:prstGeom prst="line">
+            <a:avLst/>
+          </a:prstGeom>
+          <a:noFill/>
+          <a:ln w="9525">
+            <a:solidFill>
+              <a:srgbClr val="E5E5E5"/>
+            </a:solidFill>
+            <a:prstDash val="solid"/>
+          </a:ln>
+        </p:spPr>
+        <p:txBody>
+          <a:bodyPr/>
+          <a:lstStyle/>
+          <a:p>
+            <a:endParaRPr lang="en-US" dirty="0"/>
+          </a:p>
+        </p:txBody>
+      </p:sp>
+      <p:sp>
+        <p:nvSpPr>
+          <p:cNvPr id="160" name="Field 1 cause_code"/>
+          <p:cNvSpPr/>
+          <p:nvPr/>
+        </p:nvSpPr>
+        <p:spPr>
+          <a:xfrm>
+            <a:off x="6172960" y="5846080"/>
+            <a:ext cx="1450000" cy="320000"/>
+          </a:xfrm>
+          <a:prstGeom prst="rect">
+            <a:avLst/>
+          </a:prstGeom>
+          <a:noFill/>
+          <a:ln/>
+        </p:spPr>
+        <p:txBody>
+          <a:bodyPr wrap="square" lIns="0" tIns="0" rIns="0" bIns="0" rtlCol="0" anchor="ctr"/>
+          <a:lstStyle/>
+          <a:p>
+            <a:pPr marL="0" indent="0">
+              <a:buNone/>
+            </a:pPr>
+            <a:r>
+              <a:rPr lang="en-US" sz="1100" b="1" dirty="0">
+                <a:solidFill>
+                  <a:srgbClr val="1A1A1A"/>
+                </a:solidFill>
+                <a:latin typeface="Calibri" pitchFamily="34" charset="0"/>
+                <a:ea typeface="Calibri" pitchFamily="34" charset="-122"/>
+                <a:cs typeface="Calibri" pitchFamily="34" charset="-120"/>
+              </a:rPr>
+              <a:t>cause_code</a:t>
+            </a:r>
+            <a:endParaRPr lang="en-US" sz="1100" dirty="0"/>
+          </a:p>
+        </p:txBody>
+      </p:sp>
+      <p:sp>
+        <p:nvSpPr>
+          <p:cNvPr id="161" name="Desc 1 cause_code"/>
+          <p:cNvSpPr/>
+          <p:nvPr/>
+        </p:nvSpPr>
+        <p:spPr>
+          <a:xfrm>
+            <a:off x="7722960" y="5846080"/>
+            <a:ext cx="3400000" cy="320000"/>
+          </a:xfrm>
+          <a:prstGeom prst="rect">
+            <a:avLst/>
+          </a:prstGeom>
+          <a:noFill/>
+          <a:ln/>
+        </p:spPr>
+        <p:txBody>
+          <a:bodyPr wrap="square" lIns="0" tIns="0" rIns="0" bIns="0" rtlCol="0" anchor="ctr"/>
+          <a:lstStyle/>
+          <a:p>
+            <a:pPr marL="0" indent="0">
+              <a:buNone/>
+            </a:pPr>
+            <a:r>
+              <a:rPr lang="en-US" sz="1100" dirty="0">
+                <a:solidFill>
+                  <a:srgbClr val="1A1A1A"/>
+                </a:solidFill>
+                <a:latin typeface="Calibri" pitchFamily="34" charset="0"/>
+                <a:ea typeface="Calibri" pitchFamily="34" charset="-122"/>
+                <a:cs typeface="Calibri" pitchFamily="34" charset="-120"/>
+              </a:rPr>
+              <a:t>Cause Code combo, Quality section - real QCCauseCode class</a:t>
+            </a:r>
+            <a:endParaRPr lang="en-US" sz="1100" dirty="0"/>
+          </a:p>
+        </p:txBody>
+      </p:sp>
+      <p:sp>
+        <p:nvSpPr>
+          <p:cNvPr id="162" name="Divider 1 cause_code"/>
+          <p:cNvSpPr/>
+          <p:nvPr/>
+        </p:nvSpPr>
+        <p:spPr>
+          <a:xfrm>
+            <a:off x="6172960" y="6166080"/>
+            <a:ext cx="4950000" cy="0"/>
           </a:xfrm>
           <a:prstGeom prst="line">
             <a:avLst/>
@@ -8607,7 +10205,7 @@
             <a:r>
               <a:rPr lang="en-US" sz="1500" b="1" dirty="0">
                 <a:solidFill>
-                  <a:srgbClr val="CF0C2C"/>
+                  <a:srgbClr val="1A1A1A"/>
                 </a:solidFill>
                 <a:latin typeface="Calibri" pitchFamily="34" charset="0"/>
                 <a:ea typeface="Calibri" pitchFamily="34" charset="-122"/>
@@ -9620,7 +11218,7 @@
             <a:r>
               <a:rPr lang="en-US" sz="1500" b="1" dirty="0">
                 <a:solidFill>
-                  <a:srgbClr val="CF0C2C"/>
+                  <a:srgbClr val="1A1A1A"/>
                 </a:solidFill>
                 <a:latin typeface="Calibri" pitchFamily="34" charset="0"/>
                 <a:ea typeface="Calibri" pitchFamily="34" charset="-122"/>

--- a/docs/presentations/eCMRs_plan.pptx
+++ b/docs/presentations/eCMRs_plan.pptx
@@ -1536,9 +1536,14 @@
             <a:avLst/>
           </a:prstGeom>
           <a:solidFill>
-            <a:srgbClr val="F7F7F7"/>
+            <a:srgbClr val="FFFFFF"/>
           </a:solidFill>
-          <a:ln/>
+          <a:ln w="12700">
+            <a:solidFill>
+              <a:srgbClr val="CF0C2C"/>
+            </a:solidFill>
+            <a:prstDash val="solid"/>
+          </a:ln>
         </p:spPr>
         <p:txBody>
           <a:bodyPr/>
@@ -1679,7 +1684,7 @@
     <p:bg>
       <p:bgPr>
         <a:solidFill>
-          <a:srgbClr val="F7F7F7"/>
+          <a:srgbClr val="FFFFFF"/>
         </a:solidFill>
         <a:effectLst/>
       </p:bgPr>
@@ -1792,9 +1797,14 @@
               <a:gd name="adj" fmla="val 8000"/>
             </a:avLst>
           </a:prstGeom>
-          <a:noFill/>
-          <a:ln>
-            <a:noFill/>
+          <a:solidFill>
+            <a:srgbClr val="CF0C2C"/>
+          </a:solidFill>
+          <a:ln w="12700">
+            <a:solidFill>
+              <a:srgbClr val="CF0C2C"/>
+            </a:solidFill>
+            <a:prstDash val="solid"/>
           </a:ln>
         </p:spPr>
         <p:txBody>
@@ -2311,7 +2321,7 @@
     <p:bg>
       <p:bgPr>
         <a:solidFill>
-          <a:srgbClr val="F7F7F7"/>
+          <a:srgbClr val="FFFFFF"/>
         </a:solidFill>
         <a:effectLst/>
       </p:bgPr>
@@ -2346,9 +2356,14 @@
               <a:gd name="adj" fmla="val 8000"/>
             </a:avLst>
           </a:prstGeom>
-          <a:noFill/>
-          <a:ln>
-            <a:noFill/>
+          <a:solidFill>
+            <a:srgbClr val="CF0C2C"/>
+          </a:solidFill>
+          <a:ln w="12700">
+            <a:solidFill>
+              <a:srgbClr val="CF0C2C"/>
+            </a:solidFill>
+            <a:prstDash val="solid"/>
           </a:ln>
         </p:spPr>
         <p:txBody>
@@ -3041,7 +3056,7 @@
     <p:bg>
       <p:bgPr>
         <a:solidFill>
-          <a:srgbClr val="F7F7F7"/>
+          <a:srgbClr val="FFFFFF"/>
         </a:solidFill>
         <a:effectLst/>
       </p:bgPr>
@@ -3076,9 +3091,14 @@
               <a:gd name="adj" fmla="val 8000"/>
             </a:avLst>
           </a:prstGeom>
-          <a:noFill/>
-          <a:ln>
-            <a:noFill/>
+          <a:solidFill>
+            <a:srgbClr val="CF0C2C"/>
+          </a:solidFill>
+          <a:ln w="12700">
+            <a:solidFill>
+              <a:srgbClr val="CF0C2C"/>
+            </a:solidFill>
+            <a:prstDash val="solid"/>
           </a:ln>
         </p:spPr>
         <p:txBody>
@@ -3507,7 +3527,7 @@
     <p:bg>
       <p:bgPr>
         <a:solidFill>
-          <a:srgbClr val="F7F7F7"/>
+          <a:srgbClr val="FFFFFF"/>
         </a:solidFill>
         <a:effectLst/>
       </p:bgPr>
@@ -3620,9 +3640,14 @@
               <a:gd name="adj" fmla="val 8000"/>
             </a:avLst>
           </a:prstGeom>
-          <a:noFill/>
-          <a:ln>
-            <a:noFill/>
+          <a:solidFill>
+            <a:srgbClr val="CF0C2C"/>
+          </a:solidFill>
+          <a:ln w="12700">
+            <a:solidFill>
+              <a:srgbClr val="CF0C2C"/>
+            </a:solidFill>
+            <a:prstDash val="solid"/>
           </a:ln>
         </p:spPr>
         <p:txBody>
@@ -3900,9 +3925,14 @@
             <a:avLst/>
           </a:prstGeom>
           <a:solidFill>
-            <a:srgbClr val="F7F7F7"/>
+            <a:srgbClr val="FFFFFF"/>
           </a:solidFill>
-          <a:ln/>
+          <a:ln w="12700">
+            <a:solidFill>
+              <a:srgbClr val="CF0C2C"/>
+            </a:solidFill>
+            <a:prstDash val="solid"/>
+          </a:ln>
         </p:spPr>
         <p:txBody>
           <a:bodyPr/>
@@ -3927,9 +3957,14 @@
             <a:avLst/>
           </a:prstGeom>
           <a:solidFill>
-            <a:srgbClr val="F7F7F7"/>
+            <a:srgbClr val="FFFFFF"/>
           </a:solidFill>
-          <a:ln/>
+          <a:ln w="12700">
+            <a:solidFill>
+              <a:srgbClr val="CF0C2C"/>
+            </a:solidFill>
+            <a:prstDash val="solid"/>
+          </a:ln>
         </p:spPr>
         <p:txBody>
           <a:bodyPr/>
@@ -4234,7 +4269,7 @@
     <p:bg>
       <p:bgPr>
         <a:solidFill>
-          <a:srgbClr val="F7F7F7"/>
+          <a:srgbClr val="FFFFFF"/>
         </a:solidFill>
         <a:effectLst/>
       </p:bgPr>
@@ -4255,6 +4290,38 @@
       </p:grpSpPr>
       <p:sp>
         <p:nvSpPr>
+          <p:cNvPr id="500" name="Decorative Circle"/>
+          <p:cNvSpPr/>
+          <p:nvPr/>
+        </p:nvSpPr>
+        <p:spPr>
+          <a:xfrm>
+            <a:off x="-900000" y="-900000"/>
+            <a:ext cx="3000000" cy="3000000"/>
+          </a:xfrm>
+          <a:prstGeom prst="ellipse">
+            <a:avLst/>
+          </a:prstGeom>
+          <a:solidFill>
+            <a:srgbClr val="FFFFFF"/>
+          </a:solidFill>
+          <a:ln w="9525">
+            <a:solidFill>
+              <a:srgbClr val="CF0C2C"/>
+            </a:solidFill>
+            <a:prstDash val="solid"/>
+          </a:ln>
+        </p:spPr>
+        <p:txBody>
+          <a:bodyPr/>
+          <a:lstStyle/>
+          <a:p>
+            <a:endParaRPr lang="en-US" dirty="0"/>
+          </a:p>
+        </p:txBody>
+      </p:sp>
+      <p:sp>
+        <p:nvSpPr>
           <p:cNvPr id="2" name="Text 0"/>
           <p:cNvSpPr/>
           <p:nvPr/>
@@ -4347,9 +4414,14 @@
               <a:gd name="adj" fmla="val 8000"/>
             </a:avLst>
           </a:prstGeom>
-          <a:noFill/>
-          <a:ln>
-            <a:noFill/>
+          <a:solidFill>
+            <a:srgbClr val="CF0C2C"/>
+          </a:solidFill>
+          <a:ln w="12700">
+            <a:solidFill>
+              <a:srgbClr val="CF0C2C"/>
+            </a:solidFill>
+            <a:prstDash val="solid"/>
           </a:ln>
         </p:spPr>
         <p:txBody>
@@ -4457,7 +4529,7 @@
     <p:bg>
       <p:bgPr>
         <a:solidFill>
-          <a:srgbClr val="F7F7F7"/>
+          <a:srgbClr val="FFFFFF"/>
         </a:solidFill>
         <a:effectLst/>
       </p:bgPr>
@@ -5675,7 +5747,7 @@
     <p:bg>
       <p:bgPr>
         <a:solidFill>
-          <a:srgbClr val="F7F7F7"/>
+          <a:srgbClr val="FFFFFF"/>
         </a:solidFill>
         <a:effectLst/>
       </p:bgPr>
@@ -5696,6 +5768,38 @@
       </p:grpSpPr>
       <p:sp>
         <p:nvSpPr>
+          <p:cNvPr id="500" name="Decorative Circle"/>
+          <p:cNvSpPr/>
+          <p:nvPr/>
+        </p:nvSpPr>
+        <p:spPr>
+          <a:xfrm>
+            <a:off x="10500000" y="5400000"/>
+            <a:ext cx="3200000" cy="3200000"/>
+          </a:xfrm>
+          <a:prstGeom prst="ellipse">
+            <a:avLst/>
+          </a:prstGeom>
+          <a:solidFill>
+            <a:srgbClr val="FFFFFF"/>
+          </a:solidFill>
+          <a:ln w="9525">
+            <a:solidFill>
+              <a:srgbClr val="CF0C2C"/>
+            </a:solidFill>
+            <a:prstDash val="solid"/>
+          </a:ln>
+        </p:spPr>
+        <p:txBody>
+          <a:bodyPr/>
+          <a:lstStyle/>
+          <a:p>
+            <a:endParaRPr lang="en-US" dirty="0"/>
+          </a:p>
+        </p:txBody>
+      </p:sp>
+      <p:sp>
+        <p:nvSpPr>
           <p:cNvPr id="2" name="Shape 0"/>
           <p:cNvSpPr/>
           <p:nvPr/>
@@ -5710,9 +5814,14 @@
               <a:gd name="adj" fmla="val 8000"/>
             </a:avLst>
           </a:prstGeom>
-          <a:noFill/>
-          <a:ln>
-            <a:noFill/>
+          <a:solidFill>
+            <a:srgbClr val="CF0C2C"/>
+          </a:solidFill>
+          <a:ln w="12700">
+            <a:solidFill>
+              <a:srgbClr val="CF0C2C"/>
+            </a:solidFill>
+            <a:prstDash val="solid"/>
           </a:ln>
         </p:spPr>
         <p:txBody>
@@ -6543,7 +6652,7 @@
     <p:bg>
       <p:bgPr>
         <a:solidFill>
-          <a:srgbClr val="F7F7F7"/>
+          <a:srgbClr val="FFFFFF"/>
         </a:solidFill>
         <a:effectLst/>
       </p:bgPr>
@@ -6578,9 +6687,14 @@
               <a:gd name="adj" fmla="val 8000"/>
             </a:avLst>
           </a:prstGeom>
-          <a:noFill/>
-          <a:ln>
-            <a:noFill/>
+          <a:solidFill>
+            <a:srgbClr val="CF0C2C"/>
+          </a:solidFill>
+          <a:ln w="12700">
+            <a:solidFill>
+              <a:srgbClr val="CF0C2C"/>
+            </a:solidFill>
+            <a:prstDash val="solid"/>
           </a:ln>
         </p:spPr>
         <p:txBody>
@@ -7026,7 +7140,7 @@
     <p:bg>
       <p:bgPr>
         <a:solidFill>
-          <a:srgbClr val="F7F7F7"/>
+          <a:srgbClr val="FFFFFF"/>
         </a:solidFill>
         <a:effectLst/>
       </p:bgPr>
@@ -7061,9 +7175,14 @@
               <a:gd name="adj" fmla="val 8000"/>
             </a:avLst>
           </a:prstGeom>
-          <a:noFill/>
-          <a:ln>
-            <a:noFill/>
+          <a:solidFill>
+            <a:srgbClr val="CF0C2C"/>
+          </a:solidFill>
+          <a:ln w="12700">
+            <a:solidFill>
+              <a:srgbClr val="CF0C2C"/>
+            </a:solidFill>
+            <a:prstDash val="solid"/>
           </a:ln>
         </p:spPr>
         <p:txBody>
@@ -7499,7 +7618,7 @@
     <p:bg>
       <p:bgPr>
         <a:solidFill>
-          <a:srgbClr val="F7F7F7"/>
+          <a:srgbClr val="FFFFFF"/>
         </a:solidFill>
         <a:effectLst/>
       </p:bgPr>
@@ -7590,7 +7709,7 @@
                 <a:ea typeface="Calibri" pitchFamily="34" charset="-122"/>
                 <a:cs typeface="Calibri" pitchFamily="34" charset="-120"/>
               </a:rPr>
-              <a:t>Map every field that needs to come over in the migration.</a:t>
+              <a:t>What still needs work — cmr_num, Item, Priority, and Initial Change are already on the form.</a:t>
             </a:r>
             <a:endParaRPr lang="en-US" sz="1600" dirty="0"/>
           </a:p>
@@ -7612,9 +7731,14 @@
               <a:gd name="adj" fmla="val 8000"/>
             </a:avLst>
           </a:prstGeom>
-          <a:noFill/>
-          <a:ln>
-            <a:noFill/>
+          <a:solidFill>
+            <a:srgbClr val="CF0C2C"/>
+          </a:solidFill>
+          <a:ln w="12700">
+            <a:solidFill>
+              <a:srgbClr val="CF0C2C"/>
+            </a:solidFill>
+            <a:prstDash val="solid"/>
           </a:ln>
         </p:spPr>
         <p:txBody>
@@ -7719,7 +7843,7 @@
       </p:sp>
       <p:sp>
         <p:nvSpPr>
-          <p:cNvPr id="100" name="Header Field 0"/>
+          <p:cNvPr id="200" name="Header Field 0"/>
           <p:cNvSpPr/>
           <p:nvPr/>
         </p:nvSpPr>
@@ -7758,7 +7882,7 @@
       </p:sp>
       <p:sp>
         <p:nvSpPr>
-          <p:cNvPr id="101" name="Header What 0"/>
+          <p:cNvPr id="201" name="Header What 0"/>
           <p:cNvSpPr/>
           <p:nvPr/>
         </p:nvSpPr>
@@ -7797,7 +7921,7 @@
       </p:sp>
       <p:sp>
         <p:nvSpPr>
-          <p:cNvPr id="102" name="HeaderDivider 0"/>
+          <p:cNvPr id="202" name="HeaderDivider 0"/>
           <p:cNvSpPr/>
           <p:nvPr/>
         </p:nvSpPr>
@@ -7827,7 +7951,7 @@
       </p:sp>
       <p:sp>
         <p:nvSpPr>
-          <p:cNvPr id="103" name="Header Field 1"/>
+          <p:cNvPr id="203" name="Header Field 1"/>
           <p:cNvSpPr/>
           <p:nvPr/>
         </p:nvSpPr>
@@ -7866,7 +7990,7 @@
       </p:sp>
       <p:sp>
         <p:nvSpPr>
-          <p:cNvPr id="104" name="Header What 1"/>
+          <p:cNvPr id="204" name="Header What 1"/>
           <p:cNvSpPr/>
           <p:nvPr/>
         </p:nvSpPr>
@@ -7905,7 +8029,7 @@
       </p:sp>
       <p:sp>
         <p:nvSpPr>
-          <p:cNvPr id="105" name="HeaderDivider 1"/>
+          <p:cNvPr id="205" name="HeaderDivider 1"/>
           <p:cNvSpPr/>
           <p:nvPr/>
         </p:nvSpPr>
@@ -7935,14 +8059,14 @@
       </p:sp>
       <p:sp>
         <p:nvSpPr>
-          <p:cNvPr id="106" name="Field 0 cmr_num"/>
+          <p:cNvPr id="206" name="Field 0 dept"/>
           <p:cNvSpPr/>
           <p:nvPr/>
         </p:nvSpPr>
         <p:spPr>
           <a:xfrm>
             <a:off x="822960" y="3286080"/>
-            <a:ext cx="1450000" cy="320000"/>
+            <a:ext cx="1450000" cy="420000"/>
           </a:xfrm>
           <a:prstGeom prst="rect">
             <a:avLst/>
@@ -7966,7 +8090,7 @@
                 <a:ea typeface="Calibri" pitchFamily="34" charset="-122"/>
                 <a:cs typeface="Calibri" pitchFamily="34" charset="-120"/>
               </a:rPr>
-              <a:t>cmr_num</a:t>
+              <a:t>dept</a:t>
             </a:r>
             <a:endParaRPr lang="en-US" sz="1100" dirty="0"/>
           </a:p>
@@ -7974,14 +8098,14 @@
       </p:sp>
       <p:sp>
         <p:nvSpPr>
-          <p:cNvPr id="107" name="Desc 0 cmr_num"/>
+          <p:cNvPr id="207" name="Desc 0 dept"/>
           <p:cNvSpPr/>
           <p:nvPr/>
         </p:nvSpPr>
         <p:spPr>
           <a:xfrm>
             <a:off x="2372960" y="3286080"/>
-            <a:ext cx="3400000" cy="320000"/>
+            <a:ext cx="3400000" cy="420000"/>
           </a:xfrm>
           <a:prstGeom prst="rect">
             <a:avLst/>
@@ -8005,7 +8129,7 @@
                 <a:ea typeface="Calibri" pitchFamily="34" charset="-122"/>
                 <a:cs typeface="Calibri" pitchFamily="34" charset="-120"/>
               </a:rPr>
-              <a:t>Key field, auto-numbers in the IDO properties every CMR</a:t>
+              <a:t>Dept combo, SLDepts list source</a:t>
             </a:r>
             <a:endParaRPr lang="en-US" sz="1100" dirty="0"/>
           </a:p>
@@ -8013,13 +8137,13 @@
       </p:sp>
       <p:sp>
         <p:nvSpPr>
-          <p:cNvPr id="108" name="Divider 0 cmr_num"/>
-          <p:cNvSpPr/>
-          <p:nvPr/>
-        </p:nvSpPr>
-        <p:spPr>
-          <a:xfrm>
-            <a:off x="822960" y="3606080"/>
+          <p:cNvPr id="208" name="Divider 0 dept"/>
+          <p:cNvSpPr/>
+          <p:nvPr/>
+        </p:nvSpPr>
+        <p:spPr>
+          <a:xfrm>
+            <a:off x="822960" y="3706080"/>
             <a:ext cx="4950000" cy="0"/>
           </a:xfrm>
           <a:prstGeom prst="line">
@@ -8043,14 +8167,14 @@
       </p:sp>
       <p:sp>
         <p:nvSpPr>
-          <p:cNvPr id="109" name="Field 0 item"/>
-          <p:cNvSpPr/>
-          <p:nvPr/>
-        </p:nvSpPr>
-        <p:spPr>
-          <a:xfrm>
-            <a:off x="822960" y="3606080"/>
-            <a:ext cx="1450000" cy="320000"/>
+          <p:cNvPr id="209" name="Field 0 dept_description"/>
+          <p:cNvSpPr/>
+          <p:nvPr/>
+        </p:nvSpPr>
+        <p:spPr>
+          <a:xfrm>
+            <a:off x="822960" y="3706080"/>
+            <a:ext cx="1450000" cy="420000"/>
           </a:xfrm>
           <a:prstGeom prst="rect">
             <a:avLst/>
@@ -8074,7 +8198,7 @@
                 <a:ea typeface="Calibri" pitchFamily="34" charset="-122"/>
                 <a:cs typeface="Calibri" pitchFamily="34" charset="-120"/>
               </a:rPr>
-              <a:t>item</a:t>
+              <a:t>dept_description</a:t>
             </a:r>
             <a:endParaRPr lang="en-US" sz="1100" dirty="0"/>
           </a:p>
@@ -8082,14 +8206,14 @@
       </p:sp>
       <p:sp>
         <p:nvSpPr>
-          <p:cNvPr id="110" name="Desc 0 item"/>
-          <p:cNvSpPr/>
-          <p:nvPr/>
-        </p:nvSpPr>
-        <p:spPr>
-          <a:xfrm>
-            <a:off x="2372960" y="3606080"/>
-            <a:ext cx="3400000" cy="320000"/>
+          <p:cNvPr id="210" name="Desc 0 dept_description"/>
+          <p:cNvSpPr/>
+          <p:nvPr/>
+        </p:nvSpPr>
+        <p:spPr>
+          <a:xfrm>
+            <a:off x="2372960" y="3706080"/>
+            <a:ext cx="3400000" cy="420000"/>
           </a:xfrm>
           <a:prstGeom prst="rect">
             <a:avLst/>
@@ -8113,7 +8237,7 @@
                 <a:ea typeface="Calibri" pitchFamily="34" charset="-122"/>
                 <a:cs typeface="Calibri" pitchFamily="34" charset="-120"/>
               </a:rPr>
-              <a:t>Item combo, SLItems list source</a:t>
+              <a:t>Read-only, auto-fills via DefaultFrom</a:t>
             </a:r>
             <a:endParaRPr lang="en-US" sz="1100" dirty="0"/>
           </a:p>
@@ -8121,13 +8245,13 @@
       </p:sp>
       <p:sp>
         <p:nvSpPr>
-          <p:cNvPr id="111" name="Divider 0 item"/>
-          <p:cNvSpPr/>
-          <p:nvPr/>
-        </p:nvSpPr>
-        <p:spPr>
-          <a:xfrm>
-            <a:off x="822960" y="3926080"/>
+          <p:cNvPr id="211" name="Divider 0 dept_description"/>
+          <p:cNvSpPr/>
+          <p:nvPr/>
+        </p:nvSpPr>
+        <p:spPr>
+          <a:xfrm>
+            <a:off x="822960" y="4126080"/>
             <a:ext cx="4950000" cy="0"/>
           </a:xfrm>
           <a:prstGeom prst="line">
@@ -8151,14 +8275,14 @@
       </p:sp>
       <p:sp>
         <p:nvSpPr>
-          <p:cNvPr id="112" name="Field 0 item_description"/>
-          <p:cNvSpPr/>
-          <p:nvPr/>
-        </p:nvSpPr>
-        <p:spPr>
-          <a:xfrm>
-            <a:off x="822960" y="3926080"/>
-            <a:ext cx="1450000" cy="320000"/>
+          <p:cNvPr id="212" name="Field 0 wc"/>
+          <p:cNvSpPr/>
+          <p:nvPr/>
+        </p:nvSpPr>
+        <p:spPr>
+          <a:xfrm>
+            <a:off x="822960" y="4126080"/>
+            <a:ext cx="1450000" cy="420000"/>
           </a:xfrm>
           <a:prstGeom prst="rect">
             <a:avLst/>
@@ -8182,7 +8306,7 @@
                 <a:ea typeface="Calibri" pitchFamily="34" charset="-122"/>
                 <a:cs typeface="Calibri" pitchFamily="34" charset="-120"/>
               </a:rPr>
-              <a:t>item_description</a:t>
+              <a:t>wc</a:t>
             </a:r>
             <a:endParaRPr lang="en-US" sz="1100" dirty="0"/>
           </a:p>
@@ -8190,14 +8314,14 @@
       </p:sp>
       <p:sp>
         <p:nvSpPr>
-          <p:cNvPr id="113" name="Desc 0 item_description"/>
-          <p:cNvSpPr/>
-          <p:nvPr/>
-        </p:nvSpPr>
-        <p:spPr>
-          <a:xfrm>
-            <a:off x="2372960" y="3926080"/>
-            <a:ext cx="3400000" cy="320000"/>
+          <p:cNvPr id="213" name="Desc 0 wc"/>
+          <p:cNvSpPr/>
+          <p:nvPr/>
+        </p:nvSpPr>
+        <p:spPr>
+          <a:xfrm>
+            <a:off x="2372960" y="4126080"/>
+            <a:ext cx="3400000" cy="420000"/>
           </a:xfrm>
           <a:prstGeom prst="rect">
             <a:avLst/>
@@ -8221,7 +8345,7 @@
                 <a:ea typeface="Calibri" pitchFamily="34" charset="-122"/>
                 <a:cs typeface="Calibri" pitchFamily="34" charset="-120"/>
               </a:rPr>
-              <a:t>Read-only, auto-fills via DefaultFrom</a:t>
+              <a:t>Work Center combo, SLWcs list source</a:t>
             </a:r>
             <a:endParaRPr lang="en-US" sz="1100" dirty="0"/>
           </a:p>
@@ -8229,13 +8353,13 @@
       </p:sp>
       <p:sp>
         <p:nvSpPr>
-          <p:cNvPr id="114" name="Divider 0 item_description"/>
-          <p:cNvSpPr/>
-          <p:nvPr/>
-        </p:nvSpPr>
-        <p:spPr>
-          <a:xfrm>
-            <a:off x="822960" y="4246080"/>
+          <p:cNvPr id="214" name="Divider 0 wc"/>
+          <p:cNvSpPr/>
+          <p:nvPr/>
+        </p:nvSpPr>
+        <p:spPr>
+          <a:xfrm>
+            <a:off x="822960" y="4546080"/>
             <a:ext cx="4950000" cy="0"/>
           </a:xfrm>
           <a:prstGeom prst="line">
@@ -8259,14 +8383,14 @@
       </p:sp>
       <p:sp>
         <p:nvSpPr>
-          <p:cNvPr id="115" name="Field 0 dept"/>
-          <p:cNvSpPr/>
-          <p:nvPr/>
-        </p:nvSpPr>
-        <p:spPr>
-          <a:xfrm>
-            <a:off x="822960" y="4246080"/>
-            <a:ext cx="1450000" cy="320000"/>
+          <p:cNvPr id="215" name="Field 0 wc_description"/>
+          <p:cNvSpPr/>
+          <p:nvPr/>
+        </p:nvSpPr>
+        <p:spPr>
+          <a:xfrm>
+            <a:off x="822960" y="4546080"/>
+            <a:ext cx="1450000" cy="420000"/>
           </a:xfrm>
           <a:prstGeom prst="rect">
             <a:avLst/>
@@ -8290,7 +8414,7 @@
                 <a:ea typeface="Calibri" pitchFamily="34" charset="-122"/>
                 <a:cs typeface="Calibri" pitchFamily="34" charset="-120"/>
               </a:rPr>
-              <a:t>dept</a:t>
+              <a:t>wc_description</a:t>
             </a:r>
             <a:endParaRPr lang="en-US" sz="1100" dirty="0"/>
           </a:p>
@@ -8298,14 +8422,14 @@
       </p:sp>
       <p:sp>
         <p:nvSpPr>
-          <p:cNvPr id="116" name="Desc 0 dept"/>
-          <p:cNvSpPr/>
-          <p:nvPr/>
-        </p:nvSpPr>
-        <p:spPr>
-          <a:xfrm>
-            <a:off x="2372960" y="4246080"/>
-            <a:ext cx="3400000" cy="320000"/>
+          <p:cNvPr id="216" name="Desc 0 wc_description"/>
+          <p:cNvSpPr/>
+          <p:nvPr/>
+        </p:nvSpPr>
+        <p:spPr>
+          <a:xfrm>
+            <a:off x="2372960" y="4546080"/>
+            <a:ext cx="3400000" cy="420000"/>
           </a:xfrm>
           <a:prstGeom prst="rect">
             <a:avLst/>
@@ -8329,7 +8453,7 @@
                 <a:ea typeface="Calibri" pitchFamily="34" charset="-122"/>
                 <a:cs typeface="Calibri" pitchFamily="34" charset="-120"/>
               </a:rPr>
-              <a:t>Dept combo, SLDepts list source</a:t>
+              <a:t>Read-only, auto-fills via DefaultFrom</a:t>
             </a:r>
             <a:endParaRPr lang="en-US" sz="1100" dirty="0"/>
           </a:p>
@@ -8337,13 +8461,13 @@
       </p:sp>
       <p:sp>
         <p:nvSpPr>
-          <p:cNvPr id="117" name="Divider 0 dept"/>
-          <p:cNvSpPr/>
-          <p:nvPr/>
-        </p:nvSpPr>
-        <p:spPr>
-          <a:xfrm>
-            <a:off x="822960" y="4566080"/>
+          <p:cNvPr id="217" name="Divider 0 wc_description"/>
+          <p:cNvSpPr/>
+          <p:nvPr/>
+        </p:nvSpPr>
+        <p:spPr>
+          <a:xfrm>
+            <a:off x="822960" y="4966080"/>
             <a:ext cx="4950000" cy="0"/>
           </a:xfrm>
           <a:prstGeom prst="line">
@@ -8367,14 +8491,14 @@
       </p:sp>
       <p:sp>
         <p:nvSpPr>
-          <p:cNvPr id="118" name="Field 0 dept_description"/>
-          <p:cNvSpPr/>
-          <p:nvPr/>
-        </p:nvSpPr>
-        <p:spPr>
-          <a:xfrm>
-            <a:off x="822960" y="4566080"/>
-            <a:ext cx="1450000" cy="320000"/>
+          <p:cNvPr id="218" name="Field 0 req_costing"/>
+          <p:cNvSpPr/>
+          <p:nvPr/>
+        </p:nvSpPr>
+        <p:spPr>
+          <a:xfrm>
+            <a:off x="822960" y="4966080"/>
+            <a:ext cx="1450000" cy="420000"/>
           </a:xfrm>
           <a:prstGeom prst="rect">
             <a:avLst/>
@@ -8398,7 +8522,7 @@
                 <a:ea typeface="Calibri" pitchFamily="34" charset="-122"/>
                 <a:cs typeface="Calibri" pitchFamily="34" charset="-120"/>
               </a:rPr>
-              <a:t>dept_description</a:t>
+              <a:t>req_costing</a:t>
             </a:r>
             <a:endParaRPr lang="en-US" sz="1100" dirty="0"/>
           </a:p>
@@ -8406,14 +8530,14 @@
       </p:sp>
       <p:sp>
         <p:nvSpPr>
-          <p:cNvPr id="119" name="Desc 0 dept_description"/>
-          <p:cNvSpPr/>
-          <p:nvPr/>
-        </p:nvSpPr>
-        <p:spPr>
-          <a:xfrm>
-            <a:off x="2372960" y="4566080"/>
-            <a:ext cx="3400000" cy="320000"/>
+          <p:cNvPr id="219" name="Desc 0 req_costing"/>
+          <p:cNvSpPr/>
+          <p:nvPr/>
+        </p:nvSpPr>
+        <p:spPr>
+          <a:xfrm>
+            <a:off x="2372960" y="4966080"/>
+            <a:ext cx="3400000" cy="420000"/>
           </a:xfrm>
           <a:prstGeom prst="rect">
             <a:avLst/>
@@ -8437,7 +8561,7 @@
                 <a:ea typeface="Calibri" pitchFamily="34" charset="-122"/>
                 <a:cs typeface="Calibri" pitchFamily="34" charset="-120"/>
               </a:rPr>
-              <a:t>Read-only, auto-fills via DefaultFrom</a:t>
+              <a:t>Requirement checkbox: Costing</a:t>
             </a:r>
             <a:endParaRPr lang="en-US" sz="1100" dirty="0"/>
           </a:p>
@@ -8445,13 +8569,13 @@
       </p:sp>
       <p:sp>
         <p:nvSpPr>
-          <p:cNvPr id="120" name="Divider 0 dept_description"/>
-          <p:cNvSpPr/>
-          <p:nvPr/>
-        </p:nvSpPr>
-        <p:spPr>
-          <a:xfrm>
-            <a:off x="822960" y="4886080"/>
+          <p:cNvPr id="220" name="Divider 0 req_costing"/>
+          <p:cNvSpPr/>
+          <p:nvPr/>
+        </p:nvSpPr>
+        <p:spPr>
+          <a:xfrm>
+            <a:off x="822960" y="5386080"/>
             <a:ext cx="4950000" cy="0"/>
           </a:xfrm>
           <a:prstGeom prst="line">
@@ -8475,14 +8599,14 @@
       </p:sp>
       <p:sp>
         <p:nvSpPr>
-          <p:cNvPr id="121" name="Field 0 wc"/>
-          <p:cNvSpPr/>
-          <p:nvPr/>
-        </p:nvSpPr>
-        <p:spPr>
-          <a:xfrm>
-            <a:off x="822960" y="4886080"/>
-            <a:ext cx="1450000" cy="320000"/>
+          <p:cNvPr id="221" name="Field 0 req_documentation"/>
+          <p:cNvSpPr/>
+          <p:nvPr/>
+        </p:nvSpPr>
+        <p:spPr>
+          <a:xfrm>
+            <a:off x="822960" y="5386080"/>
+            <a:ext cx="1450000" cy="420000"/>
           </a:xfrm>
           <a:prstGeom prst="rect">
             <a:avLst/>
@@ -8506,7 +8630,7 @@
                 <a:ea typeface="Calibri" pitchFamily="34" charset="-122"/>
                 <a:cs typeface="Calibri" pitchFamily="34" charset="-120"/>
               </a:rPr>
-              <a:t>wc</a:t>
+              <a:t>req_documentation</a:t>
             </a:r>
             <a:endParaRPr lang="en-US" sz="1100" dirty="0"/>
           </a:p>
@@ -8514,14 +8638,14 @@
       </p:sp>
       <p:sp>
         <p:nvSpPr>
-          <p:cNvPr id="122" name="Desc 0 wc"/>
-          <p:cNvSpPr/>
-          <p:nvPr/>
-        </p:nvSpPr>
-        <p:spPr>
-          <a:xfrm>
-            <a:off x="2372960" y="4886080"/>
-            <a:ext cx="3400000" cy="320000"/>
+          <p:cNvPr id="222" name="Desc 0 req_documentation"/>
+          <p:cNvSpPr/>
+          <p:nvPr/>
+        </p:nvSpPr>
+        <p:spPr>
+          <a:xfrm>
+            <a:off x="2372960" y="5386080"/>
+            <a:ext cx="3400000" cy="420000"/>
           </a:xfrm>
           <a:prstGeom prst="rect">
             <a:avLst/>
@@ -8545,7 +8669,7 @@
                 <a:ea typeface="Calibri" pitchFamily="34" charset="-122"/>
                 <a:cs typeface="Calibri" pitchFamily="34" charset="-120"/>
               </a:rPr>
-              <a:t>Work Center combo, SLWcs list source</a:t>
+              <a:t>Requirement checkbox: Documentation</a:t>
             </a:r>
             <a:endParaRPr lang="en-US" sz="1100" dirty="0"/>
           </a:p>
@@ -8553,13 +8677,13 @@
       </p:sp>
       <p:sp>
         <p:nvSpPr>
-          <p:cNvPr id="123" name="Divider 0 wc"/>
-          <p:cNvSpPr/>
-          <p:nvPr/>
-        </p:nvSpPr>
-        <p:spPr>
-          <a:xfrm>
-            <a:off x="822960" y="5206080"/>
+          <p:cNvPr id="223" name="Divider 0 req_documentation"/>
+          <p:cNvSpPr/>
+          <p:nvPr/>
+        </p:nvSpPr>
+        <p:spPr>
+          <a:xfrm>
+            <a:off x="822960" y="5806080"/>
             <a:ext cx="4950000" cy="0"/>
           </a:xfrm>
           <a:prstGeom prst="line">
@@ -8583,14 +8707,14 @@
       </p:sp>
       <p:sp>
         <p:nvSpPr>
-          <p:cNvPr id="124" name="Field 0 wc_description"/>
-          <p:cNvSpPr/>
-          <p:nvPr/>
-        </p:nvSpPr>
-        <p:spPr>
-          <a:xfrm>
-            <a:off x="822960" y="5206080"/>
-            <a:ext cx="1450000" cy="320000"/>
+          <p:cNvPr id="224" name="Field 0 req_material"/>
+          <p:cNvSpPr/>
+          <p:nvPr/>
+        </p:nvSpPr>
+        <p:spPr>
+          <a:xfrm>
+            <a:off x="822960" y="5806080"/>
+            <a:ext cx="1450000" cy="420000"/>
           </a:xfrm>
           <a:prstGeom prst="rect">
             <a:avLst/>
@@ -8614,7 +8738,7 @@
                 <a:ea typeface="Calibri" pitchFamily="34" charset="-122"/>
                 <a:cs typeface="Calibri" pitchFamily="34" charset="-120"/>
               </a:rPr>
-              <a:t>wc_description</a:t>
+              <a:t>req_material</a:t>
             </a:r>
             <a:endParaRPr lang="en-US" sz="1100" dirty="0"/>
           </a:p>
@@ -8622,14 +8746,14 @@
       </p:sp>
       <p:sp>
         <p:nvSpPr>
-          <p:cNvPr id="125" name="Desc 0 wc_description"/>
-          <p:cNvSpPr/>
-          <p:nvPr/>
-        </p:nvSpPr>
-        <p:spPr>
-          <a:xfrm>
-            <a:off x="2372960" y="5206080"/>
-            <a:ext cx="3400000" cy="320000"/>
+          <p:cNvPr id="225" name="Desc 0 req_material"/>
+          <p:cNvSpPr/>
+          <p:nvPr/>
+        </p:nvSpPr>
+        <p:spPr>
+          <a:xfrm>
+            <a:off x="2372960" y="5806080"/>
+            <a:ext cx="3400000" cy="420000"/>
           </a:xfrm>
           <a:prstGeom prst="rect">
             <a:avLst/>
@@ -8653,7 +8777,7 @@
                 <a:ea typeface="Calibri" pitchFamily="34" charset="-122"/>
                 <a:cs typeface="Calibri" pitchFamily="34" charset="-120"/>
               </a:rPr>
-              <a:t>Read-only, auto-fills via DefaultFrom</a:t>
+              <a:t>Requirement checkbox: Material</a:t>
             </a:r>
             <a:endParaRPr lang="en-US" sz="1100" dirty="0"/>
           </a:p>
@@ -8661,13 +8785,13 @@
       </p:sp>
       <p:sp>
         <p:nvSpPr>
-          <p:cNvPr id="126" name="Divider 0 wc_description"/>
-          <p:cNvSpPr/>
-          <p:nvPr/>
-        </p:nvSpPr>
-        <p:spPr>
-          <a:xfrm>
-            <a:off x="822960" y="5526080"/>
+          <p:cNvPr id="226" name="Divider 0 req_material"/>
+          <p:cNvSpPr/>
+          <p:nvPr/>
+        </p:nvSpPr>
+        <p:spPr>
+          <a:xfrm>
+            <a:off x="822960" y="6226080"/>
             <a:ext cx="4950000" cy="0"/>
           </a:xfrm>
           <a:prstGeom prst="line">
@@ -8691,14 +8815,14 @@
       </p:sp>
       <p:sp>
         <p:nvSpPr>
-          <p:cNvPr id="127" name="Field 0 initial_change"/>
-          <p:cNvSpPr/>
-          <p:nvPr/>
-        </p:nvSpPr>
-        <p:spPr>
-          <a:xfrm>
-            <a:off x="822960" y="5526080"/>
-            <a:ext cx="1450000" cy="320000"/>
+          <p:cNvPr id="227" name="Field 1 req_process"/>
+          <p:cNvSpPr/>
+          <p:nvPr/>
+        </p:nvSpPr>
+        <p:spPr>
+          <a:xfrm>
+            <a:off x="6172960" y="3286080"/>
+            <a:ext cx="1450000" cy="420000"/>
           </a:xfrm>
           <a:prstGeom prst="rect">
             <a:avLst/>
@@ -8722,7 +8846,7 @@
                 <a:ea typeface="Calibri" pitchFamily="34" charset="-122"/>
                 <a:cs typeface="Calibri" pitchFamily="34" charset="-120"/>
               </a:rPr>
-              <a:t>initial_change</a:t>
+              <a:t>req_process</a:t>
             </a:r>
             <a:endParaRPr lang="en-US" sz="1100" dirty="0"/>
           </a:p>
@@ -8730,14 +8854,14 @@
       </p:sp>
       <p:sp>
         <p:nvSpPr>
-          <p:cNvPr id="128" name="Desc 0 initial_change"/>
-          <p:cNvSpPr/>
-          <p:nvPr/>
-        </p:nvSpPr>
-        <p:spPr>
-          <a:xfrm>
-            <a:off x="2372960" y="5526080"/>
-            <a:ext cx="3400000" cy="320000"/>
+          <p:cNvPr id="228" name="Desc 1 req_process"/>
+          <p:cNvSpPr/>
+          <p:nvPr/>
+        </p:nvSpPr>
+        <p:spPr>
+          <a:xfrm>
+            <a:off x="7722960" y="3286080"/>
+            <a:ext cx="3400000" cy="420000"/>
           </a:xfrm>
           <a:prstGeom prst="rect">
             <a:avLst/>
@@ -8761,7 +8885,7 @@
                 <a:ea typeface="Calibri" pitchFamily="34" charset="-122"/>
                 <a:cs typeface="Calibri" pitchFamily="34" charset="-120"/>
               </a:rPr>
-              <a:t>Drives the Requirements checkbox cascade</a:t>
+              <a:t>Requirement checkbox: Process</a:t>
             </a:r>
             <a:endParaRPr lang="en-US" sz="1100" dirty="0"/>
           </a:p>
@@ -8769,13 +8893,13 @@
       </p:sp>
       <p:sp>
         <p:nvSpPr>
-          <p:cNvPr id="129" name="Divider 0 initial_change"/>
-          <p:cNvSpPr/>
-          <p:nvPr/>
-        </p:nvSpPr>
-        <p:spPr>
-          <a:xfrm>
-            <a:off x="822960" y="5846080"/>
+          <p:cNvPr id="229" name="Divider 1 req_process"/>
+          <p:cNvSpPr/>
+          <p:nvPr/>
+        </p:nvSpPr>
+        <p:spPr>
+          <a:xfrm>
+            <a:off x="6172960" y="3706080"/>
             <a:ext cx="4950000" cy="0"/>
           </a:xfrm>
           <a:prstGeom prst="line">
@@ -8799,14 +8923,14 @@
       </p:sp>
       <p:sp>
         <p:nvSpPr>
-          <p:cNvPr id="130" name="Field 0 req_costing"/>
-          <p:cNvSpPr/>
-          <p:nvPr/>
-        </p:nvSpPr>
-        <p:spPr>
-          <a:xfrm>
-            <a:off x="822960" y="5846080"/>
-            <a:ext cx="1450000" cy="320000"/>
+          <p:cNvPr id="230" name="Field 1 req_tool_machine"/>
+          <p:cNvSpPr/>
+          <p:nvPr/>
+        </p:nvSpPr>
+        <p:spPr>
+          <a:xfrm>
+            <a:off x="6172960" y="3706080"/>
+            <a:ext cx="1450000" cy="420000"/>
           </a:xfrm>
           <a:prstGeom prst="rect">
             <a:avLst/>
@@ -8830,7 +8954,7 @@
                 <a:ea typeface="Calibri" pitchFamily="34" charset="-122"/>
                 <a:cs typeface="Calibri" pitchFamily="34" charset="-120"/>
               </a:rPr>
-              <a:t>req_costing</a:t>
+              <a:t>req_tool_machine</a:t>
             </a:r>
             <a:endParaRPr lang="en-US" sz="1100" dirty="0"/>
           </a:p>
@@ -8838,14 +8962,14 @@
       </p:sp>
       <p:sp>
         <p:nvSpPr>
-          <p:cNvPr id="131" name="Desc 0 req_costing"/>
-          <p:cNvSpPr/>
-          <p:nvPr/>
-        </p:nvSpPr>
-        <p:spPr>
-          <a:xfrm>
-            <a:off x="2372960" y="5846080"/>
-            <a:ext cx="3400000" cy="320000"/>
+          <p:cNvPr id="231" name="Desc 1 req_tool_machine"/>
+          <p:cNvSpPr/>
+          <p:nvPr/>
+        </p:nvSpPr>
+        <p:spPr>
+          <a:xfrm>
+            <a:off x="7722960" y="3706080"/>
+            <a:ext cx="3400000" cy="420000"/>
           </a:xfrm>
           <a:prstGeom prst="rect">
             <a:avLst/>
@@ -8869,7 +8993,7 @@
                 <a:ea typeface="Calibri" pitchFamily="34" charset="-122"/>
                 <a:cs typeface="Calibri" pitchFamily="34" charset="-120"/>
               </a:rPr>
-              <a:t>Requirement checkbox: Costing</a:t>
+              <a:t>Requirement checkbox: Tool/Machine</a:t>
             </a:r>
             <a:endParaRPr lang="en-US" sz="1100" dirty="0"/>
           </a:p>
@@ -8877,13 +9001,13 @@
       </p:sp>
       <p:sp>
         <p:nvSpPr>
-          <p:cNvPr id="132" name="Divider 0 req_costing"/>
-          <p:cNvSpPr/>
-          <p:nvPr/>
-        </p:nvSpPr>
-        <p:spPr>
-          <a:xfrm>
-            <a:off x="822960" y="6166080"/>
+          <p:cNvPr id="232" name="Divider 1 req_tool_machine"/>
+          <p:cNvSpPr/>
+          <p:nvPr/>
+        </p:nvSpPr>
+        <p:spPr>
+          <a:xfrm>
+            <a:off x="6172960" y="4126080"/>
             <a:ext cx="4950000" cy="0"/>
           </a:xfrm>
           <a:prstGeom prst="line">
@@ -8907,14 +9031,14 @@
       </p:sp>
       <p:sp>
         <p:nvSpPr>
-          <p:cNvPr id="133" name="Field 0 req_documentation"/>
-          <p:cNvSpPr/>
-          <p:nvPr/>
-        </p:nvSpPr>
-        <p:spPr>
-          <a:xfrm>
-            <a:off x="822960" y="6166080"/>
-            <a:ext cx="1450000" cy="320000"/>
+          <p:cNvPr id="233" name="Field 1 due_date"/>
+          <p:cNvSpPr/>
+          <p:nvPr/>
+        </p:nvSpPr>
+        <p:spPr>
+          <a:xfrm>
+            <a:off x="6172960" y="4126080"/>
+            <a:ext cx="1450000" cy="420000"/>
           </a:xfrm>
           <a:prstGeom prst="rect">
             <a:avLst/>
@@ -8938,7 +9062,7 @@
                 <a:ea typeface="Calibri" pitchFamily="34" charset="-122"/>
                 <a:cs typeface="Calibri" pitchFamily="34" charset="-120"/>
               </a:rPr>
-              <a:t>req_documentation</a:t>
+              <a:t>due_date</a:t>
             </a:r>
             <a:endParaRPr lang="en-US" sz="1100" dirty="0"/>
           </a:p>
@@ -8946,14 +9070,14 @@
       </p:sp>
       <p:sp>
         <p:nvSpPr>
-          <p:cNvPr id="134" name="Desc 0 req_documentation"/>
-          <p:cNvSpPr/>
-          <p:nvPr/>
-        </p:nvSpPr>
-        <p:spPr>
-          <a:xfrm>
-            <a:off x="2372960" y="6166080"/>
-            <a:ext cx="3400000" cy="320000"/>
+          <p:cNvPr id="234" name="Desc 1 due_date"/>
+          <p:cNvSpPr/>
+          <p:nvPr/>
+        </p:nvSpPr>
+        <p:spPr>
+          <a:xfrm>
+            <a:off x="7722960" y="4126080"/>
+            <a:ext cx="3400000" cy="420000"/>
           </a:xfrm>
           <a:prstGeom prst="rect">
             <a:avLst/>
@@ -8977,7 +9101,7 @@
                 <a:ea typeface="Calibri" pitchFamily="34" charset="-122"/>
                 <a:cs typeface="Calibri" pitchFamily="34" charset="-120"/>
               </a:rPr>
-              <a:t>Requirement checkbox: Documentation</a:t>
+              <a:t>Due Date</a:t>
             </a:r>
             <a:endParaRPr lang="en-US" sz="1100" dirty="0"/>
           </a:p>
@@ -8985,13 +9109,13 @@
       </p:sp>
       <p:sp>
         <p:nvSpPr>
-          <p:cNvPr id="135" name="Divider 0 req_documentation"/>
-          <p:cNvSpPr/>
-          <p:nvPr/>
-        </p:nvSpPr>
-        <p:spPr>
-          <a:xfrm>
-            <a:off x="822960" y="6486080"/>
+          <p:cNvPr id="235" name="Divider 1 due_date"/>
+          <p:cNvSpPr/>
+          <p:nvPr/>
+        </p:nvSpPr>
+        <p:spPr>
+          <a:xfrm>
+            <a:off x="6172960" y="4546080"/>
             <a:ext cx="4950000" cy="0"/>
           </a:xfrm>
           <a:prstGeom prst="line">
@@ -9015,14 +9139,14 @@
       </p:sp>
       <p:sp>
         <p:nvSpPr>
-          <p:cNvPr id="136" name="Field 1 req_material"/>
-          <p:cNvSpPr/>
-          <p:nvPr/>
-        </p:nvSpPr>
-        <p:spPr>
-          <a:xfrm>
-            <a:off x="6172960" y="3286080"/>
-            <a:ext cx="1450000" cy="320000"/>
+          <p:cNvPr id="236" name="Field 1 general_note"/>
+          <p:cNvSpPr/>
+          <p:nvPr/>
+        </p:nvSpPr>
+        <p:spPr>
+          <a:xfrm>
+            <a:off x="6172960" y="4546080"/>
+            <a:ext cx="1450000" cy="420000"/>
           </a:xfrm>
           <a:prstGeom prst="rect">
             <a:avLst/>
@@ -9046,7 +9170,7 @@
                 <a:ea typeface="Calibri" pitchFamily="34" charset="-122"/>
                 <a:cs typeface="Calibri" pitchFamily="34" charset="-120"/>
               </a:rPr>
-              <a:t>req_material</a:t>
+              <a:t>general_note</a:t>
             </a:r>
             <a:endParaRPr lang="en-US" sz="1100" dirty="0"/>
           </a:p>
@@ -9054,14 +9178,14 @@
       </p:sp>
       <p:sp>
         <p:nvSpPr>
-          <p:cNvPr id="137" name="Desc 1 req_material"/>
-          <p:cNvSpPr/>
-          <p:nvPr/>
-        </p:nvSpPr>
-        <p:spPr>
-          <a:xfrm>
-            <a:off x="7722960" y="3286080"/>
-            <a:ext cx="3400000" cy="320000"/>
+          <p:cNvPr id="237" name="Desc 1 general_note"/>
+          <p:cNvSpPr/>
+          <p:nvPr/>
+        </p:nvSpPr>
+        <p:spPr>
+          <a:xfrm>
+            <a:off x="7722960" y="4546080"/>
+            <a:ext cx="3400000" cy="420000"/>
           </a:xfrm>
           <a:prstGeom prst="rect">
             <a:avLst/>
@@ -9085,7 +9209,7 @@
                 <a:ea typeface="Calibri" pitchFamily="34" charset="-122"/>
                 <a:cs typeface="Calibri" pitchFamily="34" charset="-120"/>
               </a:rPr>
-              <a:t>Requirement checkbox: Material</a:t>
+              <a:t>Note (free text)</a:t>
             </a:r>
             <a:endParaRPr lang="en-US" sz="1100" dirty="0"/>
           </a:p>
@@ -9093,13 +9217,13 @@
       </p:sp>
       <p:sp>
         <p:nvSpPr>
-          <p:cNvPr id="138" name="Divider 1 req_material"/>
-          <p:cNvSpPr/>
-          <p:nvPr/>
-        </p:nvSpPr>
-        <p:spPr>
-          <a:xfrm>
-            <a:off x="6172960" y="3606080"/>
+          <p:cNvPr id="238" name="Divider 1 general_note"/>
+          <p:cNvSpPr/>
+          <p:nvPr/>
+        </p:nvSpPr>
+        <p:spPr>
+          <a:xfrm>
+            <a:off x="6172960" y="4966080"/>
             <a:ext cx="4950000" cy="0"/>
           </a:xfrm>
           <a:prstGeom prst="line">
@@ -9123,14 +9247,14 @@
       </p:sp>
       <p:sp>
         <p:nvSpPr>
-          <p:cNvPr id="139" name="Field 1 req_process"/>
-          <p:cNvSpPr/>
-          <p:nvPr/>
-        </p:nvSpPr>
-        <p:spPr>
-          <a:xfrm>
-            <a:off x="6172960" y="3606080"/>
-            <a:ext cx="1450000" cy="320000"/>
+          <p:cNvPr id="239" name="Field 1 reported_by"/>
+          <p:cNvSpPr/>
+          <p:nvPr/>
+        </p:nvSpPr>
+        <p:spPr>
+          <a:xfrm>
+            <a:off x="6172960" y="4966080"/>
+            <a:ext cx="1450000" cy="420000"/>
           </a:xfrm>
           <a:prstGeom prst="rect">
             <a:avLst/>
@@ -9154,7 +9278,7 @@
                 <a:ea typeface="Calibri" pitchFamily="34" charset="-122"/>
                 <a:cs typeface="Calibri" pitchFamily="34" charset="-120"/>
               </a:rPr>
-              <a:t>req_process</a:t>
+              <a:t>reported_by</a:t>
             </a:r>
             <a:endParaRPr lang="en-US" sz="1100" dirty="0"/>
           </a:p>
@@ -9162,14 +9286,14 @@
       </p:sp>
       <p:sp>
         <p:nvSpPr>
-          <p:cNvPr id="140" name="Desc 1 req_process"/>
-          <p:cNvSpPr/>
-          <p:nvPr/>
-        </p:nvSpPr>
-        <p:spPr>
-          <a:xfrm>
-            <a:off x="7722960" y="3606080"/>
-            <a:ext cx="3400000" cy="320000"/>
+          <p:cNvPr id="240" name="Desc 1 reported_by"/>
+          <p:cNvSpPr/>
+          <p:nvPr/>
+        </p:nvSpPr>
+        <p:spPr>
+          <a:xfrm>
+            <a:off x="7722960" y="4966080"/>
+            <a:ext cx="3400000" cy="420000"/>
           </a:xfrm>
           <a:prstGeom prst="rect">
             <a:avLst/>
@@ -9193,7 +9317,7 @@
                 <a:ea typeface="Calibri" pitchFamily="34" charset="-122"/>
                 <a:cs typeface="Calibri" pitchFamily="34" charset="-120"/>
               </a:rPr>
-              <a:t>Requirement checkbox: Process</a:t>
+              <a:t>Reported By - who requested the change</a:t>
             </a:r>
             <a:endParaRPr lang="en-US" sz="1100" dirty="0"/>
           </a:p>
@@ -9201,13 +9325,13 @@
       </p:sp>
       <p:sp>
         <p:nvSpPr>
-          <p:cNvPr id="141" name="Divider 1 req_process"/>
-          <p:cNvSpPr/>
-          <p:nvPr/>
-        </p:nvSpPr>
-        <p:spPr>
-          <a:xfrm>
-            <a:off x="6172960" y="3926080"/>
+          <p:cNvPr id="241" name="Divider 1 reported_by"/>
+          <p:cNvSpPr/>
+          <p:nvPr/>
+        </p:nvSpPr>
+        <p:spPr>
+          <a:xfrm>
+            <a:off x="6172960" y="5386080"/>
             <a:ext cx="4950000" cy="0"/>
           </a:xfrm>
           <a:prstGeom prst="line">
@@ -9231,14 +9355,14 @@
       </p:sp>
       <p:sp>
         <p:nvSpPr>
-          <p:cNvPr id="142" name="Field 1 req_tool_machine"/>
-          <p:cNvSpPr/>
-          <p:nvPr/>
-        </p:nvSpPr>
-        <p:spPr>
-          <a:xfrm>
-            <a:off x="6172960" y="3926080"/>
-            <a:ext cx="1450000" cy="320000"/>
+          <p:cNvPr id="242" name="Field 1 reason_code"/>
+          <p:cNvSpPr/>
+          <p:nvPr/>
+        </p:nvSpPr>
+        <p:spPr>
+          <a:xfrm>
+            <a:off x="6172960" y="5386080"/>
+            <a:ext cx="1450000" cy="420000"/>
           </a:xfrm>
           <a:prstGeom prst="rect">
             <a:avLst/>
@@ -9262,7 +9386,7 @@
                 <a:ea typeface="Calibri" pitchFamily="34" charset="-122"/>
                 <a:cs typeface="Calibri" pitchFamily="34" charset="-120"/>
               </a:rPr>
-              <a:t>req_tool_machine</a:t>
+              <a:t>reason_code</a:t>
             </a:r>
             <a:endParaRPr lang="en-US" sz="1100" dirty="0"/>
           </a:p>
@@ -9270,14 +9394,14 @@
       </p:sp>
       <p:sp>
         <p:nvSpPr>
-          <p:cNvPr id="143" name="Desc 1 req_tool_machine"/>
-          <p:cNvSpPr/>
-          <p:nvPr/>
-        </p:nvSpPr>
-        <p:spPr>
-          <a:xfrm>
-            <a:off x="7722960" y="3926080"/>
-            <a:ext cx="3400000" cy="320000"/>
+          <p:cNvPr id="243" name="Desc 1 reason_code"/>
+          <p:cNvSpPr/>
+          <p:nvPr/>
+        </p:nvSpPr>
+        <p:spPr>
+          <a:xfrm>
+            <a:off x="7722960" y="5386080"/>
+            <a:ext cx="3400000" cy="420000"/>
           </a:xfrm>
           <a:prstGeom prst="rect">
             <a:avLst/>
@@ -9301,7 +9425,7 @@
                 <a:ea typeface="Calibri" pitchFamily="34" charset="-122"/>
                 <a:cs typeface="Calibri" pitchFamily="34" charset="-120"/>
               </a:rPr>
-              <a:t>Requirement checkbox: Tool/Machine</a:t>
+              <a:t>Reason Code combo, Quality section - real QCReasonCode class</a:t>
             </a:r>
             <a:endParaRPr lang="en-US" sz="1100" dirty="0"/>
           </a:p>
@@ -9309,13 +9433,13 @@
       </p:sp>
       <p:sp>
         <p:nvSpPr>
-          <p:cNvPr id="144" name="Divider 1 req_tool_machine"/>
-          <p:cNvSpPr/>
-          <p:nvPr/>
-        </p:nvSpPr>
-        <p:spPr>
-          <a:xfrm>
-            <a:off x="6172960" y="4246080"/>
+          <p:cNvPr id="244" name="Divider 1 reason_code"/>
+          <p:cNvSpPr/>
+          <p:nvPr/>
+        </p:nvSpPr>
+        <p:spPr>
+          <a:xfrm>
+            <a:off x="6172960" y="5806080"/>
             <a:ext cx="4950000" cy="0"/>
           </a:xfrm>
           <a:prstGeom prst="line">
@@ -9339,14 +9463,14 @@
       </p:sp>
       <p:sp>
         <p:nvSpPr>
-          <p:cNvPr id="145" name="Field 1 priority"/>
-          <p:cNvSpPr/>
-          <p:nvPr/>
-        </p:nvSpPr>
-        <p:spPr>
-          <a:xfrm>
-            <a:off x="6172960" y="4246080"/>
-            <a:ext cx="1450000" cy="320000"/>
+          <p:cNvPr id="245" name="Field 1 cause_code"/>
+          <p:cNvSpPr/>
+          <p:nvPr/>
+        </p:nvSpPr>
+        <p:spPr>
+          <a:xfrm>
+            <a:off x="6172960" y="5806080"/>
+            <a:ext cx="1450000" cy="420000"/>
           </a:xfrm>
           <a:prstGeom prst="rect">
             <a:avLst/>
@@ -9370,7 +9494,7 @@
                 <a:ea typeface="Calibri" pitchFamily="34" charset="-122"/>
                 <a:cs typeface="Calibri" pitchFamily="34" charset="-120"/>
               </a:rPr>
-              <a:t>priority</a:t>
+              <a:t>cause_code</a:t>
             </a:r>
             <a:endParaRPr lang="en-US" sz="1100" dirty="0"/>
           </a:p>
@@ -9378,14 +9502,14 @@
       </p:sp>
       <p:sp>
         <p:nvSpPr>
-          <p:cNvPr id="146" name="Desc 1 priority"/>
-          <p:cNvSpPr/>
-          <p:nvPr/>
-        </p:nvSpPr>
-        <p:spPr>
-          <a:xfrm>
-            <a:off x="7722960" y="4246080"/>
-            <a:ext cx="3400000" cy="320000"/>
+          <p:cNvPr id="246" name="Desc 1 cause_code"/>
+          <p:cNvSpPr/>
+          <p:nvPr/>
+        </p:nvSpPr>
+        <p:spPr>
+          <a:xfrm>
+            <a:off x="7722960" y="5806080"/>
+            <a:ext cx="3400000" cy="420000"/>
           </a:xfrm>
           <a:prstGeom prst="rect">
             <a:avLst/>
@@ -9409,7 +9533,7 @@
                 <a:ea typeface="Calibri" pitchFamily="34" charset="-122"/>
                 <a:cs typeface="Calibri" pitchFamily="34" charset="-120"/>
               </a:rPr>
-              <a:t>Priority combo</a:t>
+              <a:t>Cause Code combo, Quality section - real QCCauseCode class</a:t>
             </a:r>
             <a:endParaRPr lang="en-US" sz="1100" dirty="0"/>
           </a:p>
@@ -9417,553 +9541,13 @@
       </p:sp>
       <p:sp>
         <p:nvSpPr>
-          <p:cNvPr id="147" name="Divider 1 priority"/>
-          <p:cNvSpPr/>
-          <p:nvPr/>
-        </p:nvSpPr>
-        <p:spPr>
-          <a:xfrm>
-            <a:off x="6172960" y="4566080"/>
-            <a:ext cx="4950000" cy="0"/>
-          </a:xfrm>
-          <a:prstGeom prst="line">
-            <a:avLst/>
-          </a:prstGeom>
-          <a:noFill/>
-          <a:ln w="9525">
-            <a:solidFill>
-              <a:srgbClr val="E5E5E5"/>
-            </a:solidFill>
-            <a:prstDash val="solid"/>
-          </a:ln>
-        </p:spPr>
-        <p:txBody>
-          <a:bodyPr/>
-          <a:lstStyle/>
-          <a:p>
-            <a:endParaRPr lang="en-US" dirty="0"/>
-          </a:p>
-        </p:txBody>
-      </p:sp>
-      <p:sp>
-        <p:nvSpPr>
-          <p:cNvPr id="148" name="Field 1 due_date"/>
-          <p:cNvSpPr/>
-          <p:nvPr/>
-        </p:nvSpPr>
-        <p:spPr>
-          <a:xfrm>
-            <a:off x="6172960" y="4566080"/>
-            <a:ext cx="1450000" cy="320000"/>
-          </a:xfrm>
-          <a:prstGeom prst="rect">
-            <a:avLst/>
-          </a:prstGeom>
-          <a:noFill/>
-          <a:ln/>
-        </p:spPr>
-        <p:txBody>
-          <a:bodyPr wrap="square" lIns="0" tIns="0" rIns="0" bIns="0" rtlCol="0" anchor="ctr"/>
-          <a:lstStyle/>
-          <a:p>
-            <a:pPr marL="0" indent="0">
-              <a:buNone/>
-            </a:pPr>
-            <a:r>
-              <a:rPr lang="en-US" sz="1100" b="1" dirty="0">
-                <a:solidFill>
-                  <a:srgbClr val="1A1A1A"/>
-                </a:solidFill>
-                <a:latin typeface="Calibri" pitchFamily="34" charset="0"/>
-                <a:ea typeface="Calibri" pitchFamily="34" charset="-122"/>
-                <a:cs typeface="Calibri" pitchFamily="34" charset="-120"/>
-              </a:rPr>
-              <a:t>due_date</a:t>
-            </a:r>
-            <a:endParaRPr lang="en-US" sz="1100" dirty="0"/>
-          </a:p>
-        </p:txBody>
-      </p:sp>
-      <p:sp>
-        <p:nvSpPr>
-          <p:cNvPr id="149" name="Desc 1 due_date"/>
-          <p:cNvSpPr/>
-          <p:nvPr/>
-        </p:nvSpPr>
-        <p:spPr>
-          <a:xfrm>
-            <a:off x="7722960" y="4566080"/>
-            <a:ext cx="3400000" cy="320000"/>
-          </a:xfrm>
-          <a:prstGeom prst="rect">
-            <a:avLst/>
-          </a:prstGeom>
-          <a:noFill/>
-          <a:ln/>
-        </p:spPr>
-        <p:txBody>
-          <a:bodyPr wrap="square" lIns="0" tIns="0" rIns="0" bIns="0" rtlCol="0" anchor="ctr"/>
-          <a:lstStyle/>
-          <a:p>
-            <a:pPr marL="0" indent="0">
-              <a:buNone/>
-            </a:pPr>
-            <a:r>
-              <a:rPr lang="en-US" sz="1100" dirty="0">
-                <a:solidFill>
-                  <a:srgbClr val="1A1A1A"/>
-                </a:solidFill>
-                <a:latin typeface="Calibri" pitchFamily="34" charset="0"/>
-                <a:ea typeface="Calibri" pitchFamily="34" charset="-122"/>
-                <a:cs typeface="Calibri" pitchFamily="34" charset="-120"/>
-              </a:rPr>
-              <a:t>Due Date</a:t>
-            </a:r>
-            <a:endParaRPr lang="en-US" sz="1100" dirty="0"/>
-          </a:p>
-        </p:txBody>
-      </p:sp>
-      <p:sp>
-        <p:nvSpPr>
-          <p:cNvPr id="150" name="Divider 1 due_date"/>
-          <p:cNvSpPr/>
-          <p:nvPr/>
-        </p:nvSpPr>
-        <p:spPr>
-          <a:xfrm>
-            <a:off x="6172960" y="4886080"/>
-            <a:ext cx="4950000" cy="0"/>
-          </a:xfrm>
-          <a:prstGeom prst="line">
-            <a:avLst/>
-          </a:prstGeom>
-          <a:noFill/>
-          <a:ln w="9525">
-            <a:solidFill>
-              <a:srgbClr val="E5E5E5"/>
-            </a:solidFill>
-            <a:prstDash val="solid"/>
-          </a:ln>
-        </p:spPr>
-        <p:txBody>
-          <a:bodyPr/>
-          <a:lstStyle/>
-          <a:p>
-            <a:endParaRPr lang="en-US" dirty="0"/>
-          </a:p>
-        </p:txBody>
-      </p:sp>
-      <p:sp>
-        <p:nvSpPr>
-          <p:cNvPr id="151" name="Field 1 general_note"/>
-          <p:cNvSpPr/>
-          <p:nvPr/>
-        </p:nvSpPr>
-        <p:spPr>
-          <a:xfrm>
-            <a:off x="6172960" y="4886080"/>
-            <a:ext cx="1450000" cy="320000"/>
-          </a:xfrm>
-          <a:prstGeom prst="rect">
-            <a:avLst/>
-          </a:prstGeom>
-          <a:noFill/>
-          <a:ln/>
-        </p:spPr>
-        <p:txBody>
-          <a:bodyPr wrap="square" lIns="0" tIns="0" rIns="0" bIns="0" rtlCol="0" anchor="ctr"/>
-          <a:lstStyle/>
-          <a:p>
-            <a:pPr marL="0" indent="0">
-              <a:buNone/>
-            </a:pPr>
-            <a:r>
-              <a:rPr lang="en-US" sz="1100" b="1" dirty="0">
-                <a:solidFill>
-                  <a:srgbClr val="1A1A1A"/>
-                </a:solidFill>
-                <a:latin typeface="Calibri" pitchFamily="34" charset="0"/>
-                <a:ea typeface="Calibri" pitchFamily="34" charset="-122"/>
-                <a:cs typeface="Calibri" pitchFamily="34" charset="-120"/>
-              </a:rPr>
-              <a:t>general_note</a:t>
-            </a:r>
-            <a:endParaRPr lang="en-US" sz="1100" dirty="0"/>
-          </a:p>
-        </p:txBody>
-      </p:sp>
-      <p:sp>
-        <p:nvSpPr>
-          <p:cNvPr id="152" name="Desc 1 general_note"/>
-          <p:cNvSpPr/>
-          <p:nvPr/>
-        </p:nvSpPr>
-        <p:spPr>
-          <a:xfrm>
-            <a:off x="7722960" y="4886080"/>
-            <a:ext cx="3400000" cy="320000"/>
-          </a:xfrm>
-          <a:prstGeom prst="rect">
-            <a:avLst/>
-          </a:prstGeom>
-          <a:noFill/>
-          <a:ln/>
-        </p:spPr>
-        <p:txBody>
-          <a:bodyPr wrap="square" lIns="0" tIns="0" rIns="0" bIns="0" rtlCol="0" anchor="ctr"/>
-          <a:lstStyle/>
-          <a:p>
-            <a:pPr marL="0" indent="0">
-              <a:buNone/>
-            </a:pPr>
-            <a:r>
-              <a:rPr lang="en-US" sz="1100" dirty="0">
-                <a:solidFill>
-                  <a:srgbClr val="1A1A1A"/>
-                </a:solidFill>
-                <a:latin typeface="Calibri" pitchFamily="34" charset="0"/>
-                <a:ea typeface="Calibri" pitchFamily="34" charset="-122"/>
-                <a:cs typeface="Calibri" pitchFamily="34" charset="-120"/>
-              </a:rPr>
-              <a:t>Note (free text)</a:t>
-            </a:r>
-            <a:endParaRPr lang="en-US" sz="1100" dirty="0"/>
-          </a:p>
-        </p:txBody>
-      </p:sp>
-      <p:sp>
-        <p:nvSpPr>
-          <p:cNvPr id="153" name="Divider 1 general_note"/>
-          <p:cNvSpPr/>
-          <p:nvPr/>
-        </p:nvSpPr>
-        <p:spPr>
-          <a:xfrm>
-            <a:off x="6172960" y="5206080"/>
-            <a:ext cx="4950000" cy="0"/>
-          </a:xfrm>
-          <a:prstGeom prst="line">
-            <a:avLst/>
-          </a:prstGeom>
-          <a:noFill/>
-          <a:ln w="9525">
-            <a:solidFill>
-              <a:srgbClr val="E5E5E5"/>
-            </a:solidFill>
-            <a:prstDash val="solid"/>
-          </a:ln>
-        </p:spPr>
-        <p:txBody>
-          <a:bodyPr/>
-          <a:lstStyle/>
-          <a:p>
-            <a:endParaRPr lang="en-US" dirty="0"/>
-          </a:p>
-        </p:txBody>
-      </p:sp>
-      <p:sp>
-        <p:nvSpPr>
-          <p:cNvPr id="154" name="Field 1 reported_by"/>
-          <p:cNvSpPr/>
-          <p:nvPr/>
-        </p:nvSpPr>
-        <p:spPr>
-          <a:xfrm>
-            <a:off x="6172960" y="5206080"/>
-            <a:ext cx="1450000" cy="320000"/>
-          </a:xfrm>
-          <a:prstGeom prst="rect">
-            <a:avLst/>
-          </a:prstGeom>
-          <a:noFill/>
-          <a:ln/>
-        </p:spPr>
-        <p:txBody>
-          <a:bodyPr wrap="square" lIns="0" tIns="0" rIns="0" bIns="0" rtlCol="0" anchor="ctr"/>
-          <a:lstStyle/>
-          <a:p>
-            <a:pPr marL="0" indent="0">
-              <a:buNone/>
-            </a:pPr>
-            <a:r>
-              <a:rPr lang="en-US" sz="1100" b="1" dirty="0">
-                <a:solidFill>
-                  <a:srgbClr val="1A1A1A"/>
-                </a:solidFill>
-                <a:latin typeface="Calibri" pitchFamily="34" charset="0"/>
-                <a:ea typeface="Calibri" pitchFamily="34" charset="-122"/>
-                <a:cs typeface="Calibri" pitchFamily="34" charset="-120"/>
-              </a:rPr>
-              <a:t>reported_by</a:t>
-            </a:r>
-            <a:endParaRPr lang="en-US" sz="1100" dirty="0"/>
-          </a:p>
-        </p:txBody>
-      </p:sp>
-      <p:sp>
-        <p:nvSpPr>
-          <p:cNvPr id="155" name="Desc 1 reported_by"/>
-          <p:cNvSpPr/>
-          <p:nvPr/>
-        </p:nvSpPr>
-        <p:spPr>
-          <a:xfrm>
-            <a:off x="7722960" y="5206080"/>
-            <a:ext cx="3400000" cy="320000"/>
-          </a:xfrm>
-          <a:prstGeom prst="rect">
-            <a:avLst/>
-          </a:prstGeom>
-          <a:noFill/>
-          <a:ln/>
-        </p:spPr>
-        <p:txBody>
-          <a:bodyPr wrap="square" lIns="0" tIns="0" rIns="0" bIns="0" rtlCol="0" anchor="ctr"/>
-          <a:lstStyle/>
-          <a:p>
-            <a:pPr marL="0" indent="0">
-              <a:buNone/>
-            </a:pPr>
-            <a:r>
-              <a:rPr lang="en-US" sz="1100" dirty="0">
-                <a:solidFill>
-                  <a:srgbClr val="1A1A1A"/>
-                </a:solidFill>
-                <a:latin typeface="Calibri" pitchFamily="34" charset="0"/>
-                <a:ea typeface="Calibri" pitchFamily="34" charset="-122"/>
-                <a:cs typeface="Calibri" pitchFamily="34" charset="-120"/>
-              </a:rPr>
-              <a:t>Reported By - who requested the change</a:t>
-            </a:r>
-            <a:endParaRPr lang="en-US" sz="1100" dirty="0"/>
-          </a:p>
-        </p:txBody>
-      </p:sp>
-      <p:sp>
-        <p:nvSpPr>
-          <p:cNvPr id="156" name="Divider 1 reported_by"/>
-          <p:cNvSpPr/>
-          <p:nvPr/>
-        </p:nvSpPr>
-        <p:spPr>
-          <a:xfrm>
-            <a:off x="6172960" y="5526080"/>
-            <a:ext cx="4950000" cy="0"/>
-          </a:xfrm>
-          <a:prstGeom prst="line">
-            <a:avLst/>
-          </a:prstGeom>
-          <a:noFill/>
-          <a:ln w="9525">
-            <a:solidFill>
-              <a:srgbClr val="E5E5E5"/>
-            </a:solidFill>
-            <a:prstDash val="solid"/>
-          </a:ln>
-        </p:spPr>
-        <p:txBody>
-          <a:bodyPr/>
-          <a:lstStyle/>
-          <a:p>
-            <a:endParaRPr lang="en-US" dirty="0"/>
-          </a:p>
-        </p:txBody>
-      </p:sp>
-      <p:sp>
-        <p:nvSpPr>
-          <p:cNvPr id="157" name="Field 1 reason_code"/>
-          <p:cNvSpPr/>
-          <p:nvPr/>
-        </p:nvSpPr>
-        <p:spPr>
-          <a:xfrm>
-            <a:off x="6172960" y="5526080"/>
-            <a:ext cx="1450000" cy="320000"/>
-          </a:xfrm>
-          <a:prstGeom prst="rect">
-            <a:avLst/>
-          </a:prstGeom>
-          <a:noFill/>
-          <a:ln/>
-        </p:spPr>
-        <p:txBody>
-          <a:bodyPr wrap="square" lIns="0" tIns="0" rIns="0" bIns="0" rtlCol="0" anchor="ctr"/>
-          <a:lstStyle/>
-          <a:p>
-            <a:pPr marL="0" indent="0">
-              <a:buNone/>
-            </a:pPr>
-            <a:r>
-              <a:rPr lang="en-US" sz="1100" b="1" dirty="0">
-                <a:solidFill>
-                  <a:srgbClr val="1A1A1A"/>
-                </a:solidFill>
-                <a:latin typeface="Calibri" pitchFamily="34" charset="0"/>
-                <a:ea typeface="Calibri" pitchFamily="34" charset="-122"/>
-                <a:cs typeface="Calibri" pitchFamily="34" charset="-120"/>
-              </a:rPr>
-              <a:t>reason_code</a:t>
-            </a:r>
-            <a:endParaRPr lang="en-US" sz="1100" dirty="0"/>
-          </a:p>
-        </p:txBody>
-      </p:sp>
-      <p:sp>
-        <p:nvSpPr>
-          <p:cNvPr id="158" name="Desc 1 reason_code"/>
-          <p:cNvSpPr/>
-          <p:nvPr/>
-        </p:nvSpPr>
-        <p:spPr>
-          <a:xfrm>
-            <a:off x="7722960" y="5526080"/>
-            <a:ext cx="3400000" cy="320000"/>
-          </a:xfrm>
-          <a:prstGeom prst="rect">
-            <a:avLst/>
-          </a:prstGeom>
-          <a:noFill/>
-          <a:ln/>
-        </p:spPr>
-        <p:txBody>
-          <a:bodyPr wrap="square" lIns="0" tIns="0" rIns="0" bIns="0" rtlCol="0" anchor="ctr"/>
-          <a:lstStyle/>
-          <a:p>
-            <a:pPr marL="0" indent="0">
-              <a:buNone/>
-            </a:pPr>
-            <a:r>
-              <a:rPr lang="en-US" sz="1100" dirty="0">
-                <a:solidFill>
-                  <a:srgbClr val="1A1A1A"/>
-                </a:solidFill>
-                <a:latin typeface="Calibri" pitchFamily="34" charset="0"/>
-                <a:ea typeface="Calibri" pitchFamily="34" charset="-122"/>
-                <a:cs typeface="Calibri" pitchFamily="34" charset="-120"/>
-              </a:rPr>
-              <a:t>Reason Code combo, Quality section - real QCReasonCode class</a:t>
-            </a:r>
-            <a:endParaRPr lang="en-US" sz="1100" dirty="0"/>
-          </a:p>
-        </p:txBody>
-      </p:sp>
-      <p:sp>
-        <p:nvSpPr>
-          <p:cNvPr id="159" name="Divider 1 reason_code"/>
-          <p:cNvSpPr/>
-          <p:nvPr/>
-        </p:nvSpPr>
-        <p:spPr>
-          <a:xfrm>
-            <a:off x="6172960" y="5846080"/>
-            <a:ext cx="4950000" cy="0"/>
-          </a:xfrm>
-          <a:prstGeom prst="line">
-            <a:avLst/>
-          </a:prstGeom>
-          <a:noFill/>
-          <a:ln w="9525">
-            <a:solidFill>
-              <a:srgbClr val="E5E5E5"/>
-            </a:solidFill>
-            <a:prstDash val="solid"/>
-          </a:ln>
-        </p:spPr>
-        <p:txBody>
-          <a:bodyPr/>
-          <a:lstStyle/>
-          <a:p>
-            <a:endParaRPr lang="en-US" dirty="0"/>
-          </a:p>
-        </p:txBody>
-      </p:sp>
-      <p:sp>
-        <p:nvSpPr>
-          <p:cNvPr id="160" name="Field 1 cause_code"/>
-          <p:cNvSpPr/>
-          <p:nvPr/>
-        </p:nvSpPr>
-        <p:spPr>
-          <a:xfrm>
-            <a:off x="6172960" y="5846080"/>
-            <a:ext cx="1450000" cy="320000"/>
-          </a:xfrm>
-          <a:prstGeom prst="rect">
-            <a:avLst/>
-          </a:prstGeom>
-          <a:noFill/>
-          <a:ln/>
-        </p:spPr>
-        <p:txBody>
-          <a:bodyPr wrap="square" lIns="0" tIns="0" rIns="0" bIns="0" rtlCol="0" anchor="ctr"/>
-          <a:lstStyle/>
-          <a:p>
-            <a:pPr marL="0" indent="0">
-              <a:buNone/>
-            </a:pPr>
-            <a:r>
-              <a:rPr lang="en-US" sz="1100" b="1" dirty="0">
-                <a:solidFill>
-                  <a:srgbClr val="1A1A1A"/>
-                </a:solidFill>
-                <a:latin typeface="Calibri" pitchFamily="34" charset="0"/>
-                <a:ea typeface="Calibri" pitchFamily="34" charset="-122"/>
-                <a:cs typeface="Calibri" pitchFamily="34" charset="-120"/>
-              </a:rPr>
-              <a:t>cause_code</a:t>
-            </a:r>
-            <a:endParaRPr lang="en-US" sz="1100" dirty="0"/>
-          </a:p>
-        </p:txBody>
-      </p:sp>
-      <p:sp>
-        <p:nvSpPr>
-          <p:cNvPr id="161" name="Desc 1 cause_code"/>
-          <p:cNvSpPr/>
-          <p:nvPr/>
-        </p:nvSpPr>
-        <p:spPr>
-          <a:xfrm>
-            <a:off x="7722960" y="5846080"/>
-            <a:ext cx="3400000" cy="320000"/>
-          </a:xfrm>
-          <a:prstGeom prst="rect">
-            <a:avLst/>
-          </a:prstGeom>
-          <a:noFill/>
-          <a:ln/>
-        </p:spPr>
-        <p:txBody>
-          <a:bodyPr wrap="square" lIns="0" tIns="0" rIns="0" bIns="0" rtlCol="0" anchor="ctr"/>
-          <a:lstStyle/>
-          <a:p>
-            <a:pPr marL="0" indent="0">
-              <a:buNone/>
-            </a:pPr>
-            <a:r>
-              <a:rPr lang="en-US" sz="1100" dirty="0">
-                <a:solidFill>
-                  <a:srgbClr val="1A1A1A"/>
-                </a:solidFill>
-                <a:latin typeface="Calibri" pitchFamily="34" charset="0"/>
-                <a:ea typeface="Calibri" pitchFamily="34" charset="-122"/>
-                <a:cs typeface="Calibri" pitchFamily="34" charset="-120"/>
-              </a:rPr>
-              <a:t>Cause Code combo, Quality section - real QCCauseCode class</a:t>
-            </a:r>
-            <a:endParaRPr lang="en-US" sz="1100" dirty="0"/>
-          </a:p>
-        </p:txBody>
-      </p:sp>
-      <p:sp>
-        <p:nvSpPr>
-          <p:cNvPr id="162" name="Divider 1 cause_code"/>
-          <p:cNvSpPr/>
-          <p:nvPr/>
-        </p:nvSpPr>
-        <p:spPr>
-          <a:xfrm>
-            <a:off x="6172960" y="6166080"/>
+          <p:cNvPr id="247" name="Divider 1 cause_code"/>
+          <p:cNvSpPr/>
+          <p:nvPr/>
+        </p:nvSpPr>
+        <p:spPr>
+          <a:xfrm>
+            <a:off x="6172960" y="6226080"/>
             <a:ext cx="4950000" cy="0"/>
           </a:xfrm>
           <a:prstGeom prst="line">
@@ -9999,7 +9583,7 @@
     <p:bg>
       <p:bgPr>
         <a:solidFill>
-          <a:srgbClr val="F7F7F7"/>
+          <a:srgbClr val="FFFFFF"/>
         </a:solidFill>
         <a:effectLst/>
       </p:bgPr>
@@ -10112,9 +9696,14 @@
               <a:gd name="adj" fmla="val 8000"/>
             </a:avLst>
           </a:prstGeom>
-          <a:noFill/>
-          <a:ln>
-            <a:noFill/>
+          <a:solidFill>
+            <a:srgbClr val="CF0C2C"/>
+          </a:solidFill>
+          <a:ln w="12700">
+            <a:solidFill>
+              <a:srgbClr val="CF0C2C"/>
+            </a:solidFill>
+            <a:prstDash val="solid"/>
           </a:ln>
         </p:spPr>
         <p:txBody>
@@ -11012,7 +10601,7 @@
     <p:bg>
       <p:bgPr>
         <a:solidFill>
-          <a:srgbClr val="F7F7F7"/>
+          <a:srgbClr val="FFFFFF"/>
         </a:solidFill>
         <a:effectLst/>
       </p:bgPr>
@@ -11047,9 +10636,14 @@
               <a:gd name="adj" fmla="val 8000"/>
             </a:avLst>
           </a:prstGeom>
-          <a:noFill/>
-          <a:ln>
-            <a:noFill/>
+          <a:solidFill>
+            <a:srgbClr val="CF0C2C"/>
+          </a:solidFill>
+          <a:ln w="12700">
+            <a:solidFill>
+              <a:srgbClr val="CF0C2C"/>
+            </a:solidFill>
+            <a:prstDash val="solid"/>
           </a:ln>
         </p:spPr>
         <p:txBody>

--- a/docs/presentations/eCMRs_plan.pptx
+++ b/docs/presentations/eCMRs_plan.pptx
@@ -9808,7 +9808,7 @@
       </p:sp>
       <p:sp>
         <p:nvSpPr>
-          <p:cNvPr id="8" name="Text 5"/>
+          <p:cNvPr id="300" name="Header Field"/>
           <p:cNvSpPr/>
           <p:nvPr/>
         </p:nvSpPr>
@@ -9847,7 +9847,7 @@
       </p:sp>
       <p:sp>
         <p:nvSpPr>
-          <p:cNvPr id="9" name="Text 6"/>
+          <p:cNvPr id="301" name="Header What"/>
           <p:cNvSpPr/>
           <p:nvPr/>
         </p:nvSpPr>
@@ -9886,146 +9886,13 @@
       </p:sp>
       <p:sp>
         <p:nvSpPr>
-          <p:cNvPr id="10" name="Shape 7"/>
+          <p:cNvPr id="302" name="HeaderDivider"/>
           <p:cNvSpPr/>
           <p:nvPr/>
         </p:nvSpPr>
         <p:spPr>
           <a:xfrm>
             <a:off x="822960" y="3328416"/>
-            <a:ext cx="10545775" cy="0"/>
-          </a:xfrm>
-          <a:prstGeom prst="line">
-            <a:avLst/>
-          </a:prstGeom>
-          <a:noFill/>
-          <a:ln w="12700">
-            <a:solidFill>
-              <a:srgbClr val="E5E5E5"/>
-            </a:solidFill>
-            <a:prstDash val="solid"/>
-          </a:ln>
-        </p:spPr>
-        <p:txBody>
-          <a:bodyPr/>
-          <a:lstStyle/>
-          <a:p>
-            <a:endParaRPr lang="en-US" dirty="0"/>
-          </a:p>
-        </p:txBody>
-      </p:sp>
-      <p:sp>
-        <p:nvSpPr>
-          <p:cNvPr id="11" name="Shape 8"/>
-          <p:cNvSpPr/>
-          <p:nvPr/>
-        </p:nvSpPr>
-        <p:spPr>
-          <a:xfrm>
-            <a:off x="822960" y="3419856"/>
-            <a:ext cx="10545775" cy="400000"/>
-          </a:xfrm>
-          <a:prstGeom prst="rect">
-            <a:avLst/>
-          </a:prstGeom>
-          <a:noFill/>
-          <a:ln/>
-        </p:spPr>
-        <p:txBody>
-          <a:bodyPr/>
-          <a:lstStyle/>
-          <a:p>
-            <a:endParaRPr lang="en-US" dirty="0"/>
-          </a:p>
-        </p:txBody>
-      </p:sp>
-      <p:sp>
-        <p:nvSpPr>
-          <p:cNvPr id="12" name="Text 9"/>
-          <p:cNvSpPr/>
-          <p:nvPr/>
-        </p:nvSpPr>
-        <p:spPr>
-          <a:xfrm>
-            <a:off x="932688" y="3419856"/>
-            <a:ext cx="3054005" cy="400000"/>
-          </a:xfrm>
-          <a:prstGeom prst="rect">
-            <a:avLst/>
-          </a:prstGeom>
-          <a:noFill/>
-          <a:ln/>
-        </p:spPr>
-        <p:txBody>
-          <a:bodyPr wrap="square" lIns="0" tIns="0" rIns="0" bIns="0" rtlCol="0" anchor="ctr"/>
-          <a:lstStyle/>
-          <a:p>
-            <a:pPr marL="0" indent="0">
-              <a:buNone/>
-            </a:pPr>
-            <a:r>
-              <a:rPr lang="en-US" sz="1300" b="1" dirty="0">
-                <a:solidFill>
-                  <a:srgbClr val="1A1A1A"/>
-                </a:solidFill>
-                <a:latin typeface="Calibri" pitchFamily="34" charset="0"/>
-                <a:ea typeface="Calibri" pitchFamily="34" charset="-122"/>
-                <a:cs typeface="Calibri" pitchFamily="34" charset="-120"/>
-              </a:rPr>
-              <a:t>JOB (job_num)</a:t>
-            </a:r>
-            <a:endParaRPr lang="en-US" sz="1300" dirty="0"/>
-          </a:p>
-        </p:txBody>
-      </p:sp>
-      <p:sp>
-        <p:nvSpPr>
-          <p:cNvPr id="13" name="Text 10"/>
-          <p:cNvSpPr/>
-          <p:nvPr/>
-        </p:nvSpPr>
-        <p:spPr>
-          <a:xfrm>
-            <a:off x="3986693" y="3419856"/>
-            <a:ext cx="7290603" cy="400000"/>
-          </a:xfrm>
-          <a:prstGeom prst="rect">
-            <a:avLst/>
-          </a:prstGeom>
-          <a:noFill/>
-          <a:ln/>
-        </p:spPr>
-        <p:txBody>
-          <a:bodyPr wrap="square" lIns="0" tIns="0" rIns="0" bIns="0" rtlCol="0" anchor="ctr"/>
-          <a:lstStyle/>
-          <a:p>
-            <a:pPr marL="0" indent="0">
-              <a:buNone/>
-            </a:pPr>
-            <a:r>
-              <a:rPr lang="en-US" sz="1300" dirty="0">
-                <a:solidFill>
-                  <a:srgbClr val="1A1A1A"/>
-                </a:solidFill>
-                <a:latin typeface="Calibri" pitchFamily="34" charset="0"/>
-                <a:ea typeface="Calibri" pitchFamily="34" charset="-122"/>
-                <a:cs typeface="Calibri" pitchFamily="34" charset="-120"/>
-              </a:rPr>
-              <a:t>Combo lookup (SLMatltrans/RefNum) — already built and on the form.</a:t>
-            </a:r>
-            <a:endParaRPr lang="en-US" sz="1300" dirty="0"/>
-          </a:p>
-        </p:txBody>
-      </p:sp>
-      <p:sp>
-        <p:nvSpPr>
-          <p:cNvPr id="14" name="Shape 11"/>
-          <p:cNvSpPr/>
-          <p:nvPr/>
-        </p:nvSpPr>
-        <p:spPr>
-          <a:xfrm>
-            <a:off x="822960" y="3819856"/>
             <a:ext cx="10545775" cy="0"/>
           </a:xfrm>
           <a:prstGeom prst="line">
@@ -10049,14 +9916,14 @@
       </p:sp>
       <p:sp>
         <p:nvSpPr>
-          <p:cNvPr id="27" name="Text 24"/>
-          <p:cNvSpPr/>
-          <p:nvPr/>
-        </p:nvSpPr>
-        <p:spPr>
-          <a:xfrm>
-            <a:off x="932688" y="3819856"/>
-            <a:ext cx="3054005" cy="400000"/>
+          <p:cNvPr id="303" name="Field Serial # (serial_num)"/>
+          <p:cNvSpPr/>
+          <p:nvPr/>
+        </p:nvSpPr>
+        <p:spPr>
+          <a:xfrm>
+            <a:off x="822960" y="3419856"/>
+            <a:ext cx="3163733" cy="400000"/>
           </a:xfrm>
           <a:prstGeom prst="rect">
             <a:avLst/>
@@ -10088,14 +9955,14 @@
       </p:sp>
       <p:sp>
         <p:nvSpPr>
-          <p:cNvPr id="28" name="Text 25"/>
-          <p:cNvSpPr/>
-          <p:nvPr/>
-        </p:nvSpPr>
-        <p:spPr>
-          <a:xfrm>
-            <a:off x="3986693" y="3819856"/>
-            <a:ext cx="7290603" cy="400000"/>
+          <p:cNvPr id="304" name="Desc Serial # (serial_num)"/>
+          <p:cNvSpPr/>
+          <p:nvPr/>
+        </p:nvSpPr>
+        <p:spPr>
+          <a:xfrm>
+            <a:off x="3986693" y="3419856"/>
+            <a:ext cx="7382043" cy="400000"/>
           </a:xfrm>
           <a:prstGeom prst="rect">
             <a:avLst/>
@@ -10127,13 +9994,13 @@
       </p:sp>
       <p:sp>
         <p:nvSpPr>
-          <p:cNvPr id="29" name="Shape 26"/>
-          <p:cNvSpPr/>
-          <p:nvPr/>
-        </p:nvSpPr>
-        <p:spPr>
-          <a:xfrm>
-            <a:off x="822960" y="4219856"/>
+          <p:cNvPr id="305" name="Divider Serial # (serial_num)"/>
+          <p:cNvSpPr/>
+          <p:nvPr/>
+        </p:nvSpPr>
+        <p:spPr>
+          <a:xfrm>
+            <a:off x="822960" y="3819856"/>
             <a:ext cx="10545775" cy="0"/>
           </a:xfrm>
           <a:prstGeom prst="line">
@@ -10157,14 +10024,14 @@
       </p:sp>
       <p:sp>
         <p:nvSpPr>
-          <p:cNvPr id="15" name="Text 12"/>
-          <p:cNvSpPr/>
-          <p:nvPr/>
-        </p:nvSpPr>
-        <p:spPr>
-          <a:xfrm>
-            <a:off x="932688" y="4219856"/>
-            <a:ext cx="3054005" cy="400000"/>
+          <p:cNvPr id="306" name="Field Lot # (lot_num)"/>
+          <p:cNvSpPr/>
+          <p:nvPr/>
+        </p:nvSpPr>
+        <p:spPr>
+          <a:xfrm>
+            <a:off x="822960" y="3819856"/>
+            <a:ext cx="3163733" cy="400000"/>
           </a:xfrm>
           <a:prstGeom prst="rect">
             <a:avLst/>
@@ -10196,14 +10063,14 @@
       </p:sp>
       <p:sp>
         <p:nvSpPr>
-          <p:cNvPr id="16" name="Text 13"/>
-          <p:cNvSpPr/>
-          <p:nvPr/>
-        </p:nvSpPr>
-        <p:spPr>
-          <a:xfrm>
-            <a:off x="3986693" y="4219856"/>
-            <a:ext cx="7290603" cy="400000"/>
+          <p:cNvPr id="307" name="Desc Lot # (lot_num)"/>
+          <p:cNvSpPr/>
+          <p:nvPr/>
+        </p:nvSpPr>
+        <p:spPr>
+          <a:xfrm>
+            <a:off x="3986693" y="3819856"/>
+            <a:ext cx="7382043" cy="400000"/>
           </a:xfrm>
           <a:prstGeom prst="rect">
             <a:avLst/>
@@ -10235,13 +10102,13 @@
       </p:sp>
       <p:sp>
         <p:nvSpPr>
-          <p:cNvPr id="17" name="Shape 14"/>
-          <p:cNvSpPr/>
-          <p:nvPr/>
-        </p:nvSpPr>
-        <p:spPr>
-          <a:xfrm>
-            <a:off x="822960" y="4619856"/>
+          <p:cNvPr id="308" name="Divider Lot # (lot_num)"/>
+          <p:cNvSpPr/>
+          <p:nvPr/>
+        </p:nvSpPr>
+        <p:spPr>
+          <a:xfrm>
+            <a:off x="822960" y="4219856"/>
             <a:ext cx="10545775" cy="0"/>
           </a:xfrm>
           <a:prstGeom prst="line">
@@ -10265,14 +10132,14 @@
       </p:sp>
       <p:sp>
         <p:nvSpPr>
-          <p:cNvPr id="18" name="Text 15"/>
-          <p:cNvSpPr/>
-          <p:nvPr/>
-        </p:nvSpPr>
-        <p:spPr>
-          <a:xfrm>
-            <a:off x="932688" y="4619856"/>
-            <a:ext cx="3054005" cy="400000"/>
+          <p:cNvPr id="309" name="Field Top Level PN (top_level_pn)"/>
+          <p:cNvSpPr/>
+          <p:nvPr/>
+        </p:nvSpPr>
+        <p:spPr>
+          <a:xfrm>
+            <a:off x="822960" y="4219856"/>
+            <a:ext cx="3163733" cy="400000"/>
           </a:xfrm>
           <a:prstGeom prst="rect">
             <a:avLst/>
@@ -10296,7 +10163,7 @@
                 <a:ea typeface="Calibri" pitchFamily="34" charset="-122"/>
                 <a:cs typeface="Calibri" pitchFamily="34" charset="-120"/>
               </a:rPr>
-              <a:t>Top Level PN</a:t>
+              <a:t>Top Level PN (top_level_pn)</a:t>
             </a:r>
             <a:endParaRPr lang="en-US" sz="1300" dirty="0"/>
           </a:p>
@@ -10304,14 +10171,14 @@
       </p:sp>
       <p:sp>
         <p:nvSpPr>
-          <p:cNvPr id="19" name="Text 16"/>
-          <p:cNvSpPr/>
-          <p:nvPr/>
-        </p:nvSpPr>
-        <p:spPr>
-          <a:xfrm>
-            <a:off x="3986693" y="4619856"/>
-            <a:ext cx="7290603" cy="400000"/>
+          <p:cNvPr id="310" name="Desc Top Level PN (top_level_pn)"/>
+          <p:cNvSpPr/>
+          <p:nvPr/>
+        </p:nvSpPr>
+        <p:spPr>
+          <a:xfrm>
+            <a:off x="3986693" y="4219856"/>
+            <a:ext cx="7382043" cy="400000"/>
           </a:xfrm>
           <a:prstGeom prst="rect">
             <a:avLst/>
@@ -10335,7 +10202,7 @@
                 <a:ea typeface="Calibri" pitchFamily="34" charset="-122"/>
                 <a:cs typeface="Calibri" pitchFamily="34" charset="-120"/>
               </a:rPr>
-              <a:t>Not yet built — needs a new column, IDO property, and form control.</a:t>
+              <a:t>Free-text field (char, 30) — built, highlighted on the form as a new field.</a:t>
             </a:r>
             <a:endParaRPr lang="en-US" sz="1300" dirty="0"/>
           </a:p>
@@ -10343,13 +10210,13 @@
       </p:sp>
       <p:sp>
         <p:nvSpPr>
-          <p:cNvPr id="20" name="Shape 17"/>
-          <p:cNvSpPr/>
-          <p:nvPr/>
-        </p:nvSpPr>
-        <p:spPr>
-          <a:xfrm>
-            <a:off x="822960" y="5019856"/>
+          <p:cNvPr id="311" name="Divider Top Level PN (top_level_pn)"/>
+          <p:cNvSpPr/>
+          <p:nvPr/>
+        </p:nvSpPr>
+        <p:spPr>
+          <a:xfrm>
+            <a:off x="822960" y="4619856"/>
             <a:ext cx="10545775" cy="0"/>
           </a:xfrm>
           <a:prstGeom prst="line">
@@ -10373,14 +10240,14 @@
       </p:sp>
       <p:sp>
         <p:nvSpPr>
-          <p:cNvPr id="21" name="Text 18"/>
-          <p:cNvSpPr/>
-          <p:nvPr/>
-        </p:nvSpPr>
-        <p:spPr>
-          <a:xfrm>
-            <a:off x="932688" y="5019856"/>
-            <a:ext cx="3054005" cy="400000"/>
+          <p:cNvPr id="312" name="Field Sub Assembly (sub_assembly)"/>
+          <p:cNvSpPr/>
+          <p:nvPr/>
+        </p:nvSpPr>
+        <p:spPr>
+          <a:xfrm>
+            <a:off x="822960" y="4619856"/>
+            <a:ext cx="3163733" cy="400000"/>
           </a:xfrm>
           <a:prstGeom prst="rect">
             <a:avLst/>
@@ -10404,7 +10271,7 @@
                 <a:ea typeface="Calibri" pitchFamily="34" charset="-122"/>
                 <a:cs typeface="Calibri" pitchFamily="34" charset="-120"/>
               </a:rPr>
-              <a:t>Sub Assembly</a:t>
+              <a:t>Sub Assembly (sub_assembly)</a:t>
             </a:r>
             <a:endParaRPr lang="en-US" sz="1300" dirty="0"/>
           </a:p>
@@ -10412,14 +10279,14 @@
       </p:sp>
       <p:sp>
         <p:nvSpPr>
-          <p:cNvPr id="22" name="Text 19"/>
-          <p:cNvSpPr/>
-          <p:nvPr/>
-        </p:nvSpPr>
-        <p:spPr>
-          <a:xfrm>
-            <a:off x="3986693" y="5019856"/>
-            <a:ext cx="7290603" cy="400000"/>
+          <p:cNvPr id="313" name="Desc Sub Assembly (sub_assembly)"/>
+          <p:cNvSpPr/>
+          <p:nvPr/>
+        </p:nvSpPr>
+        <p:spPr>
+          <a:xfrm>
+            <a:off x="3986693" y="4619856"/>
+            <a:ext cx="7382043" cy="400000"/>
           </a:xfrm>
           <a:prstGeom prst="rect">
             <a:avLst/>
@@ -10443,7 +10310,7 @@
                 <a:ea typeface="Calibri" pitchFamily="34" charset="-122"/>
                 <a:cs typeface="Calibri" pitchFamily="34" charset="-120"/>
               </a:rPr>
-              <a:t>Not yet built — open question whether this is the same concept as the existing next_assy_item (Next Level Assembly) or a distinct field.</a:t>
+              <a:t>Free-text field (char, 30), built distinct from Next Lvl Assy — still an open question whether they’re the same concept.</a:t>
             </a:r>
             <a:endParaRPr lang="en-US" sz="1300" dirty="0"/>
           </a:p>
@@ -10451,121 +10318,13 @@
       </p:sp>
       <p:sp>
         <p:nvSpPr>
-          <p:cNvPr id="23" name="Shape 20"/>
-          <p:cNvSpPr/>
-          <p:nvPr/>
-        </p:nvSpPr>
-        <p:spPr>
-          <a:xfrm>
-            <a:off x="822960" y="5419856"/>
-            <a:ext cx="10545775" cy="0"/>
-          </a:xfrm>
-          <a:prstGeom prst="line">
-            <a:avLst/>
-          </a:prstGeom>
-          <a:noFill/>
-          <a:ln w="9525">
-            <a:solidFill>
-              <a:srgbClr val="E5E5E5"/>
-            </a:solidFill>
-            <a:prstDash val="solid"/>
-          </a:ln>
-        </p:spPr>
-        <p:txBody>
-          <a:bodyPr/>
-          <a:lstStyle/>
-          <a:p>
-            <a:endParaRPr lang="en-US" dirty="0"/>
-          </a:p>
-        </p:txBody>
-      </p:sp>
-      <p:sp>
-        <p:nvSpPr>
-          <p:cNvPr id="24" name="Text 21"/>
-          <p:cNvSpPr/>
-          <p:nvPr/>
-        </p:nvSpPr>
-        <p:spPr>
-          <a:xfrm>
-            <a:off x="932688" y="5419856"/>
-            <a:ext cx="3054005" cy="400000"/>
-          </a:xfrm>
-          <a:prstGeom prst="rect">
-            <a:avLst/>
-          </a:prstGeom>
-          <a:noFill/>
-          <a:ln/>
-        </p:spPr>
-        <p:txBody>
-          <a:bodyPr wrap="square" lIns="0" tIns="0" rIns="0" bIns="0" rtlCol="0" anchor="ctr"/>
-          <a:lstStyle/>
-          <a:p>
-            <a:pPr marL="0" indent="0">
-              <a:buNone/>
-            </a:pPr>
-            <a:r>
-              <a:rPr lang="en-US" sz="1300" b="1" dirty="0">
-                <a:solidFill>
-                  <a:srgbClr val="1A1A1A"/>
-                </a:solidFill>
-                <a:latin typeface="Calibri" pitchFamily="34" charset="0"/>
-                <a:ea typeface="Calibri" pitchFamily="34" charset="-122"/>
-                <a:cs typeface="Calibri" pitchFamily="34" charset="-120"/>
-              </a:rPr>
-              <a:t>Part (item)</a:t>
-            </a:r>
-            <a:endParaRPr lang="en-US" sz="1300" dirty="0"/>
-          </a:p>
-        </p:txBody>
-      </p:sp>
-      <p:sp>
-        <p:nvSpPr>
-          <p:cNvPr id="25" name="Text 22"/>
-          <p:cNvSpPr/>
-          <p:nvPr/>
-        </p:nvSpPr>
-        <p:spPr>
-          <a:xfrm>
-            <a:off x="3986693" y="5419856"/>
-            <a:ext cx="7290603" cy="400000"/>
-          </a:xfrm>
-          <a:prstGeom prst="rect">
-            <a:avLst/>
-          </a:prstGeom>
-          <a:noFill/>
-          <a:ln/>
-        </p:spPr>
-        <p:txBody>
-          <a:bodyPr wrap="square" lIns="0" tIns="0" rIns="0" bIns="0" rtlCol="0" anchor="ctr"/>
-          <a:lstStyle/>
-          <a:p>
-            <a:pPr marL="0" indent="0">
-              <a:buNone/>
-            </a:pPr>
-            <a:r>
-              <a:rPr lang="en-US" sz="1300" dirty="0">
-                <a:solidFill>
-                  <a:srgbClr val="1A1A1A"/>
-                </a:solidFill>
-                <a:latin typeface="Calibri" pitchFamily="34" charset="0"/>
-                <a:ea typeface="Calibri" pitchFamily="34" charset="-122"/>
-                <a:cs typeface="Calibri" pitchFamily="34" charset="-120"/>
-              </a:rPr>
-              <a:t>Already built as the Item combo — covered on the previous Design slide.</a:t>
-            </a:r>
-            <a:endParaRPr lang="en-US" sz="1300" dirty="0"/>
-          </a:p>
-        </p:txBody>
-      </p:sp>
-      <p:sp>
-        <p:nvSpPr>
-          <p:cNvPr id="101" name="Shape 101"/>
-          <p:cNvSpPr/>
-          <p:nvPr/>
-        </p:nvSpPr>
-        <p:spPr>
-          <a:xfrm>
-            <a:off x="822960" y="5819856"/>
+          <p:cNvPr id="314" name="Divider Sub Assembly (sub_assembly)"/>
+          <p:cNvSpPr/>
+          <p:nvPr/>
+        </p:nvSpPr>
+        <p:spPr>
+          <a:xfrm>
+            <a:off x="822960" y="5019856"/>
             <a:ext cx="10545775" cy="0"/>
           </a:xfrm>
           <a:prstGeom prst="line">
